--- a/Plan/기획서/땅부수기2026 ch2.pptx
+++ b/Plan/기획서/땅부수기2026 ch2.pptx
@@ -7,6 +7,9 @@
   <p:sldIdLst>
     <p:sldId id="256" r:id="rId2"/>
     <p:sldId id="257" r:id="rId3"/>
+    <p:sldId id="258" r:id="rId4"/>
+    <p:sldId id="259" r:id="rId5"/>
+    <p:sldId id="260" r:id="rId6"/>
   </p:sldIdLst>
   <p:sldSz cx="12192000" cy="6858000"/>
   <p:notesSz cx="6858000" cy="9144000"/>
@@ -105,6 +108,11 @@
       </a:defRPr>
     </a:lvl9pPr>
   </p:defaultTextStyle>
+  <p:extLst>
+    <p:ext uri="{EFAFB233-063F-42B5-8137-9DF3F51BA10A}">
+      <p15:sldGuideLst xmlns:p15="http://schemas.microsoft.com/office/powerpoint/2012/main"/>
+    </p:ext>
+  </p:extLst>
 </p:presentation>
 </file>
 
@@ -255,7 +263,7 @@
           <a:p>
             <a:fld id="{C6FDF62A-CEF3-4A4B-9978-8C575DC3A030}" type="datetimeFigureOut">
               <a:rPr lang="ko-KR" altLang="en-US" smtClean="0"/>
-              <a:t>2026-01-13</a:t>
+              <a:t>2026-03-05</a:t>
             </a:fld>
             <a:endParaRPr lang="ko-KR" altLang="en-US"/>
           </a:p>
@@ -453,7 +461,7 @@
           <a:p>
             <a:fld id="{C6FDF62A-CEF3-4A4B-9978-8C575DC3A030}" type="datetimeFigureOut">
               <a:rPr lang="ko-KR" altLang="en-US" smtClean="0"/>
-              <a:t>2026-01-13</a:t>
+              <a:t>2026-03-05</a:t>
             </a:fld>
             <a:endParaRPr lang="ko-KR" altLang="en-US"/>
           </a:p>
@@ -661,7 +669,7 @@
           <a:p>
             <a:fld id="{C6FDF62A-CEF3-4A4B-9978-8C575DC3A030}" type="datetimeFigureOut">
               <a:rPr lang="ko-KR" altLang="en-US" smtClean="0"/>
-              <a:t>2026-01-13</a:t>
+              <a:t>2026-03-05</a:t>
             </a:fld>
             <a:endParaRPr lang="ko-KR" altLang="en-US"/>
           </a:p>
@@ -859,7 +867,7 @@
           <a:p>
             <a:fld id="{C6FDF62A-CEF3-4A4B-9978-8C575DC3A030}" type="datetimeFigureOut">
               <a:rPr lang="ko-KR" altLang="en-US" smtClean="0"/>
-              <a:t>2026-01-13</a:t>
+              <a:t>2026-03-05</a:t>
             </a:fld>
             <a:endParaRPr lang="ko-KR" altLang="en-US"/>
           </a:p>
@@ -1134,7 +1142,7 @@
           <a:p>
             <a:fld id="{C6FDF62A-CEF3-4A4B-9978-8C575DC3A030}" type="datetimeFigureOut">
               <a:rPr lang="ko-KR" altLang="en-US" smtClean="0"/>
-              <a:t>2026-01-13</a:t>
+              <a:t>2026-03-05</a:t>
             </a:fld>
             <a:endParaRPr lang="ko-KR" altLang="en-US"/>
           </a:p>
@@ -1399,7 +1407,7 @@
           <a:p>
             <a:fld id="{C6FDF62A-CEF3-4A4B-9978-8C575DC3A030}" type="datetimeFigureOut">
               <a:rPr lang="ko-KR" altLang="en-US" smtClean="0"/>
-              <a:t>2026-01-13</a:t>
+              <a:t>2026-03-05</a:t>
             </a:fld>
             <a:endParaRPr lang="ko-KR" altLang="en-US"/>
           </a:p>
@@ -1811,7 +1819,7 @@
           <a:p>
             <a:fld id="{C6FDF62A-CEF3-4A4B-9978-8C575DC3A030}" type="datetimeFigureOut">
               <a:rPr lang="ko-KR" altLang="en-US" smtClean="0"/>
-              <a:t>2026-01-13</a:t>
+              <a:t>2026-03-05</a:t>
             </a:fld>
             <a:endParaRPr lang="ko-KR" altLang="en-US"/>
           </a:p>
@@ -1952,7 +1960,7 @@
           <a:p>
             <a:fld id="{C6FDF62A-CEF3-4A4B-9978-8C575DC3A030}" type="datetimeFigureOut">
               <a:rPr lang="ko-KR" altLang="en-US" smtClean="0"/>
-              <a:t>2026-01-13</a:t>
+              <a:t>2026-03-05</a:t>
             </a:fld>
             <a:endParaRPr lang="ko-KR" altLang="en-US"/>
           </a:p>
@@ -2065,7 +2073,7 @@
           <a:p>
             <a:fld id="{C6FDF62A-CEF3-4A4B-9978-8C575DC3A030}" type="datetimeFigureOut">
               <a:rPr lang="ko-KR" altLang="en-US" smtClean="0"/>
-              <a:t>2026-01-13</a:t>
+              <a:t>2026-03-05</a:t>
             </a:fld>
             <a:endParaRPr lang="ko-KR" altLang="en-US"/>
           </a:p>
@@ -2376,7 +2384,7 @@
           <a:p>
             <a:fld id="{C6FDF62A-CEF3-4A4B-9978-8C575DC3A030}" type="datetimeFigureOut">
               <a:rPr lang="ko-KR" altLang="en-US" smtClean="0"/>
-              <a:t>2026-01-13</a:t>
+              <a:t>2026-03-05</a:t>
             </a:fld>
             <a:endParaRPr lang="ko-KR" altLang="en-US"/>
           </a:p>
@@ -2664,7 +2672,7 @@
           <a:p>
             <a:fld id="{C6FDF62A-CEF3-4A4B-9978-8C575DC3A030}" type="datetimeFigureOut">
               <a:rPr lang="ko-KR" altLang="en-US" smtClean="0"/>
-              <a:t>2026-01-13</a:t>
+              <a:t>2026-03-05</a:t>
             </a:fld>
             <a:endParaRPr lang="ko-KR" altLang="en-US"/>
           </a:p>
@@ -2905,7 +2913,7 @@
           <a:p>
             <a:fld id="{C6FDF62A-CEF3-4A4B-9978-8C575DC3A030}" type="datetimeFigureOut">
               <a:rPr lang="ko-KR" altLang="en-US" smtClean="0"/>
-              <a:t>2026-01-13</a:t>
+              <a:t>2026-03-05</a:t>
             </a:fld>
             <a:endParaRPr lang="ko-KR" altLang="en-US"/>
           </a:p>
@@ -3825,6 +3833,3056 @@
     <p:extLst>
       <p:ext uri="{BB962C8B-B14F-4D97-AF65-F5344CB8AC3E}">
         <p14:creationId xmlns:p14="http://schemas.microsoft.com/office/powerpoint/2010/main" val="3462530269"/>
+      </p:ext>
+    </p:extLst>
+  </p:cSld>
+  <p:clrMapOvr>
+    <a:masterClrMapping/>
+  </p:clrMapOvr>
+</p:sld>
+</file>
+
+<file path=ppt/slides/slide3.xml><?xml version="1.0" encoding="utf-8"?>
+<p:sld xmlns:a="http://schemas.openxmlformats.org/drawingml/2006/main" xmlns:r="http://schemas.openxmlformats.org/officeDocument/2006/relationships" xmlns:p="http://schemas.openxmlformats.org/presentationml/2006/main">
+  <p:cSld>
+    <p:spTree>
+      <p:nvGrpSpPr>
+        <p:cNvPr id="1" name="">
+          <a:extLst>
+            <a:ext uri="{FF2B5EF4-FFF2-40B4-BE49-F238E27FC236}">
+              <a16:creationId xmlns:a16="http://schemas.microsoft.com/office/drawing/2014/main" id="{EF454EE9-DC50-5B50-C450-D2324EEA34F4}"/>
+            </a:ext>
+          </a:extLst>
+        </p:cNvPr>
+        <p:cNvGrpSpPr/>
+        <p:nvPr/>
+      </p:nvGrpSpPr>
+      <p:grpSpPr>
+        <a:xfrm>
+          <a:off x="0" y="0"/>
+          <a:ext cx="0" cy="0"/>
+          <a:chOff x="0" y="0"/>
+          <a:chExt cx="0" cy="0"/>
+        </a:xfrm>
+      </p:grpSpPr>
+      <p:sp>
+        <p:nvSpPr>
+          <p:cNvPr id="8" name="TextBox 7">
+            <a:extLst>
+              <a:ext uri="{FF2B5EF4-FFF2-40B4-BE49-F238E27FC236}">
+                <a16:creationId xmlns:a16="http://schemas.microsoft.com/office/drawing/2014/main" id="{0692F68F-9FE0-562C-CAF0-FFB64FAD0421}"/>
+              </a:ext>
+            </a:extLst>
+          </p:cNvPr>
+          <p:cNvSpPr txBox="1"/>
+          <p:nvPr/>
+        </p:nvSpPr>
+        <p:spPr>
+          <a:xfrm>
+            <a:off x="463452" y="563419"/>
+            <a:ext cx="1420582" cy="369332"/>
+          </a:xfrm>
+          <a:prstGeom prst="rect">
+            <a:avLst/>
+          </a:prstGeom>
+          <a:noFill/>
+        </p:spPr>
+        <p:txBody>
+          <a:bodyPr wrap="none" rtlCol="0">
+            <a:spAutoFit/>
+          </a:bodyPr>
+          <a:lstStyle/>
+          <a:p>
+            <a:r>
+              <a:rPr lang="ko-KR" altLang="en-US" b="1" dirty="0"/>
+              <a:t>점수 </a:t>
+            </a:r>
+            <a:r>
+              <a:rPr lang="ko-KR" altLang="en-US" b="1" dirty="0" err="1"/>
+              <a:t>정보표</a:t>
+            </a:r>
+            <a:endParaRPr lang="ko-KR" altLang="en-US" b="1" dirty="0"/>
+          </a:p>
+        </p:txBody>
+      </p:sp>
+      <p:sp>
+        <p:nvSpPr>
+          <p:cNvPr id="9" name="TextBox 8">
+            <a:extLst>
+              <a:ext uri="{FF2B5EF4-FFF2-40B4-BE49-F238E27FC236}">
+                <a16:creationId xmlns:a16="http://schemas.microsoft.com/office/drawing/2014/main" id="{2223CB87-8681-8029-4212-FA9BDC062269}"/>
+              </a:ext>
+            </a:extLst>
+          </p:cNvPr>
+          <p:cNvSpPr txBox="1"/>
+          <p:nvPr/>
+        </p:nvSpPr>
+        <p:spPr>
+          <a:xfrm>
+            <a:off x="426507" y="3613727"/>
+            <a:ext cx="4666662" cy="1200329"/>
+          </a:xfrm>
+          <a:prstGeom prst="rect">
+            <a:avLst/>
+          </a:prstGeom>
+          <a:noFill/>
+        </p:spPr>
+        <p:txBody>
+          <a:bodyPr wrap="none" rtlCol="0">
+            <a:spAutoFit/>
+          </a:bodyPr>
+          <a:lstStyle/>
+          <a:p>
+            <a:r>
+              <a:rPr lang="en-US" altLang="ko-KR" dirty="0"/>
+              <a:t>Stage</a:t>
+            </a:r>
+            <a:r>
+              <a:rPr lang="ko-KR" altLang="en-US" dirty="0"/>
+              <a:t>의 </a:t>
+            </a:r>
+            <a:r>
+              <a:rPr lang="en-US" altLang="ko-KR" dirty="0"/>
+              <a:t>Target score </a:t>
+            </a:r>
+            <a:r>
+              <a:rPr lang="ko-KR" altLang="en-US" dirty="0"/>
+              <a:t>하단</a:t>
+            </a:r>
+            <a:r>
+              <a:rPr lang="en-US" altLang="ko-KR" dirty="0"/>
+              <a:t> </a:t>
+            </a:r>
+            <a:r>
+              <a:rPr lang="ko-KR" altLang="en-US" dirty="0"/>
+              <a:t>버튼으로 표기</a:t>
+            </a:r>
+            <a:endParaRPr lang="en-US" altLang="ko-KR" dirty="0"/>
+          </a:p>
+          <a:p>
+            <a:endParaRPr lang="en-US" altLang="ko-KR" dirty="0"/>
+          </a:p>
+          <a:p>
+            <a:r>
+              <a:rPr lang="en-US" altLang="ko-KR" dirty="0"/>
+              <a:t>			   </a:t>
+            </a:r>
+            <a:r>
+              <a:rPr lang="ko-KR" altLang="en-US" dirty="0" err="1"/>
+              <a:t>발라트로의</a:t>
+            </a:r>
+            <a:endParaRPr lang="en-US" altLang="ko-KR" dirty="0"/>
+          </a:p>
+          <a:p>
+            <a:r>
+              <a:rPr lang="en-US" altLang="ko-KR" dirty="0"/>
+              <a:t>			   </a:t>
+            </a:r>
+            <a:r>
+              <a:rPr lang="ko-KR" altLang="en-US" dirty="0" err="1"/>
+              <a:t>족보같은</a:t>
+            </a:r>
+            <a:r>
+              <a:rPr lang="ko-KR" altLang="en-US" dirty="0"/>
+              <a:t> 기능</a:t>
+            </a:r>
+            <a:endParaRPr lang="en-US" altLang="ko-KR" dirty="0"/>
+          </a:p>
+        </p:txBody>
+      </p:sp>
+      <p:sp>
+        <p:nvSpPr>
+          <p:cNvPr id="2" name="AutoShape 2">
+            <a:extLst>
+              <a:ext uri="{FF2B5EF4-FFF2-40B4-BE49-F238E27FC236}">
+                <a16:creationId xmlns:a16="http://schemas.microsoft.com/office/drawing/2014/main" id="{33814FD4-4B1B-76A2-5B79-DD2617D61513}"/>
+              </a:ext>
+            </a:extLst>
+          </p:cNvPr>
+          <p:cNvSpPr>
+            <a:spLocks noChangeAspect="1" noChangeArrowheads="1"/>
+          </p:cNvSpPr>
+          <p:nvPr/>
+        </p:nvSpPr>
+        <p:spPr bwMode="auto">
+          <a:xfrm>
+            <a:off x="5943600" y="3276600"/>
+            <a:ext cx="304800" cy="304800"/>
+          </a:xfrm>
+          <a:prstGeom prst="rect">
+            <a:avLst/>
+          </a:prstGeom>
+          <a:noFill/>
+          <a:extLst>
+            <a:ext uri="{909E8E84-426E-40DD-AFC4-6F175D3DCCD1}">
+              <a14:hiddenFill xmlns:a14="http://schemas.microsoft.com/office/drawing/2010/main">
+                <a:solidFill>
+                  <a:srgbClr val="FFFFFF"/>
+                </a:solidFill>
+              </a14:hiddenFill>
+            </a:ext>
+          </a:extLst>
+        </p:spPr>
+        <p:txBody>
+          <a:bodyPr vert="horz" wrap="square" lIns="91440" tIns="45720" rIns="91440" bIns="45720" numCol="1" anchor="t" anchorCtr="0" compatLnSpc="1">
+            <a:prstTxWarp prst="textNoShape">
+              <a:avLst/>
+            </a:prstTxWarp>
+          </a:bodyPr>
+          <a:lstStyle/>
+          <a:p>
+            <a:endParaRPr lang="ko-KR" altLang="en-US"/>
+          </a:p>
+        </p:txBody>
+      </p:sp>
+      <p:pic>
+        <p:nvPicPr>
+          <p:cNvPr id="6" name="그림 5">
+            <a:extLst>
+              <a:ext uri="{FF2B5EF4-FFF2-40B4-BE49-F238E27FC236}">
+                <a16:creationId xmlns:a16="http://schemas.microsoft.com/office/drawing/2014/main" id="{F801AA1E-A113-A877-F076-ABEC806F4AE0}"/>
+              </a:ext>
+            </a:extLst>
+          </p:cNvPr>
+          <p:cNvPicPr>
+            <a:picLocks noChangeAspect="1"/>
+          </p:cNvPicPr>
+          <p:nvPr/>
+        </p:nvPicPr>
+        <p:blipFill>
+          <a:blip r:embed="rId2"/>
+          <a:stretch>
+            <a:fillRect/>
+          </a:stretch>
+        </p:blipFill>
+        <p:spPr>
+          <a:xfrm>
+            <a:off x="426507" y="1058358"/>
+            <a:ext cx="2695384" cy="2421277"/>
+          </a:xfrm>
+          <a:prstGeom prst="rect">
+            <a:avLst/>
+          </a:prstGeom>
+        </p:spPr>
+      </p:pic>
+      <p:sp>
+        <p:nvSpPr>
+          <p:cNvPr id="10" name="직사각형 9">
+            <a:extLst>
+              <a:ext uri="{FF2B5EF4-FFF2-40B4-BE49-F238E27FC236}">
+                <a16:creationId xmlns:a16="http://schemas.microsoft.com/office/drawing/2014/main" id="{2CF59888-7E9F-0B0B-701B-3AA65FF0A4F6}"/>
+              </a:ext>
+            </a:extLst>
+          </p:cNvPr>
+          <p:cNvSpPr/>
+          <p:nvPr/>
+        </p:nvSpPr>
+        <p:spPr>
+          <a:xfrm>
+            <a:off x="2493818" y="2669309"/>
+            <a:ext cx="406400" cy="452582"/>
+          </a:xfrm>
+          <a:prstGeom prst="rect">
+            <a:avLst/>
+          </a:prstGeom>
+          <a:noFill/>
+          <a:ln w="38100">
+            <a:solidFill>
+              <a:srgbClr val="FF0000"/>
+            </a:solidFill>
+          </a:ln>
+        </p:spPr>
+        <p:style>
+          <a:lnRef idx="2">
+            <a:schemeClr val="accent1">
+              <a:shade val="15000"/>
+            </a:schemeClr>
+          </a:lnRef>
+          <a:fillRef idx="1">
+            <a:schemeClr val="accent1"/>
+          </a:fillRef>
+          <a:effectRef idx="0">
+            <a:schemeClr val="accent1"/>
+          </a:effectRef>
+          <a:fontRef idx="minor">
+            <a:schemeClr val="lt1"/>
+          </a:fontRef>
+        </p:style>
+        <p:txBody>
+          <a:bodyPr rtlCol="0" anchor="ctr"/>
+          <a:lstStyle/>
+          <a:p>
+            <a:pPr algn="ctr"/>
+            <a:endParaRPr lang="ko-KR" altLang="en-US"/>
+          </a:p>
+        </p:txBody>
+      </p:sp>
+      <p:pic>
+        <p:nvPicPr>
+          <p:cNvPr id="12" name="그림 11">
+            <a:extLst>
+              <a:ext uri="{FF2B5EF4-FFF2-40B4-BE49-F238E27FC236}">
+                <a16:creationId xmlns:a16="http://schemas.microsoft.com/office/drawing/2014/main" id="{2D4D79B1-48C4-1E52-8C12-BC63B15E7CCD}"/>
+              </a:ext>
+            </a:extLst>
+          </p:cNvPr>
+          <p:cNvPicPr>
+            <a:picLocks noChangeAspect="1"/>
+          </p:cNvPicPr>
+          <p:nvPr/>
+        </p:nvPicPr>
+        <p:blipFill>
+          <a:blip r:embed="rId3"/>
+          <a:stretch>
+            <a:fillRect/>
+          </a:stretch>
+        </p:blipFill>
+        <p:spPr>
+          <a:xfrm>
+            <a:off x="463452" y="4117151"/>
+            <a:ext cx="2886478" cy="2333951"/>
+          </a:xfrm>
+          <a:prstGeom prst="rect">
+            <a:avLst/>
+          </a:prstGeom>
+        </p:spPr>
+      </p:pic>
+      <p:sp>
+        <p:nvSpPr>
+          <p:cNvPr id="13" name="직사각형 12">
+            <a:extLst>
+              <a:ext uri="{FF2B5EF4-FFF2-40B4-BE49-F238E27FC236}">
+                <a16:creationId xmlns:a16="http://schemas.microsoft.com/office/drawing/2014/main" id="{5D5414A8-2471-912F-5E23-684D2AB37C50}"/>
+              </a:ext>
+            </a:extLst>
+          </p:cNvPr>
+          <p:cNvSpPr/>
+          <p:nvPr/>
+        </p:nvSpPr>
+        <p:spPr>
+          <a:xfrm>
+            <a:off x="3470217" y="461654"/>
+            <a:ext cx="4937522" cy="3017981"/>
+          </a:xfrm>
+          <a:prstGeom prst="rect">
+            <a:avLst/>
+          </a:prstGeom>
+          <a:solidFill>
+            <a:schemeClr val="tx2">
+              <a:lumMod val="10000"/>
+              <a:lumOff val="90000"/>
+            </a:schemeClr>
+          </a:solidFill>
+        </p:spPr>
+        <p:style>
+          <a:lnRef idx="2">
+            <a:schemeClr val="accent1">
+              <a:shade val="15000"/>
+            </a:schemeClr>
+          </a:lnRef>
+          <a:fillRef idx="1">
+            <a:schemeClr val="accent1"/>
+          </a:fillRef>
+          <a:effectRef idx="0">
+            <a:schemeClr val="accent1"/>
+          </a:effectRef>
+          <a:fontRef idx="minor">
+            <a:schemeClr val="lt1"/>
+          </a:fontRef>
+        </p:style>
+        <p:txBody>
+          <a:bodyPr rtlCol="0" anchor="ctr"/>
+          <a:lstStyle/>
+          <a:p>
+            <a:pPr algn="ctr"/>
+            <a:endParaRPr lang="ko-KR" altLang="en-US"/>
+          </a:p>
+        </p:txBody>
+      </p:sp>
+      <p:sp>
+        <p:nvSpPr>
+          <p:cNvPr id="15" name="사각형: 둥근 모서리 14">
+            <a:extLst>
+              <a:ext uri="{FF2B5EF4-FFF2-40B4-BE49-F238E27FC236}">
+                <a16:creationId xmlns:a16="http://schemas.microsoft.com/office/drawing/2014/main" id="{CC9E2A3A-7E85-A64E-6F45-C2B637EB9C38}"/>
+              </a:ext>
+            </a:extLst>
+          </p:cNvPr>
+          <p:cNvSpPr/>
+          <p:nvPr/>
+        </p:nvSpPr>
+        <p:spPr>
+          <a:xfrm>
+            <a:off x="3694545" y="563419"/>
+            <a:ext cx="1773382" cy="369332"/>
+          </a:xfrm>
+          <a:prstGeom prst="roundRect">
+            <a:avLst/>
+          </a:prstGeom>
+        </p:spPr>
+        <p:style>
+          <a:lnRef idx="2">
+            <a:schemeClr val="accent1">
+              <a:shade val="15000"/>
+            </a:schemeClr>
+          </a:lnRef>
+          <a:fillRef idx="1">
+            <a:schemeClr val="accent1"/>
+          </a:fillRef>
+          <a:effectRef idx="0">
+            <a:schemeClr val="accent1"/>
+          </a:effectRef>
+          <a:fontRef idx="minor">
+            <a:schemeClr val="lt1"/>
+          </a:fontRef>
+        </p:style>
+        <p:txBody>
+          <a:bodyPr rtlCol="0" anchor="ctr"/>
+          <a:lstStyle/>
+          <a:p>
+            <a:pPr algn="ctr"/>
+            <a:r>
+              <a:rPr lang="ko-KR" altLang="en-US" dirty="0"/>
+              <a:t>태그 점수</a:t>
+            </a:r>
+          </a:p>
+        </p:txBody>
+      </p:sp>
+      <p:sp>
+        <p:nvSpPr>
+          <p:cNvPr id="16" name="사각형: 둥근 모서리 15">
+            <a:extLst>
+              <a:ext uri="{FF2B5EF4-FFF2-40B4-BE49-F238E27FC236}">
+                <a16:creationId xmlns:a16="http://schemas.microsoft.com/office/drawing/2014/main" id="{61B75A3A-5C66-E7C5-072D-E530689449A5}"/>
+              </a:ext>
+            </a:extLst>
+          </p:cNvPr>
+          <p:cNvSpPr/>
+          <p:nvPr/>
+        </p:nvSpPr>
+        <p:spPr>
+          <a:xfrm>
+            <a:off x="6271491" y="563419"/>
+            <a:ext cx="1773382" cy="369332"/>
+          </a:xfrm>
+          <a:prstGeom prst="roundRect">
+            <a:avLst/>
+          </a:prstGeom>
+        </p:spPr>
+        <p:style>
+          <a:lnRef idx="2">
+            <a:schemeClr val="accent1">
+              <a:shade val="15000"/>
+            </a:schemeClr>
+          </a:lnRef>
+          <a:fillRef idx="1">
+            <a:schemeClr val="accent1"/>
+          </a:fillRef>
+          <a:effectRef idx="0">
+            <a:schemeClr val="accent1"/>
+          </a:effectRef>
+          <a:fontRef idx="minor">
+            <a:schemeClr val="lt1"/>
+          </a:fontRef>
+        </p:style>
+        <p:txBody>
+          <a:bodyPr rtlCol="0" anchor="ctr"/>
+          <a:lstStyle/>
+          <a:p>
+            <a:pPr algn="ctr"/>
+            <a:r>
+              <a:rPr lang="ko-KR" altLang="en-US" dirty="0">
+                <a:solidFill>
+                  <a:schemeClr val="accent1">
+                    <a:lumMod val="50000"/>
+                  </a:schemeClr>
+                </a:solidFill>
+              </a:rPr>
+              <a:t>타일 점수</a:t>
+            </a:r>
+          </a:p>
+        </p:txBody>
+      </p:sp>
+      <p:sp>
+        <p:nvSpPr>
+          <p:cNvPr id="18" name="사각형: 둥근 모서리 17">
+            <a:extLst>
+              <a:ext uri="{FF2B5EF4-FFF2-40B4-BE49-F238E27FC236}">
+                <a16:creationId xmlns:a16="http://schemas.microsoft.com/office/drawing/2014/main" id="{4BB4A9AF-A8B6-B3E8-413F-68C4414A4F06}"/>
+              </a:ext>
+            </a:extLst>
+          </p:cNvPr>
+          <p:cNvSpPr/>
+          <p:nvPr/>
+        </p:nvSpPr>
+        <p:spPr>
+          <a:xfrm>
+            <a:off x="3694544" y="1054054"/>
+            <a:ext cx="4488873" cy="304800"/>
+          </a:xfrm>
+          <a:prstGeom prst="roundRect">
+            <a:avLst/>
+          </a:prstGeom>
+        </p:spPr>
+        <p:style>
+          <a:lnRef idx="2">
+            <a:schemeClr val="accent1">
+              <a:shade val="15000"/>
+            </a:schemeClr>
+          </a:lnRef>
+          <a:fillRef idx="1">
+            <a:schemeClr val="accent1"/>
+          </a:fillRef>
+          <a:effectRef idx="0">
+            <a:schemeClr val="accent1"/>
+          </a:effectRef>
+          <a:fontRef idx="minor">
+            <a:schemeClr val="lt1"/>
+          </a:fontRef>
+        </p:style>
+        <p:txBody>
+          <a:bodyPr rtlCol="0" anchor="ctr"/>
+          <a:lstStyle/>
+          <a:p>
+            <a:pPr algn="ctr"/>
+            <a:r>
+              <a:rPr lang="ko-KR" altLang="en-US" dirty="0"/>
+              <a:t>도구</a:t>
+            </a:r>
+            <a:r>
+              <a:rPr lang="en-US" altLang="ko-KR" dirty="0"/>
+              <a:t>		000 x 1</a:t>
+            </a:r>
+          </a:p>
+        </p:txBody>
+      </p:sp>
+      <p:sp>
+        <p:nvSpPr>
+          <p:cNvPr id="19" name="사각형: 둥근 모서리 18">
+            <a:extLst>
+              <a:ext uri="{FF2B5EF4-FFF2-40B4-BE49-F238E27FC236}">
+                <a16:creationId xmlns:a16="http://schemas.microsoft.com/office/drawing/2014/main" id="{F6A3597A-1962-3300-25BB-AAA29350E7F1}"/>
+              </a:ext>
+            </a:extLst>
+          </p:cNvPr>
+          <p:cNvSpPr/>
+          <p:nvPr/>
+        </p:nvSpPr>
+        <p:spPr>
+          <a:xfrm>
+            <a:off x="3694543" y="1425219"/>
+            <a:ext cx="4488873" cy="304800"/>
+          </a:xfrm>
+          <a:prstGeom prst="roundRect">
+            <a:avLst/>
+          </a:prstGeom>
+        </p:spPr>
+        <p:style>
+          <a:lnRef idx="2">
+            <a:schemeClr val="accent1">
+              <a:shade val="15000"/>
+            </a:schemeClr>
+          </a:lnRef>
+          <a:fillRef idx="1">
+            <a:schemeClr val="accent1"/>
+          </a:fillRef>
+          <a:effectRef idx="0">
+            <a:schemeClr val="accent1"/>
+          </a:effectRef>
+          <a:fontRef idx="minor">
+            <a:schemeClr val="lt1"/>
+          </a:fontRef>
+        </p:style>
+        <p:txBody>
+          <a:bodyPr rtlCol="0" anchor="ctr"/>
+          <a:lstStyle/>
+          <a:p>
+            <a:pPr algn="ctr"/>
+            <a:r>
+              <a:rPr lang="ko-KR" altLang="en-US" dirty="0"/>
+              <a:t>마나</a:t>
+            </a:r>
+            <a:r>
+              <a:rPr lang="en-US" altLang="ko-KR" dirty="0"/>
+              <a:t>		000 x 1</a:t>
+            </a:r>
+          </a:p>
+        </p:txBody>
+      </p:sp>
+      <p:sp>
+        <p:nvSpPr>
+          <p:cNvPr id="20" name="사각형: 둥근 모서리 19">
+            <a:extLst>
+              <a:ext uri="{FF2B5EF4-FFF2-40B4-BE49-F238E27FC236}">
+                <a16:creationId xmlns:a16="http://schemas.microsoft.com/office/drawing/2014/main" id="{E1304D82-6660-38B1-F759-2A6F612EFA82}"/>
+              </a:ext>
+            </a:extLst>
+          </p:cNvPr>
+          <p:cNvSpPr/>
+          <p:nvPr/>
+        </p:nvSpPr>
+        <p:spPr>
+          <a:xfrm>
+            <a:off x="3694542" y="1792010"/>
+            <a:ext cx="4488873" cy="304800"/>
+          </a:xfrm>
+          <a:prstGeom prst="roundRect">
+            <a:avLst/>
+          </a:prstGeom>
+        </p:spPr>
+        <p:style>
+          <a:lnRef idx="2">
+            <a:schemeClr val="accent1">
+              <a:shade val="15000"/>
+            </a:schemeClr>
+          </a:lnRef>
+          <a:fillRef idx="1">
+            <a:schemeClr val="accent1"/>
+          </a:fillRef>
+          <a:effectRef idx="0">
+            <a:schemeClr val="accent1"/>
+          </a:effectRef>
+          <a:fontRef idx="minor">
+            <a:schemeClr val="lt1"/>
+          </a:fontRef>
+        </p:style>
+        <p:txBody>
+          <a:bodyPr rtlCol="0" anchor="ctr"/>
+          <a:lstStyle/>
+          <a:p>
+            <a:pPr algn="ctr"/>
+            <a:r>
+              <a:rPr lang="ko-KR" altLang="en-US" dirty="0"/>
+              <a:t>마법</a:t>
+            </a:r>
+            <a:r>
+              <a:rPr lang="en-US" altLang="ko-KR" dirty="0"/>
+              <a:t>		000 x 1</a:t>
+            </a:r>
+          </a:p>
+        </p:txBody>
+      </p:sp>
+      <p:sp>
+        <p:nvSpPr>
+          <p:cNvPr id="21" name="사각형: 둥근 모서리 20">
+            <a:extLst>
+              <a:ext uri="{FF2B5EF4-FFF2-40B4-BE49-F238E27FC236}">
+                <a16:creationId xmlns:a16="http://schemas.microsoft.com/office/drawing/2014/main" id="{E9263239-F64B-637A-9EA0-862BF50314A6}"/>
+              </a:ext>
+            </a:extLst>
+          </p:cNvPr>
+          <p:cNvSpPr/>
+          <p:nvPr/>
+        </p:nvSpPr>
+        <p:spPr>
+          <a:xfrm>
+            <a:off x="3694542" y="2174323"/>
+            <a:ext cx="4488873" cy="304800"/>
+          </a:xfrm>
+          <a:prstGeom prst="roundRect">
+            <a:avLst/>
+          </a:prstGeom>
+        </p:spPr>
+        <p:style>
+          <a:lnRef idx="2">
+            <a:schemeClr val="accent1">
+              <a:shade val="15000"/>
+            </a:schemeClr>
+          </a:lnRef>
+          <a:fillRef idx="1">
+            <a:schemeClr val="accent1"/>
+          </a:fillRef>
+          <a:effectRef idx="0">
+            <a:schemeClr val="accent1"/>
+          </a:effectRef>
+          <a:fontRef idx="minor">
+            <a:schemeClr val="lt1"/>
+          </a:fontRef>
+        </p:style>
+        <p:txBody>
+          <a:bodyPr rtlCol="0" anchor="ctr"/>
+          <a:lstStyle/>
+          <a:p>
+            <a:pPr algn="ctr"/>
+            <a:r>
+              <a:rPr lang="ko-KR" altLang="en-US" dirty="0"/>
+              <a:t>황금</a:t>
+            </a:r>
+            <a:r>
+              <a:rPr lang="en-US" altLang="ko-KR" dirty="0"/>
+              <a:t>		000 x 1</a:t>
+            </a:r>
+          </a:p>
+        </p:txBody>
+      </p:sp>
+      <p:sp>
+        <p:nvSpPr>
+          <p:cNvPr id="22" name="사각형: 둥근 모서리 21">
+            <a:extLst>
+              <a:ext uri="{FF2B5EF4-FFF2-40B4-BE49-F238E27FC236}">
+                <a16:creationId xmlns:a16="http://schemas.microsoft.com/office/drawing/2014/main" id="{44AB851B-BCDD-9734-852F-65F29A165E21}"/>
+              </a:ext>
+            </a:extLst>
+          </p:cNvPr>
+          <p:cNvSpPr/>
+          <p:nvPr/>
+        </p:nvSpPr>
+        <p:spPr>
+          <a:xfrm>
+            <a:off x="3694542" y="2537727"/>
+            <a:ext cx="4488873" cy="304800"/>
+          </a:xfrm>
+          <a:prstGeom prst="roundRect">
+            <a:avLst/>
+          </a:prstGeom>
+        </p:spPr>
+        <p:style>
+          <a:lnRef idx="2">
+            <a:schemeClr val="accent1">
+              <a:shade val="15000"/>
+            </a:schemeClr>
+          </a:lnRef>
+          <a:fillRef idx="1">
+            <a:schemeClr val="accent1"/>
+          </a:fillRef>
+          <a:effectRef idx="0">
+            <a:schemeClr val="accent1"/>
+          </a:effectRef>
+          <a:fontRef idx="minor">
+            <a:schemeClr val="lt1"/>
+          </a:fontRef>
+        </p:style>
+        <p:txBody>
+          <a:bodyPr rtlCol="0" anchor="ctr"/>
+          <a:lstStyle/>
+          <a:p>
+            <a:pPr algn="ctr"/>
+            <a:r>
+              <a:rPr lang="ko-KR" altLang="en-US" dirty="0"/>
+              <a:t>화염</a:t>
+            </a:r>
+            <a:r>
+              <a:rPr lang="en-US" altLang="ko-KR" dirty="0"/>
+              <a:t>		000 x 1</a:t>
+            </a:r>
+          </a:p>
+        </p:txBody>
+      </p:sp>
+      <p:sp>
+        <p:nvSpPr>
+          <p:cNvPr id="23" name="사각형: 둥근 모서리 22">
+            <a:extLst>
+              <a:ext uri="{FF2B5EF4-FFF2-40B4-BE49-F238E27FC236}">
+                <a16:creationId xmlns:a16="http://schemas.microsoft.com/office/drawing/2014/main" id="{0E177221-3CF7-0F5B-29DF-7B17BE6B07D6}"/>
+              </a:ext>
+            </a:extLst>
+          </p:cNvPr>
+          <p:cNvSpPr/>
+          <p:nvPr/>
+        </p:nvSpPr>
+        <p:spPr>
+          <a:xfrm>
+            <a:off x="3694541" y="2912279"/>
+            <a:ext cx="4488873" cy="141252"/>
+          </a:xfrm>
+          <a:prstGeom prst="roundRect">
+            <a:avLst/>
+          </a:prstGeom>
+        </p:spPr>
+        <p:style>
+          <a:lnRef idx="2">
+            <a:schemeClr val="accent1">
+              <a:shade val="15000"/>
+            </a:schemeClr>
+          </a:lnRef>
+          <a:fillRef idx="1">
+            <a:schemeClr val="accent1"/>
+          </a:fillRef>
+          <a:effectRef idx="0">
+            <a:schemeClr val="accent1"/>
+          </a:effectRef>
+          <a:fontRef idx="minor">
+            <a:schemeClr val="lt1"/>
+          </a:fontRef>
+        </p:style>
+        <p:txBody>
+          <a:bodyPr rtlCol="0" anchor="ctr"/>
+          <a:lstStyle/>
+          <a:p>
+            <a:pPr algn="ctr"/>
+            <a:r>
+              <a:rPr lang="ko-KR" altLang="en-US" dirty="0"/>
+              <a:t>얼음</a:t>
+            </a:r>
+            <a:r>
+              <a:rPr lang="en-US" altLang="ko-KR" dirty="0"/>
+              <a:t>		000 x 1</a:t>
+            </a:r>
+          </a:p>
+        </p:txBody>
+      </p:sp>
+      <p:sp>
+        <p:nvSpPr>
+          <p:cNvPr id="24" name="TextBox 23">
+            <a:extLst>
+              <a:ext uri="{FF2B5EF4-FFF2-40B4-BE49-F238E27FC236}">
+                <a16:creationId xmlns:a16="http://schemas.microsoft.com/office/drawing/2014/main" id="{8A55448D-2074-0D24-33FF-C08D54AE1161}"/>
+              </a:ext>
+            </a:extLst>
+          </p:cNvPr>
+          <p:cNvSpPr txBox="1"/>
+          <p:nvPr/>
+        </p:nvSpPr>
+        <p:spPr>
+          <a:xfrm>
+            <a:off x="5657418" y="3592548"/>
+            <a:ext cx="6080511" cy="3416320"/>
+          </a:xfrm>
+          <a:prstGeom prst="rect">
+            <a:avLst/>
+          </a:prstGeom>
+          <a:noFill/>
+        </p:spPr>
+        <p:txBody>
+          <a:bodyPr wrap="none" rtlCol="0">
+            <a:spAutoFit/>
+          </a:bodyPr>
+          <a:lstStyle/>
+          <a:p>
+            <a:r>
+              <a:rPr lang="ko-KR" altLang="en-US" dirty="0"/>
+              <a:t>태그 점수 </a:t>
+            </a:r>
+            <a:r>
+              <a:rPr lang="en-US" altLang="ko-KR" dirty="0"/>
+              <a:t>- </a:t>
+            </a:r>
+            <a:r>
+              <a:rPr lang="ko-KR" altLang="en-US" dirty="0"/>
+              <a:t>타일 파괴 시 카드로 받을 수 있는 점수</a:t>
+            </a:r>
+            <a:endParaRPr lang="en-US" altLang="ko-KR" dirty="0"/>
+          </a:p>
+          <a:p>
+            <a:r>
+              <a:rPr lang="ko-KR" altLang="en-US" dirty="0"/>
+              <a:t>기본 점수 </a:t>
+            </a:r>
+            <a:r>
+              <a:rPr lang="en-US" altLang="ko-KR" dirty="0"/>
+              <a:t>x </a:t>
+            </a:r>
+            <a:r>
+              <a:rPr lang="ko-KR" altLang="en-US" dirty="0"/>
+              <a:t>기본 배율을 표기</a:t>
+            </a:r>
+            <a:endParaRPr lang="en-US" altLang="ko-KR" dirty="0"/>
+          </a:p>
+          <a:p>
+            <a:endParaRPr lang="en-US" altLang="ko-KR" dirty="0"/>
+          </a:p>
+          <a:p>
+            <a:r>
+              <a:rPr lang="ko-KR" altLang="en-US" dirty="0"/>
+              <a:t>도구</a:t>
+            </a:r>
+            <a:r>
+              <a:rPr lang="en-US" altLang="ko-KR" dirty="0"/>
+              <a:t>/</a:t>
+            </a:r>
+            <a:r>
+              <a:rPr lang="ko-KR" altLang="en-US" dirty="0"/>
+              <a:t>황금 태그 카드로 타일 </a:t>
+            </a:r>
+            <a:r>
+              <a:rPr lang="ko-KR" altLang="en-US" dirty="0" err="1"/>
+              <a:t>파괴시</a:t>
+            </a:r>
+            <a:r>
+              <a:rPr lang="ko-KR" altLang="en-US" dirty="0"/>
+              <a:t> →</a:t>
+            </a:r>
+            <a:br>
+              <a:rPr lang="en-US" altLang="ko-KR" dirty="0"/>
+            </a:br>
+            <a:r>
+              <a:rPr lang="en-US" altLang="ko-KR" dirty="0"/>
+              <a:t> (</a:t>
+            </a:r>
+            <a:r>
+              <a:rPr lang="ko-KR" altLang="en-US" dirty="0"/>
+              <a:t>파괴 점수</a:t>
+            </a:r>
+            <a:r>
+              <a:rPr lang="en-US" altLang="ko-KR" dirty="0"/>
+              <a:t>x</a:t>
+            </a:r>
+            <a:r>
+              <a:rPr lang="ko-KR" altLang="en-US" dirty="0"/>
+              <a:t>파괴 배율</a:t>
+            </a:r>
+            <a:r>
+              <a:rPr lang="en-US" altLang="ko-KR" dirty="0"/>
+              <a:t>) + (</a:t>
+            </a:r>
+            <a:r>
+              <a:rPr lang="ko-KR" altLang="en-US" dirty="0"/>
+              <a:t>도구 점수</a:t>
+            </a:r>
+            <a:r>
+              <a:rPr lang="en-US" altLang="ko-KR" dirty="0"/>
+              <a:t>x</a:t>
+            </a:r>
+            <a:r>
+              <a:rPr lang="ko-KR" altLang="en-US" dirty="0"/>
+              <a:t>도구 배율</a:t>
+            </a:r>
+            <a:r>
+              <a:rPr lang="en-US" altLang="ko-KR" dirty="0"/>
+              <a:t>) +</a:t>
+            </a:r>
+            <a:br>
+              <a:rPr lang="en-US" altLang="ko-KR" dirty="0"/>
+            </a:br>
+            <a:r>
+              <a:rPr lang="en-US" altLang="ko-KR" dirty="0"/>
+              <a:t> (</a:t>
+            </a:r>
+            <a:r>
+              <a:rPr lang="ko-KR" altLang="en-US" dirty="0"/>
+              <a:t>황금 점수</a:t>
+            </a:r>
+            <a:r>
+              <a:rPr lang="en-US" altLang="ko-KR" dirty="0"/>
+              <a:t>x</a:t>
+            </a:r>
+            <a:r>
+              <a:rPr lang="ko-KR" altLang="en-US" dirty="0"/>
+              <a:t>황금 배율</a:t>
+            </a:r>
+            <a:r>
+              <a:rPr lang="en-US" altLang="ko-KR" dirty="0"/>
+              <a:t>) </a:t>
+            </a:r>
+            <a:r>
+              <a:rPr lang="ko-KR" altLang="en-US" dirty="0"/>
+              <a:t>에 해당하는 점수 획득</a:t>
+            </a:r>
+            <a:endParaRPr lang="en-US" altLang="ko-KR" dirty="0"/>
+          </a:p>
+          <a:p>
+            <a:endParaRPr lang="en-US" altLang="ko-KR" dirty="0"/>
+          </a:p>
+          <a:p>
+            <a:r>
+              <a:rPr lang="ko-KR" altLang="en-US" dirty="0"/>
+              <a:t>타일 점수 </a:t>
+            </a:r>
+            <a:r>
+              <a:rPr lang="en-US" altLang="ko-KR" dirty="0"/>
+              <a:t>– </a:t>
+            </a:r>
+            <a:r>
+              <a:rPr lang="ko-KR" altLang="en-US" dirty="0"/>
+              <a:t>타일의 특수 효과</a:t>
+            </a:r>
+            <a:r>
+              <a:rPr lang="en-US" altLang="ko-KR" dirty="0"/>
+              <a:t>/</a:t>
+            </a:r>
+            <a:r>
+              <a:rPr lang="ko-KR" altLang="en-US" dirty="0"/>
+              <a:t>파괴로 받을 수 있는 점수</a:t>
+            </a:r>
+            <a:endParaRPr lang="en-US" altLang="ko-KR" dirty="0"/>
+          </a:p>
+          <a:p>
+            <a:r>
+              <a:rPr lang="en-US" altLang="ko-KR" dirty="0"/>
+              <a:t> (</a:t>
+            </a:r>
+            <a:r>
+              <a:rPr lang="ko-KR" altLang="en-US" dirty="0"/>
+              <a:t>감전은 효과 점수와 파괴 점수가 다를 수 있음</a:t>
+            </a:r>
+            <a:r>
+              <a:rPr lang="en-US" altLang="ko-KR" dirty="0"/>
+              <a:t>)</a:t>
+            </a:r>
+          </a:p>
+          <a:p>
+            <a:endParaRPr lang="en-US" altLang="ko-KR" dirty="0"/>
+          </a:p>
+          <a:p>
+            <a:r>
+              <a:rPr lang="en-US" altLang="ko-KR" dirty="0"/>
+              <a:t> </a:t>
+            </a:r>
+            <a:r>
+              <a:rPr lang="ko-KR" altLang="en-US" dirty="0"/>
+              <a:t>파괴 점수 </a:t>
+            </a:r>
+            <a:r>
+              <a:rPr lang="en-US" altLang="ko-KR" dirty="0"/>
+              <a:t>– </a:t>
+            </a:r>
+            <a:r>
+              <a:rPr lang="ko-KR" altLang="en-US" dirty="0"/>
+              <a:t>태그가 없으면 파괴</a:t>
+            </a:r>
+            <a:r>
+              <a:rPr lang="en-US" altLang="ko-KR" dirty="0"/>
+              <a:t>(</a:t>
+            </a:r>
+            <a:r>
+              <a:rPr lang="ko-KR" altLang="en-US" dirty="0"/>
+              <a:t>기본</a:t>
+            </a:r>
+            <a:r>
+              <a:rPr lang="en-US" altLang="ko-KR" dirty="0"/>
+              <a:t>) </a:t>
+            </a:r>
+            <a:r>
+              <a:rPr lang="ko-KR" altLang="en-US" dirty="0"/>
+              <a:t>점수</a:t>
+            </a:r>
+            <a:br>
+              <a:rPr lang="en-US" altLang="ko-KR" dirty="0"/>
+            </a:br>
+            <a:r>
+              <a:rPr lang="en-US" altLang="ko-KR" dirty="0"/>
+              <a:t> </a:t>
+            </a:r>
+            <a:r>
+              <a:rPr lang="ko-KR" altLang="en-US" dirty="0"/>
+              <a:t>태그가 있으면 해당 태그 파괴 점수를 모두 별개로 이행</a:t>
+            </a:r>
+            <a:endParaRPr lang="en-US" altLang="ko-KR" dirty="0"/>
+          </a:p>
+        </p:txBody>
+      </p:sp>
+      <p:sp>
+        <p:nvSpPr>
+          <p:cNvPr id="25" name="직사각형 24">
+            <a:extLst>
+              <a:ext uri="{FF2B5EF4-FFF2-40B4-BE49-F238E27FC236}">
+                <a16:creationId xmlns:a16="http://schemas.microsoft.com/office/drawing/2014/main" id="{4F344E99-0FFD-F26F-D9AE-2ACE06CA2D2B}"/>
+              </a:ext>
+            </a:extLst>
+          </p:cNvPr>
+          <p:cNvSpPr/>
+          <p:nvPr/>
+        </p:nvSpPr>
+        <p:spPr>
+          <a:xfrm>
+            <a:off x="8497459" y="461654"/>
+            <a:ext cx="4937522" cy="3017981"/>
+          </a:xfrm>
+          <a:prstGeom prst="rect">
+            <a:avLst/>
+          </a:prstGeom>
+          <a:solidFill>
+            <a:schemeClr val="tx2">
+              <a:lumMod val="10000"/>
+              <a:lumOff val="90000"/>
+            </a:schemeClr>
+          </a:solidFill>
+        </p:spPr>
+        <p:style>
+          <a:lnRef idx="2">
+            <a:schemeClr val="accent1">
+              <a:shade val="15000"/>
+            </a:schemeClr>
+          </a:lnRef>
+          <a:fillRef idx="1">
+            <a:schemeClr val="accent1"/>
+          </a:fillRef>
+          <a:effectRef idx="0">
+            <a:schemeClr val="accent1"/>
+          </a:effectRef>
+          <a:fontRef idx="minor">
+            <a:schemeClr val="lt1"/>
+          </a:fontRef>
+        </p:style>
+        <p:txBody>
+          <a:bodyPr rtlCol="0" anchor="ctr"/>
+          <a:lstStyle/>
+          <a:p>
+            <a:pPr algn="ctr"/>
+            <a:endParaRPr lang="ko-KR" altLang="en-US"/>
+          </a:p>
+        </p:txBody>
+      </p:sp>
+      <p:sp>
+        <p:nvSpPr>
+          <p:cNvPr id="26" name="사각형: 둥근 모서리 25">
+            <a:extLst>
+              <a:ext uri="{FF2B5EF4-FFF2-40B4-BE49-F238E27FC236}">
+                <a16:creationId xmlns:a16="http://schemas.microsoft.com/office/drawing/2014/main" id="{464D4321-80FC-67B8-DD68-E956A91C0BE9}"/>
+              </a:ext>
+            </a:extLst>
+          </p:cNvPr>
+          <p:cNvSpPr/>
+          <p:nvPr/>
+        </p:nvSpPr>
+        <p:spPr>
+          <a:xfrm>
+            <a:off x="8721787" y="563419"/>
+            <a:ext cx="1773382" cy="369332"/>
+          </a:xfrm>
+          <a:prstGeom prst="roundRect">
+            <a:avLst/>
+          </a:prstGeom>
+        </p:spPr>
+        <p:style>
+          <a:lnRef idx="2">
+            <a:schemeClr val="accent1">
+              <a:shade val="15000"/>
+            </a:schemeClr>
+          </a:lnRef>
+          <a:fillRef idx="1">
+            <a:schemeClr val="accent1"/>
+          </a:fillRef>
+          <a:effectRef idx="0">
+            <a:schemeClr val="accent1"/>
+          </a:effectRef>
+          <a:fontRef idx="minor">
+            <a:schemeClr val="lt1"/>
+          </a:fontRef>
+        </p:style>
+        <p:txBody>
+          <a:bodyPr rtlCol="0" anchor="ctr"/>
+          <a:lstStyle/>
+          <a:p>
+            <a:pPr algn="ctr"/>
+            <a:r>
+              <a:rPr lang="ko-KR" altLang="en-US" dirty="0">
+                <a:solidFill>
+                  <a:schemeClr val="accent1">
+                    <a:lumMod val="50000"/>
+                  </a:schemeClr>
+                </a:solidFill>
+              </a:rPr>
+              <a:t>태그 점수</a:t>
+            </a:r>
+          </a:p>
+        </p:txBody>
+      </p:sp>
+      <p:sp>
+        <p:nvSpPr>
+          <p:cNvPr id="27" name="사각형: 둥근 모서리 26">
+            <a:extLst>
+              <a:ext uri="{FF2B5EF4-FFF2-40B4-BE49-F238E27FC236}">
+                <a16:creationId xmlns:a16="http://schemas.microsoft.com/office/drawing/2014/main" id="{735BEDFD-4951-0138-D3CE-960843861992}"/>
+              </a:ext>
+            </a:extLst>
+          </p:cNvPr>
+          <p:cNvSpPr/>
+          <p:nvPr/>
+        </p:nvSpPr>
+        <p:spPr>
+          <a:xfrm>
+            <a:off x="11298733" y="563419"/>
+            <a:ext cx="1773382" cy="369332"/>
+          </a:xfrm>
+          <a:prstGeom prst="roundRect">
+            <a:avLst/>
+          </a:prstGeom>
+        </p:spPr>
+        <p:style>
+          <a:lnRef idx="2">
+            <a:schemeClr val="accent1">
+              <a:shade val="15000"/>
+            </a:schemeClr>
+          </a:lnRef>
+          <a:fillRef idx="1">
+            <a:schemeClr val="accent1"/>
+          </a:fillRef>
+          <a:effectRef idx="0">
+            <a:schemeClr val="accent1"/>
+          </a:effectRef>
+          <a:fontRef idx="minor">
+            <a:schemeClr val="lt1"/>
+          </a:fontRef>
+        </p:style>
+        <p:txBody>
+          <a:bodyPr rtlCol="0" anchor="ctr"/>
+          <a:lstStyle/>
+          <a:p>
+            <a:pPr algn="ctr"/>
+            <a:r>
+              <a:rPr lang="ko-KR" altLang="en-US" dirty="0"/>
+              <a:t>타일 점수</a:t>
+            </a:r>
+          </a:p>
+        </p:txBody>
+      </p:sp>
+      <p:sp>
+        <p:nvSpPr>
+          <p:cNvPr id="28" name="사각형: 둥근 모서리 27">
+            <a:extLst>
+              <a:ext uri="{FF2B5EF4-FFF2-40B4-BE49-F238E27FC236}">
+                <a16:creationId xmlns:a16="http://schemas.microsoft.com/office/drawing/2014/main" id="{5E7561C9-8D9A-D738-84D2-E63C8F587207}"/>
+              </a:ext>
+            </a:extLst>
+          </p:cNvPr>
+          <p:cNvSpPr/>
+          <p:nvPr/>
+        </p:nvSpPr>
+        <p:spPr>
+          <a:xfrm>
+            <a:off x="8721787" y="1417938"/>
+            <a:ext cx="4488873" cy="304800"/>
+          </a:xfrm>
+          <a:prstGeom prst="roundRect">
+            <a:avLst/>
+          </a:prstGeom>
+        </p:spPr>
+        <p:style>
+          <a:lnRef idx="2">
+            <a:schemeClr val="accent1">
+              <a:shade val="15000"/>
+            </a:schemeClr>
+          </a:lnRef>
+          <a:fillRef idx="1">
+            <a:schemeClr val="accent1"/>
+          </a:fillRef>
+          <a:effectRef idx="0">
+            <a:schemeClr val="accent1"/>
+          </a:effectRef>
+          <a:fontRef idx="minor">
+            <a:schemeClr val="lt1"/>
+          </a:fontRef>
+        </p:style>
+        <p:txBody>
+          <a:bodyPr rtlCol="0" anchor="ctr"/>
+          <a:lstStyle/>
+          <a:p>
+            <a:pPr algn="ctr"/>
+            <a:r>
+              <a:rPr lang="ko-KR" altLang="en-US" dirty="0"/>
+              <a:t>균열</a:t>
+            </a:r>
+            <a:r>
+              <a:rPr lang="en-US" altLang="ko-KR" dirty="0"/>
+              <a:t>		100 x 1</a:t>
+            </a:r>
+          </a:p>
+        </p:txBody>
+      </p:sp>
+      <p:sp>
+        <p:nvSpPr>
+          <p:cNvPr id="29" name="사각형: 둥근 모서리 28">
+            <a:extLst>
+              <a:ext uri="{FF2B5EF4-FFF2-40B4-BE49-F238E27FC236}">
+                <a16:creationId xmlns:a16="http://schemas.microsoft.com/office/drawing/2014/main" id="{30881CF7-54CC-4F20-8A33-CE4E26831DB5}"/>
+              </a:ext>
+            </a:extLst>
+          </p:cNvPr>
+          <p:cNvSpPr/>
+          <p:nvPr/>
+        </p:nvSpPr>
+        <p:spPr>
+          <a:xfrm>
+            <a:off x="8721786" y="1789103"/>
+            <a:ext cx="4488873" cy="304800"/>
+          </a:xfrm>
+          <a:prstGeom prst="roundRect">
+            <a:avLst/>
+          </a:prstGeom>
+        </p:spPr>
+        <p:style>
+          <a:lnRef idx="2">
+            <a:schemeClr val="accent1">
+              <a:shade val="15000"/>
+            </a:schemeClr>
+          </a:lnRef>
+          <a:fillRef idx="1">
+            <a:schemeClr val="accent1"/>
+          </a:fillRef>
+          <a:effectRef idx="0">
+            <a:schemeClr val="accent1"/>
+          </a:effectRef>
+          <a:fontRef idx="minor">
+            <a:schemeClr val="lt1"/>
+          </a:fontRef>
+        </p:style>
+        <p:txBody>
+          <a:bodyPr rtlCol="0" anchor="ctr"/>
+          <a:lstStyle/>
+          <a:p>
+            <a:pPr algn="ctr"/>
+            <a:r>
+              <a:rPr lang="ko-KR" altLang="en-US" dirty="0"/>
+              <a:t>잔상</a:t>
+            </a:r>
+            <a:r>
+              <a:rPr lang="en-US" altLang="ko-KR" dirty="0"/>
+              <a:t>		000 x 1</a:t>
+            </a:r>
+          </a:p>
+        </p:txBody>
+      </p:sp>
+      <p:sp>
+        <p:nvSpPr>
+          <p:cNvPr id="30" name="사각형: 둥근 모서리 29">
+            <a:extLst>
+              <a:ext uri="{FF2B5EF4-FFF2-40B4-BE49-F238E27FC236}">
+                <a16:creationId xmlns:a16="http://schemas.microsoft.com/office/drawing/2014/main" id="{0837C01D-1248-5C20-9DF9-3CD334B05528}"/>
+              </a:ext>
+            </a:extLst>
+          </p:cNvPr>
+          <p:cNvSpPr/>
+          <p:nvPr/>
+        </p:nvSpPr>
+        <p:spPr>
+          <a:xfrm>
+            <a:off x="8721785" y="2160268"/>
+            <a:ext cx="4488873" cy="304800"/>
+          </a:xfrm>
+          <a:prstGeom prst="roundRect">
+            <a:avLst/>
+          </a:prstGeom>
+        </p:spPr>
+        <p:style>
+          <a:lnRef idx="2">
+            <a:schemeClr val="accent1">
+              <a:shade val="15000"/>
+            </a:schemeClr>
+          </a:lnRef>
+          <a:fillRef idx="1">
+            <a:schemeClr val="accent1"/>
+          </a:fillRef>
+          <a:effectRef idx="0">
+            <a:schemeClr val="accent1"/>
+          </a:effectRef>
+          <a:fontRef idx="minor">
+            <a:schemeClr val="lt1"/>
+          </a:fontRef>
+        </p:style>
+        <p:txBody>
+          <a:bodyPr rtlCol="0" anchor="ctr"/>
+          <a:lstStyle/>
+          <a:p>
+            <a:pPr algn="ctr"/>
+            <a:r>
+              <a:rPr lang="ko-KR" altLang="en-US" dirty="0"/>
+              <a:t>연소</a:t>
+            </a:r>
+            <a:r>
+              <a:rPr lang="en-US" altLang="ko-KR" dirty="0"/>
+              <a:t>(</a:t>
+            </a:r>
+            <a:r>
+              <a:rPr lang="ko-KR" altLang="en-US" dirty="0"/>
+              <a:t>파괴</a:t>
+            </a:r>
+            <a:r>
+              <a:rPr lang="en-US" altLang="ko-KR" dirty="0"/>
+              <a:t>)	000 x 0</a:t>
+            </a:r>
+          </a:p>
+        </p:txBody>
+      </p:sp>
+      <p:sp>
+        <p:nvSpPr>
+          <p:cNvPr id="31" name="사각형: 둥근 모서리 30">
+            <a:extLst>
+              <a:ext uri="{FF2B5EF4-FFF2-40B4-BE49-F238E27FC236}">
+                <a16:creationId xmlns:a16="http://schemas.microsoft.com/office/drawing/2014/main" id="{2A4DC814-AAA0-C267-6E57-B6311CD94C9A}"/>
+              </a:ext>
+            </a:extLst>
+          </p:cNvPr>
+          <p:cNvSpPr/>
+          <p:nvPr/>
+        </p:nvSpPr>
+        <p:spPr>
+          <a:xfrm>
+            <a:off x="8721784" y="2527059"/>
+            <a:ext cx="4488873" cy="304800"/>
+          </a:xfrm>
+          <a:prstGeom prst="roundRect">
+            <a:avLst/>
+          </a:prstGeom>
+        </p:spPr>
+        <p:style>
+          <a:lnRef idx="2">
+            <a:schemeClr val="accent1">
+              <a:shade val="15000"/>
+            </a:schemeClr>
+          </a:lnRef>
+          <a:fillRef idx="1">
+            <a:schemeClr val="accent1"/>
+          </a:fillRef>
+          <a:effectRef idx="0">
+            <a:schemeClr val="accent1"/>
+          </a:effectRef>
+          <a:fontRef idx="minor">
+            <a:schemeClr val="lt1"/>
+          </a:fontRef>
+        </p:style>
+        <p:txBody>
+          <a:bodyPr rtlCol="0" anchor="ctr"/>
+          <a:lstStyle/>
+          <a:p>
+            <a:pPr algn="ctr"/>
+            <a:r>
+              <a:rPr lang="ko-KR" altLang="en-US" dirty="0"/>
+              <a:t>감전</a:t>
+            </a:r>
+            <a:r>
+              <a:rPr lang="en-US" altLang="ko-KR" dirty="0"/>
+              <a:t>(</a:t>
+            </a:r>
+            <a:r>
+              <a:rPr lang="ko-KR" altLang="en-US" dirty="0"/>
+              <a:t>효과</a:t>
+            </a:r>
+            <a:r>
+              <a:rPr lang="en-US" altLang="ko-KR" dirty="0"/>
+              <a:t>)	010 x 1</a:t>
+            </a:r>
+          </a:p>
+        </p:txBody>
+      </p:sp>
+      <p:sp>
+        <p:nvSpPr>
+          <p:cNvPr id="32" name="사각형: 둥근 모서리 31">
+            <a:extLst>
+              <a:ext uri="{FF2B5EF4-FFF2-40B4-BE49-F238E27FC236}">
+                <a16:creationId xmlns:a16="http://schemas.microsoft.com/office/drawing/2014/main" id="{7108285A-FFE6-DA88-98DC-7EE6300BA6EA}"/>
+              </a:ext>
+            </a:extLst>
+          </p:cNvPr>
+          <p:cNvSpPr/>
+          <p:nvPr/>
+        </p:nvSpPr>
+        <p:spPr>
+          <a:xfrm>
+            <a:off x="8721784" y="3229615"/>
+            <a:ext cx="4488873" cy="199385"/>
+          </a:xfrm>
+          <a:prstGeom prst="roundRect">
+            <a:avLst/>
+          </a:prstGeom>
+        </p:spPr>
+        <p:style>
+          <a:lnRef idx="2">
+            <a:schemeClr val="accent1">
+              <a:shade val="15000"/>
+            </a:schemeClr>
+          </a:lnRef>
+          <a:fillRef idx="1">
+            <a:schemeClr val="accent1"/>
+          </a:fillRef>
+          <a:effectRef idx="0">
+            <a:schemeClr val="accent1"/>
+          </a:effectRef>
+          <a:fontRef idx="minor">
+            <a:schemeClr val="lt1"/>
+          </a:fontRef>
+        </p:style>
+        <p:txBody>
+          <a:bodyPr rtlCol="0" anchor="ctr"/>
+          <a:lstStyle/>
+          <a:p>
+            <a:pPr algn="ctr"/>
+            <a:r>
+              <a:rPr lang="ko-KR" altLang="en-US" dirty="0"/>
+              <a:t>빙결</a:t>
+            </a:r>
+            <a:r>
+              <a:rPr lang="en-US" altLang="ko-KR" dirty="0"/>
+              <a:t>		000 x 1</a:t>
+            </a:r>
+          </a:p>
+        </p:txBody>
+      </p:sp>
+      <p:sp>
+        <p:nvSpPr>
+          <p:cNvPr id="17" name="사각형: 둥근 모서리 16">
+            <a:extLst>
+              <a:ext uri="{FF2B5EF4-FFF2-40B4-BE49-F238E27FC236}">
+                <a16:creationId xmlns:a16="http://schemas.microsoft.com/office/drawing/2014/main" id="{3C38FDDC-0002-2E25-A0DB-C2800A42AB7A}"/>
+              </a:ext>
+            </a:extLst>
+          </p:cNvPr>
+          <p:cNvSpPr/>
+          <p:nvPr/>
+        </p:nvSpPr>
+        <p:spPr>
+          <a:xfrm>
+            <a:off x="8721783" y="1058358"/>
+            <a:ext cx="4488873" cy="304800"/>
+          </a:xfrm>
+          <a:prstGeom prst="roundRect">
+            <a:avLst/>
+          </a:prstGeom>
+        </p:spPr>
+        <p:style>
+          <a:lnRef idx="2">
+            <a:schemeClr val="accent1">
+              <a:shade val="15000"/>
+            </a:schemeClr>
+          </a:lnRef>
+          <a:fillRef idx="1">
+            <a:schemeClr val="accent1"/>
+          </a:fillRef>
+          <a:effectRef idx="0">
+            <a:schemeClr val="accent1"/>
+          </a:effectRef>
+          <a:fontRef idx="minor">
+            <a:schemeClr val="lt1"/>
+          </a:fontRef>
+        </p:style>
+        <p:txBody>
+          <a:bodyPr rtlCol="0" anchor="ctr"/>
+          <a:lstStyle/>
+          <a:p>
+            <a:pPr algn="ctr"/>
+            <a:r>
+              <a:rPr lang="ko-KR" altLang="en-US" dirty="0"/>
+              <a:t>파괴</a:t>
+            </a:r>
+            <a:r>
+              <a:rPr lang="en-US" altLang="ko-KR" dirty="0"/>
+              <a:t>(</a:t>
+            </a:r>
+            <a:r>
+              <a:rPr lang="ko-KR" altLang="en-US" dirty="0"/>
+              <a:t>기본</a:t>
+            </a:r>
+            <a:r>
+              <a:rPr lang="en-US" altLang="ko-KR" dirty="0"/>
+              <a:t>)	100 x 1</a:t>
+            </a:r>
+          </a:p>
+        </p:txBody>
+      </p:sp>
+      <p:sp>
+        <p:nvSpPr>
+          <p:cNvPr id="35" name="사각형: 둥근 모서리 34">
+            <a:extLst>
+              <a:ext uri="{FF2B5EF4-FFF2-40B4-BE49-F238E27FC236}">
+                <a16:creationId xmlns:a16="http://schemas.microsoft.com/office/drawing/2014/main" id="{A3E97136-FEC5-3D08-0EF2-59D9428E85BA}"/>
+              </a:ext>
+            </a:extLst>
+          </p:cNvPr>
+          <p:cNvSpPr/>
+          <p:nvPr/>
+        </p:nvSpPr>
+        <p:spPr>
+          <a:xfrm>
+            <a:off x="8721782" y="2870035"/>
+            <a:ext cx="4488873" cy="304800"/>
+          </a:xfrm>
+          <a:prstGeom prst="roundRect">
+            <a:avLst/>
+          </a:prstGeom>
+        </p:spPr>
+        <p:style>
+          <a:lnRef idx="2">
+            <a:schemeClr val="accent1">
+              <a:shade val="15000"/>
+            </a:schemeClr>
+          </a:lnRef>
+          <a:fillRef idx="1">
+            <a:schemeClr val="accent1"/>
+          </a:fillRef>
+          <a:effectRef idx="0">
+            <a:schemeClr val="accent1"/>
+          </a:effectRef>
+          <a:fontRef idx="minor">
+            <a:schemeClr val="lt1"/>
+          </a:fontRef>
+        </p:style>
+        <p:txBody>
+          <a:bodyPr rtlCol="0" anchor="ctr"/>
+          <a:lstStyle/>
+          <a:p>
+            <a:pPr algn="ctr"/>
+            <a:r>
+              <a:rPr lang="ko-KR" altLang="en-US" dirty="0"/>
+              <a:t>감전</a:t>
+            </a:r>
+            <a:r>
+              <a:rPr lang="en-US" altLang="ko-KR" dirty="0"/>
+              <a:t>(</a:t>
+            </a:r>
+            <a:r>
+              <a:rPr lang="ko-KR" altLang="en-US" dirty="0"/>
+              <a:t>파괴</a:t>
+            </a:r>
+            <a:r>
+              <a:rPr lang="en-US" altLang="ko-KR" dirty="0"/>
+              <a:t>)	100 x -1</a:t>
+            </a:r>
+          </a:p>
+        </p:txBody>
+      </p:sp>
+    </p:spTree>
+    <p:extLst>
+      <p:ext uri="{BB962C8B-B14F-4D97-AF65-F5344CB8AC3E}">
+        <p14:creationId xmlns:p14="http://schemas.microsoft.com/office/powerpoint/2010/main" val="1998517965"/>
+      </p:ext>
+    </p:extLst>
+  </p:cSld>
+  <p:clrMapOvr>
+    <a:masterClrMapping/>
+  </p:clrMapOvr>
+</p:sld>
+</file>
+
+<file path=ppt/slides/slide4.xml><?xml version="1.0" encoding="utf-8"?>
+<p:sld xmlns:a="http://schemas.openxmlformats.org/drawingml/2006/main" xmlns:r="http://schemas.openxmlformats.org/officeDocument/2006/relationships" xmlns:p="http://schemas.openxmlformats.org/presentationml/2006/main">
+  <p:cSld>
+    <p:spTree>
+      <p:nvGrpSpPr>
+        <p:cNvPr id="1" name="">
+          <a:extLst>
+            <a:ext uri="{FF2B5EF4-FFF2-40B4-BE49-F238E27FC236}">
+              <a16:creationId xmlns:a16="http://schemas.microsoft.com/office/drawing/2014/main" id="{D1C13129-29EB-C92D-5F42-91537BCE20A4}"/>
+            </a:ext>
+          </a:extLst>
+        </p:cNvPr>
+        <p:cNvGrpSpPr/>
+        <p:nvPr/>
+      </p:nvGrpSpPr>
+      <p:grpSpPr>
+        <a:xfrm>
+          <a:off x="0" y="0"/>
+          <a:ext cx="0" cy="0"/>
+          <a:chOff x="0" y="0"/>
+          <a:chExt cx="0" cy="0"/>
+        </a:xfrm>
+      </p:grpSpPr>
+      <p:sp>
+        <p:nvSpPr>
+          <p:cNvPr id="8" name="TextBox 7">
+            <a:extLst>
+              <a:ext uri="{FF2B5EF4-FFF2-40B4-BE49-F238E27FC236}">
+                <a16:creationId xmlns:a16="http://schemas.microsoft.com/office/drawing/2014/main" id="{05A04099-986D-C159-3F11-C013A961423D}"/>
+              </a:ext>
+            </a:extLst>
+          </p:cNvPr>
+          <p:cNvSpPr txBox="1"/>
+          <p:nvPr/>
+        </p:nvSpPr>
+        <p:spPr>
+          <a:xfrm>
+            <a:off x="463452" y="563419"/>
+            <a:ext cx="1420582" cy="369332"/>
+          </a:xfrm>
+          <a:prstGeom prst="rect">
+            <a:avLst/>
+          </a:prstGeom>
+          <a:noFill/>
+        </p:spPr>
+        <p:txBody>
+          <a:bodyPr wrap="none" rtlCol="0">
+            <a:spAutoFit/>
+          </a:bodyPr>
+          <a:lstStyle/>
+          <a:p>
+            <a:r>
+              <a:rPr lang="ko-KR" altLang="en-US" b="1" dirty="0"/>
+              <a:t>점수 </a:t>
+            </a:r>
+            <a:r>
+              <a:rPr lang="ko-KR" altLang="en-US" b="1" dirty="0" err="1"/>
+              <a:t>정보표</a:t>
+            </a:r>
+            <a:endParaRPr lang="ko-KR" altLang="en-US" b="1" dirty="0"/>
+          </a:p>
+        </p:txBody>
+      </p:sp>
+      <p:sp>
+        <p:nvSpPr>
+          <p:cNvPr id="2" name="AutoShape 2">
+            <a:extLst>
+              <a:ext uri="{FF2B5EF4-FFF2-40B4-BE49-F238E27FC236}">
+                <a16:creationId xmlns:a16="http://schemas.microsoft.com/office/drawing/2014/main" id="{89C689AD-5773-DE0C-0136-ABEE541E3EF8}"/>
+              </a:ext>
+            </a:extLst>
+          </p:cNvPr>
+          <p:cNvSpPr>
+            <a:spLocks noChangeAspect="1" noChangeArrowheads="1"/>
+          </p:cNvSpPr>
+          <p:nvPr/>
+        </p:nvSpPr>
+        <p:spPr bwMode="auto">
+          <a:xfrm>
+            <a:off x="5943600" y="3276600"/>
+            <a:ext cx="304800" cy="304800"/>
+          </a:xfrm>
+          <a:prstGeom prst="rect">
+            <a:avLst/>
+          </a:prstGeom>
+          <a:noFill/>
+          <a:extLst>
+            <a:ext uri="{909E8E84-426E-40DD-AFC4-6F175D3DCCD1}">
+              <a14:hiddenFill xmlns:a14="http://schemas.microsoft.com/office/drawing/2010/main">
+                <a:solidFill>
+                  <a:srgbClr val="FFFFFF"/>
+                </a:solidFill>
+              </a14:hiddenFill>
+            </a:ext>
+          </a:extLst>
+        </p:spPr>
+        <p:txBody>
+          <a:bodyPr vert="horz" wrap="square" lIns="91440" tIns="45720" rIns="91440" bIns="45720" numCol="1" anchor="t" anchorCtr="0" compatLnSpc="1">
+            <a:prstTxWarp prst="textNoShape">
+              <a:avLst/>
+            </a:prstTxWarp>
+          </a:bodyPr>
+          <a:lstStyle/>
+          <a:p>
+            <a:endParaRPr lang="ko-KR" altLang="en-US"/>
+          </a:p>
+        </p:txBody>
+      </p:sp>
+      <p:sp>
+        <p:nvSpPr>
+          <p:cNvPr id="24" name="TextBox 23">
+            <a:extLst>
+              <a:ext uri="{FF2B5EF4-FFF2-40B4-BE49-F238E27FC236}">
+                <a16:creationId xmlns:a16="http://schemas.microsoft.com/office/drawing/2014/main" id="{8248E95E-1DDE-B2AA-677E-4DBE2731CA03}"/>
+              </a:ext>
+            </a:extLst>
+          </p:cNvPr>
+          <p:cNvSpPr txBox="1"/>
+          <p:nvPr/>
+        </p:nvSpPr>
+        <p:spPr>
+          <a:xfrm>
+            <a:off x="5648037" y="563419"/>
+            <a:ext cx="6080511" cy="3693319"/>
+          </a:xfrm>
+          <a:prstGeom prst="rect">
+            <a:avLst/>
+          </a:prstGeom>
+          <a:noFill/>
+        </p:spPr>
+        <p:txBody>
+          <a:bodyPr wrap="square" rtlCol="0">
+            <a:spAutoFit/>
+          </a:bodyPr>
+          <a:lstStyle/>
+          <a:p>
+            <a:r>
+              <a:rPr lang="ko-KR" altLang="en-US" b="1" dirty="0"/>
+              <a:t>타일 점수</a:t>
+            </a:r>
+            <a:endParaRPr lang="en-US" altLang="ko-KR" b="1" dirty="0"/>
+          </a:p>
+          <a:p>
+            <a:endParaRPr lang="en-US" altLang="ko-KR" dirty="0"/>
+          </a:p>
+          <a:p>
+            <a:r>
+              <a:rPr lang="ko-KR" altLang="en-US" dirty="0"/>
+              <a:t>파괴 점수 </a:t>
+            </a:r>
+            <a:r>
+              <a:rPr lang="en-US" altLang="ko-KR" dirty="0"/>
+              <a:t>– </a:t>
+            </a:r>
+            <a:r>
+              <a:rPr lang="ko-KR" altLang="en-US" dirty="0"/>
+              <a:t>태그가 없으면 파괴</a:t>
+            </a:r>
+            <a:r>
+              <a:rPr lang="en-US" altLang="ko-KR" dirty="0"/>
+              <a:t>(</a:t>
+            </a:r>
+            <a:r>
+              <a:rPr lang="ko-KR" altLang="en-US" dirty="0"/>
+              <a:t>기본</a:t>
+            </a:r>
+            <a:r>
+              <a:rPr lang="en-US" altLang="ko-KR" dirty="0"/>
+              <a:t>) </a:t>
+            </a:r>
+            <a:r>
+              <a:rPr lang="ko-KR" altLang="en-US" dirty="0"/>
+              <a:t>점수를 계산</a:t>
+            </a:r>
+            <a:endParaRPr lang="en-US" altLang="ko-KR" dirty="0"/>
+          </a:p>
+          <a:p>
+            <a:r>
+              <a:rPr lang="ko-KR" altLang="en-US" dirty="0"/>
+              <a:t> 태그가 있으면 해당 태그 파괴 점수를 모두 별개로 이행</a:t>
+            </a:r>
+            <a:endParaRPr lang="en-US" altLang="ko-KR" dirty="0"/>
+          </a:p>
+          <a:p>
+            <a:endParaRPr lang="en-US" altLang="ko-KR" dirty="0"/>
+          </a:p>
+          <a:p>
+            <a:r>
+              <a:rPr lang="ko-KR" altLang="en-US" dirty="0"/>
+              <a:t>균열 </a:t>
+            </a:r>
+            <a:r>
+              <a:rPr lang="en-US" altLang="ko-KR" dirty="0"/>
+              <a:t>- </a:t>
+            </a:r>
+            <a:r>
+              <a:rPr lang="ko-KR" altLang="en-US" dirty="0"/>
+              <a:t>파괴</a:t>
+            </a:r>
+            <a:r>
+              <a:rPr lang="en-US" altLang="ko-KR" dirty="0"/>
+              <a:t>(</a:t>
+            </a:r>
+            <a:r>
+              <a:rPr lang="ko-KR" altLang="en-US" dirty="0"/>
+              <a:t>기본</a:t>
+            </a:r>
+            <a:r>
+              <a:rPr lang="en-US" altLang="ko-KR" dirty="0"/>
+              <a:t>)</a:t>
+            </a:r>
+            <a:r>
+              <a:rPr lang="ko-KR" altLang="en-US" dirty="0"/>
+              <a:t>의 점수와 연동</a:t>
+            </a:r>
+            <a:r>
+              <a:rPr lang="en-US" altLang="ko-KR" dirty="0"/>
+              <a:t>, </a:t>
+            </a:r>
+            <a:r>
+              <a:rPr lang="ko-KR" altLang="en-US" dirty="0"/>
+              <a:t>후 균열 전용 유물 적용</a:t>
+            </a:r>
+            <a:endParaRPr lang="en-US" altLang="ko-KR" dirty="0"/>
+          </a:p>
+          <a:p>
+            <a:r>
+              <a:rPr lang="ko-KR" altLang="en-US" dirty="0"/>
+              <a:t>잔상 </a:t>
+            </a:r>
+            <a:r>
+              <a:rPr lang="en-US" altLang="ko-KR" dirty="0"/>
+              <a:t>- </a:t>
+            </a:r>
+            <a:r>
+              <a:rPr lang="ko-KR" altLang="en-US" dirty="0"/>
+              <a:t>기본 </a:t>
+            </a:r>
+            <a:r>
+              <a:rPr lang="en-US" altLang="ko-KR" dirty="0"/>
+              <a:t>0x0</a:t>
+            </a:r>
+            <a:r>
+              <a:rPr lang="ko-KR" altLang="en-US" dirty="0"/>
+              <a:t>점</a:t>
+            </a:r>
+            <a:endParaRPr lang="en-US" altLang="ko-KR" dirty="0"/>
+          </a:p>
+          <a:p>
+            <a:r>
+              <a:rPr lang="ko-KR" altLang="en-US" dirty="0"/>
+              <a:t>연소 파괴 </a:t>
+            </a:r>
+            <a:r>
+              <a:rPr lang="en-US" altLang="ko-KR" dirty="0"/>
+              <a:t>- </a:t>
+            </a:r>
+            <a:r>
+              <a:rPr lang="ko-KR" altLang="en-US" dirty="0"/>
+              <a:t>기본 </a:t>
+            </a:r>
+            <a:r>
+              <a:rPr lang="en-US" altLang="ko-KR" dirty="0"/>
+              <a:t>0x1</a:t>
+            </a:r>
+            <a:r>
+              <a:rPr lang="ko-KR" altLang="en-US" dirty="0"/>
+              <a:t>점</a:t>
+            </a:r>
+            <a:endParaRPr lang="en-US" altLang="ko-KR" dirty="0"/>
+          </a:p>
+          <a:p>
+            <a:r>
+              <a:rPr lang="ko-KR" altLang="en-US" dirty="0"/>
+              <a:t>감전 효과 </a:t>
+            </a:r>
+            <a:r>
+              <a:rPr lang="en-US" altLang="ko-KR" dirty="0"/>
+              <a:t>- (</a:t>
+            </a:r>
+            <a:r>
+              <a:rPr lang="ko-KR" altLang="en-US" dirty="0"/>
+              <a:t>파괴 점수</a:t>
+            </a:r>
+            <a:r>
+              <a:rPr lang="en-US" altLang="ko-KR" dirty="0"/>
+              <a:t>x</a:t>
+            </a:r>
+            <a:r>
+              <a:rPr lang="ko-KR" altLang="en-US" dirty="0"/>
+              <a:t>파괴 배율</a:t>
+            </a:r>
+            <a:r>
+              <a:rPr lang="en-US" altLang="ko-KR" dirty="0"/>
+              <a:t>x0.1)</a:t>
+            </a:r>
+            <a:r>
+              <a:rPr lang="ko-KR" altLang="en-US" dirty="0"/>
+              <a:t>과 연동</a:t>
+            </a:r>
+            <a:r>
+              <a:rPr lang="en-US" altLang="ko-KR" dirty="0"/>
+              <a:t>, </a:t>
+            </a:r>
+            <a:r>
+              <a:rPr lang="ko-KR" altLang="en-US" dirty="0"/>
+              <a:t>후 감전 유물 적용</a:t>
+            </a:r>
+            <a:endParaRPr lang="en-US" altLang="ko-KR" dirty="0"/>
+          </a:p>
+          <a:p>
+            <a:r>
+              <a:rPr lang="ko-KR" altLang="en-US" dirty="0"/>
+              <a:t>감전 파괴 </a:t>
+            </a:r>
+            <a:r>
+              <a:rPr lang="en-US" altLang="ko-KR" dirty="0"/>
+              <a:t>- (</a:t>
+            </a:r>
+            <a:r>
+              <a:rPr lang="ko-KR" altLang="en-US" dirty="0"/>
+              <a:t>파괴 점수</a:t>
+            </a:r>
+            <a:r>
+              <a:rPr lang="en-US" altLang="ko-KR" dirty="0"/>
+              <a:t>x</a:t>
+            </a:r>
+            <a:r>
+              <a:rPr lang="ko-KR" altLang="en-US" dirty="0"/>
+              <a:t>파괴배율</a:t>
+            </a:r>
+            <a:r>
+              <a:rPr lang="en-US" altLang="ko-KR" dirty="0"/>
+              <a:t>)</a:t>
+            </a:r>
+            <a:r>
+              <a:rPr lang="ko-KR" altLang="en-US" dirty="0"/>
+              <a:t>과 연동 </a:t>
+            </a:r>
+            <a:r>
+              <a:rPr lang="en-US" altLang="ko-KR" dirty="0"/>
+              <a:t>x -1</a:t>
+            </a:r>
+            <a:br>
+              <a:rPr lang="en-US" altLang="ko-KR" dirty="0"/>
+            </a:br>
+            <a:r>
+              <a:rPr lang="ko-KR" altLang="en-US" dirty="0"/>
+              <a:t>빙결 파괴 </a:t>
+            </a:r>
+            <a:r>
+              <a:rPr lang="en-US" altLang="ko-KR" dirty="0"/>
+              <a:t>- </a:t>
+            </a:r>
+            <a:r>
+              <a:rPr lang="ko-KR" altLang="en-US" dirty="0"/>
+              <a:t>파괴</a:t>
+            </a:r>
+            <a:r>
+              <a:rPr lang="en-US" altLang="ko-KR" dirty="0"/>
+              <a:t>(</a:t>
+            </a:r>
+            <a:r>
+              <a:rPr lang="ko-KR" altLang="en-US" dirty="0"/>
+              <a:t>기본</a:t>
+            </a:r>
+            <a:r>
+              <a:rPr lang="en-US" altLang="ko-KR" dirty="0"/>
+              <a:t>)</a:t>
+            </a:r>
+            <a:r>
+              <a:rPr lang="ko-KR" altLang="en-US" dirty="0"/>
+              <a:t>의 점수와 연동</a:t>
+            </a:r>
+            <a:r>
+              <a:rPr lang="en-US" altLang="ko-KR" dirty="0"/>
+              <a:t>, </a:t>
+            </a:r>
+            <a:r>
+              <a:rPr lang="ko-KR" altLang="en-US" dirty="0"/>
+              <a:t>후 빙결 유물 적용</a:t>
+            </a:r>
+            <a:endParaRPr lang="en-US" altLang="ko-KR" dirty="0"/>
+          </a:p>
+          <a:p>
+            <a:r>
+              <a:rPr lang="en-US" altLang="ko-KR" dirty="0"/>
+              <a:t> </a:t>
+            </a:r>
+          </a:p>
+        </p:txBody>
+      </p:sp>
+      <p:sp>
+        <p:nvSpPr>
+          <p:cNvPr id="25" name="직사각형 24">
+            <a:extLst>
+              <a:ext uri="{FF2B5EF4-FFF2-40B4-BE49-F238E27FC236}">
+                <a16:creationId xmlns:a16="http://schemas.microsoft.com/office/drawing/2014/main" id="{595BE80B-19BE-F17A-02EF-ED8ECA6E90FA}"/>
+              </a:ext>
+            </a:extLst>
+          </p:cNvPr>
+          <p:cNvSpPr/>
+          <p:nvPr/>
+        </p:nvSpPr>
+        <p:spPr>
+          <a:xfrm>
+            <a:off x="463452" y="1025073"/>
+            <a:ext cx="4937522" cy="3017981"/>
+          </a:xfrm>
+          <a:prstGeom prst="rect">
+            <a:avLst/>
+          </a:prstGeom>
+          <a:solidFill>
+            <a:schemeClr val="tx2">
+              <a:lumMod val="10000"/>
+              <a:lumOff val="90000"/>
+            </a:schemeClr>
+          </a:solidFill>
+        </p:spPr>
+        <p:style>
+          <a:lnRef idx="2">
+            <a:schemeClr val="accent1">
+              <a:shade val="15000"/>
+            </a:schemeClr>
+          </a:lnRef>
+          <a:fillRef idx="1">
+            <a:schemeClr val="accent1"/>
+          </a:fillRef>
+          <a:effectRef idx="0">
+            <a:schemeClr val="accent1"/>
+          </a:effectRef>
+          <a:fontRef idx="minor">
+            <a:schemeClr val="lt1"/>
+          </a:fontRef>
+        </p:style>
+        <p:txBody>
+          <a:bodyPr rtlCol="0" anchor="ctr"/>
+          <a:lstStyle/>
+          <a:p>
+            <a:pPr algn="ctr"/>
+            <a:endParaRPr lang="ko-KR" altLang="en-US"/>
+          </a:p>
+        </p:txBody>
+      </p:sp>
+      <p:sp>
+        <p:nvSpPr>
+          <p:cNvPr id="26" name="사각형: 둥근 모서리 25">
+            <a:extLst>
+              <a:ext uri="{FF2B5EF4-FFF2-40B4-BE49-F238E27FC236}">
+                <a16:creationId xmlns:a16="http://schemas.microsoft.com/office/drawing/2014/main" id="{75DC52B5-23CE-C24B-0AF0-29AA68948D18}"/>
+              </a:ext>
+            </a:extLst>
+          </p:cNvPr>
+          <p:cNvSpPr/>
+          <p:nvPr/>
+        </p:nvSpPr>
+        <p:spPr>
+          <a:xfrm>
+            <a:off x="687780" y="1126838"/>
+            <a:ext cx="1773382" cy="369332"/>
+          </a:xfrm>
+          <a:prstGeom prst="roundRect">
+            <a:avLst/>
+          </a:prstGeom>
+        </p:spPr>
+        <p:style>
+          <a:lnRef idx="2">
+            <a:schemeClr val="accent1">
+              <a:shade val="15000"/>
+            </a:schemeClr>
+          </a:lnRef>
+          <a:fillRef idx="1">
+            <a:schemeClr val="accent1"/>
+          </a:fillRef>
+          <a:effectRef idx="0">
+            <a:schemeClr val="accent1"/>
+          </a:effectRef>
+          <a:fontRef idx="minor">
+            <a:schemeClr val="lt1"/>
+          </a:fontRef>
+        </p:style>
+        <p:txBody>
+          <a:bodyPr rtlCol="0" anchor="ctr"/>
+          <a:lstStyle/>
+          <a:p>
+            <a:pPr algn="ctr"/>
+            <a:r>
+              <a:rPr lang="ko-KR" altLang="en-US" dirty="0">
+                <a:solidFill>
+                  <a:schemeClr val="accent1">
+                    <a:lumMod val="50000"/>
+                  </a:schemeClr>
+                </a:solidFill>
+              </a:rPr>
+              <a:t>태그 점수</a:t>
+            </a:r>
+          </a:p>
+        </p:txBody>
+      </p:sp>
+      <p:sp>
+        <p:nvSpPr>
+          <p:cNvPr id="27" name="사각형: 둥근 모서리 26">
+            <a:extLst>
+              <a:ext uri="{FF2B5EF4-FFF2-40B4-BE49-F238E27FC236}">
+                <a16:creationId xmlns:a16="http://schemas.microsoft.com/office/drawing/2014/main" id="{5935C789-2BCB-B699-DCAA-91FC6495F29E}"/>
+              </a:ext>
+            </a:extLst>
+          </p:cNvPr>
+          <p:cNvSpPr/>
+          <p:nvPr/>
+        </p:nvSpPr>
+        <p:spPr>
+          <a:xfrm>
+            <a:off x="3264726" y="1126838"/>
+            <a:ext cx="1773382" cy="369332"/>
+          </a:xfrm>
+          <a:prstGeom prst="roundRect">
+            <a:avLst/>
+          </a:prstGeom>
+        </p:spPr>
+        <p:style>
+          <a:lnRef idx="2">
+            <a:schemeClr val="accent1">
+              <a:shade val="15000"/>
+            </a:schemeClr>
+          </a:lnRef>
+          <a:fillRef idx="1">
+            <a:schemeClr val="accent1"/>
+          </a:fillRef>
+          <a:effectRef idx="0">
+            <a:schemeClr val="accent1"/>
+          </a:effectRef>
+          <a:fontRef idx="minor">
+            <a:schemeClr val="lt1"/>
+          </a:fontRef>
+        </p:style>
+        <p:txBody>
+          <a:bodyPr rtlCol="0" anchor="ctr"/>
+          <a:lstStyle/>
+          <a:p>
+            <a:pPr algn="ctr"/>
+            <a:r>
+              <a:rPr lang="ko-KR" altLang="en-US" dirty="0"/>
+              <a:t>타일 점수</a:t>
+            </a:r>
+          </a:p>
+        </p:txBody>
+      </p:sp>
+      <p:sp>
+        <p:nvSpPr>
+          <p:cNvPr id="28" name="사각형: 둥근 모서리 27">
+            <a:extLst>
+              <a:ext uri="{FF2B5EF4-FFF2-40B4-BE49-F238E27FC236}">
+                <a16:creationId xmlns:a16="http://schemas.microsoft.com/office/drawing/2014/main" id="{4A89CA78-581C-ECCA-5C6C-52FAFE9C9BDF}"/>
+              </a:ext>
+            </a:extLst>
+          </p:cNvPr>
+          <p:cNvSpPr/>
+          <p:nvPr/>
+        </p:nvSpPr>
+        <p:spPr>
+          <a:xfrm>
+            <a:off x="687780" y="1981357"/>
+            <a:ext cx="4488873" cy="304800"/>
+          </a:xfrm>
+          <a:prstGeom prst="roundRect">
+            <a:avLst/>
+          </a:prstGeom>
+        </p:spPr>
+        <p:style>
+          <a:lnRef idx="2">
+            <a:schemeClr val="accent1">
+              <a:shade val="15000"/>
+            </a:schemeClr>
+          </a:lnRef>
+          <a:fillRef idx="1">
+            <a:schemeClr val="accent1"/>
+          </a:fillRef>
+          <a:effectRef idx="0">
+            <a:schemeClr val="accent1"/>
+          </a:effectRef>
+          <a:fontRef idx="minor">
+            <a:schemeClr val="lt1"/>
+          </a:fontRef>
+        </p:style>
+        <p:txBody>
+          <a:bodyPr rtlCol="0" anchor="ctr"/>
+          <a:lstStyle/>
+          <a:p>
+            <a:pPr algn="ctr"/>
+            <a:r>
+              <a:rPr lang="ko-KR" altLang="en-US" dirty="0"/>
+              <a:t>균열</a:t>
+            </a:r>
+            <a:r>
+              <a:rPr lang="en-US" altLang="ko-KR" dirty="0"/>
+              <a:t>		100 x 1</a:t>
+            </a:r>
+          </a:p>
+        </p:txBody>
+      </p:sp>
+      <p:sp>
+        <p:nvSpPr>
+          <p:cNvPr id="29" name="사각형: 둥근 모서리 28">
+            <a:extLst>
+              <a:ext uri="{FF2B5EF4-FFF2-40B4-BE49-F238E27FC236}">
+                <a16:creationId xmlns:a16="http://schemas.microsoft.com/office/drawing/2014/main" id="{EF4EC40E-A148-3444-125B-0909CC6D6042}"/>
+              </a:ext>
+            </a:extLst>
+          </p:cNvPr>
+          <p:cNvSpPr/>
+          <p:nvPr/>
+        </p:nvSpPr>
+        <p:spPr>
+          <a:xfrm>
+            <a:off x="687779" y="2352522"/>
+            <a:ext cx="4488873" cy="304800"/>
+          </a:xfrm>
+          <a:prstGeom prst="roundRect">
+            <a:avLst/>
+          </a:prstGeom>
+        </p:spPr>
+        <p:style>
+          <a:lnRef idx="2">
+            <a:schemeClr val="accent1">
+              <a:shade val="15000"/>
+            </a:schemeClr>
+          </a:lnRef>
+          <a:fillRef idx="1">
+            <a:schemeClr val="accent1"/>
+          </a:fillRef>
+          <a:effectRef idx="0">
+            <a:schemeClr val="accent1"/>
+          </a:effectRef>
+          <a:fontRef idx="minor">
+            <a:schemeClr val="lt1"/>
+          </a:fontRef>
+        </p:style>
+        <p:txBody>
+          <a:bodyPr rtlCol="0" anchor="ctr"/>
+          <a:lstStyle/>
+          <a:p>
+            <a:pPr algn="ctr"/>
+            <a:r>
+              <a:rPr lang="ko-KR" altLang="en-US" dirty="0"/>
+              <a:t>잔상</a:t>
+            </a:r>
+            <a:r>
+              <a:rPr lang="en-US" altLang="ko-KR" dirty="0"/>
+              <a:t>		000 x 0</a:t>
+            </a:r>
+          </a:p>
+        </p:txBody>
+      </p:sp>
+      <p:sp>
+        <p:nvSpPr>
+          <p:cNvPr id="30" name="사각형: 둥근 모서리 29">
+            <a:extLst>
+              <a:ext uri="{FF2B5EF4-FFF2-40B4-BE49-F238E27FC236}">
+                <a16:creationId xmlns:a16="http://schemas.microsoft.com/office/drawing/2014/main" id="{E8E9FA44-34CF-A227-015A-7F9D69B06C31}"/>
+              </a:ext>
+            </a:extLst>
+          </p:cNvPr>
+          <p:cNvSpPr/>
+          <p:nvPr/>
+        </p:nvSpPr>
+        <p:spPr>
+          <a:xfrm>
+            <a:off x="687778" y="2723687"/>
+            <a:ext cx="4488873" cy="304800"/>
+          </a:xfrm>
+          <a:prstGeom prst="roundRect">
+            <a:avLst/>
+          </a:prstGeom>
+        </p:spPr>
+        <p:style>
+          <a:lnRef idx="2">
+            <a:schemeClr val="accent1">
+              <a:shade val="15000"/>
+            </a:schemeClr>
+          </a:lnRef>
+          <a:fillRef idx="1">
+            <a:schemeClr val="accent1"/>
+          </a:fillRef>
+          <a:effectRef idx="0">
+            <a:schemeClr val="accent1"/>
+          </a:effectRef>
+          <a:fontRef idx="minor">
+            <a:schemeClr val="lt1"/>
+          </a:fontRef>
+        </p:style>
+        <p:txBody>
+          <a:bodyPr rtlCol="0" anchor="ctr"/>
+          <a:lstStyle/>
+          <a:p>
+            <a:pPr algn="ctr"/>
+            <a:r>
+              <a:rPr lang="ko-KR" altLang="en-US" dirty="0"/>
+              <a:t>연소</a:t>
+            </a:r>
+            <a:r>
+              <a:rPr lang="en-US" altLang="ko-KR" dirty="0"/>
+              <a:t>(</a:t>
+            </a:r>
+            <a:r>
+              <a:rPr lang="ko-KR" altLang="en-US" dirty="0"/>
+              <a:t>파괴</a:t>
+            </a:r>
+            <a:r>
+              <a:rPr lang="en-US" altLang="ko-KR" dirty="0"/>
+              <a:t>)	000 x 0</a:t>
+            </a:r>
+          </a:p>
+        </p:txBody>
+      </p:sp>
+      <p:sp>
+        <p:nvSpPr>
+          <p:cNvPr id="31" name="사각형: 둥근 모서리 30">
+            <a:extLst>
+              <a:ext uri="{FF2B5EF4-FFF2-40B4-BE49-F238E27FC236}">
+                <a16:creationId xmlns:a16="http://schemas.microsoft.com/office/drawing/2014/main" id="{332C0ADD-97BD-4858-23BF-56FE94551538}"/>
+              </a:ext>
+            </a:extLst>
+          </p:cNvPr>
+          <p:cNvSpPr/>
+          <p:nvPr/>
+        </p:nvSpPr>
+        <p:spPr>
+          <a:xfrm>
+            <a:off x="687777" y="3090478"/>
+            <a:ext cx="4488873" cy="304800"/>
+          </a:xfrm>
+          <a:prstGeom prst="roundRect">
+            <a:avLst/>
+          </a:prstGeom>
+        </p:spPr>
+        <p:style>
+          <a:lnRef idx="2">
+            <a:schemeClr val="accent1">
+              <a:shade val="15000"/>
+            </a:schemeClr>
+          </a:lnRef>
+          <a:fillRef idx="1">
+            <a:schemeClr val="accent1"/>
+          </a:fillRef>
+          <a:effectRef idx="0">
+            <a:schemeClr val="accent1"/>
+          </a:effectRef>
+          <a:fontRef idx="minor">
+            <a:schemeClr val="lt1"/>
+          </a:fontRef>
+        </p:style>
+        <p:txBody>
+          <a:bodyPr rtlCol="0" anchor="ctr"/>
+          <a:lstStyle/>
+          <a:p>
+            <a:pPr algn="ctr"/>
+            <a:r>
+              <a:rPr lang="ko-KR" altLang="en-US" dirty="0"/>
+              <a:t>감전</a:t>
+            </a:r>
+            <a:r>
+              <a:rPr lang="en-US" altLang="ko-KR" dirty="0"/>
+              <a:t>(</a:t>
+            </a:r>
+            <a:r>
+              <a:rPr lang="ko-KR" altLang="en-US" dirty="0"/>
+              <a:t>효과</a:t>
+            </a:r>
+            <a:r>
+              <a:rPr lang="en-US" altLang="ko-KR" dirty="0"/>
+              <a:t>)	010 x 1</a:t>
+            </a:r>
+          </a:p>
+        </p:txBody>
+      </p:sp>
+      <p:sp>
+        <p:nvSpPr>
+          <p:cNvPr id="32" name="사각형: 둥근 모서리 31">
+            <a:extLst>
+              <a:ext uri="{FF2B5EF4-FFF2-40B4-BE49-F238E27FC236}">
+                <a16:creationId xmlns:a16="http://schemas.microsoft.com/office/drawing/2014/main" id="{EF2484DB-093E-0243-8B4C-9396B14EDF58}"/>
+              </a:ext>
+            </a:extLst>
+          </p:cNvPr>
+          <p:cNvSpPr/>
+          <p:nvPr/>
+        </p:nvSpPr>
+        <p:spPr>
+          <a:xfrm>
+            <a:off x="687777" y="3793034"/>
+            <a:ext cx="4488873" cy="199385"/>
+          </a:xfrm>
+          <a:prstGeom prst="roundRect">
+            <a:avLst/>
+          </a:prstGeom>
+        </p:spPr>
+        <p:style>
+          <a:lnRef idx="2">
+            <a:schemeClr val="accent1">
+              <a:shade val="15000"/>
+            </a:schemeClr>
+          </a:lnRef>
+          <a:fillRef idx="1">
+            <a:schemeClr val="accent1"/>
+          </a:fillRef>
+          <a:effectRef idx="0">
+            <a:schemeClr val="accent1"/>
+          </a:effectRef>
+          <a:fontRef idx="minor">
+            <a:schemeClr val="lt1"/>
+          </a:fontRef>
+        </p:style>
+        <p:txBody>
+          <a:bodyPr rtlCol="0" anchor="ctr"/>
+          <a:lstStyle/>
+          <a:p>
+            <a:pPr algn="ctr"/>
+            <a:r>
+              <a:rPr lang="ko-KR" altLang="en-US" dirty="0"/>
+              <a:t>빙결</a:t>
+            </a:r>
+            <a:r>
+              <a:rPr lang="en-US" altLang="ko-KR" dirty="0"/>
+              <a:t>		000 x 1</a:t>
+            </a:r>
+          </a:p>
+        </p:txBody>
+      </p:sp>
+      <p:sp>
+        <p:nvSpPr>
+          <p:cNvPr id="17" name="사각형: 둥근 모서리 16">
+            <a:extLst>
+              <a:ext uri="{FF2B5EF4-FFF2-40B4-BE49-F238E27FC236}">
+                <a16:creationId xmlns:a16="http://schemas.microsoft.com/office/drawing/2014/main" id="{67459556-AB1E-18C5-EA89-FB61D1FE14E0}"/>
+              </a:ext>
+            </a:extLst>
+          </p:cNvPr>
+          <p:cNvSpPr/>
+          <p:nvPr/>
+        </p:nvSpPr>
+        <p:spPr>
+          <a:xfrm>
+            <a:off x="687776" y="1621777"/>
+            <a:ext cx="4488873" cy="304800"/>
+          </a:xfrm>
+          <a:prstGeom prst="roundRect">
+            <a:avLst/>
+          </a:prstGeom>
+        </p:spPr>
+        <p:style>
+          <a:lnRef idx="2">
+            <a:schemeClr val="accent1">
+              <a:shade val="15000"/>
+            </a:schemeClr>
+          </a:lnRef>
+          <a:fillRef idx="1">
+            <a:schemeClr val="accent1"/>
+          </a:fillRef>
+          <a:effectRef idx="0">
+            <a:schemeClr val="accent1"/>
+          </a:effectRef>
+          <a:fontRef idx="minor">
+            <a:schemeClr val="lt1"/>
+          </a:fontRef>
+        </p:style>
+        <p:txBody>
+          <a:bodyPr rtlCol="0" anchor="ctr"/>
+          <a:lstStyle/>
+          <a:p>
+            <a:pPr algn="ctr"/>
+            <a:r>
+              <a:rPr lang="ko-KR" altLang="en-US" dirty="0"/>
+              <a:t>파괴</a:t>
+            </a:r>
+            <a:r>
+              <a:rPr lang="en-US" altLang="ko-KR" dirty="0"/>
+              <a:t>(</a:t>
+            </a:r>
+            <a:r>
+              <a:rPr lang="ko-KR" altLang="en-US" dirty="0"/>
+              <a:t>기본</a:t>
+            </a:r>
+            <a:r>
+              <a:rPr lang="en-US" altLang="ko-KR" dirty="0"/>
+              <a:t>)	100 x 1</a:t>
+            </a:r>
+          </a:p>
+        </p:txBody>
+      </p:sp>
+      <p:sp>
+        <p:nvSpPr>
+          <p:cNvPr id="35" name="사각형: 둥근 모서리 34">
+            <a:extLst>
+              <a:ext uri="{FF2B5EF4-FFF2-40B4-BE49-F238E27FC236}">
+                <a16:creationId xmlns:a16="http://schemas.microsoft.com/office/drawing/2014/main" id="{DA051EB2-2E81-8E2E-D6F9-659122089582}"/>
+              </a:ext>
+            </a:extLst>
+          </p:cNvPr>
+          <p:cNvSpPr/>
+          <p:nvPr/>
+        </p:nvSpPr>
+        <p:spPr>
+          <a:xfrm>
+            <a:off x="687775" y="3433454"/>
+            <a:ext cx="4488873" cy="304800"/>
+          </a:xfrm>
+          <a:prstGeom prst="roundRect">
+            <a:avLst/>
+          </a:prstGeom>
+        </p:spPr>
+        <p:style>
+          <a:lnRef idx="2">
+            <a:schemeClr val="accent1">
+              <a:shade val="15000"/>
+            </a:schemeClr>
+          </a:lnRef>
+          <a:fillRef idx="1">
+            <a:schemeClr val="accent1"/>
+          </a:fillRef>
+          <a:effectRef idx="0">
+            <a:schemeClr val="accent1"/>
+          </a:effectRef>
+          <a:fontRef idx="minor">
+            <a:schemeClr val="lt1"/>
+          </a:fontRef>
+        </p:style>
+        <p:txBody>
+          <a:bodyPr rtlCol="0" anchor="ctr"/>
+          <a:lstStyle/>
+          <a:p>
+            <a:pPr algn="ctr"/>
+            <a:r>
+              <a:rPr lang="ko-KR" altLang="en-US" dirty="0"/>
+              <a:t>감전</a:t>
+            </a:r>
+            <a:r>
+              <a:rPr lang="en-US" altLang="ko-KR" dirty="0"/>
+              <a:t>(</a:t>
+            </a:r>
+            <a:r>
+              <a:rPr lang="ko-KR" altLang="en-US" dirty="0"/>
+              <a:t>파괴</a:t>
+            </a:r>
+            <a:r>
+              <a:rPr lang="en-US" altLang="ko-KR" dirty="0"/>
+              <a:t>)	100 x -1</a:t>
+            </a:r>
+          </a:p>
+        </p:txBody>
+      </p:sp>
+    </p:spTree>
+    <p:extLst>
+      <p:ext uri="{BB962C8B-B14F-4D97-AF65-F5344CB8AC3E}">
+        <p14:creationId xmlns:p14="http://schemas.microsoft.com/office/powerpoint/2010/main" val="1839257290"/>
+      </p:ext>
+    </p:extLst>
+  </p:cSld>
+  <p:clrMapOvr>
+    <a:masterClrMapping/>
+  </p:clrMapOvr>
+</p:sld>
+</file>
+
+<file path=ppt/slides/slide5.xml><?xml version="1.0" encoding="utf-8"?>
+<p:sld xmlns:a="http://schemas.openxmlformats.org/drawingml/2006/main" xmlns:r="http://schemas.openxmlformats.org/officeDocument/2006/relationships" xmlns:p="http://schemas.openxmlformats.org/presentationml/2006/main">
+  <p:cSld>
+    <p:spTree>
+      <p:nvGrpSpPr>
+        <p:cNvPr id="1" name="">
+          <a:extLst>
+            <a:ext uri="{FF2B5EF4-FFF2-40B4-BE49-F238E27FC236}">
+              <a16:creationId xmlns:a16="http://schemas.microsoft.com/office/drawing/2014/main" id="{972CACE6-D6A6-4DC4-D160-15AB88D04B90}"/>
+            </a:ext>
+          </a:extLst>
+        </p:cNvPr>
+        <p:cNvGrpSpPr/>
+        <p:nvPr/>
+      </p:nvGrpSpPr>
+      <p:grpSpPr>
+        <a:xfrm>
+          <a:off x="0" y="0"/>
+          <a:ext cx="0" cy="0"/>
+          <a:chOff x="0" y="0"/>
+          <a:chExt cx="0" cy="0"/>
+        </a:xfrm>
+      </p:grpSpPr>
+      <p:sp>
+        <p:nvSpPr>
+          <p:cNvPr id="2" name="AutoShape 2">
+            <a:extLst>
+              <a:ext uri="{FF2B5EF4-FFF2-40B4-BE49-F238E27FC236}">
+                <a16:creationId xmlns:a16="http://schemas.microsoft.com/office/drawing/2014/main" id="{E4392E95-E307-6C5F-33B7-F735601F727C}"/>
+              </a:ext>
+            </a:extLst>
+          </p:cNvPr>
+          <p:cNvSpPr>
+            <a:spLocks noChangeAspect="1" noChangeArrowheads="1"/>
+          </p:cNvSpPr>
+          <p:nvPr/>
+        </p:nvSpPr>
+        <p:spPr bwMode="auto">
+          <a:xfrm>
+            <a:off x="5943600" y="3276600"/>
+            <a:ext cx="304800" cy="304800"/>
+          </a:xfrm>
+          <a:prstGeom prst="rect">
+            <a:avLst/>
+          </a:prstGeom>
+          <a:noFill/>
+          <a:extLst>
+            <a:ext uri="{909E8E84-426E-40DD-AFC4-6F175D3DCCD1}">
+              <a14:hiddenFill xmlns:a14="http://schemas.microsoft.com/office/drawing/2010/main">
+                <a:solidFill>
+                  <a:srgbClr val="FFFFFF"/>
+                </a:solidFill>
+              </a14:hiddenFill>
+            </a:ext>
+          </a:extLst>
+        </p:spPr>
+        <p:txBody>
+          <a:bodyPr vert="horz" wrap="square" lIns="91440" tIns="45720" rIns="91440" bIns="45720" numCol="1" anchor="t" anchorCtr="0" compatLnSpc="1">
+            <a:prstTxWarp prst="textNoShape">
+              <a:avLst/>
+            </a:prstTxWarp>
+          </a:bodyPr>
+          <a:lstStyle/>
+          <a:p>
+            <a:endParaRPr lang="ko-KR" altLang="en-US"/>
+          </a:p>
+        </p:txBody>
+      </p:sp>
+      <p:sp>
+        <p:nvSpPr>
+          <p:cNvPr id="24" name="TextBox 23">
+            <a:extLst>
+              <a:ext uri="{FF2B5EF4-FFF2-40B4-BE49-F238E27FC236}">
+                <a16:creationId xmlns:a16="http://schemas.microsoft.com/office/drawing/2014/main" id="{AE54957C-E100-CC9C-E286-8EEA26B7F850}"/>
+              </a:ext>
+            </a:extLst>
+          </p:cNvPr>
+          <p:cNvSpPr txBox="1"/>
+          <p:nvPr/>
+        </p:nvSpPr>
+        <p:spPr>
+          <a:xfrm>
+            <a:off x="669637" y="563419"/>
+            <a:ext cx="10617199" cy="5078313"/>
+          </a:xfrm>
+          <a:prstGeom prst="rect">
+            <a:avLst/>
+          </a:prstGeom>
+          <a:noFill/>
+        </p:spPr>
+        <p:txBody>
+          <a:bodyPr wrap="square" rtlCol="0">
+            <a:spAutoFit/>
+          </a:bodyPr>
+          <a:lstStyle/>
+          <a:p>
+            <a:r>
+              <a:rPr lang="ko-KR" altLang="en-US" b="1" dirty="0"/>
+              <a:t>방해 타일 타격 금지 유물</a:t>
+            </a:r>
+            <a:endParaRPr lang="en-US" altLang="ko-KR" b="1" dirty="0"/>
+          </a:p>
+          <a:p>
+            <a:endParaRPr lang="en-US" altLang="ko-KR" dirty="0"/>
+          </a:p>
+          <a:p>
+            <a:r>
+              <a:rPr lang="ko-KR" altLang="en-US" dirty="0"/>
+              <a:t>유물 </a:t>
+            </a:r>
+            <a:r>
+              <a:rPr lang="en-US" altLang="ko-KR" dirty="0"/>
+              <a:t>‘</a:t>
+            </a:r>
+            <a:r>
+              <a:rPr lang="ko-KR" altLang="en-US" dirty="0"/>
+              <a:t>흔들리는 발판</a:t>
+            </a:r>
+            <a:r>
+              <a:rPr lang="en-US" altLang="ko-KR" dirty="0"/>
+              <a:t>’(</a:t>
+            </a:r>
+            <a:r>
+              <a:rPr lang="ko-KR" altLang="en-US" dirty="0"/>
+              <a:t>예시</a:t>
+            </a:r>
+            <a:r>
+              <a:rPr lang="en-US" altLang="ko-KR" dirty="0"/>
+              <a:t>)</a:t>
+            </a:r>
+            <a:r>
+              <a:rPr lang="ko-KR" altLang="en-US" dirty="0"/>
+              <a:t> </a:t>
+            </a:r>
+            <a:r>
+              <a:rPr lang="en-US" altLang="ko-KR" dirty="0"/>
+              <a:t> - [</a:t>
+            </a:r>
+            <a:r>
+              <a:rPr lang="ko-KR" altLang="en-US" dirty="0"/>
+              <a:t>불안정</a:t>
+            </a:r>
+            <a:r>
+              <a:rPr lang="en-US" altLang="ko-KR" dirty="0"/>
+              <a:t>] </a:t>
+            </a:r>
+            <a:r>
+              <a:rPr lang="ko-KR" altLang="en-US" dirty="0"/>
+              <a:t>부여</a:t>
+            </a:r>
+            <a:r>
+              <a:rPr lang="en-US" altLang="ko-KR" dirty="0"/>
+              <a:t>, </a:t>
+            </a:r>
+            <a:r>
+              <a:rPr lang="ko-KR" altLang="en-US" dirty="0"/>
+              <a:t>불안정 태그 카드 등장 </a:t>
+            </a:r>
+            <a:r>
+              <a:rPr lang="en-US" altLang="ko-KR" dirty="0">
+                <a:solidFill>
+                  <a:srgbClr val="C00000"/>
+                </a:solidFill>
+              </a:rPr>
+              <a:t>&lt;&lt;</a:t>
+            </a:r>
+            <a:r>
+              <a:rPr lang="ko-KR" altLang="en-US" dirty="0">
+                <a:solidFill>
+                  <a:srgbClr val="C00000"/>
+                </a:solidFill>
+              </a:rPr>
+              <a:t>특정 층 반드시 등장</a:t>
+            </a:r>
+            <a:endParaRPr lang="en-US" altLang="ko-KR" dirty="0">
+              <a:solidFill>
+                <a:srgbClr val="C00000"/>
+              </a:solidFill>
+            </a:endParaRPr>
+          </a:p>
+          <a:p>
+            <a:endParaRPr lang="en-US" altLang="ko-KR" dirty="0"/>
+          </a:p>
+          <a:p>
+            <a:r>
+              <a:rPr lang="ko-KR" altLang="en-US" b="1" dirty="0"/>
+              <a:t>불안정 </a:t>
+            </a:r>
+            <a:r>
+              <a:rPr lang="en-US" altLang="ko-KR" b="1" dirty="0"/>
+              <a:t>UI </a:t>
+            </a:r>
+            <a:r>
+              <a:rPr lang="en-US" altLang="ko-KR" dirty="0"/>
+              <a:t>– </a:t>
+            </a:r>
+            <a:r>
+              <a:rPr lang="ko-KR" altLang="en-US" dirty="0"/>
+              <a:t>캐릭터 옆에 게이지 추가 </a:t>
+            </a:r>
+            <a:r>
+              <a:rPr lang="en-US" altLang="ko-KR" dirty="0"/>
+              <a:t>/ </a:t>
+            </a:r>
+            <a:r>
+              <a:rPr lang="ko-KR" altLang="en-US" dirty="0"/>
+              <a:t>마우스 </a:t>
+            </a:r>
+            <a:r>
+              <a:rPr lang="ko-KR" altLang="en-US" dirty="0" err="1"/>
+              <a:t>오버시</a:t>
+            </a:r>
+            <a:r>
+              <a:rPr lang="ko-KR" altLang="en-US" dirty="0"/>
+              <a:t> 설명 표기</a:t>
+            </a:r>
+            <a:endParaRPr lang="en-US" altLang="ko-KR" dirty="0"/>
+          </a:p>
+          <a:p>
+            <a:r>
+              <a:rPr lang="en-US" altLang="ko-KR" dirty="0"/>
+              <a:t> </a:t>
+            </a:r>
+            <a:r>
+              <a:rPr lang="ko-KR" altLang="en-US" dirty="0"/>
+              <a:t>최대 </a:t>
+            </a:r>
+            <a:r>
+              <a:rPr lang="en-US" altLang="ko-KR" dirty="0"/>
+              <a:t>10 / </a:t>
+            </a:r>
+            <a:r>
+              <a:rPr lang="ko-KR" altLang="en-US" dirty="0"/>
+              <a:t>방해 타일 </a:t>
+            </a:r>
+            <a:r>
+              <a:rPr lang="ko-KR" altLang="en-US" dirty="0" err="1"/>
+              <a:t>타격시</a:t>
+            </a:r>
+            <a:r>
+              <a:rPr lang="ko-KR" altLang="en-US" dirty="0"/>
+              <a:t> </a:t>
+            </a:r>
+            <a:r>
+              <a:rPr lang="en-US" altLang="ko-KR" dirty="0"/>
+              <a:t>+ 1 / 10 </a:t>
+            </a:r>
+            <a:r>
+              <a:rPr lang="ko-KR" altLang="en-US" dirty="0" err="1"/>
+              <a:t>달성시</a:t>
+            </a:r>
+            <a:r>
+              <a:rPr lang="ko-KR" altLang="en-US" dirty="0"/>
+              <a:t> 게임 오버</a:t>
+            </a:r>
+            <a:endParaRPr lang="en-US" altLang="ko-KR" dirty="0"/>
+          </a:p>
+          <a:p>
+            <a:endParaRPr lang="en-US" altLang="ko-KR" dirty="0"/>
+          </a:p>
+          <a:p>
+            <a:r>
+              <a:rPr lang="ko-KR" altLang="en-US" b="1" dirty="0"/>
+              <a:t>유물</a:t>
+            </a:r>
+            <a:endParaRPr lang="en-US" altLang="ko-KR" b="1" dirty="0"/>
+          </a:p>
+          <a:p>
+            <a:r>
+              <a:rPr lang="ko-KR" altLang="en-US" dirty="0"/>
+              <a:t>불안정</a:t>
+            </a:r>
+            <a:r>
+              <a:rPr lang="en-US" altLang="ko-KR" dirty="0"/>
+              <a:t> </a:t>
+            </a:r>
+            <a:r>
+              <a:rPr lang="ko-KR" altLang="en-US" dirty="0"/>
+              <a:t>룬 </a:t>
+            </a:r>
+            <a:r>
+              <a:rPr lang="en-US" altLang="ko-KR" dirty="0"/>
+              <a:t>– </a:t>
+            </a:r>
+            <a:r>
+              <a:rPr lang="ko-KR" altLang="en-US" dirty="0"/>
+              <a:t>불안정이 </a:t>
+            </a:r>
+            <a:r>
+              <a:rPr lang="en-US" altLang="ko-KR" dirty="0"/>
+              <a:t>1 </a:t>
+            </a:r>
+            <a:r>
+              <a:rPr lang="ko-KR" altLang="en-US" dirty="0"/>
+              <a:t>이하로 내려가지 않음</a:t>
+            </a:r>
+            <a:r>
+              <a:rPr lang="en-US" altLang="ko-KR" dirty="0"/>
+              <a:t>(</a:t>
+            </a:r>
+            <a:r>
+              <a:rPr lang="ko-KR" altLang="en-US" dirty="0"/>
+              <a:t>이미 불안정 룬을 가지고 있다면 다음 단계로 변경</a:t>
+            </a:r>
+            <a:r>
+              <a:rPr lang="en-US" altLang="ko-KR" dirty="0"/>
+              <a:t>)</a:t>
+            </a:r>
+          </a:p>
+          <a:p>
+            <a:r>
+              <a:rPr lang="ko-KR" altLang="en-US" dirty="0"/>
+              <a:t>불안정 룬</a:t>
+            </a:r>
+            <a:r>
+              <a:rPr lang="en-US" altLang="ko-KR" dirty="0"/>
+              <a:t>+ - </a:t>
+            </a:r>
+            <a:r>
+              <a:rPr lang="ko-KR" altLang="en-US" dirty="0"/>
+              <a:t>불안정이 </a:t>
+            </a:r>
+            <a:r>
+              <a:rPr lang="en-US" altLang="ko-KR" dirty="0"/>
+              <a:t>2 </a:t>
+            </a:r>
+            <a:r>
+              <a:rPr lang="ko-KR" altLang="en-US" dirty="0"/>
+              <a:t>이하로 내려가지 않음</a:t>
+            </a:r>
+            <a:endParaRPr lang="en-US" altLang="ko-KR" dirty="0"/>
+          </a:p>
+          <a:p>
+            <a:r>
+              <a:rPr lang="ko-KR" altLang="en-US" dirty="0"/>
+              <a:t>불안정 룬</a:t>
+            </a:r>
+            <a:r>
+              <a:rPr lang="en-US" altLang="ko-KR" dirty="0"/>
+              <a:t>++ - </a:t>
+            </a:r>
+            <a:r>
+              <a:rPr lang="ko-KR" altLang="en-US" dirty="0"/>
+              <a:t>불안정이 </a:t>
+            </a:r>
+            <a:r>
+              <a:rPr lang="en-US" altLang="ko-KR" dirty="0"/>
+              <a:t>3 </a:t>
+            </a:r>
+            <a:r>
+              <a:rPr lang="ko-KR" altLang="en-US" dirty="0"/>
+              <a:t>이하로 내려가지 않음</a:t>
+            </a:r>
+            <a:r>
+              <a:rPr lang="en-US" altLang="ko-KR" dirty="0"/>
+              <a:t>… </a:t>
+            </a:r>
+            <a:r>
+              <a:rPr lang="ko-KR" altLang="en-US" dirty="0"/>
+              <a:t>등으로 총 타격 횟수 낮춰 난이도 올리기</a:t>
+            </a:r>
+            <a:endParaRPr lang="en-US" altLang="ko-KR" dirty="0"/>
+          </a:p>
+          <a:p>
+            <a:r>
+              <a:rPr lang="en-US" altLang="ko-KR" dirty="0"/>
+              <a:t>‘</a:t>
+            </a:r>
+            <a:r>
+              <a:rPr lang="ko-KR" altLang="en-US" dirty="0"/>
+              <a:t>무너지는 발판</a:t>
+            </a:r>
+            <a:r>
+              <a:rPr lang="en-US" altLang="ko-KR" dirty="0"/>
+              <a:t>’ – [</a:t>
+            </a:r>
+            <a:r>
+              <a:rPr lang="ko-KR" altLang="en-US" dirty="0"/>
+              <a:t>불안정</a:t>
+            </a:r>
+            <a:r>
+              <a:rPr lang="en-US" altLang="ko-KR" dirty="0"/>
+              <a:t>]</a:t>
+            </a:r>
+            <a:r>
+              <a:rPr lang="ko-KR" altLang="en-US" dirty="0"/>
+              <a:t>이 초기화 되지 않음 </a:t>
+            </a:r>
+            <a:r>
+              <a:rPr lang="en-US" altLang="ko-KR" dirty="0">
+                <a:solidFill>
+                  <a:srgbClr val="C00000"/>
+                </a:solidFill>
+              </a:rPr>
+              <a:t>&lt;&lt;</a:t>
+            </a:r>
+            <a:r>
+              <a:rPr lang="ko-KR" altLang="en-US" dirty="0">
+                <a:solidFill>
+                  <a:srgbClr val="C00000"/>
+                </a:solidFill>
+              </a:rPr>
+              <a:t>특정 층 반드시 등장</a:t>
+            </a:r>
+            <a:endParaRPr lang="en-US" altLang="ko-KR" dirty="0">
+              <a:solidFill>
+                <a:srgbClr val="C00000"/>
+              </a:solidFill>
+            </a:endParaRPr>
+          </a:p>
+          <a:p>
+            <a:endParaRPr lang="en-US" altLang="ko-KR" dirty="0"/>
+          </a:p>
+          <a:p>
+            <a:r>
+              <a:rPr lang="ko-KR" altLang="en-US" b="1" dirty="0"/>
+              <a:t>카드</a:t>
+            </a:r>
+            <a:endParaRPr lang="en-US" altLang="ko-KR" b="1" dirty="0"/>
+          </a:p>
+          <a:p>
+            <a:r>
+              <a:rPr lang="en-US" altLang="ko-KR" dirty="0"/>
+              <a:t> </a:t>
+            </a:r>
+            <a:r>
+              <a:rPr lang="ko-KR" altLang="en-US" dirty="0"/>
+              <a:t>불안정 회복</a:t>
+            </a:r>
+            <a:r>
+              <a:rPr lang="en-US" altLang="ko-KR" dirty="0"/>
+              <a:t>, </a:t>
+            </a:r>
+            <a:r>
+              <a:rPr lang="ko-KR" altLang="en-US" dirty="0"/>
+              <a:t>불안정 방지 카드</a:t>
+            </a:r>
+            <a:r>
+              <a:rPr lang="en-US" altLang="ko-KR" dirty="0"/>
+              <a:t>, </a:t>
+            </a:r>
+            <a:r>
+              <a:rPr lang="ko-KR" altLang="en-US" dirty="0"/>
+              <a:t>불안정을 증가하고 보너스를 받는</a:t>
+            </a:r>
+            <a:endParaRPr lang="en-US" altLang="ko-KR" dirty="0"/>
+          </a:p>
+          <a:p>
+            <a:r>
+              <a:rPr lang="en-US" altLang="ko-KR" dirty="0"/>
+              <a:t> </a:t>
+            </a:r>
+            <a:r>
+              <a:rPr lang="ko-KR" altLang="en-US" dirty="0"/>
+              <a:t>등을 </a:t>
+            </a:r>
+            <a:r>
+              <a:rPr lang="en-US" altLang="ko-KR" dirty="0"/>
+              <a:t>[</a:t>
+            </a:r>
+            <a:r>
+              <a:rPr lang="ko-KR" altLang="en-US" dirty="0"/>
+              <a:t>불안정</a:t>
+            </a:r>
+            <a:r>
+              <a:rPr lang="en-US" altLang="ko-KR" dirty="0"/>
+              <a:t>]</a:t>
+            </a:r>
+            <a:r>
+              <a:rPr lang="ko-KR" altLang="en-US" dirty="0"/>
+              <a:t> 태그 달고 추가</a:t>
+            </a:r>
+            <a:endParaRPr lang="en-US" altLang="ko-KR" dirty="0"/>
+          </a:p>
+          <a:p>
+            <a:endParaRPr lang="en-US" altLang="ko-KR" dirty="0"/>
+          </a:p>
+          <a:p>
+            <a:endParaRPr lang="en-US" altLang="ko-KR" dirty="0"/>
+          </a:p>
+        </p:txBody>
+      </p:sp>
+    </p:spTree>
+    <p:extLst>
+      <p:ext uri="{BB962C8B-B14F-4D97-AF65-F5344CB8AC3E}">
+        <p14:creationId xmlns:p14="http://schemas.microsoft.com/office/powerpoint/2010/main" val="1179173822"/>
       </p:ext>
     </p:extLst>
   </p:cSld>

--- a/Plan/기획서/땅부수기2026 ch2.pptx
+++ b/Plan/기획서/땅부수기2026 ch2.pptx
@@ -9,7 +9,9 @@
     <p:sldId id="257" r:id="rId3"/>
     <p:sldId id="258" r:id="rId4"/>
     <p:sldId id="259" r:id="rId5"/>
-    <p:sldId id="260" r:id="rId6"/>
+    <p:sldId id="261" r:id="rId6"/>
+    <p:sldId id="262" r:id="rId7"/>
+    <p:sldId id="260" r:id="rId8"/>
   </p:sldIdLst>
   <p:sldSz cx="12192000" cy="6858000"/>
   <p:notesSz cx="6858000" cy="9144000"/>
@@ -263,7 +265,7 @@
           <a:p>
             <a:fld id="{C6FDF62A-CEF3-4A4B-9978-8C575DC3A030}" type="datetimeFigureOut">
               <a:rPr lang="ko-KR" altLang="en-US" smtClean="0"/>
-              <a:t>2026-03-05</a:t>
+              <a:t>2026-04-15</a:t>
             </a:fld>
             <a:endParaRPr lang="ko-KR" altLang="en-US"/>
           </a:p>
@@ -461,7 +463,7 @@
           <a:p>
             <a:fld id="{C6FDF62A-CEF3-4A4B-9978-8C575DC3A030}" type="datetimeFigureOut">
               <a:rPr lang="ko-KR" altLang="en-US" smtClean="0"/>
-              <a:t>2026-03-05</a:t>
+              <a:t>2026-04-15</a:t>
             </a:fld>
             <a:endParaRPr lang="ko-KR" altLang="en-US"/>
           </a:p>
@@ -669,7 +671,7 @@
           <a:p>
             <a:fld id="{C6FDF62A-CEF3-4A4B-9978-8C575DC3A030}" type="datetimeFigureOut">
               <a:rPr lang="ko-KR" altLang="en-US" smtClean="0"/>
-              <a:t>2026-03-05</a:t>
+              <a:t>2026-04-15</a:t>
             </a:fld>
             <a:endParaRPr lang="ko-KR" altLang="en-US"/>
           </a:p>
@@ -867,7 +869,7 @@
           <a:p>
             <a:fld id="{C6FDF62A-CEF3-4A4B-9978-8C575DC3A030}" type="datetimeFigureOut">
               <a:rPr lang="ko-KR" altLang="en-US" smtClean="0"/>
-              <a:t>2026-03-05</a:t>
+              <a:t>2026-04-15</a:t>
             </a:fld>
             <a:endParaRPr lang="ko-KR" altLang="en-US"/>
           </a:p>
@@ -1142,7 +1144,7 @@
           <a:p>
             <a:fld id="{C6FDF62A-CEF3-4A4B-9978-8C575DC3A030}" type="datetimeFigureOut">
               <a:rPr lang="ko-KR" altLang="en-US" smtClean="0"/>
-              <a:t>2026-03-05</a:t>
+              <a:t>2026-04-15</a:t>
             </a:fld>
             <a:endParaRPr lang="ko-KR" altLang="en-US"/>
           </a:p>
@@ -1407,7 +1409,7 @@
           <a:p>
             <a:fld id="{C6FDF62A-CEF3-4A4B-9978-8C575DC3A030}" type="datetimeFigureOut">
               <a:rPr lang="ko-KR" altLang="en-US" smtClean="0"/>
-              <a:t>2026-03-05</a:t>
+              <a:t>2026-04-15</a:t>
             </a:fld>
             <a:endParaRPr lang="ko-KR" altLang="en-US"/>
           </a:p>
@@ -1819,7 +1821,7 @@
           <a:p>
             <a:fld id="{C6FDF62A-CEF3-4A4B-9978-8C575DC3A030}" type="datetimeFigureOut">
               <a:rPr lang="ko-KR" altLang="en-US" smtClean="0"/>
-              <a:t>2026-03-05</a:t>
+              <a:t>2026-04-15</a:t>
             </a:fld>
             <a:endParaRPr lang="ko-KR" altLang="en-US"/>
           </a:p>
@@ -1960,7 +1962,7 @@
           <a:p>
             <a:fld id="{C6FDF62A-CEF3-4A4B-9978-8C575DC3A030}" type="datetimeFigureOut">
               <a:rPr lang="ko-KR" altLang="en-US" smtClean="0"/>
-              <a:t>2026-03-05</a:t>
+              <a:t>2026-04-15</a:t>
             </a:fld>
             <a:endParaRPr lang="ko-KR" altLang="en-US"/>
           </a:p>
@@ -2073,7 +2075,7 @@
           <a:p>
             <a:fld id="{C6FDF62A-CEF3-4A4B-9978-8C575DC3A030}" type="datetimeFigureOut">
               <a:rPr lang="ko-KR" altLang="en-US" smtClean="0"/>
-              <a:t>2026-03-05</a:t>
+              <a:t>2026-04-15</a:t>
             </a:fld>
             <a:endParaRPr lang="ko-KR" altLang="en-US"/>
           </a:p>
@@ -2384,7 +2386,7 @@
           <a:p>
             <a:fld id="{C6FDF62A-CEF3-4A4B-9978-8C575DC3A030}" type="datetimeFigureOut">
               <a:rPr lang="ko-KR" altLang="en-US" smtClean="0"/>
-              <a:t>2026-03-05</a:t>
+              <a:t>2026-04-15</a:t>
             </a:fld>
             <a:endParaRPr lang="ko-KR" altLang="en-US"/>
           </a:p>
@@ -2672,7 +2674,7 @@
           <a:p>
             <a:fld id="{C6FDF62A-CEF3-4A4B-9978-8C575DC3A030}" type="datetimeFigureOut">
               <a:rPr lang="ko-KR" altLang="en-US" smtClean="0"/>
-              <a:t>2026-03-05</a:t>
+              <a:t>2026-04-15</a:t>
             </a:fld>
             <a:endParaRPr lang="ko-KR" altLang="en-US"/>
           </a:p>
@@ -2913,7 +2915,7 @@
           <a:p>
             <a:fld id="{C6FDF62A-CEF3-4A4B-9978-8C575DC3A030}" type="datetimeFigureOut">
               <a:rPr lang="ko-KR" altLang="en-US" smtClean="0"/>
-              <a:t>2026-03-05</a:t>
+              <a:t>2026-04-15</a:t>
             </a:fld>
             <a:endParaRPr lang="ko-KR" altLang="en-US"/>
           </a:p>
@@ -3919,8 +3921,8 @@
         </p:nvSpPr>
         <p:spPr>
           <a:xfrm>
-            <a:off x="426507" y="3613727"/>
-            <a:ext cx="4666662" cy="1200329"/>
+            <a:off x="3182926" y="1512620"/>
+            <a:ext cx="2346283" cy="646331"/>
           </a:xfrm>
           <a:prstGeom prst="rect">
             <a:avLst/>
@@ -3943,8 +3945,10 @@
             </a:r>
             <a:r>
               <a:rPr lang="en-US" altLang="ko-KR" dirty="0"/>
-              <a:t>Target score </a:t>
-            </a:r>
+              <a:t>Target score</a:t>
+            </a:r>
+          </a:p>
+          <a:p>
             <a:r>
               <a:rPr lang="ko-KR" altLang="en-US" dirty="0"/>
               <a:t>하단</a:t>
@@ -3956,35 +3960,6 @@
             <a:r>
               <a:rPr lang="ko-KR" altLang="en-US" dirty="0"/>
               <a:t>버튼으로 표기</a:t>
-            </a:r>
-            <a:endParaRPr lang="en-US" altLang="ko-KR" dirty="0"/>
-          </a:p>
-          <a:p>
-            <a:endParaRPr lang="en-US" altLang="ko-KR" dirty="0"/>
-          </a:p>
-          <a:p>
-            <a:r>
-              <a:rPr lang="en-US" altLang="ko-KR" dirty="0"/>
-              <a:t>			   </a:t>
-            </a:r>
-            <a:r>
-              <a:rPr lang="ko-KR" altLang="en-US" dirty="0" err="1"/>
-              <a:t>발라트로의</a:t>
-            </a:r>
-            <a:endParaRPr lang="en-US" altLang="ko-KR" dirty="0"/>
-          </a:p>
-          <a:p>
-            <a:r>
-              <a:rPr lang="en-US" altLang="ko-KR" dirty="0"/>
-              <a:t>			   </a:t>
-            </a:r>
-            <a:r>
-              <a:rPr lang="ko-KR" altLang="en-US" dirty="0" err="1"/>
-              <a:t>족보같은</a:t>
-            </a:r>
-            <a:r>
-              <a:rPr lang="ko-KR" altLang="en-US" dirty="0"/>
-              <a:t> 기능</a:t>
             </a:r>
             <a:endParaRPr lang="en-US" altLang="ko-KR" dirty="0"/>
           </a:p>
@@ -4139,7 +4114,7 @@
         </p:blipFill>
         <p:spPr>
           <a:xfrm>
-            <a:off x="463452" y="4117151"/>
+            <a:off x="426507" y="3605242"/>
             <a:ext cx="2886478" cy="2333951"/>
           </a:xfrm>
           <a:prstGeom prst="rect">
@@ -4149,480 +4124,6 @@
       </p:pic>
       <p:sp>
         <p:nvSpPr>
-          <p:cNvPr id="13" name="직사각형 12">
-            <a:extLst>
-              <a:ext uri="{FF2B5EF4-FFF2-40B4-BE49-F238E27FC236}">
-                <a16:creationId xmlns:a16="http://schemas.microsoft.com/office/drawing/2014/main" id="{5D5414A8-2471-912F-5E23-684D2AB37C50}"/>
-              </a:ext>
-            </a:extLst>
-          </p:cNvPr>
-          <p:cNvSpPr/>
-          <p:nvPr/>
-        </p:nvSpPr>
-        <p:spPr>
-          <a:xfrm>
-            <a:off x="3470217" y="461654"/>
-            <a:ext cx="4937522" cy="3017981"/>
-          </a:xfrm>
-          <a:prstGeom prst="rect">
-            <a:avLst/>
-          </a:prstGeom>
-          <a:solidFill>
-            <a:schemeClr val="tx2">
-              <a:lumMod val="10000"/>
-              <a:lumOff val="90000"/>
-            </a:schemeClr>
-          </a:solidFill>
-        </p:spPr>
-        <p:style>
-          <a:lnRef idx="2">
-            <a:schemeClr val="accent1">
-              <a:shade val="15000"/>
-            </a:schemeClr>
-          </a:lnRef>
-          <a:fillRef idx="1">
-            <a:schemeClr val="accent1"/>
-          </a:fillRef>
-          <a:effectRef idx="0">
-            <a:schemeClr val="accent1"/>
-          </a:effectRef>
-          <a:fontRef idx="minor">
-            <a:schemeClr val="lt1"/>
-          </a:fontRef>
-        </p:style>
-        <p:txBody>
-          <a:bodyPr rtlCol="0" anchor="ctr"/>
-          <a:lstStyle/>
-          <a:p>
-            <a:pPr algn="ctr"/>
-            <a:endParaRPr lang="ko-KR" altLang="en-US"/>
-          </a:p>
-        </p:txBody>
-      </p:sp>
-      <p:sp>
-        <p:nvSpPr>
-          <p:cNvPr id="15" name="사각형: 둥근 모서리 14">
-            <a:extLst>
-              <a:ext uri="{FF2B5EF4-FFF2-40B4-BE49-F238E27FC236}">
-                <a16:creationId xmlns:a16="http://schemas.microsoft.com/office/drawing/2014/main" id="{CC9E2A3A-7E85-A64E-6F45-C2B637EB9C38}"/>
-              </a:ext>
-            </a:extLst>
-          </p:cNvPr>
-          <p:cNvSpPr/>
-          <p:nvPr/>
-        </p:nvSpPr>
-        <p:spPr>
-          <a:xfrm>
-            <a:off x="3694545" y="563419"/>
-            <a:ext cx="1773382" cy="369332"/>
-          </a:xfrm>
-          <a:prstGeom prst="roundRect">
-            <a:avLst/>
-          </a:prstGeom>
-        </p:spPr>
-        <p:style>
-          <a:lnRef idx="2">
-            <a:schemeClr val="accent1">
-              <a:shade val="15000"/>
-            </a:schemeClr>
-          </a:lnRef>
-          <a:fillRef idx="1">
-            <a:schemeClr val="accent1"/>
-          </a:fillRef>
-          <a:effectRef idx="0">
-            <a:schemeClr val="accent1"/>
-          </a:effectRef>
-          <a:fontRef idx="minor">
-            <a:schemeClr val="lt1"/>
-          </a:fontRef>
-        </p:style>
-        <p:txBody>
-          <a:bodyPr rtlCol="0" anchor="ctr"/>
-          <a:lstStyle/>
-          <a:p>
-            <a:pPr algn="ctr"/>
-            <a:r>
-              <a:rPr lang="ko-KR" altLang="en-US" dirty="0"/>
-              <a:t>태그 점수</a:t>
-            </a:r>
-          </a:p>
-        </p:txBody>
-      </p:sp>
-      <p:sp>
-        <p:nvSpPr>
-          <p:cNvPr id="16" name="사각형: 둥근 모서리 15">
-            <a:extLst>
-              <a:ext uri="{FF2B5EF4-FFF2-40B4-BE49-F238E27FC236}">
-                <a16:creationId xmlns:a16="http://schemas.microsoft.com/office/drawing/2014/main" id="{61B75A3A-5C66-E7C5-072D-E530689449A5}"/>
-              </a:ext>
-            </a:extLst>
-          </p:cNvPr>
-          <p:cNvSpPr/>
-          <p:nvPr/>
-        </p:nvSpPr>
-        <p:spPr>
-          <a:xfrm>
-            <a:off x="6271491" y="563419"/>
-            <a:ext cx="1773382" cy="369332"/>
-          </a:xfrm>
-          <a:prstGeom prst="roundRect">
-            <a:avLst/>
-          </a:prstGeom>
-        </p:spPr>
-        <p:style>
-          <a:lnRef idx="2">
-            <a:schemeClr val="accent1">
-              <a:shade val="15000"/>
-            </a:schemeClr>
-          </a:lnRef>
-          <a:fillRef idx="1">
-            <a:schemeClr val="accent1"/>
-          </a:fillRef>
-          <a:effectRef idx="0">
-            <a:schemeClr val="accent1"/>
-          </a:effectRef>
-          <a:fontRef idx="minor">
-            <a:schemeClr val="lt1"/>
-          </a:fontRef>
-        </p:style>
-        <p:txBody>
-          <a:bodyPr rtlCol="0" anchor="ctr"/>
-          <a:lstStyle/>
-          <a:p>
-            <a:pPr algn="ctr"/>
-            <a:r>
-              <a:rPr lang="ko-KR" altLang="en-US" dirty="0">
-                <a:solidFill>
-                  <a:schemeClr val="accent1">
-                    <a:lumMod val="50000"/>
-                  </a:schemeClr>
-                </a:solidFill>
-              </a:rPr>
-              <a:t>타일 점수</a:t>
-            </a:r>
-          </a:p>
-        </p:txBody>
-      </p:sp>
-      <p:sp>
-        <p:nvSpPr>
-          <p:cNvPr id="18" name="사각형: 둥근 모서리 17">
-            <a:extLst>
-              <a:ext uri="{FF2B5EF4-FFF2-40B4-BE49-F238E27FC236}">
-                <a16:creationId xmlns:a16="http://schemas.microsoft.com/office/drawing/2014/main" id="{4BB4A9AF-A8B6-B3E8-413F-68C4414A4F06}"/>
-              </a:ext>
-            </a:extLst>
-          </p:cNvPr>
-          <p:cNvSpPr/>
-          <p:nvPr/>
-        </p:nvSpPr>
-        <p:spPr>
-          <a:xfrm>
-            <a:off x="3694544" y="1054054"/>
-            <a:ext cx="4488873" cy="304800"/>
-          </a:xfrm>
-          <a:prstGeom prst="roundRect">
-            <a:avLst/>
-          </a:prstGeom>
-        </p:spPr>
-        <p:style>
-          <a:lnRef idx="2">
-            <a:schemeClr val="accent1">
-              <a:shade val="15000"/>
-            </a:schemeClr>
-          </a:lnRef>
-          <a:fillRef idx="1">
-            <a:schemeClr val="accent1"/>
-          </a:fillRef>
-          <a:effectRef idx="0">
-            <a:schemeClr val="accent1"/>
-          </a:effectRef>
-          <a:fontRef idx="minor">
-            <a:schemeClr val="lt1"/>
-          </a:fontRef>
-        </p:style>
-        <p:txBody>
-          <a:bodyPr rtlCol="0" anchor="ctr"/>
-          <a:lstStyle/>
-          <a:p>
-            <a:pPr algn="ctr"/>
-            <a:r>
-              <a:rPr lang="ko-KR" altLang="en-US" dirty="0"/>
-              <a:t>도구</a:t>
-            </a:r>
-            <a:r>
-              <a:rPr lang="en-US" altLang="ko-KR" dirty="0"/>
-              <a:t>		000 x 1</a:t>
-            </a:r>
-          </a:p>
-        </p:txBody>
-      </p:sp>
-      <p:sp>
-        <p:nvSpPr>
-          <p:cNvPr id="19" name="사각형: 둥근 모서리 18">
-            <a:extLst>
-              <a:ext uri="{FF2B5EF4-FFF2-40B4-BE49-F238E27FC236}">
-                <a16:creationId xmlns:a16="http://schemas.microsoft.com/office/drawing/2014/main" id="{F6A3597A-1962-3300-25BB-AAA29350E7F1}"/>
-              </a:ext>
-            </a:extLst>
-          </p:cNvPr>
-          <p:cNvSpPr/>
-          <p:nvPr/>
-        </p:nvSpPr>
-        <p:spPr>
-          <a:xfrm>
-            <a:off x="3694543" y="1425219"/>
-            <a:ext cx="4488873" cy="304800"/>
-          </a:xfrm>
-          <a:prstGeom prst="roundRect">
-            <a:avLst/>
-          </a:prstGeom>
-        </p:spPr>
-        <p:style>
-          <a:lnRef idx="2">
-            <a:schemeClr val="accent1">
-              <a:shade val="15000"/>
-            </a:schemeClr>
-          </a:lnRef>
-          <a:fillRef idx="1">
-            <a:schemeClr val="accent1"/>
-          </a:fillRef>
-          <a:effectRef idx="0">
-            <a:schemeClr val="accent1"/>
-          </a:effectRef>
-          <a:fontRef idx="minor">
-            <a:schemeClr val="lt1"/>
-          </a:fontRef>
-        </p:style>
-        <p:txBody>
-          <a:bodyPr rtlCol="0" anchor="ctr"/>
-          <a:lstStyle/>
-          <a:p>
-            <a:pPr algn="ctr"/>
-            <a:r>
-              <a:rPr lang="ko-KR" altLang="en-US" dirty="0"/>
-              <a:t>마나</a:t>
-            </a:r>
-            <a:r>
-              <a:rPr lang="en-US" altLang="ko-KR" dirty="0"/>
-              <a:t>		000 x 1</a:t>
-            </a:r>
-          </a:p>
-        </p:txBody>
-      </p:sp>
-      <p:sp>
-        <p:nvSpPr>
-          <p:cNvPr id="20" name="사각형: 둥근 모서리 19">
-            <a:extLst>
-              <a:ext uri="{FF2B5EF4-FFF2-40B4-BE49-F238E27FC236}">
-                <a16:creationId xmlns:a16="http://schemas.microsoft.com/office/drawing/2014/main" id="{E1304D82-6660-38B1-F759-2A6F612EFA82}"/>
-              </a:ext>
-            </a:extLst>
-          </p:cNvPr>
-          <p:cNvSpPr/>
-          <p:nvPr/>
-        </p:nvSpPr>
-        <p:spPr>
-          <a:xfrm>
-            <a:off x="3694542" y="1792010"/>
-            <a:ext cx="4488873" cy="304800"/>
-          </a:xfrm>
-          <a:prstGeom prst="roundRect">
-            <a:avLst/>
-          </a:prstGeom>
-        </p:spPr>
-        <p:style>
-          <a:lnRef idx="2">
-            <a:schemeClr val="accent1">
-              <a:shade val="15000"/>
-            </a:schemeClr>
-          </a:lnRef>
-          <a:fillRef idx="1">
-            <a:schemeClr val="accent1"/>
-          </a:fillRef>
-          <a:effectRef idx="0">
-            <a:schemeClr val="accent1"/>
-          </a:effectRef>
-          <a:fontRef idx="minor">
-            <a:schemeClr val="lt1"/>
-          </a:fontRef>
-        </p:style>
-        <p:txBody>
-          <a:bodyPr rtlCol="0" anchor="ctr"/>
-          <a:lstStyle/>
-          <a:p>
-            <a:pPr algn="ctr"/>
-            <a:r>
-              <a:rPr lang="ko-KR" altLang="en-US" dirty="0"/>
-              <a:t>마법</a:t>
-            </a:r>
-            <a:r>
-              <a:rPr lang="en-US" altLang="ko-KR" dirty="0"/>
-              <a:t>		000 x 1</a:t>
-            </a:r>
-          </a:p>
-        </p:txBody>
-      </p:sp>
-      <p:sp>
-        <p:nvSpPr>
-          <p:cNvPr id="21" name="사각형: 둥근 모서리 20">
-            <a:extLst>
-              <a:ext uri="{FF2B5EF4-FFF2-40B4-BE49-F238E27FC236}">
-                <a16:creationId xmlns:a16="http://schemas.microsoft.com/office/drawing/2014/main" id="{E9263239-F64B-637A-9EA0-862BF50314A6}"/>
-              </a:ext>
-            </a:extLst>
-          </p:cNvPr>
-          <p:cNvSpPr/>
-          <p:nvPr/>
-        </p:nvSpPr>
-        <p:spPr>
-          <a:xfrm>
-            <a:off x="3694542" y="2174323"/>
-            <a:ext cx="4488873" cy="304800"/>
-          </a:xfrm>
-          <a:prstGeom prst="roundRect">
-            <a:avLst/>
-          </a:prstGeom>
-        </p:spPr>
-        <p:style>
-          <a:lnRef idx="2">
-            <a:schemeClr val="accent1">
-              <a:shade val="15000"/>
-            </a:schemeClr>
-          </a:lnRef>
-          <a:fillRef idx="1">
-            <a:schemeClr val="accent1"/>
-          </a:fillRef>
-          <a:effectRef idx="0">
-            <a:schemeClr val="accent1"/>
-          </a:effectRef>
-          <a:fontRef idx="minor">
-            <a:schemeClr val="lt1"/>
-          </a:fontRef>
-        </p:style>
-        <p:txBody>
-          <a:bodyPr rtlCol="0" anchor="ctr"/>
-          <a:lstStyle/>
-          <a:p>
-            <a:pPr algn="ctr"/>
-            <a:r>
-              <a:rPr lang="ko-KR" altLang="en-US" dirty="0"/>
-              <a:t>황금</a:t>
-            </a:r>
-            <a:r>
-              <a:rPr lang="en-US" altLang="ko-KR" dirty="0"/>
-              <a:t>		000 x 1</a:t>
-            </a:r>
-          </a:p>
-        </p:txBody>
-      </p:sp>
-      <p:sp>
-        <p:nvSpPr>
-          <p:cNvPr id="22" name="사각형: 둥근 모서리 21">
-            <a:extLst>
-              <a:ext uri="{FF2B5EF4-FFF2-40B4-BE49-F238E27FC236}">
-                <a16:creationId xmlns:a16="http://schemas.microsoft.com/office/drawing/2014/main" id="{44AB851B-BCDD-9734-852F-65F29A165E21}"/>
-              </a:ext>
-            </a:extLst>
-          </p:cNvPr>
-          <p:cNvSpPr/>
-          <p:nvPr/>
-        </p:nvSpPr>
-        <p:spPr>
-          <a:xfrm>
-            <a:off x="3694542" y="2537727"/>
-            <a:ext cx="4488873" cy="304800"/>
-          </a:xfrm>
-          <a:prstGeom prst="roundRect">
-            <a:avLst/>
-          </a:prstGeom>
-        </p:spPr>
-        <p:style>
-          <a:lnRef idx="2">
-            <a:schemeClr val="accent1">
-              <a:shade val="15000"/>
-            </a:schemeClr>
-          </a:lnRef>
-          <a:fillRef idx="1">
-            <a:schemeClr val="accent1"/>
-          </a:fillRef>
-          <a:effectRef idx="0">
-            <a:schemeClr val="accent1"/>
-          </a:effectRef>
-          <a:fontRef idx="minor">
-            <a:schemeClr val="lt1"/>
-          </a:fontRef>
-        </p:style>
-        <p:txBody>
-          <a:bodyPr rtlCol="0" anchor="ctr"/>
-          <a:lstStyle/>
-          <a:p>
-            <a:pPr algn="ctr"/>
-            <a:r>
-              <a:rPr lang="ko-KR" altLang="en-US" dirty="0"/>
-              <a:t>화염</a:t>
-            </a:r>
-            <a:r>
-              <a:rPr lang="en-US" altLang="ko-KR" dirty="0"/>
-              <a:t>		000 x 1</a:t>
-            </a:r>
-          </a:p>
-        </p:txBody>
-      </p:sp>
-      <p:sp>
-        <p:nvSpPr>
-          <p:cNvPr id="23" name="사각형: 둥근 모서리 22">
-            <a:extLst>
-              <a:ext uri="{FF2B5EF4-FFF2-40B4-BE49-F238E27FC236}">
-                <a16:creationId xmlns:a16="http://schemas.microsoft.com/office/drawing/2014/main" id="{0E177221-3CF7-0F5B-29DF-7B17BE6B07D6}"/>
-              </a:ext>
-            </a:extLst>
-          </p:cNvPr>
-          <p:cNvSpPr/>
-          <p:nvPr/>
-        </p:nvSpPr>
-        <p:spPr>
-          <a:xfrm>
-            <a:off x="3694541" y="2912279"/>
-            <a:ext cx="4488873" cy="141252"/>
-          </a:xfrm>
-          <a:prstGeom prst="roundRect">
-            <a:avLst/>
-          </a:prstGeom>
-        </p:spPr>
-        <p:style>
-          <a:lnRef idx="2">
-            <a:schemeClr val="accent1">
-              <a:shade val="15000"/>
-            </a:schemeClr>
-          </a:lnRef>
-          <a:fillRef idx="1">
-            <a:schemeClr val="accent1"/>
-          </a:fillRef>
-          <a:effectRef idx="0">
-            <a:schemeClr val="accent1"/>
-          </a:effectRef>
-          <a:fontRef idx="minor">
-            <a:schemeClr val="lt1"/>
-          </a:fontRef>
-        </p:style>
-        <p:txBody>
-          <a:bodyPr rtlCol="0" anchor="ctr"/>
-          <a:lstStyle/>
-          <a:p>
-            <a:pPr algn="ctr"/>
-            <a:r>
-              <a:rPr lang="ko-KR" altLang="en-US" dirty="0"/>
-              <a:t>얼음</a:t>
-            </a:r>
-            <a:r>
-              <a:rPr lang="en-US" altLang="ko-KR" dirty="0"/>
-              <a:t>		000 x 1</a:t>
-            </a:r>
-          </a:p>
-        </p:txBody>
-      </p:sp>
-      <p:sp>
-        <p:nvSpPr>
           <p:cNvPr id="24" name="TextBox 23">
             <a:extLst>
               <a:ext uri="{FF2B5EF4-FFF2-40B4-BE49-F238E27FC236}">
@@ -4636,7 +4137,7 @@
         <p:spPr>
           <a:xfrm>
             <a:off x="5657418" y="3592548"/>
-            <a:ext cx="6080511" cy="3416320"/>
+            <a:ext cx="6375463" cy="3046988"/>
           </a:xfrm>
           <a:prstGeom prst="rect">
             <a:avLst/>
@@ -4650,11 +4151,27 @@
           <a:lstStyle/>
           <a:p>
             <a:r>
-              <a:rPr lang="ko-KR" altLang="en-US" dirty="0"/>
-              <a:t>태그 점수 </a:t>
-            </a:r>
-            <a:r>
-              <a:rPr lang="en-US" altLang="ko-KR" dirty="0"/>
+              <a:rPr lang="ko-KR" altLang="en-US" b="1" dirty="0"/>
+              <a:t>태그 점수</a:t>
+            </a:r>
+            <a:r>
+              <a:rPr lang="en-US" altLang="ko-KR" b="1" dirty="0"/>
+              <a:t>(</a:t>
+            </a:r>
+            <a:r>
+              <a:rPr lang="ko-KR" altLang="en-US" b="1" dirty="0"/>
+              <a:t>좌</a:t>
+            </a:r>
+            <a:r>
+              <a:rPr lang="en-US" altLang="ko-KR" b="1" dirty="0"/>
+              <a:t>)</a:t>
+            </a:r>
+            <a:r>
+              <a:rPr lang="ko-KR" altLang="en-US" b="1" dirty="0"/>
+              <a:t> </a:t>
+            </a:r>
+            <a:r>
+              <a:rPr lang="en-US" altLang="ko-KR" b="1" dirty="0"/>
               <a:t>- </a:t>
             </a:r>
             <a:r>
@@ -4679,744 +4196,361 @@
             <a:endParaRPr lang="en-US" altLang="ko-KR" dirty="0"/>
           </a:p>
           <a:p>
+            <a:endParaRPr lang="en-US" altLang="ko-KR" sz="1400" dirty="0"/>
+          </a:p>
+          <a:p>
+            <a:r>
+              <a:rPr lang="ko-KR" altLang="en-US" sz="1400" dirty="0"/>
+              <a:t>예시</a:t>
+            </a:r>
+            <a:r>
+              <a:rPr lang="en-US" altLang="ko-KR" sz="1400" dirty="0"/>
+              <a:t>) </a:t>
+            </a:r>
+            <a:r>
+              <a:rPr lang="ko-KR" altLang="en-US" sz="1400" dirty="0"/>
+              <a:t>도구</a:t>
+            </a:r>
+            <a:r>
+              <a:rPr lang="en-US" altLang="ko-KR" sz="1400" dirty="0"/>
+              <a:t>/</a:t>
+            </a:r>
+            <a:r>
+              <a:rPr lang="ko-KR" altLang="en-US" sz="1400" dirty="0"/>
+              <a:t>황금 태그 카드로 타일 </a:t>
+            </a:r>
+            <a:r>
+              <a:rPr lang="ko-KR" altLang="en-US" sz="1400" dirty="0" err="1"/>
+              <a:t>파괴시</a:t>
+            </a:r>
+            <a:r>
+              <a:rPr lang="ko-KR" altLang="en-US" sz="1400" dirty="0"/>
+              <a:t> →</a:t>
+            </a:r>
+            <a:br>
+              <a:rPr lang="en-US" altLang="ko-KR" sz="1400" dirty="0"/>
+            </a:br>
+            <a:r>
+              <a:rPr lang="en-US" altLang="ko-KR" sz="1400" dirty="0"/>
+              <a:t> (</a:t>
+            </a:r>
+            <a:r>
+              <a:rPr lang="ko-KR" altLang="en-US" sz="1400" dirty="0"/>
+              <a:t>파괴 점수</a:t>
+            </a:r>
+            <a:r>
+              <a:rPr lang="en-US" altLang="ko-KR" sz="1400" dirty="0"/>
+              <a:t>x</a:t>
+            </a:r>
+            <a:r>
+              <a:rPr lang="ko-KR" altLang="en-US" sz="1400" dirty="0"/>
+              <a:t>파괴 배율</a:t>
+            </a:r>
+            <a:r>
+              <a:rPr lang="en-US" altLang="ko-KR" sz="1400" dirty="0"/>
+              <a:t>) + (</a:t>
+            </a:r>
+            <a:r>
+              <a:rPr lang="ko-KR" altLang="en-US" sz="1400" dirty="0"/>
+              <a:t>도구 점수</a:t>
+            </a:r>
+            <a:r>
+              <a:rPr lang="en-US" altLang="ko-KR" sz="1400" dirty="0"/>
+              <a:t>x</a:t>
+            </a:r>
+            <a:r>
+              <a:rPr lang="ko-KR" altLang="en-US" sz="1400" dirty="0"/>
+              <a:t>도구 배율</a:t>
+            </a:r>
+            <a:r>
+              <a:rPr lang="en-US" altLang="ko-KR" sz="1400" dirty="0"/>
+              <a:t>) +</a:t>
+            </a:r>
+            <a:br>
+              <a:rPr lang="en-US" altLang="ko-KR" sz="1400" dirty="0"/>
+            </a:br>
+            <a:r>
+              <a:rPr lang="en-US" altLang="ko-KR" sz="1400" dirty="0"/>
+              <a:t> (</a:t>
+            </a:r>
+            <a:r>
+              <a:rPr lang="ko-KR" altLang="en-US" sz="1400" dirty="0"/>
+              <a:t>황금 점수</a:t>
+            </a:r>
+            <a:r>
+              <a:rPr lang="en-US" altLang="ko-KR" sz="1400" dirty="0"/>
+              <a:t>x</a:t>
+            </a:r>
+            <a:r>
+              <a:rPr lang="ko-KR" altLang="en-US" sz="1400" dirty="0"/>
+              <a:t>황금 배율</a:t>
+            </a:r>
+            <a:r>
+              <a:rPr lang="en-US" altLang="ko-KR" sz="1400" dirty="0"/>
+              <a:t>) </a:t>
+            </a:r>
+            <a:r>
+              <a:rPr lang="ko-KR" altLang="en-US" sz="1400" dirty="0"/>
+              <a:t>에 해당하는 점수 획득</a:t>
+            </a:r>
+            <a:endParaRPr lang="en-US" altLang="ko-KR" sz="1400" dirty="0"/>
+          </a:p>
+          <a:p>
+            <a:endParaRPr lang="en-US" altLang="ko-KR" b="1" dirty="0"/>
+          </a:p>
+          <a:p>
+            <a:r>
+              <a:rPr lang="ko-KR" altLang="en-US" b="1" dirty="0"/>
+              <a:t>타일 점수</a:t>
+            </a:r>
+            <a:r>
+              <a:rPr lang="en-US" altLang="ko-KR" b="1" dirty="0"/>
+              <a:t>(</a:t>
+            </a:r>
+            <a:r>
+              <a:rPr lang="ko-KR" altLang="en-US" b="1" dirty="0"/>
+              <a:t>우</a:t>
+            </a:r>
+            <a:r>
+              <a:rPr lang="en-US" altLang="ko-KR" b="1" dirty="0"/>
+              <a:t>)</a:t>
+            </a:r>
+            <a:r>
+              <a:rPr lang="ko-KR" altLang="en-US" b="1" dirty="0"/>
+              <a:t> </a:t>
+            </a:r>
+            <a:r>
+              <a:rPr lang="en-US" altLang="ko-KR" b="1" dirty="0"/>
+              <a:t>– </a:t>
+            </a:r>
+            <a:r>
+              <a:rPr lang="ko-KR" altLang="en-US" dirty="0"/>
+              <a:t>타일의 특수 효과</a:t>
+            </a:r>
+            <a:r>
+              <a:rPr lang="en-US" altLang="ko-KR" dirty="0"/>
+              <a:t>/</a:t>
+            </a:r>
+            <a:r>
+              <a:rPr lang="ko-KR" altLang="en-US" dirty="0"/>
+              <a:t>파괴로 받을 수 있는 점수</a:t>
+            </a:r>
             <a:endParaRPr lang="en-US" altLang="ko-KR" dirty="0"/>
           </a:p>
           <a:p>
             <a:r>
-              <a:rPr lang="ko-KR" altLang="en-US" dirty="0"/>
-              <a:t>도구</a:t>
-            </a:r>
-            <a:r>
-              <a:rPr lang="en-US" altLang="ko-KR" dirty="0"/>
-              <a:t>/</a:t>
-            </a:r>
-            <a:r>
-              <a:rPr lang="ko-KR" altLang="en-US" dirty="0"/>
-              <a:t>황금 태그 카드로 타일 </a:t>
-            </a:r>
-            <a:r>
-              <a:rPr lang="ko-KR" altLang="en-US" dirty="0" err="1"/>
-              <a:t>파괴시</a:t>
-            </a:r>
-            <a:r>
-              <a:rPr lang="ko-KR" altLang="en-US" dirty="0"/>
-              <a:t> →</a:t>
+              <a:rPr lang="en-US" altLang="ko-KR" dirty="0"/>
+              <a:t> (</a:t>
+            </a:r>
+            <a:r>
+              <a:rPr lang="ko-KR" altLang="en-US" dirty="0"/>
+              <a:t>감전은 효과 점수와 파괴 점수가 다를 수 있음</a:t>
+            </a:r>
+            <a:r>
+              <a:rPr lang="en-US" altLang="ko-KR" dirty="0"/>
+              <a:t>)</a:t>
+            </a:r>
+          </a:p>
+          <a:p>
+            <a:endParaRPr lang="en-US" altLang="ko-KR" dirty="0"/>
+          </a:p>
+          <a:p>
+            <a:r>
+              <a:rPr lang="en-US" altLang="ko-KR" sz="1400" dirty="0"/>
+              <a:t> </a:t>
+            </a:r>
+            <a:r>
+              <a:rPr lang="ko-KR" altLang="en-US" sz="1400" dirty="0"/>
+              <a:t>파괴 점수 </a:t>
+            </a:r>
+            <a:r>
+              <a:rPr lang="en-US" altLang="ko-KR" sz="1400" dirty="0"/>
+              <a:t>– </a:t>
+            </a:r>
+            <a:r>
+              <a:rPr lang="ko-KR" altLang="en-US" sz="1400" dirty="0"/>
+              <a:t>태그가 없으면 파괴</a:t>
+            </a:r>
+            <a:r>
+              <a:rPr lang="en-US" altLang="ko-KR" sz="1400" dirty="0"/>
+              <a:t>(</a:t>
+            </a:r>
+            <a:r>
+              <a:rPr lang="ko-KR" altLang="en-US" sz="1400" dirty="0"/>
+              <a:t>기본</a:t>
+            </a:r>
+            <a:r>
+              <a:rPr lang="en-US" altLang="ko-KR" sz="1400" dirty="0"/>
+              <a:t>) </a:t>
+            </a:r>
+            <a:r>
+              <a:rPr lang="ko-KR" altLang="en-US" sz="1400" dirty="0"/>
+              <a:t>점수</a:t>
             </a:r>
             <a:br>
-              <a:rPr lang="en-US" altLang="ko-KR" dirty="0"/>
+              <a:rPr lang="en-US" altLang="ko-KR" sz="1400" dirty="0"/>
             </a:br>
             <a:r>
-              <a:rPr lang="en-US" altLang="ko-KR" dirty="0"/>
-              <a:t> (</a:t>
-            </a:r>
-            <a:r>
-              <a:rPr lang="ko-KR" altLang="en-US" dirty="0"/>
-              <a:t>파괴 점수</a:t>
-            </a:r>
-            <a:r>
-              <a:rPr lang="en-US" altLang="ko-KR" dirty="0"/>
-              <a:t>x</a:t>
-            </a:r>
-            <a:r>
-              <a:rPr lang="ko-KR" altLang="en-US" dirty="0"/>
-              <a:t>파괴 배율</a:t>
-            </a:r>
-            <a:r>
-              <a:rPr lang="en-US" altLang="ko-KR" dirty="0"/>
-              <a:t>) + (</a:t>
-            </a:r>
-            <a:r>
-              <a:rPr lang="ko-KR" altLang="en-US" dirty="0"/>
-              <a:t>도구 점수</a:t>
-            </a:r>
-            <a:r>
-              <a:rPr lang="en-US" altLang="ko-KR" dirty="0"/>
-              <a:t>x</a:t>
-            </a:r>
-            <a:r>
-              <a:rPr lang="ko-KR" altLang="en-US" dirty="0"/>
-              <a:t>도구 배율</a:t>
-            </a:r>
-            <a:r>
-              <a:rPr lang="en-US" altLang="ko-KR" dirty="0"/>
-              <a:t>) +</a:t>
-            </a:r>
-            <a:br>
-              <a:rPr lang="en-US" altLang="ko-KR" dirty="0"/>
-            </a:br>
-            <a:r>
-              <a:rPr lang="en-US" altLang="ko-KR" dirty="0"/>
-              <a:t> (</a:t>
-            </a:r>
-            <a:r>
-              <a:rPr lang="ko-KR" altLang="en-US" dirty="0"/>
-              <a:t>황금 점수</a:t>
-            </a:r>
-            <a:r>
-              <a:rPr lang="en-US" altLang="ko-KR" dirty="0"/>
-              <a:t>x</a:t>
-            </a:r>
-            <a:r>
-              <a:rPr lang="ko-KR" altLang="en-US" dirty="0"/>
-              <a:t>황금 배율</a:t>
-            </a:r>
-            <a:r>
-              <a:rPr lang="en-US" altLang="ko-KR" dirty="0"/>
-              <a:t>) </a:t>
-            </a:r>
-            <a:r>
-              <a:rPr lang="ko-KR" altLang="en-US" dirty="0"/>
-              <a:t>에 해당하는 점수 획득</a:t>
-            </a:r>
-            <a:endParaRPr lang="en-US" altLang="ko-KR" dirty="0"/>
-          </a:p>
-          <a:p>
-            <a:endParaRPr lang="en-US" altLang="ko-KR" dirty="0"/>
-          </a:p>
-          <a:p>
-            <a:r>
-              <a:rPr lang="ko-KR" altLang="en-US" dirty="0"/>
-              <a:t>타일 점수 </a:t>
-            </a:r>
-            <a:r>
-              <a:rPr lang="en-US" altLang="ko-KR" dirty="0"/>
-              <a:t>– </a:t>
-            </a:r>
-            <a:r>
-              <a:rPr lang="ko-KR" altLang="en-US" dirty="0"/>
-              <a:t>타일의 특수 효과</a:t>
-            </a:r>
-            <a:r>
-              <a:rPr lang="en-US" altLang="ko-KR" dirty="0"/>
-              <a:t>/</a:t>
-            </a:r>
-            <a:r>
-              <a:rPr lang="ko-KR" altLang="en-US" dirty="0"/>
-              <a:t>파괴로 받을 수 있는 점수</a:t>
-            </a:r>
-            <a:endParaRPr lang="en-US" altLang="ko-KR" dirty="0"/>
-          </a:p>
-          <a:p>
-            <a:r>
-              <a:rPr lang="en-US" altLang="ko-KR" dirty="0"/>
-              <a:t> (</a:t>
-            </a:r>
-            <a:r>
-              <a:rPr lang="ko-KR" altLang="en-US" dirty="0"/>
-              <a:t>감전은 효과 점수와 파괴 점수가 다를 수 있음</a:t>
-            </a:r>
-            <a:r>
-              <a:rPr lang="en-US" altLang="ko-KR" dirty="0"/>
-              <a:t>)</a:t>
-            </a:r>
-          </a:p>
-          <a:p>
-            <a:endParaRPr lang="en-US" altLang="ko-KR" dirty="0"/>
-          </a:p>
-          <a:p>
-            <a:r>
-              <a:rPr lang="en-US" altLang="ko-KR" dirty="0"/>
+              <a:rPr lang="en-US" altLang="ko-KR" sz="1400" dirty="0"/>
               <a:t> </a:t>
             </a:r>
             <a:r>
-              <a:rPr lang="ko-KR" altLang="en-US" dirty="0"/>
-              <a:t>파괴 점수 </a:t>
-            </a:r>
-            <a:r>
-              <a:rPr lang="en-US" altLang="ko-KR" dirty="0"/>
-              <a:t>– </a:t>
-            </a:r>
-            <a:r>
-              <a:rPr lang="ko-KR" altLang="en-US" dirty="0"/>
-              <a:t>태그가 없으면 파괴</a:t>
-            </a:r>
-            <a:r>
-              <a:rPr lang="en-US" altLang="ko-KR" dirty="0"/>
-              <a:t>(</a:t>
-            </a:r>
-            <a:r>
-              <a:rPr lang="ko-KR" altLang="en-US" dirty="0"/>
-              <a:t>기본</a:t>
-            </a:r>
-            <a:r>
-              <a:rPr lang="en-US" altLang="ko-KR" dirty="0"/>
-              <a:t>) </a:t>
-            </a:r>
-            <a:r>
-              <a:rPr lang="ko-KR" altLang="en-US" dirty="0"/>
-              <a:t>점수</a:t>
-            </a:r>
-            <a:br>
-              <a:rPr lang="en-US" altLang="ko-KR" dirty="0"/>
-            </a:br>
-            <a:r>
-              <a:rPr lang="en-US" altLang="ko-KR" dirty="0"/>
-              <a:t> </a:t>
-            </a:r>
-            <a:r>
-              <a:rPr lang="ko-KR" altLang="en-US" dirty="0"/>
+              <a:rPr lang="ko-KR" altLang="en-US" sz="1400" dirty="0"/>
               <a:t>태그가 있으면 해당 태그 파괴 점수를 모두 별개로 이행</a:t>
             </a:r>
-            <a:endParaRPr lang="en-US" altLang="ko-KR" dirty="0"/>
-          </a:p>
-        </p:txBody>
-      </p:sp>
-      <p:sp>
-        <p:nvSpPr>
-          <p:cNvPr id="25" name="직사각형 24">
-            <a:extLst>
-              <a:ext uri="{FF2B5EF4-FFF2-40B4-BE49-F238E27FC236}">
-                <a16:creationId xmlns:a16="http://schemas.microsoft.com/office/drawing/2014/main" id="{4F344E99-0FFD-F26F-D9AE-2ACE06CA2D2B}"/>
-              </a:ext>
-            </a:extLst>
-          </p:cNvPr>
-          <p:cNvSpPr/>
+            <a:endParaRPr lang="en-US" altLang="ko-KR" sz="1400" dirty="0"/>
+          </a:p>
+        </p:txBody>
+      </p:sp>
+      <p:pic>
+        <p:nvPicPr>
+          <p:cNvPr id="7" name="그림 6">
+            <a:extLst>
+              <a:ext uri="{FF2B5EF4-FFF2-40B4-BE49-F238E27FC236}">
+                <a16:creationId xmlns:a16="http://schemas.microsoft.com/office/drawing/2014/main" id="{B3A9DCB5-5326-FDB7-5244-C99E8F9140E2}"/>
+              </a:ext>
+            </a:extLst>
+          </p:cNvPr>
+          <p:cNvPicPr>
+            <a:picLocks noChangeAspect="1"/>
+          </p:cNvPicPr>
           <p:nvPr/>
-        </p:nvSpPr>
+        </p:nvPicPr>
+        <p:blipFill>
+          <a:blip r:embed="rId4"/>
+          <a:stretch>
+            <a:fillRect/>
+          </a:stretch>
+        </p:blipFill>
         <p:spPr>
           <a:xfrm>
-            <a:off x="8497459" y="461654"/>
-            <a:ext cx="4937522" cy="3017981"/>
+            <a:off x="5529209" y="109181"/>
+            <a:ext cx="3073442" cy="3416321"/>
           </a:xfrm>
           <a:prstGeom prst="rect">
             <a:avLst/>
           </a:prstGeom>
-          <a:solidFill>
-            <a:schemeClr val="tx2">
-              <a:lumMod val="10000"/>
-              <a:lumOff val="90000"/>
-            </a:schemeClr>
-          </a:solidFill>
+        </p:spPr>
+      </p:pic>
+      <p:pic>
+        <p:nvPicPr>
+          <p:cNvPr id="14" name="그림 13">
+            <a:extLst>
+              <a:ext uri="{FF2B5EF4-FFF2-40B4-BE49-F238E27FC236}">
+                <a16:creationId xmlns:a16="http://schemas.microsoft.com/office/drawing/2014/main" id="{EC2F7C35-5C14-0EDC-CE50-AA667DBDC7BB}"/>
+              </a:ext>
+            </a:extLst>
+          </p:cNvPr>
+          <p:cNvPicPr>
+            <a:picLocks noChangeAspect="1"/>
+          </p:cNvPicPr>
+          <p:nvPr/>
+        </p:nvPicPr>
+        <p:blipFill>
+          <a:blip r:embed="rId5"/>
+          <a:stretch>
+            <a:fillRect/>
+          </a:stretch>
+        </p:blipFill>
+        <p:spPr>
+          <a:xfrm>
+            <a:off x="8738344" y="109181"/>
+            <a:ext cx="3294537" cy="3416320"/>
+          </a:xfrm>
+          <a:prstGeom prst="rect">
+            <a:avLst/>
+          </a:prstGeom>
+        </p:spPr>
+      </p:pic>
+      <p:cxnSp>
+        <p:nvCxnSpPr>
+          <p:cNvPr id="34" name="직선 화살표 연결선 33">
+            <a:extLst>
+              <a:ext uri="{FF2B5EF4-FFF2-40B4-BE49-F238E27FC236}">
+                <a16:creationId xmlns:a16="http://schemas.microsoft.com/office/drawing/2014/main" id="{B4AC5D4E-B62E-0DAB-A6A9-B560FDA55849}"/>
+              </a:ext>
+            </a:extLst>
+          </p:cNvPr>
+          <p:cNvCxnSpPr>
+            <a:stCxn id="10" idx="3"/>
+          </p:cNvCxnSpPr>
+          <p:nvPr/>
+        </p:nvCxnSpPr>
+        <p:spPr>
+          <a:xfrm flipV="1">
+            <a:off x="2900218" y="2096655"/>
+            <a:ext cx="2493818" cy="798945"/>
+          </a:xfrm>
+          <a:prstGeom prst="straightConnector1">
+            <a:avLst/>
+          </a:prstGeom>
+          <a:ln w="28575">
+            <a:solidFill>
+              <a:srgbClr val="FF0000"/>
+            </a:solidFill>
+            <a:tailEnd type="triangle"/>
+          </a:ln>
         </p:spPr>
         <p:style>
           <a:lnRef idx="2">
-            <a:schemeClr val="accent1">
-              <a:shade val="15000"/>
-            </a:schemeClr>
+            <a:schemeClr val="accent1"/>
           </a:lnRef>
-          <a:fillRef idx="1">
+          <a:fillRef idx="0">
             <a:schemeClr val="accent1"/>
           </a:fillRef>
-          <a:effectRef idx="0">
+          <a:effectRef idx="1">
             <a:schemeClr val="accent1"/>
           </a:effectRef>
           <a:fontRef idx="minor">
-            <a:schemeClr val="lt1"/>
+            <a:schemeClr val="tx1"/>
           </a:fontRef>
         </p:style>
-        <p:txBody>
-          <a:bodyPr rtlCol="0" anchor="ctr"/>
-          <a:lstStyle/>
-          <a:p>
-            <a:pPr algn="ctr"/>
-            <a:endParaRPr lang="ko-KR" altLang="en-US"/>
-          </a:p>
-        </p:txBody>
-      </p:sp>
-      <p:sp>
-        <p:nvSpPr>
-          <p:cNvPr id="26" name="사각형: 둥근 모서리 25">
-            <a:extLst>
-              <a:ext uri="{FF2B5EF4-FFF2-40B4-BE49-F238E27FC236}">
-                <a16:creationId xmlns:a16="http://schemas.microsoft.com/office/drawing/2014/main" id="{464D4321-80FC-67B8-DD68-E956A91C0BE9}"/>
-              </a:ext>
-            </a:extLst>
-          </p:cNvPr>
-          <p:cNvSpPr/>
+      </p:cxnSp>
+      <p:sp>
+        <p:nvSpPr>
+          <p:cNvPr id="36" name="TextBox 35">
+            <a:extLst>
+              <a:ext uri="{FF2B5EF4-FFF2-40B4-BE49-F238E27FC236}">
+                <a16:creationId xmlns:a16="http://schemas.microsoft.com/office/drawing/2014/main" id="{951361A5-4BFB-D96C-11B9-79D004590071}"/>
+              </a:ext>
+            </a:extLst>
+          </p:cNvPr>
+          <p:cNvSpPr txBox="1"/>
           <p:nvPr/>
         </p:nvSpPr>
         <p:spPr>
           <a:xfrm>
-            <a:off x="8721787" y="563419"/>
-            <a:ext cx="1773382" cy="369332"/>
+            <a:off x="426507" y="5962298"/>
+            <a:ext cx="2887329" cy="369332"/>
           </a:xfrm>
-          <a:prstGeom prst="roundRect">
+          <a:prstGeom prst="rect">
             <a:avLst/>
           </a:prstGeom>
+          <a:noFill/>
         </p:spPr>
-        <p:style>
-          <a:lnRef idx="2">
-            <a:schemeClr val="accent1">
-              <a:shade val="15000"/>
-            </a:schemeClr>
-          </a:lnRef>
-          <a:fillRef idx="1">
-            <a:schemeClr val="accent1"/>
-          </a:fillRef>
-          <a:effectRef idx="0">
-            <a:schemeClr val="accent1"/>
-          </a:effectRef>
-          <a:fontRef idx="minor">
-            <a:schemeClr val="lt1"/>
-          </a:fontRef>
-        </p:style>
-        <p:txBody>
-          <a:bodyPr rtlCol="0" anchor="ctr"/>
-          <a:lstStyle/>
-          <a:p>
-            <a:pPr algn="ctr"/>
-            <a:r>
-              <a:rPr lang="ko-KR" altLang="en-US" dirty="0">
-                <a:solidFill>
-                  <a:schemeClr val="accent1">
-                    <a:lumMod val="50000"/>
-                  </a:schemeClr>
-                </a:solidFill>
-              </a:rPr>
-              <a:t>태그 점수</a:t>
-            </a:r>
-          </a:p>
-        </p:txBody>
-      </p:sp>
-      <p:sp>
-        <p:nvSpPr>
-          <p:cNvPr id="27" name="사각형: 둥근 모서리 26">
-            <a:extLst>
-              <a:ext uri="{FF2B5EF4-FFF2-40B4-BE49-F238E27FC236}">
-                <a16:creationId xmlns:a16="http://schemas.microsoft.com/office/drawing/2014/main" id="{735BEDFD-4951-0138-D3CE-960843861992}"/>
-              </a:ext>
-            </a:extLst>
-          </p:cNvPr>
-          <p:cNvSpPr/>
-          <p:nvPr/>
-        </p:nvSpPr>
-        <p:spPr>
-          <a:xfrm>
-            <a:off x="11298733" y="563419"/>
-            <a:ext cx="1773382" cy="369332"/>
-          </a:xfrm>
-          <a:prstGeom prst="roundRect">
-            <a:avLst/>
-          </a:prstGeom>
-        </p:spPr>
-        <p:style>
-          <a:lnRef idx="2">
-            <a:schemeClr val="accent1">
-              <a:shade val="15000"/>
-            </a:schemeClr>
-          </a:lnRef>
-          <a:fillRef idx="1">
-            <a:schemeClr val="accent1"/>
-          </a:fillRef>
-          <a:effectRef idx="0">
-            <a:schemeClr val="accent1"/>
-          </a:effectRef>
-          <a:fontRef idx="minor">
-            <a:schemeClr val="lt1"/>
-          </a:fontRef>
-        </p:style>
-        <p:txBody>
-          <a:bodyPr rtlCol="0" anchor="ctr"/>
-          <a:lstStyle/>
-          <a:p>
-            <a:pPr algn="ctr"/>
-            <a:r>
-              <a:rPr lang="ko-KR" altLang="en-US" dirty="0"/>
-              <a:t>타일 점수</a:t>
-            </a:r>
-          </a:p>
-        </p:txBody>
-      </p:sp>
-      <p:sp>
-        <p:nvSpPr>
-          <p:cNvPr id="28" name="사각형: 둥근 모서리 27">
-            <a:extLst>
-              <a:ext uri="{FF2B5EF4-FFF2-40B4-BE49-F238E27FC236}">
-                <a16:creationId xmlns:a16="http://schemas.microsoft.com/office/drawing/2014/main" id="{5E7561C9-8D9A-D738-84D2-E63C8F587207}"/>
-              </a:ext>
-            </a:extLst>
-          </p:cNvPr>
-          <p:cNvSpPr/>
-          <p:nvPr/>
-        </p:nvSpPr>
-        <p:spPr>
-          <a:xfrm>
-            <a:off x="8721787" y="1417938"/>
-            <a:ext cx="4488873" cy="304800"/>
-          </a:xfrm>
-          <a:prstGeom prst="roundRect">
-            <a:avLst/>
-          </a:prstGeom>
-        </p:spPr>
-        <p:style>
-          <a:lnRef idx="2">
-            <a:schemeClr val="accent1">
-              <a:shade val="15000"/>
-            </a:schemeClr>
-          </a:lnRef>
-          <a:fillRef idx="1">
-            <a:schemeClr val="accent1"/>
-          </a:fillRef>
-          <a:effectRef idx="0">
-            <a:schemeClr val="accent1"/>
-          </a:effectRef>
-          <a:fontRef idx="minor">
-            <a:schemeClr val="lt1"/>
-          </a:fontRef>
-        </p:style>
-        <p:txBody>
-          <a:bodyPr rtlCol="0" anchor="ctr"/>
-          <a:lstStyle/>
-          <a:p>
-            <a:pPr algn="ctr"/>
-            <a:r>
-              <a:rPr lang="ko-KR" altLang="en-US" dirty="0"/>
-              <a:t>균열</a:t>
-            </a:r>
-            <a:r>
-              <a:rPr lang="en-US" altLang="ko-KR" dirty="0"/>
-              <a:t>		100 x 1</a:t>
-            </a:r>
-          </a:p>
-        </p:txBody>
-      </p:sp>
-      <p:sp>
-        <p:nvSpPr>
-          <p:cNvPr id="29" name="사각형: 둥근 모서리 28">
-            <a:extLst>
-              <a:ext uri="{FF2B5EF4-FFF2-40B4-BE49-F238E27FC236}">
-                <a16:creationId xmlns:a16="http://schemas.microsoft.com/office/drawing/2014/main" id="{30881CF7-54CC-4F20-8A33-CE4E26831DB5}"/>
-              </a:ext>
-            </a:extLst>
-          </p:cNvPr>
-          <p:cNvSpPr/>
-          <p:nvPr/>
-        </p:nvSpPr>
-        <p:spPr>
-          <a:xfrm>
-            <a:off x="8721786" y="1789103"/>
-            <a:ext cx="4488873" cy="304800"/>
-          </a:xfrm>
-          <a:prstGeom prst="roundRect">
-            <a:avLst/>
-          </a:prstGeom>
-        </p:spPr>
-        <p:style>
-          <a:lnRef idx="2">
-            <a:schemeClr val="accent1">
-              <a:shade val="15000"/>
-            </a:schemeClr>
-          </a:lnRef>
-          <a:fillRef idx="1">
-            <a:schemeClr val="accent1"/>
-          </a:fillRef>
-          <a:effectRef idx="0">
-            <a:schemeClr val="accent1"/>
-          </a:effectRef>
-          <a:fontRef idx="minor">
-            <a:schemeClr val="lt1"/>
-          </a:fontRef>
-        </p:style>
-        <p:txBody>
-          <a:bodyPr rtlCol="0" anchor="ctr"/>
-          <a:lstStyle/>
-          <a:p>
-            <a:pPr algn="ctr"/>
-            <a:r>
-              <a:rPr lang="ko-KR" altLang="en-US" dirty="0"/>
-              <a:t>잔상</a:t>
-            </a:r>
-            <a:r>
-              <a:rPr lang="en-US" altLang="ko-KR" dirty="0"/>
-              <a:t>		000 x 1</a:t>
-            </a:r>
-          </a:p>
-        </p:txBody>
-      </p:sp>
-      <p:sp>
-        <p:nvSpPr>
-          <p:cNvPr id="30" name="사각형: 둥근 모서리 29">
-            <a:extLst>
-              <a:ext uri="{FF2B5EF4-FFF2-40B4-BE49-F238E27FC236}">
-                <a16:creationId xmlns:a16="http://schemas.microsoft.com/office/drawing/2014/main" id="{0837C01D-1248-5C20-9DF9-3CD334B05528}"/>
-              </a:ext>
-            </a:extLst>
-          </p:cNvPr>
-          <p:cNvSpPr/>
-          <p:nvPr/>
-        </p:nvSpPr>
-        <p:spPr>
-          <a:xfrm>
-            <a:off x="8721785" y="2160268"/>
-            <a:ext cx="4488873" cy="304800"/>
-          </a:xfrm>
-          <a:prstGeom prst="roundRect">
-            <a:avLst/>
-          </a:prstGeom>
-        </p:spPr>
-        <p:style>
-          <a:lnRef idx="2">
-            <a:schemeClr val="accent1">
-              <a:shade val="15000"/>
-            </a:schemeClr>
-          </a:lnRef>
-          <a:fillRef idx="1">
-            <a:schemeClr val="accent1"/>
-          </a:fillRef>
-          <a:effectRef idx="0">
-            <a:schemeClr val="accent1"/>
-          </a:effectRef>
-          <a:fontRef idx="minor">
-            <a:schemeClr val="lt1"/>
-          </a:fontRef>
-        </p:style>
-        <p:txBody>
-          <a:bodyPr rtlCol="0" anchor="ctr"/>
-          <a:lstStyle/>
-          <a:p>
-            <a:pPr algn="ctr"/>
-            <a:r>
-              <a:rPr lang="ko-KR" altLang="en-US" dirty="0"/>
-              <a:t>연소</a:t>
-            </a:r>
-            <a:r>
-              <a:rPr lang="en-US" altLang="ko-KR" dirty="0"/>
-              <a:t>(</a:t>
-            </a:r>
-            <a:r>
-              <a:rPr lang="ko-KR" altLang="en-US" dirty="0"/>
-              <a:t>파괴</a:t>
-            </a:r>
-            <a:r>
-              <a:rPr lang="en-US" altLang="ko-KR" dirty="0"/>
-              <a:t>)	000 x 0</a:t>
-            </a:r>
-          </a:p>
-        </p:txBody>
-      </p:sp>
-      <p:sp>
-        <p:nvSpPr>
-          <p:cNvPr id="31" name="사각형: 둥근 모서리 30">
-            <a:extLst>
-              <a:ext uri="{FF2B5EF4-FFF2-40B4-BE49-F238E27FC236}">
-                <a16:creationId xmlns:a16="http://schemas.microsoft.com/office/drawing/2014/main" id="{2A4DC814-AAA0-C267-6E57-B6311CD94C9A}"/>
-              </a:ext>
-            </a:extLst>
-          </p:cNvPr>
-          <p:cNvSpPr/>
-          <p:nvPr/>
-        </p:nvSpPr>
-        <p:spPr>
-          <a:xfrm>
-            <a:off x="8721784" y="2527059"/>
-            <a:ext cx="4488873" cy="304800"/>
-          </a:xfrm>
-          <a:prstGeom prst="roundRect">
-            <a:avLst/>
-          </a:prstGeom>
-        </p:spPr>
-        <p:style>
-          <a:lnRef idx="2">
-            <a:schemeClr val="accent1">
-              <a:shade val="15000"/>
-            </a:schemeClr>
-          </a:lnRef>
-          <a:fillRef idx="1">
-            <a:schemeClr val="accent1"/>
-          </a:fillRef>
-          <a:effectRef idx="0">
-            <a:schemeClr val="accent1"/>
-          </a:effectRef>
-          <a:fontRef idx="minor">
-            <a:schemeClr val="lt1"/>
-          </a:fontRef>
-        </p:style>
-        <p:txBody>
-          <a:bodyPr rtlCol="0" anchor="ctr"/>
-          <a:lstStyle/>
-          <a:p>
-            <a:pPr algn="ctr"/>
-            <a:r>
-              <a:rPr lang="ko-KR" altLang="en-US" dirty="0"/>
-              <a:t>감전</a:t>
-            </a:r>
-            <a:r>
-              <a:rPr lang="en-US" altLang="ko-KR" dirty="0"/>
-              <a:t>(</a:t>
-            </a:r>
-            <a:r>
-              <a:rPr lang="ko-KR" altLang="en-US" dirty="0"/>
-              <a:t>효과</a:t>
-            </a:r>
-            <a:r>
-              <a:rPr lang="en-US" altLang="ko-KR" dirty="0"/>
-              <a:t>)	010 x 1</a:t>
-            </a:r>
-          </a:p>
-        </p:txBody>
-      </p:sp>
-      <p:sp>
-        <p:nvSpPr>
-          <p:cNvPr id="32" name="사각형: 둥근 모서리 31">
-            <a:extLst>
-              <a:ext uri="{FF2B5EF4-FFF2-40B4-BE49-F238E27FC236}">
-                <a16:creationId xmlns:a16="http://schemas.microsoft.com/office/drawing/2014/main" id="{7108285A-FFE6-DA88-98DC-7EE6300BA6EA}"/>
-              </a:ext>
-            </a:extLst>
-          </p:cNvPr>
-          <p:cNvSpPr/>
-          <p:nvPr/>
-        </p:nvSpPr>
-        <p:spPr>
-          <a:xfrm>
-            <a:off x="8721784" y="3229615"/>
-            <a:ext cx="4488873" cy="199385"/>
-          </a:xfrm>
-          <a:prstGeom prst="roundRect">
-            <a:avLst/>
-          </a:prstGeom>
-        </p:spPr>
-        <p:style>
-          <a:lnRef idx="2">
-            <a:schemeClr val="accent1">
-              <a:shade val="15000"/>
-            </a:schemeClr>
-          </a:lnRef>
-          <a:fillRef idx="1">
-            <a:schemeClr val="accent1"/>
-          </a:fillRef>
-          <a:effectRef idx="0">
-            <a:schemeClr val="accent1"/>
-          </a:effectRef>
-          <a:fontRef idx="minor">
-            <a:schemeClr val="lt1"/>
-          </a:fontRef>
-        </p:style>
-        <p:txBody>
-          <a:bodyPr rtlCol="0" anchor="ctr"/>
-          <a:lstStyle/>
-          <a:p>
-            <a:pPr algn="ctr"/>
-            <a:r>
-              <a:rPr lang="ko-KR" altLang="en-US" dirty="0"/>
-              <a:t>빙결</a:t>
-            </a:r>
-            <a:r>
-              <a:rPr lang="en-US" altLang="ko-KR" dirty="0"/>
-              <a:t>		000 x 1</a:t>
-            </a:r>
-          </a:p>
-        </p:txBody>
-      </p:sp>
-      <p:sp>
-        <p:nvSpPr>
-          <p:cNvPr id="17" name="사각형: 둥근 모서리 16">
-            <a:extLst>
-              <a:ext uri="{FF2B5EF4-FFF2-40B4-BE49-F238E27FC236}">
-                <a16:creationId xmlns:a16="http://schemas.microsoft.com/office/drawing/2014/main" id="{3C38FDDC-0002-2E25-A0DB-C2800A42AB7A}"/>
-              </a:ext>
-            </a:extLst>
-          </p:cNvPr>
-          <p:cNvSpPr/>
-          <p:nvPr/>
-        </p:nvSpPr>
-        <p:spPr>
-          <a:xfrm>
-            <a:off x="8721783" y="1058358"/>
-            <a:ext cx="4488873" cy="304800"/>
-          </a:xfrm>
-          <a:prstGeom prst="roundRect">
-            <a:avLst/>
-          </a:prstGeom>
-        </p:spPr>
-        <p:style>
-          <a:lnRef idx="2">
-            <a:schemeClr val="accent1">
-              <a:shade val="15000"/>
-            </a:schemeClr>
-          </a:lnRef>
-          <a:fillRef idx="1">
-            <a:schemeClr val="accent1"/>
-          </a:fillRef>
-          <a:effectRef idx="0">
-            <a:schemeClr val="accent1"/>
-          </a:effectRef>
-          <a:fontRef idx="minor">
-            <a:schemeClr val="lt1"/>
-          </a:fontRef>
-        </p:style>
-        <p:txBody>
-          <a:bodyPr rtlCol="0" anchor="ctr"/>
-          <a:lstStyle/>
-          <a:p>
-            <a:pPr algn="ctr"/>
-            <a:r>
-              <a:rPr lang="ko-KR" altLang="en-US" dirty="0"/>
-              <a:t>파괴</a:t>
-            </a:r>
-            <a:r>
-              <a:rPr lang="en-US" altLang="ko-KR" dirty="0"/>
-              <a:t>(</a:t>
-            </a:r>
-            <a:r>
-              <a:rPr lang="ko-KR" altLang="en-US" dirty="0"/>
-              <a:t>기본</a:t>
-            </a:r>
-            <a:r>
-              <a:rPr lang="en-US" altLang="ko-KR" dirty="0"/>
-              <a:t>)	100 x 1</a:t>
-            </a:r>
-          </a:p>
-        </p:txBody>
-      </p:sp>
-      <p:sp>
-        <p:nvSpPr>
-          <p:cNvPr id="35" name="사각형: 둥근 모서리 34">
-            <a:extLst>
-              <a:ext uri="{FF2B5EF4-FFF2-40B4-BE49-F238E27FC236}">
-                <a16:creationId xmlns:a16="http://schemas.microsoft.com/office/drawing/2014/main" id="{A3E97136-FEC5-3D08-0EF2-59D9428E85BA}"/>
-              </a:ext>
-            </a:extLst>
-          </p:cNvPr>
-          <p:cNvSpPr/>
-          <p:nvPr/>
-        </p:nvSpPr>
-        <p:spPr>
-          <a:xfrm>
-            <a:off x="8721782" y="2870035"/>
-            <a:ext cx="4488873" cy="304800"/>
-          </a:xfrm>
-          <a:prstGeom prst="roundRect">
-            <a:avLst/>
-          </a:prstGeom>
-        </p:spPr>
-        <p:style>
-          <a:lnRef idx="2">
-            <a:schemeClr val="accent1">
-              <a:shade val="15000"/>
-            </a:schemeClr>
-          </a:lnRef>
-          <a:fillRef idx="1">
-            <a:schemeClr val="accent1"/>
-          </a:fillRef>
-          <a:effectRef idx="0">
-            <a:schemeClr val="accent1"/>
-          </a:effectRef>
-          <a:fontRef idx="minor">
-            <a:schemeClr val="lt1"/>
-          </a:fontRef>
-        </p:style>
-        <p:txBody>
-          <a:bodyPr rtlCol="0" anchor="ctr"/>
-          <a:lstStyle/>
-          <a:p>
-            <a:pPr algn="ctr"/>
-            <a:r>
-              <a:rPr lang="ko-KR" altLang="en-US" dirty="0"/>
-              <a:t>감전</a:t>
-            </a:r>
-            <a:r>
-              <a:rPr lang="en-US" altLang="ko-KR" dirty="0"/>
-              <a:t>(</a:t>
-            </a:r>
-            <a:r>
-              <a:rPr lang="ko-KR" altLang="en-US" dirty="0"/>
-              <a:t>파괴</a:t>
-            </a:r>
-            <a:r>
-              <a:rPr lang="en-US" altLang="ko-KR" dirty="0"/>
-              <a:t>)	100 x -1</a:t>
-            </a:r>
+        <p:txBody>
+          <a:bodyPr wrap="none" rtlCol="0">
+            <a:spAutoFit/>
+          </a:bodyPr>
+          <a:lstStyle/>
+          <a:p>
+            <a:r>
+              <a:rPr lang="ko-KR" altLang="en-US" dirty="0" err="1"/>
+              <a:t>발라트로의</a:t>
+            </a:r>
+            <a:r>
+              <a:rPr lang="ko-KR" altLang="en-US" dirty="0"/>
+              <a:t> </a:t>
+            </a:r>
+            <a:r>
+              <a:rPr lang="ko-KR" altLang="en-US" dirty="0" err="1"/>
+              <a:t>족보같은</a:t>
+            </a:r>
+            <a:r>
+              <a:rPr lang="ko-KR" altLang="en-US" dirty="0"/>
+              <a:t> 기능</a:t>
+            </a:r>
+            <a:endParaRPr lang="en-US" altLang="ko-KR" dirty="0"/>
           </a:p>
         </p:txBody>
       </p:sp>
@@ -5825,32 +4959,408 @@
           </a:p>
         </p:txBody>
       </p:sp>
-      <p:sp>
-        <p:nvSpPr>
-          <p:cNvPr id="25" name="직사각형 24">
-            <a:extLst>
-              <a:ext uri="{FF2B5EF4-FFF2-40B4-BE49-F238E27FC236}">
-                <a16:creationId xmlns:a16="http://schemas.microsoft.com/office/drawing/2014/main" id="{595BE80B-19BE-F17A-02EF-ED8ECA6E90FA}"/>
-              </a:ext>
-            </a:extLst>
-          </p:cNvPr>
-          <p:cNvSpPr/>
+      <p:pic>
+        <p:nvPicPr>
+          <p:cNvPr id="3" name="그림 2">
+            <a:extLst>
+              <a:ext uri="{FF2B5EF4-FFF2-40B4-BE49-F238E27FC236}">
+                <a16:creationId xmlns:a16="http://schemas.microsoft.com/office/drawing/2014/main" id="{0D32CCBD-85F3-ED11-9AAF-4C36D7E3B7F0}"/>
+              </a:ext>
+            </a:extLst>
+          </p:cNvPr>
+          <p:cNvPicPr>
+            <a:picLocks noChangeAspect="1"/>
+          </p:cNvPicPr>
           <p:nvPr/>
-        </p:nvSpPr>
+        </p:nvPicPr>
+        <p:blipFill>
+          <a:blip r:embed="rId2"/>
+          <a:stretch>
+            <a:fillRect/>
+          </a:stretch>
+        </p:blipFill>
         <p:spPr>
           <a:xfrm>
-            <a:off x="463452" y="1025073"/>
-            <a:ext cx="4937522" cy="3017981"/>
+            <a:off x="463452" y="1208308"/>
+            <a:ext cx="4704551" cy="4878455"/>
           </a:xfrm>
           <a:prstGeom prst="rect">
             <a:avLst/>
           </a:prstGeom>
-          <a:solidFill>
-            <a:schemeClr val="tx2">
-              <a:lumMod val="10000"/>
-              <a:lumOff val="90000"/>
-            </a:schemeClr>
-          </a:solidFill>
+        </p:spPr>
+      </p:pic>
+    </p:spTree>
+    <p:extLst>
+      <p:ext uri="{BB962C8B-B14F-4D97-AF65-F5344CB8AC3E}">
+        <p14:creationId xmlns:p14="http://schemas.microsoft.com/office/powerpoint/2010/main" val="1839257290"/>
+      </p:ext>
+    </p:extLst>
+  </p:cSld>
+  <p:clrMapOvr>
+    <a:masterClrMapping/>
+  </p:clrMapOvr>
+</p:sld>
+</file>
+
+<file path=ppt/slides/slide5.xml><?xml version="1.0" encoding="utf-8"?>
+<p:sld xmlns:a="http://schemas.openxmlformats.org/drawingml/2006/main" xmlns:r="http://schemas.openxmlformats.org/officeDocument/2006/relationships" xmlns:p="http://schemas.openxmlformats.org/presentationml/2006/main">
+  <p:cSld>
+    <p:spTree>
+      <p:nvGrpSpPr>
+        <p:cNvPr id="1" name="">
+          <a:extLst>
+            <a:ext uri="{FF2B5EF4-FFF2-40B4-BE49-F238E27FC236}">
+              <a16:creationId xmlns:a16="http://schemas.microsoft.com/office/drawing/2014/main" id="{9CC00A2B-26D4-AD7F-C557-396614EF44A3}"/>
+            </a:ext>
+          </a:extLst>
+        </p:cNvPr>
+        <p:cNvGrpSpPr/>
+        <p:nvPr/>
+      </p:nvGrpSpPr>
+      <p:grpSpPr>
+        <a:xfrm>
+          <a:off x="0" y="0"/>
+          <a:ext cx="0" cy="0"/>
+          <a:chOff x="0" y="0"/>
+          <a:chExt cx="0" cy="0"/>
+        </a:xfrm>
+      </p:grpSpPr>
+      <p:sp>
+        <p:nvSpPr>
+          <p:cNvPr id="8" name="TextBox 7">
+            <a:extLst>
+              <a:ext uri="{FF2B5EF4-FFF2-40B4-BE49-F238E27FC236}">
+                <a16:creationId xmlns:a16="http://schemas.microsoft.com/office/drawing/2014/main" id="{EAECB721-BB18-379E-C1BA-4DD47293883B}"/>
+              </a:ext>
+            </a:extLst>
+          </p:cNvPr>
+          <p:cNvSpPr txBox="1"/>
+          <p:nvPr/>
+        </p:nvSpPr>
+        <p:spPr>
+          <a:xfrm>
+            <a:off x="463452" y="563419"/>
+            <a:ext cx="1420582" cy="369332"/>
+          </a:xfrm>
+          <a:prstGeom prst="rect">
+            <a:avLst/>
+          </a:prstGeom>
+          <a:noFill/>
+        </p:spPr>
+        <p:txBody>
+          <a:bodyPr wrap="none" rtlCol="0">
+            <a:spAutoFit/>
+          </a:bodyPr>
+          <a:lstStyle/>
+          <a:p>
+            <a:r>
+              <a:rPr lang="ko-KR" altLang="en-US" b="1" dirty="0"/>
+              <a:t>보상 </a:t>
+            </a:r>
+            <a:r>
+              <a:rPr lang="ko-KR" altLang="en-US" b="1" dirty="0" err="1"/>
+              <a:t>획득창</a:t>
+            </a:r>
+            <a:endParaRPr lang="ko-KR" altLang="en-US" b="1" dirty="0"/>
+          </a:p>
+        </p:txBody>
+      </p:sp>
+      <p:pic>
+        <p:nvPicPr>
+          <p:cNvPr id="5" name="그림 4">
+            <a:extLst>
+              <a:ext uri="{FF2B5EF4-FFF2-40B4-BE49-F238E27FC236}">
+                <a16:creationId xmlns:a16="http://schemas.microsoft.com/office/drawing/2014/main" id="{E5566841-0C93-82B5-9098-17106208D9CE}"/>
+              </a:ext>
+            </a:extLst>
+          </p:cNvPr>
+          <p:cNvPicPr>
+            <a:picLocks noChangeAspect="1"/>
+          </p:cNvPicPr>
+          <p:nvPr/>
+        </p:nvPicPr>
+        <p:blipFill>
+          <a:blip r:embed="rId2"/>
+          <a:stretch>
+            <a:fillRect/>
+          </a:stretch>
+        </p:blipFill>
+        <p:spPr>
+          <a:xfrm>
+            <a:off x="463452" y="1025236"/>
+            <a:ext cx="5378131" cy="3013375"/>
+          </a:xfrm>
+          <a:prstGeom prst="rect">
+            <a:avLst/>
+          </a:prstGeom>
+        </p:spPr>
+      </p:pic>
+      <p:sp>
+        <p:nvSpPr>
+          <p:cNvPr id="6" name="TextBox 5">
+            <a:extLst>
+              <a:ext uri="{FF2B5EF4-FFF2-40B4-BE49-F238E27FC236}">
+                <a16:creationId xmlns:a16="http://schemas.microsoft.com/office/drawing/2014/main" id="{23B2FF99-9681-09CD-E15E-29997E140955}"/>
+              </a:ext>
+            </a:extLst>
+          </p:cNvPr>
+          <p:cNvSpPr txBox="1"/>
+          <p:nvPr/>
+        </p:nvSpPr>
+        <p:spPr>
+          <a:xfrm>
+            <a:off x="6096000" y="563419"/>
+            <a:ext cx="5632548" cy="5078313"/>
+          </a:xfrm>
+          <a:prstGeom prst="rect">
+            <a:avLst/>
+          </a:prstGeom>
+          <a:noFill/>
+        </p:spPr>
+        <p:txBody>
+          <a:bodyPr wrap="square" rtlCol="0">
+            <a:spAutoFit/>
+          </a:bodyPr>
+          <a:lstStyle/>
+          <a:p>
+            <a:r>
+              <a:rPr lang="ko-KR" altLang="en-US" b="1" dirty="0">
+                <a:solidFill>
+                  <a:srgbClr val="FF0000"/>
+                </a:solidFill>
+              </a:rPr>
+              <a:t>게</a:t>
+            </a:r>
+            <a:r>
+              <a:rPr lang="ko-KR" altLang="en-US" b="1" dirty="0"/>
+              <a:t>임 도중에 등장하게 되면서 변경된 점</a:t>
+            </a:r>
+            <a:endParaRPr lang="en-US" altLang="ko-KR" b="1" dirty="0"/>
+          </a:p>
+          <a:p>
+            <a:r>
+              <a:rPr lang="ko-KR" altLang="en-US" dirty="0"/>
+              <a:t> 상단에 </a:t>
+            </a:r>
+            <a:r>
+              <a:rPr lang="en-US" altLang="ko-KR" dirty="0"/>
+              <a:t>“</a:t>
+            </a:r>
+            <a:r>
+              <a:rPr lang="ko-KR" altLang="en-US" dirty="0"/>
+              <a:t>▽</a:t>
+            </a:r>
+            <a:r>
+              <a:rPr lang="en-US" altLang="ko-KR" dirty="0"/>
+              <a:t>(</a:t>
+            </a:r>
+            <a:r>
+              <a:rPr lang="ko-KR" altLang="en-US" dirty="0"/>
+              <a:t>접기 버튼</a:t>
+            </a:r>
+            <a:r>
+              <a:rPr lang="en-US" altLang="ko-KR" dirty="0"/>
+              <a:t>)”</a:t>
+            </a:r>
+            <a:r>
+              <a:rPr lang="ko-KR" altLang="en-US" dirty="0"/>
+              <a:t>이 추가되어</a:t>
+            </a:r>
+            <a:r>
+              <a:rPr lang="en-US" altLang="ko-KR" dirty="0"/>
+              <a:t>,</a:t>
+            </a:r>
+          </a:p>
+          <a:p>
+            <a:r>
+              <a:rPr lang="ko-KR" altLang="en-US" dirty="0"/>
+              <a:t>누르면 보상 선택 </a:t>
+            </a:r>
+            <a:r>
+              <a:rPr lang="en-US" altLang="ko-KR" dirty="0"/>
+              <a:t>UI</a:t>
+            </a:r>
+            <a:r>
+              <a:rPr lang="ko-KR" altLang="en-US" dirty="0"/>
+              <a:t>가 전체적으로 아래로 내려가</a:t>
+            </a:r>
+            <a:r>
+              <a:rPr lang="en-US" altLang="ko-KR" dirty="0"/>
+              <a:t>,</a:t>
+            </a:r>
+          </a:p>
+          <a:p>
+            <a:r>
+              <a:rPr lang="ko-KR" altLang="en-US" dirty="0"/>
+              <a:t>게임 진행 화면을 살펴볼 수 있게 됨</a:t>
+            </a:r>
+            <a:endParaRPr lang="en-US" altLang="ko-KR" dirty="0"/>
+          </a:p>
+          <a:p>
+            <a:endParaRPr lang="en-US" altLang="ko-KR" dirty="0"/>
+          </a:p>
+          <a:p>
+            <a:r>
+              <a:rPr lang="ko-KR" altLang="en-US" dirty="0"/>
+              <a:t>짝을 이루는 △버튼이 있어 다시 펼칠 수 있음</a:t>
+            </a:r>
+            <a:r>
+              <a:rPr lang="en-US" altLang="ko-KR" dirty="0"/>
+              <a:t>.</a:t>
+            </a:r>
+          </a:p>
+          <a:p>
+            <a:r>
+              <a:rPr lang="ko-KR" altLang="en-US" dirty="0"/>
+              <a:t>손패 정도만 살펴볼 수 있고 게임 진행은 불가능</a:t>
+            </a:r>
+            <a:endParaRPr lang="en-US" altLang="ko-KR" dirty="0"/>
+          </a:p>
+          <a:p>
+            <a:endParaRPr lang="en-US" altLang="ko-KR" dirty="0"/>
+          </a:p>
+          <a:p>
+            <a:r>
+              <a:rPr lang="ko-KR" altLang="en-US" b="1" dirty="0">
+                <a:solidFill>
+                  <a:schemeClr val="accent2"/>
+                </a:solidFill>
+              </a:rPr>
+              <a:t>보</a:t>
+            </a:r>
+            <a:r>
+              <a:rPr lang="ko-KR" altLang="en-US" b="1" dirty="0"/>
+              <a:t>상 개수를 여럿 선택 가능하게 되면서</a:t>
+            </a:r>
+            <a:r>
+              <a:rPr lang="en-US" altLang="ko-KR" b="1" dirty="0"/>
+              <a:t> </a:t>
+            </a:r>
+            <a:r>
+              <a:rPr lang="ko-KR" altLang="en-US" b="1" dirty="0"/>
+              <a:t>변경된 점</a:t>
+            </a:r>
+            <a:endParaRPr lang="en-US" altLang="ko-KR" b="1" dirty="0"/>
+          </a:p>
+          <a:p>
+            <a:endParaRPr lang="en-US" altLang="ko-KR" dirty="0"/>
+          </a:p>
+          <a:p>
+            <a:r>
+              <a:rPr lang="en-US" altLang="ko-KR" dirty="0"/>
+              <a:t>Select all</a:t>
+            </a:r>
+            <a:r>
+              <a:rPr lang="ko-KR" altLang="en-US" dirty="0"/>
+              <a:t>버튼</a:t>
+            </a:r>
+            <a:r>
+              <a:rPr lang="en-US" altLang="ko-KR" dirty="0"/>
+              <a:t> </a:t>
+            </a:r>
+            <a:r>
+              <a:rPr lang="ko-KR" altLang="en-US" dirty="0"/>
+              <a:t>추가</a:t>
+            </a:r>
+            <a:endParaRPr lang="en-US" altLang="ko-KR" dirty="0"/>
+          </a:p>
+          <a:p>
+            <a:r>
+              <a:rPr lang="ko-KR" altLang="en-US" dirty="0"/>
+              <a:t>선택하기</a:t>
+            </a:r>
+            <a:r>
+              <a:rPr lang="en-US" altLang="ko-KR" dirty="0"/>
+              <a:t>/</a:t>
+            </a:r>
+            <a:r>
+              <a:rPr lang="ko-KR" altLang="en-US" dirty="0"/>
+              <a:t>취소하기가 마우스 오버에서 표기</a:t>
+            </a:r>
+            <a:endParaRPr lang="en-US" altLang="ko-KR" dirty="0"/>
+          </a:p>
+          <a:p>
+            <a:r>
+              <a:rPr lang="ko-KR" altLang="en-US" dirty="0"/>
+              <a:t>선택 기능 추가</a:t>
+            </a:r>
+            <a:endParaRPr lang="en-US" altLang="ko-KR" dirty="0"/>
+          </a:p>
+          <a:p>
+            <a:r>
+              <a:rPr lang="ko-KR" altLang="en-US" dirty="0"/>
+              <a:t>선택 가능 카드 수량 표기 </a:t>
+            </a:r>
+            <a:r>
+              <a:rPr lang="en-US" altLang="ko-KR" dirty="0"/>
+              <a:t>(n/m) </a:t>
+            </a:r>
+            <a:r>
+              <a:rPr lang="ko-KR" altLang="en-US" dirty="0"/>
+              <a:t>추가</a:t>
+            </a:r>
+            <a:endParaRPr lang="en-US" altLang="ko-KR" dirty="0"/>
+          </a:p>
+          <a:p>
+            <a:r>
+              <a:rPr lang="ko-KR" altLang="en-US" dirty="0"/>
+              <a:t>경고문 추가</a:t>
+            </a:r>
+            <a:endParaRPr lang="en-US" altLang="ko-KR" dirty="0"/>
+          </a:p>
+          <a:p>
+            <a:endParaRPr lang="en-US" altLang="ko-KR" dirty="0"/>
+          </a:p>
+          <a:p>
+            <a:r>
+              <a:rPr lang="ko-KR" altLang="en-US" b="1" dirty="0">
+                <a:solidFill>
+                  <a:schemeClr val="accent6"/>
+                </a:solidFill>
+              </a:rPr>
+              <a:t>그</a:t>
+            </a:r>
+            <a:r>
+              <a:rPr lang="ko-KR" altLang="en-US" b="1" dirty="0"/>
+              <a:t>냥 추가된 점</a:t>
+            </a:r>
+            <a:endParaRPr lang="en-US" altLang="ko-KR" b="1" dirty="0"/>
+          </a:p>
+          <a:p>
+            <a:r>
+              <a:rPr lang="ko-KR" altLang="en-US" dirty="0"/>
+              <a:t>보상 내용에 골드 추가</a:t>
+            </a:r>
+            <a:endParaRPr lang="en-US" altLang="ko-KR" dirty="0"/>
+          </a:p>
+        </p:txBody>
+      </p:sp>
+      <p:sp>
+        <p:nvSpPr>
+          <p:cNvPr id="7" name="사각형: 둥근 모서리 6">
+            <a:extLst>
+              <a:ext uri="{FF2B5EF4-FFF2-40B4-BE49-F238E27FC236}">
+                <a16:creationId xmlns:a16="http://schemas.microsoft.com/office/drawing/2014/main" id="{7A6AB122-6C69-718C-B71F-C30DEA34A767}"/>
+              </a:ext>
+            </a:extLst>
+          </p:cNvPr>
+          <p:cNvSpPr/>
+          <p:nvPr/>
+        </p:nvSpPr>
+        <p:spPr>
+          <a:xfrm>
+            <a:off x="2817090" y="969695"/>
+            <a:ext cx="655782" cy="203322"/>
+          </a:xfrm>
+          <a:prstGeom prst="roundRect">
+            <a:avLst/>
+          </a:prstGeom>
+          <a:noFill/>
+          <a:ln w="38100">
+            <a:solidFill>
+              <a:srgbClr val="FF0000"/>
+            </a:solidFill>
+          </a:ln>
         </p:spPr>
         <p:style>
           <a:lnRef idx="2">
@@ -5877,12 +5387,56 @@
           </a:p>
         </p:txBody>
       </p:sp>
-      <p:sp>
-        <p:nvSpPr>
-          <p:cNvPr id="26" name="사각형: 둥근 모서리 25">
-            <a:extLst>
-              <a:ext uri="{FF2B5EF4-FFF2-40B4-BE49-F238E27FC236}">
-                <a16:creationId xmlns:a16="http://schemas.microsoft.com/office/drawing/2014/main" id="{75DC52B5-23CE-C24B-0AF0-29AA68948D18}"/>
+      <p:cxnSp>
+        <p:nvCxnSpPr>
+          <p:cNvPr id="10" name="직선 화살표 연결선 9">
+            <a:extLst>
+              <a:ext uri="{FF2B5EF4-FFF2-40B4-BE49-F238E27FC236}">
+                <a16:creationId xmlns:a16="http://schemas.microsoft.com/office/drawing/2014/main" id="{F0ED584F-D724-9752-4C2C-760207BA3DC2}"/>
+              </a:ext>
+            </a:extLst>
+          </p:cNvPr>
+          <p:cNvCxnSpPr>
+            <a:stCxn id="7" idx="3"/>
+          </p:cNvCxnSpPr>
+          <p:nvPr/>
+        </p:nvCxnSpPr>
+        <p:spPr>
+          <a:xfrm>
+            <a:off x="3472872" y="1071356"/>
+            <a:ext cx="2715492" cy="0"/>
+          </a:xfrm>
+          <a:prstGeom prst="straightConnector1">
+            <a:avLst/>
+          </a:prstGeom>
+          <a:ln>
+            <a:solidFill>
+              <a:srgbClr val="FF0000"/>
+            </a:solidFill>
+            <a:tailEnd type="triangle"/>
+          </a:ln>
+        </p:spPr>
+        <p:style>
+          <a:lnRef idx="2">
+            <a:schemeClr val="accent1"/>
+          </a:lnRef>
+          <a:fillRef idx="0">
+            <a:schemeClr val="accent1"/>
+          </a:fillRef>
+          <a:effectRef idx="1">
+            <a:schemeClr val="accent1"/>
+          </a:effectRef>
+          <a:fontRef idx="minor">
+            <a:schemeClr val="tx1"/>
+          </a:fontRef>
+        </p:style>
+      </p:cxnSp>
+      <p:sp>
+        <p:nvSpPr>
+          <p:cNvPr id="13" name="직사각형 12">
+            <a:extLst>
+              <a:ext uri="{FF2B5EF4-FFF2-40B4-BE49-F238E27FC236}">
+                <a16:creationId xmlns:a16="http://schemas.microsoft.com/office/drawing/2014/main" id="{5D04BCE9-F89B-816E-6138-DB8DF111F980}"/>
               </a:ext>
             </a:extLst>
           </p:cNvPr>
@@ -5891,12 +5445,18 @@
         </p:nvSpPr>
         <p:spPr>
           <a:xfrm>
-            <a:off x="687780" y="1126838"/>
-            <a:ext cx="1773382" cy="369332"/>
+            <a:off x="4867563" y="3713018"/>
+            <a:ext cx="323273" cy="230904"/>
           </a:xfrm>
-          <a:prstGeom prst="roundRect">
+          <a:prstGeom prst="rect">
             <a:avLst/>
           </a:prstGeom>
+          <a:noFill/>
+          <a:ln>
+            <a:solidFill>
+              <a:schemeClr val="accent2"/>
+            </a:solidFill>
+          </a:ln>
         </p:spPr>
         <p:style>
           <a:lnRef idx="2">
@@ -5919,25 +5479,16 @@
           <a:lstStyle/>
           <a:p>
             <a:pPr algn="ctr"/>
-            <a:r>
-              <a:rPr lang="ko-KR" altLang="en-US" dirty="0">
-                <a:solidFill>
-                  <a:schemeClr val="accent1">
-                    <a:lumMod val="50000"/>
-                  </a:schemeClr>
-                </a:solidFill>
-              </a:rPr>
-              <a:t>태그 점수</a:t>
-            </a:r>
-          </a:p>
-        </p:txBody>
-      </p:sp>
-      <p:sp>
-        <p:nvSpPr>
-          <p:cNvPr id="27" name="사각형: 둥근 모서리 26">
-            <a:extLst>
-              <a:ext uri="{FF2B5EF4-FFF2-40B4-BE49-F238E27FC236}">
-                <a16:creationId xmlns:a16="http://schemas.microsoft.com/office/drawing/2014/main" id="{5935C789-2BCB-B699-DCAA-91FC6495F29E}"/>
+            <a:endParaRPr lang="ko-KR" altLang="en-US"/>
+          </a:p>
+        </p:txBody>
+      </p:sp>
+      <p:sp>
+        <p:nvSpPr>
+          <p:cNvPr id="14" name="직사각형 13">
+            <a:extLst>
+              <a:ext uri="{FF2B5EF4-FFF2-40B4-BE49-F238E27FC236}">
+                <a16:creationId xmlns:a16="http://schemas.microsoft.com/office/drawing/2014/main" id="{6FF19D31-02B7-7C91-E004-9C7F1D8EDBD0}"/>
               </a:ext>
             </a:extLst>
           </p:cNvPr>
@@ -5946,12 +5497,18 @@
         </p:nvSpPr>
         <p:spPr>
           <a:xfrm>
-            <a:off x="3264726" y="1126838"/>
-            <a:ext cx="1773382" cy="369332"/>
+            <a:off x="2073563" y="3313547"/>
+            <a:ext cx="2134017" cy="630371"/>
           </a:xfrm>
-          <a:prstGeom prst="roundRect">
+          <a:prstGeom prst="rect">
             <a:avLst/>
           </a:prstGeom>
+          <a:noFill/>
+          <a:ln>
+            <a:solidFill>
+              <a:schemeClr val="accent2"/>
+            </a:solidFill>
+          </a:ln>
         </p:spPr>
         <p:style>
           <a:lnRef idx="2">
@@ -5974,19 +5531,16 @@
           <a:lstStyle/>
           <a:p>
             <a:pPr algn="ctr"/>
-            <a:r>
-              <a:rPr lang="ko-KR" altLang="en-US" dirty="0"/>
-              <a:t>타일 점수</a:t>
-            </a:r>
-          </a:p>
-        </p:txBody>
-      </p:sp>
-      <p:sp>
-        <p:nvSpPr>
-          <p:cNvPr id="28" name="사각형: 둥근 모서리 27">
-            <a:extLst>
-              <a:ext uri="{FF2B5EF4-FFF2-40B4-BE49-F238E27FC236}">
-                <a16:creationId xmlns:a16="http://schemas.microsoft.com/office/drawing/2014/main" id="{4A89CA78-581C-ECCA-5C6C-52FAFE9C9BDF}"/>
+            <a:endParaRPr lang="ko-KR" altLang="en-US"/>
+          </a:p>
+        </p:txBody>
+      </p:sp>
+      <p:sp>
+        <p:nvSpPr>
+          <p:cNvPr id="15" name="직사각형 14">
+            <a:extLst>
+              <a:ext uri="{FF2B5EF4-FFF2-40B4-BE49-F238E27FC236}">
+                <a16:creationId xmlns:a16="http://schemas.microsoft.com/office/drawing/2014/main" id="{9D9A531E-8A8F-F4B5-7F83-ABAD4580F3D8}"/>
               </a:ext>
             </a:extLst>
           </p:cNvPr>
@@ -5995,12 +5549,18 @@
         </p:nvSpPr>
         <p:spPr>
           <a:xfrm>
-            <a:off x="687780" y="1981357"/>
-            <a:ext cx="4488873" cy="304800"/>
+            <a:off x="2812888" y="2410989"/>
+            <a:ext cx="1888421" cy="276794"/>
           </a:xfrm>
-          <a:prstGeom prst="roundRect">
+          <a:prstGeom prst="rect">
             <a:avLst/>
           </a:prstGeom>
+          <a:noFill/>
+          <a:ln>
+            <a:solidFill>
+              <a:schemeClr val="accent2"/>
+            </a:solidFill>
+          </a:ln>
         </p:spPr>
         <p:style>
           <a:lnRef idx="2">
@@ -6023,23 +5583,16 @@
           <a:lstStyle/>
           <a:p>
             <a:pPr algn="ctr"/>
-            <a:r>
-              <a:rPr lang="ko-KR" altLang="en-US" dirty="0"/>
-              <a:t>균열</a:t>
-            </a:r>
-            <a:r>
-              <a:rPr lang="en-US" altLang="ko-KR" dirty="0"/>
-              <a:t>		100 x 1</a:t>
-            </a:r>
-          </a:p>
-        </p:txBody>
-      </p:sp>
-      <p:sp>
-        <p:nvSpPr>
-          <p:cNvPr id="29" name="사각형: 둥근 모서리 28">
-            <a:extLst>
-              <a:ext uri="{FF2B5EF4-FFF2-40B4-BE49-F238E27FC236}">
-                <a16:creationId xmlns:a16="http://schemas.microsoft.com/office/drawing/2014/main" id="{EF4EC40E-A148-3444-125B-0909CC6D6042}"/>
+            <a:endParaRPr lang="ko-KR" altLang="en-US"/>
+          </a:p>
+        </p:txBody>
+      </p:sp>
+      <p:sp>
+        <p:nvSpPr>
+          <p:cNvPr id="16" name="직사각형 15">
+            <a:extLst>
+              <a:ext uri="{FF2B5EF4-FFF2-40B4-BE49-F238E27FC236}">
+                <a16:creationId xmlns:a16="http://schemas.microsoft.com/office/drawing/2014/main" id="{527F57B7-AF40-E7DE-B16D-614A7901BB42}"/>
               </a:ext>
             </a:extLst>
           </p:cNvPr>
@@ -6048,12 +5601,18 @@
         </p:nvSpPr>
         <p:spPr>
           <a:xfrm>
-            <a:off x="687779" y="2352522"/>
-            <a:ext cx="4488873" cy="304800"/>
+            <a:off x="3842328" y="1602775"/>
+            <a:ext cx="1182254" cy="383035"/>
           </a:xfrm>
-          <a:prstGeom prst="roundRect">
+          <a:prstGeom prst="rect">
             <a:avLst/>
           </a:prstGeom>
+          <a:noFill/>
+          <a:ln>
+            <a:solidFill>
+              <a:schemeClr val="accent2"/>
+            </a:solidFill>
+          </a:ln>
         </p:spPr>
         <p:style>
           <a:lnRef idx="2">
@@ -6076,23 +5635,196 @@
           <a:lstStyle/>
           <a:p>
             <a:pPr algn="ctr"/>
-            <a:r>
-              <a:rPr lang="ko-KR" altLang="en-US" dirty="0"/>
-              <a:t>잔상</a:t>
-            </a:r>
-            <a:r>
-              <a:rPr lang="en-US" altLang="ko-KR" dirty="0"/>
-              <a:t>		000 x 0</a:t>
-            </a:r>
-          </a:p>
-        </p:txBody>
-      </p:sp>
-      <p:sp>
-        <p:nvSpPr>
-          <p:cNvPr id="30" name="사각형: 둥근 모서리 29">
-            <a:extLst>
-              <a:ext uri="{FF2B5EF4-FFF2-40B4-BE49-F238E27FC236}">
-                <a16:creationId xmlns:a16="http://schemas.microsoft.com/office/drawing/2014/main" id="{E8E9FA44-34CF-A227-015A-7F9D69B06C31}"/>
+            <a:endParaRPr lang="ko-KR" altLang="en-US"/>
+          </a:p>
+        </p:txBody>
+      </p:sp>
+      <p:sp>
+        <p:nvSpPr>
+          <p:cNvPr id="17" name="TextBox 16">
+            <a:extLst>
+              <a:ext uri="{FF2B5EF4-FFF2-40B4-BE49-F238E27FC236}">
+                <a16:creationId xmlns:a16="http://schemas.microsoft.com/office/drawing/2014/main" id="{1B221AF0-B3E0-7C34-2B6C-7F4BF68C3721}"/>
+              </a:ext>
+            </a:extLst>
+          </p:cNvPr>
+          <p:cNvSpPr txBox="1"/>
+          <p:nvPr/>
+        </p:nvSpPr>
+        <p:spPr>
+          <a:xfrm>
+            <a:off x="336243" y="4200350"/>
+            <a:ext cx="5632548" cy="2123658"/>
+          </a:xfrm>
+          <a:prstGeom prst="rect">
+            <a:avLst/>
+          </a:prstGeom>
+          <a:noFill/>
+        </p:spPr>
+        <p:txBody>
+          <a:bodyPr wrap="square" rtlCol="0">
+            <a:spAutoFit/>
+          </a:bodyPr>
+          <a:lstStyle/>
+          <a:p>
+            <a:r>
+              <a:rPr lang="ko-KR" altLang="en-US" sz="1200" dirty="0"/>
+              <a:t>기존에는 카드를 한 번 클릭 → 선택하기 문구가 표시 → 한번 더 클릭하여</a:t>
+            </a:r>
+            <a:endParaRPr lang="en-US" altLang="ko-KR" sz="1200" dirty="0"/>
+          </a:p>
+          <a:p>
+            <a:r>
+              <a:rPr lang="ko-KR" altLang="en-US" sz="1200" dirty="0"/>
+              <a:t>카드를 선택함과 동시에 다음 화면</a:t>
+            </a:r>
+            <a:r>
+              <a:rPr lang="en-US" altLang="ko-KR" sz="1200" dirty="0"/>
+              <a:t>(</a:t>
+            </a:r>
+            <a:r>
+              <a:rPr lang="ko-KR" altLang="en-US" sz="1200" dirty="0"/>
+              <a:t>상점</a:t>
+            </a:r>
+            <a:r>
+              <a:rPr lang="en-US" altLang="ko-KR" sz="1200" dirty="0"/>
+              <a:t>)</a:t>
+            </a:r>
+            <a:r>
+              <a:rPr lang="ko-KR" altLang="en-US" sz="1200" dirty="0"/>
+              <a:t>으로 바로 넘어갔지만</a:t>
+            </a:r>
+            <a:r>
+              <a:rPr lang="en-US" altLang="ko-KR" sz="1200" dirty="0"/>
+              <a:t>,</a:t>
+            </a:r>
+          </a:p>
+          <a:p>
+            <a:endParaRPr lang="en-US" altLang="ko-KR" sz="1200" dirty="0"/>
+          </a:p>
+          <a:p>
+            <a:r>
+              <a:rPr lang="ko-KR" altLang="en-US" sz="1200" dirty="0"/>
+              <a:t>보물 기획을 통해 해당 화면이 보다 자주 등장하게 되면서</a:t>
+            </a:r>
+            <a:endParaRPr lang="en-US" altLang="ko-KR" sz="1200" dirty="0"/>
+          </a:p>
+          <a:p>
+            <a:r>
+              <a:rPr lang="ko-KR" altLang="en-US" sz="1200" dirty="0"/>
+              <a:t>여러 카드의 조작을 빠르게 해 넘어갈 수 있도록</a:t>
+            </a:r>
+            <a:r>
+              <a:rPr lang="en-US" altLang="ko-KR" sz="1200" dirty="0"/>
+              <a:t>,</a:t>
+            </a:r>
+          </a:p>
+          <a:p>
+            <a:r>
+              <a:rPr lang="ko-KR" altLang="en-US" sz="1200" dirty="0"/>
+              <a:t>카드 선택은 클릭 한번으로 되도록 변경했습니다</a:t>
+            </a:r>
+            <a:r>
+              <a:rPr lang="en-US" altLang="ko-KR" sz="1200" dirty="0"/>
+              <a:t>.</a:t>
+            </a:r>
+          </a:p>
+          <a:p>
+            <a:endParaRPr lang="en-US" altLang="ko-KR" sz="1200" dirty="0"/>
+          </a:p>
+          <a:p>
+            <a:r>
+              <a:rPr lang="ko-KR" altLang="en-US" sz="1200" dirty="0"/>
+              <a:t>동시에 사고율을 줄이기 위해 </a:t>
+            </a:r>
+            <a:r>
+              <a:rPr lang="ko-KR" altLang="en-US" sz="1200" dirty="0" err="1"/>
+              <a:t>우하단</a:t>
+            </a:r>
+            <a:r>
+              <a:rPr lang="ko-KR" altLang="en-US" sz="1200" dirty="0"/>
+              <a:t> </a:t>
+            </a:r>
+            <a:r>
+              <a:rPr lang="en-US" altLang="ko-KR" sz="1200" dirty="0"/>
+              <a:t>next</a:t>
+            </a:r>
+            <a:r>
+              <a:rPr lang="ko-KR" altLang="en-US" sz="1200" dirty="0"/>
+              <a:t>를 통해 넘어가도록 변경했습니다</a:t>
+            </a:r>
+            <a:r>
+              <a:rPr lang="en-US" altLang="ko-KR" sz="1200" dirty="0"/>
+              <a:t>.</a:t>
+            </a:r>
+          </a:p>
+          <a:p>
+            <a:r>
+              <a:rPr lang="en-US" altLang="ko-KR" sz="1200" dirty="0"/>
+              <a:t>(</a:t>
+            </a:r>
+            <a:r>
+              <a:rPr lang="ko-KR" altLang="en-US" sz="1200" dirty="0"/>
+              <a:t>아무 카드도 선택하지 않은 경우 </a:t>
+            </a:r>
+            <a:r>
+              <a:rPr lang="en-US" altLang="ko-KR" sz="1200" dirty="0"/>
+              <a:t>skip</a:t>
+            </a:r>
+            <a:r>
+              <a:rPr lang="ko-KR" altLang="en-US" sz="1200" dirty="0"/>
+              <a:t>→으로 표기되고</a:t>
+            </a:r>
+            <a:r>
+              <a:rPr lang="en-US" altLang="ko-KR" sz="1200" dirty="0"/>
+              <a:t>, </a:t>
+            </a:r>
+            <a:r>
+              <a:rPr lang="ko-KR" altLang="en-US" sz="1200" dirty="0"/>
+              <a:t>기능은 동일합니다</a:t>
+            </a:r>
+            <a:r>
+              <a:rPr lang="en-US" altLang="ko-KR" sz="1200" dirty="0"/>
+              <a:t>.)</a:t>
+            </a:r>
+          </a:p>
+          <a:p>
+            <a:r>
+              <a:rPr lang="en-US" altLang="ko-KR" sz="1200" dirty="0">
+                <a:solidFill>
+                  <a:srgbClr val="FF0000"/>
+                </a:solidFill>
+              </a:rPr>
+              <a:t>※ “Select all”</a:t>
+            </a:r>
+            <a:r>
+              <a:rPr lang="ko-KR" altLang="en-US" sz="1200" dirty="0">
+                <a:solidFill>
+                  <a:srgbClr val="FF0000"/>
+                </a:solidFill>
+              </a:rPr>
+              <a:t>은 모두 체크될 뿐 다음 화면으로 넘어가지지 않습니다</a:t>
+            </a:r>
+            <a:r>
+              <a:rPr lang="en-US" altLang="ko-KR" sz="1200" dirty="0">
+                <a:solidFill>
+                  <a:srgbClr val="FF0000"/>
+                </a:solidFill>
+              </a:rPr>
+              <a:t>.</a:t>
+            </a:r>
+          </a:p>
+          <a:p>
+            <a:endParaRPr lang="en-US" altLang="ko-KR" sz="1200" dirty="0"/>
+          </a:p>
+        </p:txBody>
+      </p:sp>
+      <p:sp>
+        <p:nvSpPr>
+          <p:cNvPr id="18" name="직사각형 17">
+            <a:extLst>
+              <a:ext uri="{FF2B5EF4-FFF2-40B4-BE49-F238E27FC236}">
+                <a16:creationId xmlns:a16="http://schemas.microsoft.com/office/drawing/2014/main" id="{78B6D64D-B98E-A16D-C06A-BAF8D4B76DF5}"/>
               </a:ext>
             </a:extLst>
           </p:cNvPr>
@@ -6101,12 +5833,18 @@
         </p:nvSpPr>
         <p:spPr>
           <a:xfrm>
-            <a:off x="687778" y="2723687"/>
-            <a:ext cx="4488873" cy="304800"/>
+            <a:off x="1252150" y="1579715"/>
+            <a:ext cx="1182255" cy="1733831"/>
           </a:xfrm>
-          <a:prstGeom prst="roundRect">
+          <a:prstGeom prst="rect">
             <a:avLst/>
           </a:prstGeom>
+          <a:noFill/>
+          <a:ln>
+            <a:solidFill>
+              <a:schemeClr val="accent6"/>
+            </a:solidFill>
+          </a:ln>
         </p:spPr>
         <p:style>
           <a:lnRef idx="2">
@@ -6129,265 +5867,14 @@
           <a:lstStyle/>
           <a:p>
             <a:pPr algn="ctr"/>
-            <a:r>
-              <a:rPr lang="ko-KR" altLang="en-US" dirty="0"/>
-              <a:t>연소</a:t>
-            </a:r>
-            <a:r>
-              <a:rPr lang="en-US" altLang="ko-KR" dirty="0"/>
-              <a:t>(</a:t>
-            </a:r>
-            <a:r>
-              <a:rPr lang="ko-KR" altLang="en-US" dirty="0"/>
-              <a:t>파괴</a:t>
-            </a:r>
-            <a:r>
-              <a:rPr lang="en-US" altLang="ko-KR" dirty="0"/>
-              <a:t>)	000 x 0</a:t>
-            </a:r>
-          </a:p>
-        </p:txBody>
-      </p:sp>
-      <p:sp>
-        <p:nvSpPr>
-          <p:cNvPr id="31" name="사각형: 둥근 모서리 30">
-            <a:extLst>
-              <a:ext uri="{FF2B5EF4-FFF2-40B4-BE49-F238E27FC236}">
-                <a16:creationId xmlns:a16="http://schemas.microsoft.com/office/drawing/2014/main" id="{332C0ADD-97BD-4858-23BF-56FE94551538}"/>
-              </a:ext>
-            </a:extLst>
-          </p:cNvPr>
-          <p:cNvSpPr/>
-          <p:nvPr/>
-        </p:nvSpPr>
-        <p:spPr>
-          <a:xfrm>
-            <a:off x="687777" y="3090478"/>
-            <a:ext cx="4488873" cy="304800"/>
-          </a:xfrm>
-          <a:prstGeom prst="roundRect">
-            <a:avLst/>
-          </a:prstGeom>
-        </p:spPr>
-        <p:style>
-          <a:lnRef idx="2">
-            <a:schemeClr val="accent1">
-              <a:shade val="15000"/>
-            </a:schemeClr>
-          </a:lnRef>
-          <a:fillRef idx="1">
-            <a:schemeClr val="accent1"/>
-          </a:fillRef>
-          <a:effectRef idx="0">
-            <a:schemeClr val="accent1"/>
-          </a:effectRef>
-          <a:fontRef idx="minor">
-            <a:schemeClr val="lt1"/>
-          </a:fontRef>
-        </p:style>
-        <p:txBody>
-          <a:bodyPr rtlCol="0" anchor="ctr"/>
-          <a:lstStyle/>
-          <a:p>
-            <a:pPr algn="ctr"/>
-            <a:r>
-              <a:rPr lang="ko-KR" altLang="en-US" dirty="0"/>
-              <a:t>감전</a:t>
-            </a:r>
-            <a:r>
-              <a:rPr lang="en-US" altLang="ko-KR" dirty="0"/>
-              <a:t>(</a:t>
-            </a:r>
-            <a:r>
-              <a:rPr lang="ko-KR" altLang="en-US" dirty="0"/>
-              <a:t>효과</a:t>
-            </a:r>
-            <a:r>
-              <a:rPr lang="en-US" altLang="ko-KR" dirty="0"/>
-              <a:t>)	010 x 1</a:t>
-            </a:r>
-          </a:p>
-        </p:txBody>
-      </p:sp>
-      <p:sp>
-        <p:nvSpPr>
-          <p:cNvPr id="32" name="사각형: 둥근 모서리 31">
-            <a:extLst>
-              <a:ext uri="{FF2B5EF4-FFF2-40B4-BE49-F238E27FC236}">
-                <a16:creationId xmlns:a16="http://schemas.microsoft.com/office/drawing/2014/main" id="{EF2484DB-093E-0243-8B4C-9396B14EDF58}"/>
-              </a:ext>
-            </a:extLst>
-          </p:cNvPr>
-          <p:cNvSpPr/>
-          <p:nvPr/>
-        </p:nvSpPr>
-        <p:spPr>
-          <a:xfrm>
-            <a:off x="687777" y="3793034"/>
-            <a:ext cx="4488873" cy="199385"/>
-          </a:xfrm>
-          <a:prstGeom prst="roundRect">
-            <a:avLst/>
-          </a:prstGeom>
-        </p:spPr>
-        <p:style>
-          <a:lnRef idx="2">
-            <a:schemeClr val="accent1">
-              <a:shade val="15000"/>
-            </a:schemeClr>
-          </a:lnRef>
-          <a:fillRef idx="1">
-            <a:schemeClr val="accent1"/>
-          </a:fillRef>
-          <a:effectRef idx="0">
-            <a:schemeClr val="accent1"/>
-          </a:effectRef>
-          <a:fontRef idx="minor">
-            <a:schemeClr val="lt1"/>
-          </a:fontRef>
-        </p:style>
-        <p:txBody>
-          <a:bodyPr rtlCol="0" anchor="ctr"/>
-          <a:lstStyle/>
-          <a:p>
-            <a:pPr algn="ctr"/>
-            <a:r>
-              <a:rPr lang="ko-KR" altLang="en-US" dirty="0"/>
-              <a:t>빙결</a:t>
-            </a:r>
-            <a:r>
-              <a:rPr lang="en-US" altLang="ko-KR" dirty="0"/>
-              <a:t>		000 x 1</a:t>
-            </a:r>
-          </a:p>
-        </p:txBody>
-      </p:sp>
-      <p:sp>
-        <p:nvSpPr>
-          <p:cNvPr id="17" name="사각형: 둥근 모서리 16">
-            <a:extLst>
-              <a:ext uri="{FF2B5EF4-FFF2-40B4-BE49-F238E27FC236}">
-                <a16:creationId xmlns:a16="http://schemas.microsoft.com/office/drawing/2014/main" id="{67459556-AB1E-18C5-EA89-FB61D1FE14E0}"/>
-              </a:ext>
-            </a:extLst>
-          </p:cNvPr>
-          <p:cNvSpPr/>
-          <p:nvPr/>
-        </p:nvSpPr>
-        <p:spPr>
-          <a:xfrm>
-            <a:off x="687776" y="1621777"/>
-            <a:ext cx="4488873" cy="304800"/>
-          </a:xfrm>
-          <a:prstGeom prst="roundRect">
-            <a:avLst/>
-          </a:prstGeom>
-        </p:spPr>
-        <p:style>
-          <a:lnRef idx="2">
-            <a:schemeClr val="accent1">
-              <a:shade val="15000"/>
-            </a:schemeClr>
-          </a:lnRef>
-          <a:fillRef idx="1">
-            <a:schemeClr val="accent1"/>
-          </a:fillRef>
-          <a:effectRef idx="0">
-            <a:schemeClr val="accent1"/>
-          </a:effectRef>
-          <a:fontRef idx="minor">
-            <a:schemeClr val="lt1"/>
-          </a:fontRef>
-        </p:style>
-        <p:txBody>
-          <a:bodyPr rtlCol="0" anchor="ctr"/>
-          <a:lstStyle/>
-          <a:p>
-            <a:pPr algn="ctr"/>
-            <a:r>
-              <a:rPr lang="ko-KR" altLang="en-US" dirty="0"/>
-              <a:t>파괴</a:t>
-            </a:r>
-            <a:r>
-              <a:rPr lang="en-US" altLang="ko-KR" dirty="0"/>
-              <a:t>(</a:t>
-            </a:r>
-            <a:r>
-              <a:rPr lang="ko-KR" altLang="en-US" dirty="0"/>
-              <a:t>기본</a:t>
-            </a:r>
-            <a:r>
-              <a:rPr lang="en-US" altLang="ko-KR" dirty="0"/>
-              <a:t>)	100 x 1</a:t>
-            </a:r>
-          </a:p>
-        </p:txBody>
-      </p:sp>
-      <p:sp>
-        <p:nvSpPr>
-          <p:cNvPr id="35" name="사각형: 둥근 모서리 34">
-            <a:extLst>
-              <a:ext uri="{FF2B5EF4-FFF2-40B4-BE49-F238E27FC236}">
-                <a16:creationId xmlns:a16="http://schemas.microsoft.com/office/drawing/2014/main" id="{DA051EB2-2E81-8E2E-D6F9-659122089582}"/>
-              </a:ext>
-            </a:extLst>
-          </p:cNvPr>
-          <p:cNvSpPr/>
-          <p:nvPr/>
-        </p:nvSpPr>
-        <p:spPr>
-          <a:xfrm>
-            <a:off x="687775" y="3433454"/>
-            <a:ext cx="4488873" cy="304800"/>
-          </a:xfrm>
-          <a:prstGeom prst="roundRect">
-            <a:avLst/>
-          </a:prstGeom>
-        </p:spPr>
-        <p:style>
-          <a:lnRef idx="2">
-            <a:schemeClr val="accent1">
-              <a:shade val="15000"/>
-            </a:schemeClr>
-          </a:lnRef>
-          <a:fillRef idx="1">
-            <a:schemeClr val="accent1"/>
-          </a:fillRef>
-          <a:effectRef idx="0">
-            <a:schemeClr val="accent1"/>
-          </a:effectRef>
-          <a:fontRef idx="minor">
-            <a:schemeClr val="lt1"/>
-          </a:fontRef>
-        </p:style>
-        <p:txBody>
-          <a:bodyPr rtlCol="0" anchor="ctr"/>
-          <a:lstStyle/>
-          <a:p>
-            <a:pPr algn="ctr"/>
-            <a:r>
-              <a:rPr lang="ko-KR" altLang="en-US" dirty="0"/>
-              <a:t>감전</a:t>
-            </a:r>
-            <a:r>
-              <a:rPr lang="en-US" altLang="ko-KR" dirty="0"/>
-              <a:t>(</a:t>
-            </a:r>
-            <a:r>
-              <a:rPr lang="ko-KR" altLang="en-US" dirty="0"/>
-              <a:t>파괴</a:t>
-            </a:r>
-            <a:r>
-              <a:rPr lang="en-US" altLang="ko-KR" dirty="0"/>
-              <a:t>)	100 x -1</a:t>
-            </a:r>
+            <a:endParaRPr lang="ko-KR" altLang="en-US"/>
           </a:p>
         </p:txBody>
       </p:sp>
     </p:spTree>
     <p:extLst>
       <p:ext uri="{BB962C8B-B14F-4D97-AF65-F5344CB8AC3E}">
-        <p14:creationId xmlns:p14="http://schemas.microsoft.com/office/powerpoint/2010/main" val="1839257290"/>
+        <p14:creationId xmlns:p14="http://schemas.microsoft.com/office/powerpoint/2010/main" val="2102816994"/>
       </p:ext>
     </p:extLst>
   </p:cSld>
@@ -6397,7 +5884,318 @@
 </p:sld>
 </file>
 
-<file path=ppt/slides/slide5.xml><?xml version="1.0" encoding="utf-8"?>
+<file path=ppt/slides/slide6.xml><?xml version="1.0" encoding="utf-8"?>
+<p:sld xmlns:a="http://schemas.openxmlformats.org/drawingml/2006/main" xmlns:r="http://schemas.openxmlformats.org/officeDocument/2006/relationships" xmlns:p="http://schemas.openxmlformats.org/presentationml/2006/main">
+  <p:cSld>
+    <p:spTree>
+      <p:nvGrpSpPr>
+        <p:cNvPr id="1" name=""/>
+        <p:cNvGrpSpPr/>
+        <p:nvPr/>
+      </p:nvGrpSpPr>
+      <p:grpSpPr>
+        <a:xfrm>
+          <a:off x="0" y="0"/>
+          <a:ext cx="0" cy="0"/>
+          <a:chOff x="0" y="0"/>
+          <a:chExt cx="0" cy="0"/>
+        </a:xfrm>
+      </p:grpSpPr>
+      <p:pic>
+        <p:nvPicPr>
+          <p:cNvPr id="3074" name="Picture 2">
+            <a:extLst>
+              <a:ext uri="{FF2B5EF4-FFF2-40B4-BE49-F238E27FC236}">
+                <a16:creationId xmlns:a16="http://schemas.microsoft.com/office/drawing/2014/main" id="{003AC68E-E299-A51C-D536-7E9B7FF1C0EC}"/>
+              </a:ext>
+            </a:extLst>
+          </p:cNvPr>
+          <p:cNvPicPr>
+            <a:picLocks noChangeAspect="1" noChangeArrowheads="1"/>
+          </p:cNvPicPr>
+          <p:nvPr/>
+        </p:nvPicPr>
+        <p:blipFill>
+          <a:blip r:embed="rId2">
+            <a:extLst>
+              <a:ext uri="{28A0092B-C50C-407E-A947-70E740481C1C}">
+                <a14:useLocalDpi xmlns:a14="http://schemas.microsoft.com/office/drawing/2010/main" val="0"/>
+              </a:ext>
+            </a:extLst>
+          </a:blip>
+          <a:srcRect/>
+          <a:stretch>
+            <a:fillRect/>
+          </a:stretch>
+        </p:blipFill>
+        <p:spPr bwMode="auto">
+          <a:xfrm>
+            <a:off x="463452" y="1007051"/>
+            <a:ext cx="5319634" cy="2992294"/>
+          </a:xfrm>
+          <a:prstGeom prst="rect">
+            <a:avLst/>
+          </a:prstGeom>
+          <a:noFill/>
+          <a:extLst>
+            <a:ext uri="{909E8E84-426E-40DD-AFC4-6F175D3DCCD1}">
+              <a14:hiddenFill xmlns:a14="http://schemas.microsoft.com/office/drawing/2010/main">
+                <a:solidFill>
+                  <a:srgbClr val="FFFFFF"/>
+                </a:solidFill>
+              </a14:hiddenFill>
+            </a:ext>
+          </a:extLst>
+        </p:spPr>
+      </p:pic>
+      <p:sp>
+        <p:nvSpPr>
+          <p:cNvPr id="6" name="TextBox 5">
+            <a:extLst>
+              <a:ext uri="{FF2B5EF4-FFF2-40B4-BE49-F238E27FC236}">
+                <a16:creationId xmlns:a16="http://schemas.microsoft.com/office/drawing/2014/main" id="{86D82223-5778-4BED-1CB4-723F9084F492}"/>
+              </a:ext>
+            </a:extLst>
+          </p:cNvPr>
+          <p:cNvSpPr txBox="1"/>
+          <p:nvPr/>
+        </p:nvSpPr>
+        <p:spPr>
+          <a:xfrm>
+            <a:off x="463452" y="563419"/>
+            <a:ext cx="1107996" cy="369332"/>
+          </a:xfrm>
+          <a:prstGeom prst="rect">
+            <a:avLst/>
+          </a:prstGeom>
+          <a:noFill/>
+        </p:spPr>
+        <p:txBody>
+          <a:bodyPr wrap="none" rtlCol="0">
+            <a:spAutoFit/>
+          </a:bodyPr>
+          <a:lstStyle/>
+          <a:p>
+            <a:r>
+              <a:rPr lang="ko-KR" altLang="en-US" b="1" dirty="0"/>
+              <a:t>이벤트창</a:t>
+            </a:r>
+          </a:p>
+        </p:txBody>
+      </p:sp>
+      <p:sp>
+        <p:nvSpPr>
+          <p:cNvPr id="7" name="TextBox 6">
+            <a:extLst>
+              <a:ext uri="{FF2B5EF4-FFF2-40B4-BE49-F238E27FC236}">
+                <a16:creationId xmlns:a16="http://schemas.microsoft.com/office/drawing/2014/main" id="{4DFF8ECE-C7A4-2FFC-4653-AEB90315523C}"/>
+              </a:ext>
+            </a:extLst>
+          </p:cNvPr>
+          <p:cNvSpPr txBox="1"/>
+          <p:nvPr/>
+        </p:nvSpPr>
+        <p:spPr>
+          <a:xfrm>
+            <a:off x="6096000" y="563419"/>
+            <a:ext cx="5632548" cy="4801314"/>
+          </a:xfrm>
+          <a:prstGeom prst="rect">
+            <a:avLst/>
+          </a:prstGeom>
+          <a:noFill/>
+        </p:spPr>
+        <p:txBody>
+          <a:bodyPr wrap="square" rtlCol="0">
+            <a:spAutoFit/>
+          </a:bodyPr>
+          <a:lstStyle/>
+          <a:p>
+            <a:r>
+              <a:rPr lang="ko-KR" altLang="en-US" b="1" dirty="0">
+                <a:solidFill>
+                  <a:srgbClr val="FF0000"/>
+                </a:solidFill>
+              </a:rPr>
+              <a:t>게</a:t>
+            </a:r>
+            <a:r>
+              <a:rPr lang="ko-KR" altLang="en-US" b="1" dirty="0"/>
+              <a:t>임 도중에 등장하므로</a:t>
+            </a:r>
+            <a:endParaRPr lang="en-US" altLang="ko-KR" b="1" dirty="0"/>
+          </a:p>
+          <a:p>
+            <a:r>
+              <a:rPr lang="ko-KR" altLang="en-US" dirty="0"/>
+              <a:t>상단에 </a:t>
+            </a:r>
+            <a:r>
+              <a:rPr lang="en-US" altLang="ko-KR" dirty="0"/>
+              <a:t>“</a:t>
+            </a:r>
+            <a:r>
+              <a:rPr lang="ko-KR" altLang="en-US" dirty="0"/>
+              <a:t>▽</a:t>
+            </a:r>
+            <a:r>
+              <a:rPr lang="en-US" altLang="ko-KR" dirty="0"/>
+              <a:t>(</a:t>
+            </a:r>
+            <a:r>
+              <a:rPr lang="ko-KR" altLang="en-US" dirty="0"/>
+              <a:t>접기 버튼</a:t>
+            </a:r>
+            <a:r>
+              <a:rPr lang="en-US" altLang="ko-KR" dirty="0"/>
+              <a:t>)”,</a:t>
+            </a:r>
+          </a:p>
+          <a:p>
+            <a:r>
+              <a:rPr lang="ko-KR" altLang="en-US" dirty="0"/>
+              <a:t>하단에 덱 보기 버튼이 있습니다</a:t>
+            </a:r>
+            <a:r>
+              <a:rPr lang="en-US" altLang="ko-KR" dirty="0"/>
+              <a:t>.</a:t>
+            </a:r>
+          </a:p>
+          <a:p>
+            <a:endParaRPr lang="en-US" altLang="ko-KR" dirty="0"/>
+          </a:p>
+          <a:p>
+            <a:r>
+              <a:rPr lang="ko-KR" altLang="en-US" b="1" dirty="0">
+                <a:solidFill>
+                  <a:schemeClr val="accent2"/>
+                </a:solidFill>
+              </a:rPr>
+              <a:t>기</a:t>
+            </a:r>
+            <a:r>
+              <a:rPr lang="ko-KR" altLang="en-US" b="1" dirty="0"/>
+              <a:t>능</a:t>
+            </a:r>
+            <a:endParaRPr lang="en-US" altLang="ko-KR" b="1" dirty="0"/>
+          </a:p>
+          <a:p>
+            <a:endParaRPr lang="en-US" altLang="ko-KR" dirty="0"/>
+          </a:p>
+          <a:p>
+            <a:r>
+              <a:rPr lang="ko-KR" altLang="en-US" dirty="0"/>
+              <a:t>이벤트별 이미지 표기</a:t>
+            </a:r>
+            <a:endParaRPr lang="en-US" altLang="ko-KR" dirty="0"/>
+          </a:p>
+          <a:p>
+            <a:r>
+              <a:rPr lang="ko-KR" altLang="en-US" dirty="0"/>
+              <a:t>이벤트 내용 표기</a:t>
+            </a:r>
+            <a:endParaRPr lang="en-US" altLang="ko-KR" dirty="0"/>
+          </a:p>
+          <a:p>
+            <a:r>
+              <a:rPr lang="ko-KR" altLang="en-US" dirty="0"/>
+              <a:t>내용이 길어지면 스크롤 가능</a:t>
+            </a:r>
+            <a:endParaRPr lang="en-US" altLang="ko-KR" dirty="0"/>
+          </a:p>
+          <a:p>
+            <a:r>
+              <a:rPr lang="ko-KR" altLang="en-US" dirty="0"/>
+              <a:t>선택지</a:t>
+            </a:r>
+            <a:r>
+              <a:rPr lang="en-US" altLang="ko-KR" dirty="0"/>
+              <a:t>(</a:t>
+            </a:r>
+            <a:r>
+              <a:rPr lang="ko-KR" altLang="en-US" dirty="0"/>
+              <a:t>예시에선 아니지만 텍스트 최하단에 위치</a:t>
+            </a:r>
+            <a:r>
+              <a:rPr lang="en-US" altLang="ko-KR" dirty="0"/>
+              <a:t>)</a:t>
+            </a:r>
+          </a:p>
+          <a:p>
+            <a:endParaRPr lang="en-US" altLang="ko-KR" dirty="0"/>
+          </a:p>
+          <a:p>
+            <a:r>
+              <a:rPr lang="ko-KR" altLang="en-US" dirty="0"/>
+              <a:t>선택지는 텍스트 내용과 분리된 색상으로 표시</a:t>
+            </a:r>
+            <a:endParaRPr lang="en-US" altLang="ko-KR" dirty="0"/>
+          </a:p>
+          <a:p>
+            <a:r>
+              <a:rPr lang="ko-KR" altLang="en-US" dirty="0"/>
+              <a:t>마우스 오버로 강조</a:t>
+            </a:r>
+            <a:endParaRPr lang="en-US" altLang="ko-KR" dirty="0"/>
+          </a:p>
+          <a:p>
+            <a:endParaRPr lang="en-US" altLang="ko-KR" dirty="0"/>
+          </a:p>
+          <a:p>
+            <a:r>
+              <a:rPr lang="ko-KR" altLang="en-US" dirty="0"/>
+              <a:t>조건에 의해 선택 못 하는 선택지는</a:t>
+            </a:r>
+            <a:endParaRPr lang="en-US" altLang="ko-KR" dirty="0"/>
+          </a:p>
+          <a:p>
+            <a:r>
+              <a:rPr lang="ko-KR" altLang="en-US" dirty="0"/>
+              <a:t>별개 색상으로 표기하거나 </a:t>
+            </a:r>
+            <a:r>
+              <a:rPr lang="ko-KR" altLang="en-US" strike="sngStrike" dirty="0" err="1"/>
+              <a:t>줄처리</a:t>
+            </a:r>
+            <a:r>
+              <a:rPr lang="ko-KR" altLang="en-US" dirty="0"/>
+              <a:t> 할 듯</a:t>
+            </a:r>
+            <a:r>
+              <a:rPr lang="en-US" altLang="ko-KR" dirty="0"/>
+              <a:t>?</a:t>
+            </a:r>
+          </a:p>
+          <a:p>
+            <a:r>
+              <a:rPr lang="en-US" altLang="ko-KR" dirty="0"/>
+              <a:t>(</a:t>
+            </a:r>
+            <a:r>
+              <a:rPr lang="ko-KR" altLang="en-US" dirty="0"/>
+              <a:t>이야기 필요</a:t>
+            </a:r>
+            <a:r>
+              <a:rPr lang="en-US" altLang="ko-KR" dirty="0"/>
+              <a:t>)</a:t>
+            </a:r>
+          </a:p>
+        </p:txBody>
+      </p:sp>
+    </p:spTree>
+    <p:extLst>
+      <p:ext uri="{BB962C8B-B14F-4D97-AF65-F5344CB8AC3E}">
+        <p14:creationId xmlns:p14="http://schemas.microsoft.com/office/powerpoint/2010/main" val="1440800593"/>
+      </p:ext>
+    </p:extLst>
+  </p:cSld>
+  <p:clrMapOvr>
+    <a:masterClrMapping/>
+  </p:clrMapOvr>
+</p:sld>
+</file>
+
+<file path=ppt/slides/slide7.xml><?xml version="1.0" encoding="utf-8"?>
 <p:sld xmlns:a="http://schemas.openxmlformats.org/drawingml/2006/main" xmlns:r="http://schemas.openxmlformats.org/officeDocument/2006/relationships" xmlns:p="http://schemas.openxmlformats.org/presentationml/2006/main">
   <p:cSld>
     <p:spTree>

--- a/Plan/기획서/땅부수기2026 ch2.pptx
+++ b/Plan/기획서/땅부수기2026 ch2.pptx
@@ -265,7 +265,7 @@
           <a:p>
             <a:fld id="{C6FDF62A-CEF3-4A4B-9978-8C575DC3A030}" type="datetimeFigureOut">
               <a:rPr lang="ko-KR" altLang="en-US" smtClean="0"/>
-              <a:t>2026-04-15</a:t>
+              <a:t>2026-04-16</a:t>
             </a:fld>
             <a:endParaRPr lang="ko-KR" altLang="en-US"/>
           </a:p>
@@ -463,7 +463,7 @@
           <a:p>
             <a:fld id="{C6FDF62A-CEF3-4A4B-9978-8C575DC3A030}" type="datetimeFigureOut">
               <a:rPr lang="ko-KR" altLang="en-US" smtClean="0"/>
-              <a:t>2026-04-15</a:t>
+              <a:t>2026-04-16</a:t>
             </a:fld>
             <a:endParaRPr lang="ko-KR" altLang="en-US"/>
           </a:p>
@@ -671,7 +671,7 @@
           <a:p>
             <a:fld id="{C6FDF62A-CEF3-4A4B-9978-8C575DC3A030}" type="datetimeFigureOut">
               <a:rPr lang="ko-KR" altLang="en-US" smtClean="0"/>
-              <a:t>2026-04-15</a:t>
+              <a:t>2026-04-16</a:t>
             </a:fld>
             <a:endParaRPr lang="ko-KR" altLang="en-US"/>
           </a:p>
@@ -869,7 +869,7 @@
           <a:p>
             <a:fld id="{C6FDF62A-CEF3-4A4B-9978-8C575DC3A030}" type="datetimeFigureOut">
               <a:rPr lang="ko-KR" altLang="en-US" smtClean="0"/>
-              <a:t>2026-04-15</a:t>
+              <a:t>2026-04-16</a:t>
             </a:fld>
             <a:endParaRPr lang="ko-KR" altLang="en-US"/>
           </a:p>
@@ -1144,7 +1144,7 @@
           <a:p>
             <a:fld id="{C6FDF62A-CEF3-4A4B-9978-8C575DC3A030}" type="datetimeFigureOut">
               <a:rPr lang="ko-KR" altLang="en-US" smtClean="0"/>
-              <a:t>2026-04-15</a:t>
+              <a:t>2026-04-16</a:t>
             </a:fld>
             <a:endParaRPr lang="ko-KR" altLang="en-US"/>
           </a:p>
@@ -1409,7 +1409,7 @@
           <a:p>
             <a:fld id="{C6FDF62A-CEF3-4A4B-9978-8C575DC3A030}" type="datetimeFigureOut">
               <a:rPr lang="ko-KR" altLang="en-US" smtClean="0"/>
-              <a:t>2026-04-15</a:t>
+              <a:t>2026-04-16</a:t>
             </a:fld>
             <a:endParaRPr lang="ko-KR" altLang="en-US"/>
           </a:p>
@@ -1821,7 +1821,7 @@
           <a:p>
             <a:fld id="{C6FDF62A-CEF3-4A4B-9978-8C575DC3A030}" type="datetimeFigureOut">
               <a:rPr lang="ko-KR" altLang="en-US" smtClean="0"/>
-              <a:t>2026-04-15</a:t>
+              <a:t>2026-04-16</a:t>
             </a:fld>
             <a:endParaRPr lang="ko-KR" altLang="en-US"/>
           </a:p>
@@ -1962,7 +1962,7 @@
           <a:p>
             <a:fld id="{C6FDF62A-CEF3-4A4B-9978-8C575DC3A030}" type="datetimeFigureOut">
               <a:rPr lang="ko-KR" altLang="en-US" smtClean="0"/>
-              <a:t>2026-04-15</a:t>
+              <a:t>2026-04-16</a:t>
             </a:fld>
             <a:endParaRPr lang="ko-KR" altLang="en-US"/>
           </a:p>
@@ -2075,7 +2075,7 @@
           <a:p>
             <a:fld id="{C6FDF62A-CEF3-4A4B-9978-8C575DC3A030}" type="datetimeFigureOut">
               <a:rPr lang="ko-KR" altLang="en-US" smtClean="0"/>
-              <a:t>2026-04-15</a:t>
+              <a:t>2026-04-16</a:t>
             </a:fld>
             <a:endParaRPr lang="ko-KR" altLang="en-US"/>
           </a:p>
@@ -2386,7 +2386,7 @@
           <a:p>
             <a:fld id="{C6FDF62A-CEF3-4A4B-9978-8C575DC3A030}" type="datetimeFigureOut">
               <a:rPr lang="ko-KR" altLang="en-US" smtClean="0"/>
-              <a:t>2026-04-15</a:t>
+              <a:t>2026-04-16</a:t>
             </a:fld>
             <a:endParaRPr lang="ko-KR" altLang="en-US"/>
           </a:p>
@@ -2674,7 +2674,7 @@
           <a:p>
             <a:fld id="{C6FDF62A-CEF3-4A4B-9978-8C575DC3A030}" type="datetimeFigureOut">
               <a:rPr lang="ko-KR" altLang="en-US" smtClean="0"/>
-              <a:t>2026-04-15</a:t>
+              <a:t>2026-04-16</a:t>
             </a:fld>
             <a:endParaRPr lang="ko-KR" altLang="en-US"/>
           </a:p>
@@ -2915,7 +2915,7 @@
           <a:p>
             <a:fld id="{C6FDF62A-CEF3-4A4B-9978-8C575DC3A030}" type="datetimeFigureOut">
               <a:rPr lang="ko-KR" altLang="en-US" smtClean="0"/>
-              <a:t>2026-04-15</a:t>
+              <a:t>2026-04-16</a:t>
             </a:fld>
             <a:endParaRPr lang="ko-KR" altLang="en-US"/>
           </a:p>
@@ -3535,42 +3535,6 @@
           <a:chExt cx="0" cy="0"/>
         </a:xfrm>
       </p:grpSpPr>
-      <p:pic>
-        <p:nvPicPr>
-          <p:cNvPr id="7" name="그림 6">
-            <a:extLst>
-              <a:ext uri="{FF2B5EF4-FFF2-40B4-BE49-F238E27FC236}">
-                <a16:creationId xmlns:a16="http://schemas.microsoft.com/office/drawing/2014/main" id="{7BB6F7CB-F708-ED01-7B34-218CC45D054D}"/>
-              </a:ext>
-            </a:extLst>
-          </p:cNvPr>
-          <p:cNvPicPr>
-            <a:picLocks noChangeAspect="1"/>
-          </p:cNvPicPr>
-          <p:nvPr/>
-        </p:nvPicPr>
-        <p:blipFill>
-          <a:blip r:embed="rId2">
-            <a:extLst>
-              <a:ext uri="{28A0092B-C50C-407E-A947-70E740481C1C}">
-                <a14:useLocalDpi xmlns:a14="http://schemas.microsoft.com/office/drawing/2010/main" val="0"/>
-              </a:ext>
-            </a:extLst>
-          </a:blip>
-          <a:stretch>
-            <a:fillRect/>
-          </a:stretch>
-        </p:blipFill>
-        <p:spPr>
-          <a:xfrm>
-            <a:off x="634711" y="1256147"/>
-            <a:ext cx="1390650" cy="1981200"/>
-          </a:xfrm>
-          <a:prstGeom prst="rect">
-            <a:avLst/>
-          </a:prstGeom>
-        </p:spPr>
-      </p:pic>
       <p:sp>
         <p:nvSpPr>
           <p:cNvPr id="8" name="TextBox 7">
@@ -3752,7 +3716,7 @@
           <a:p>
             <a:r>
               <a:rPr lang="ko-KR" altLang="en-US" dirty="0"/>
-              <a:t>타일 파괴 실패 시</a:t>
+              <a:t>타일 파괴 실패 혹은 파괴는 안 하고 태그만 부여 시</a:t>
             </a:r>
             <a:r>
               <a:rPr lang="en-US" altLang="ko-KR" dirty="0"/>
@@ -3797,10 +3761,46 @@
       </p:sp>
       <p:pic>
         <p:nvPicPr>
-          <p:cNvPr id="14" name="그림 13">
-            <a:extLst>
-              <a:ext uri="{FF2B5EF4-FFF2-40B4-BE49-F238E27FC236}">
-                <a16:creationId xmlns:a16="http://schemas.microsoft.com/office/drawing/2014/main" id="{CC4B3D01-F753-4AB9-ACC0-C4F8A501279A}"/>
+          <p:cNvPr id="5" name="그림 4">
+            <a:extLst>
+              <a:ext uri="{FF2B5EF4-FFF2-40B4-BE49-F238E27FC236}">
+                <a16:creationId xmlns:a16="http://schemas.microsoft.com/office/drawing/2014/main" id="{D8D5229C-BA23-1A2C-B44A-1400A0C4DF13}"/>
+              </a:ext>
+            </a:extLst>
+          </p:cNvPr>
+          <p:cNvPicPr>
+            <a:picLocks noChangeAspect="1"/>
+          </p:cNvPicPr>
+          <p:nvPr/>
+        </p:nvPicPr>
+        <p:blipFill>
+          <a:blip r:embed="rId2">
+            <a:extLst>
+              <a:ext uri="{28A0092B-C50C-407E-A947-70E740481C1C}">
+                <a14:useLocalDpi xmlns:a14="http://schemas.microsoft.com/office/drawing/2010/main" val="0"/>
+              </a:ext>
+            </a:extLst>
+          </a:blip>
+          <a:stretch>
+            <a:fillRect/>
+          </a:stretch>
+        </p:blipFill>
+        <p:spPr>
+          <a:xfrm>
+            <a:off x="475286" y="1130118"/>
+            <a:ext cx="2101515" cy="2101515"/>
+          </a:xfrm>
+          <a:prstGeom prst="rect">
+            <a:avLst/>
+          </a:prstGeom>
+        </p:spPr>
+      </p:pic>
+      <p:pic>
+        <p:nvPicPr>
+          <p:cNvPr id="10" name="그림 9">
+            <a:extLst>
+              <a:ext uri="{FF2B5EF4-FFF2-40B4-BE49-F238E27FC236}">
+                <a16:creationId xmlns:a16="http://schemas.microsoft.com/office/drawing/2014/main" id="{59068B35-E3A0-BA86-9285-ABAEEE169CBD}"/>
               </a:ext>
             </a:extLst>
           </p:cNvPr>
@@ -3823,8 +3823,8 @@
         </p:blipFill>
         <p:spPr>
           <a:xfrm>
-            <a:off x="2320590" y="1256147"/>
-            <a:ext cx="1390650" cy="1981200"/>
+            <a:off x="2814926" y="1130118"/>
+            <a:ext cx="2101515" cy="2101515"/>
           </a:xfrm>
           <a:prstGeom prst="rect">
             <a:avLst/>
@@ -4690,7 +4690,7 @@
         <p:spPr>
           <a:xfrm>
             <a:off x="5648037" y="563419"/>
-            <a:ext cx="6080511" cy="3693319"/>
+            <a:ext cx="6080511" cy="5355312"/>
           </a:xfrm>
           <a:prstGeom prst="rect">
             <a:avLst/>
@@ -4952,9 +4952,87 @@
             <a:endParaRPr lang="en-US" altLang="ko-KR" dirty="0"/>
           </a:p>
           <a:p>
-            <a:r>
-              <a:rPr lang="en-US" altLang="ko-KR" dirty="0"/>
-              <a:t> </a:t>
+            <a:endParaRPr lang="en-US" altLang="ko-KR" dirty="0"/>
+          </a:p>
+          <a:p>
+            <a:r>
+              <a:rPr lang="ko-KR" altLang="en-US" b="1" dirty="0"/>
+              <a:t>별 </a:t>
+            </a:r>
+            <a:r>
+              <a:rPr lang="en-US" altLang="ko-KR" b="1" dirty="0"/>
+              <a:t>(</a:t>
+            </a:r>
+            <a:r>
+              <a:rPr lang="ko-KR" altLang="en-US" b="1" dirty="0"/>
+              <a:t>즐겨찾기</a:t>
+            </a:r>
+            <a:r>
+              <a:rPr lang="en-US" altLang="ko-KR" b="1" dirty="0"/>
+              <a:t>)</a:t>
+            </a:r>
+          </a:p>
+          <a:p>
+            <a:endParaRPr lang="en-US" altLang="ko-KR" dirty="0"/>
+          </a:p>
+          <a:p>
+            <a:r>
+              <a:rPr lang="ko-KR" altLang="en-US" dirty="0"/>
+              <a:t>유저가 즐겨찾기 한 게 맨 위로 올라옴</a:t>
+            </a:r>
+            <a:r>
+              <a:rPr lang="en-US" altLang="ko-KR" dirty="0"/>
+              <a:t>(</a:t>
+            </a:r>
+            <a:r>
+              <a:rPr lang="ko-KR" altLang="en-US" dirty="0"/>
+              <a:t>유저가 별 </a:t>
+            </a:r>
+            <a:r>
+              <a:rPr lang="ko-KR" altLang="en-US" dirty="0" err="1"/>
+              <a:t>누른거</a:t>
+            </a:r>
+            <a:r>
+              <a:rPr lang="ko-KR" altLang="en-US" dirty="0"/>
+              <a:t> 순서대로 맨 위로 올라감</a:t>
+            </a:r>
+            <a:r>
+              <a:rPr lang="en-US" altLang="ko-KR" dirty="0"/>
+              <a:t>)</a:t>
+            </a:r>
+          </a:p>
+          <a:p>
+            <a:r>
+              <a:rPr lang="ko-KR" altLang="en-US" dirty="0"/>
+              <a:t>캐릭터별 권장 태그가 기본적으로 즐겨찾기 되어있을까</a:t>
+            </a:r>
+            <a:r>
+              <a:rPr lang="en-US" altLang="ko-KR" dirty="0"/>
+              <a:t>?</a:t>
+            </a:r>
+            <a:r>
+              <a:rPr lang="ko-KR" altLang="en-US" dirty="0"/>
+              <a:t>하는 얘기가 있었음</a:t>
+            </a:r>
+            <a:r>
+              <a:rPr lang="en-US" altLang="ko-KR" dirty="0"/>
+              <a:t>(</a:t>
+            </a:r>
+            <a:r>
+              <a:rPr lang="ko-KR" altLang="en-US" dirty="0"/>
+              <a:t>중요하진 않음</a:t>
+            </a:r>
+            <a:r>
+              <a:rPr lang="en-US" altLang="ko-KR" dirty="0"/>
+              <a:t>. </a:t>
+            </a:r>
+            <a:r>
+              <a:rPr lang="ko-KR" altLang="en-US" dirty="0"/>
+              <a:t>있음 좋음</a:t>
+            </a:r>
+            <a:r>
+              <a:rPr lang="en-US" altLang="ko-KR" dirty="0"/>
+              <a:t>)</a:t>
             </a:r>
           </a:p>
         </p:txBody>
@@ -5040,7 +5118,7 @@
         <p:spPr>
           <a:xfrm>
             <a:off x="463452" y="563419"/>
-            <a:ext cx="1420582" cy="369332"/>
+            <a:ext cx="2076548" cy="369332"/>
           </a:xfrm>
           <a:prstGeom prst="rect">
             <a:avLst/>
@@ -5048,7 +5126,7 @@
           <a:noFill/>
         </p:spPr>
         <p:txBody>
-          <a:bodyPr wrap="none" rtlCol="0">
+          <a:bodyPr wrap="square" rtlCol="0">
             <a:spAutoFit/>
           </a:bodyPr>
           <a:lstStyle/>
@@ -5110,7 +5188,7 @@
         <p:spPr>
           <a:xfrm>
             <a:off x="6096000" y="563419"/>
-            <a:ext cx="5632548" cy="5078313"/>
+            <a:ext cx="5632548" cy="5355312"/>
           </a:xfrm>
           <a:prstGeom prst="rect">
             <a:avLst/>
@@ -5215,6 +5293,20 @@
               <a:t>손패 정도만 살펴볼 수 있고 게임 진행은 불가능</a:t>
             </a:r>
             <a:endParaRPr lang="en-US" altLang="ko-KR" dirty="0"/>
+          </a:p>
+          <a:p>
+            <a:r>
+              <a:rPr lang="en-US" altLang="ko-KR" dirty="0"/>
+              <a:t>(</a:t>
+            </a:r>
+            <a:r>
+              <a:rPr lang="ko-KR" altLang="en-US" dirty="0"/>
+              <a:t>이건 보물같이 게임 도중 등장하는 상황에서만</a:t>
+            </a:r>
+            <a:r>
+              <a:rPr lang="en-US" altLang="ko-KR" dirty="0"/>
+              <a:t>)</a:t>
+            </a:r>
           </a:p>
           <a:p>
             <a:endParaRPr lang="en-US" altLang="ko-KR" dirty="0"/>
@@ -5998,7 +6090,7 @@
         <p:spPr>
           <a:xfrm>
             <a:off x="6096000" y="563419"/>
-            <a:ext cx="5632548" cy="4801314"/>
+            <a:ext cx="5632548" cy="4247317"/>
           </a:xfrm>
           <a:prstGeom prst="rect">
             <a:avLst/>
@@ -6146,12 +6238,9 @@
               <a:rPr lang="ko-KR" altLang="en-US" dirty="0"/>
               <a:t>조건에 의해 선택 못 하는 선택지는</a:t>
             </a:r>
-            <a:endParaRPr lang="en-US" altLang="ko-KR" dirty="0"/>
-          </a:p>
-          <a:p>
-            <a:r>
-              <a:rPr lang="ko-KR" altLang="en-US" dirty="0"/>
-              <a:t>별개 색상으로 표기하거나 </a:t>
+            <a:r>
+              <a:rPr lang="en-US" altLang="ko-KR" dirty="0"/>
+              <a:t> </a:t>
             </a:r>
             <a:r>
               <a:rPr lang="ko-KR" altLang="en-US" strike="sngStrike" dirty="0" err="1"/>
@@ -6159,26 +6248,9 @@
             </a:r>
             <a:r>
               <a:rPr lang="ko-KR" altLang="en-US" dirty="0"/>
-              <a:t> 할 듯</a:t>
-            </a:r>
-            <a:r>
-              <a:rPr lang="en-US" altLang="ko-KR" dirty="0"/>
-              <a:t>?</a:t>
-            </a:r>
-          </a:p>
-          <a:p>
-            <a:r>
-              <a:rPr lang="en-US" altLang="ko-KR" dirty="0"/>
-              <a:t>(</a:t>
-            </a:r>
-            <a:r>
-              <a:rPr lang="ko-KR" altLang="en-US" dirty="0"/>
-              <a:t>이야기 필요</a:t>
-            </a:r>
-            <a:r>
-              <a:rPr lang="en-US" altLang="ko-KR" dirty="0"/>
-              <a:t>)</a:t>
-            </a:r>
+              <a:t> 할거임</a:t>
+            </a:r>
+            <a:endParaRPr lang="en-US" altLang="ko-KR" dirty="0"/>
           </a:p>
         </p:txBody>
       </p:sp>

--- a/Plan/기획서/땅부수기2026 ch2.pptx
+++ b/Plan/기획서/땅부수기2026 ch2.pptx
@@ -10,8 +10,9 @@
     <p:sldId id="258" r:id="rId4"/>
     <p:sldId id="259" r:id="rId5"/>
     <p:sldId id="261" r:id="rId6"/>
-    <p:sldId id="262" r:id="rId7"/>
-    <p:sldId id="260" r:id="rId8"/>
+    <p:sldId id="263" r:id="rId7"/>
+    <p:sldId id="262" r:id="rId8"/>
+    <p:sldId id="260" r:id="rId9"/>
   </p:sldIdLst>
   <p:sldSz cx="12192000" cy="6858000"/>
   <p:notesSz cx="6858000" cy="9144000"/>
@@ -265,7 +266,7 @@
           <a:p>
             <a:fld id="{C6FDF62A-CEF3-4A4B-9978-8C575DC3A030}" type="datetimeFigureOut">
               <a:rPr lang="ko-KR" altLang="en-US" smtClean="0"/>
-              <a:t>2026-04-16</a:t>
+              <a:t>2026-04-17</a:t>
             </a:fld>
             <a:endParaRPr lang="ko-KR" altLang="en-US"/>
           </a:p>
@@ -463,7 +464,7 @@
           <a:p>
             <a:fld id="{C6FDF62A-CEF3-4A4B-9978-8C575DC3A030}" type="datetimeFigureOut">
               <a:rPr lang="ko-KR" altLang="en-US" smtClean="0"/>
-              <a:t>2026-04-16</a:t>
+              <a:t>2026-04-17</a:t>
             </a:fld>
             <a:endParaRPr lang="ko-KR" altLang="en-US"/>
           </a:p>
@@ -671,7 +672,7 @@
           <a:p>
             <a:fld id="{C6FDF62A-CEF3-4A4B-9978-8C575DC3A030}" type="datetimeFigureOut">
               <a:rPr lang="ko-KR" altLang="en-US" smtClean="0"/>
-              <a:t>2026-04-16</a:t>
+              <a:t>2026-04-17</a:t>
             </a:fld>
             <a:endParaRPr lang="ko-KR" altLang="en-US"/>
           </a:p>
@@ -869,7 +870,7 @@
           <a:p>
             <a:fld id="{C6FDF62A-CEF3-4A4B-9978-8C575DC3A030}" type="datetimeFigureOut">
               <a:rPr lang="ko-KR" altLang="en-US" smtClean="0"/>
-              <a:t>2026-04-16</a:t>
+              <a:t>2026-04-17</a:t>
             </a:fld>
             <a:endParaRPr lang="ko-KR" altLang="en-US"/>
           </a:p>
@@ -1144,7 +1145,7 @@
           <a:p>
             <a:fld id="{C6FDF62A-CEF3-4A4B-9978-8C575DC3A030}" type="datetimeFigureOut">
               <a:rPr lang="ko-KR" altLang="en-US" smtClean="0"/>
-              <a:t>2026-04-16</a:t>
+              <a:t>2026-04-17</a:t>
             </a:fld>
             <a:endParaRPr lang="ko-KR" altLang="en-US"/>
           </a:p>
@@ -1409,7 +1410,7 @@
           <a:p>
             <a:fld id="{C6FDF62A-CEF3-4A4B-9978-8C575DC3A030}" type="datetimeFigureOut">
               <a:rPr lang="ko-KR" altLang="en-US" smtClean="0"/>
-              <a:t>2026-04-16</a:t>
+              <a:t>2026-04-17</a:t>
             </a:fld>
             <a:endParaRPr lang="ko-KR" altLang="en-US"/>
           </a:p>
@@ -1821,7 +1822,7 @@
           <a:p>
             <a:fld id="{C6FDF62A-CEF3-4A4B-9978-8C575DC3A030}" type="datetimeFigureOut">
               <a:rPr lang="ko-KR" altLang="en-US" smtClean="0"/>
-              <a:t>2026-04-16</a:t>
+              <a:t>2026-04-17</a:t>
             </a:fld>
             <a:endParaRPr lang="ko-KR" altLang="en-US"/>
           </a:p>
@@ -1962,7 +1963,7 @@
           <a:p>
             <a:fld id="{C6FDF62A-CEF3-4A4B-9978-8C575DC3A030}" type="datetimeFigureOut">
               <a:rPr lang="ko-KR" altLang="en-US" smtClean="0"/>
-              <a:t>2026-04-16</a:t>
+              <a:t>2026-04-17</a:t>
             </a:fld>
             <a:endParaRPr lang="ko-KR" altLang="en-US"/>
           </a:p>
@@ -2075,7 +2076,7 @@
           <a:p>
             <a:fld id="{C6FDF62A-CEF3-4A4B-9978-8C575DC3A030}" type="datetimeFigureOut">
               <a:rPr lang="ko-KR" altLang="en-US" smtClean="0"/>
-              <a:t>2026-04-16</a:t>
+              <a:t>2026-04-17</a:t>
             </a:fld>
             <a:endParaRPr lang="ko-KR" altLang="en-US"/>
           </a:p>
@@ -2386,7 +2387,7 @@
           <a:p>
             <a:fld id="{C6FDF62A-CEF3-4A4B-9978-8C575DC3A030}" type="datetimeFigureOut">
               <a:rPr lang="ko-KR" altLang="en-US" smtClean="0"/>
-              <a:t>2026-04-16</a:t>
+              <a:t>2026-04-17</a:t>
             </a:fld>
             <a:endParaRPr lang="ko-KR" altLang="en-US"/>
           </a:p>
@@ -2674,7 +2675,7 @@
           <a:p>
             <a:fld id="{C6FDF62A-CEF3-4A4B-9978-8C575DC3A030}" type="datetimeFigureOut">
               <a:rPr lang="ko-KR" altLang="en-US" smtClean="0"/>
-              <a:t>2026-04-16</a:t>
+              <a:t>2026-04-17</a:t>
             </a:fld>
             <a:endParaRPr lang="ko-KR" altLang="en-US"/>
           </a:p>
@@ -2915,7 +2916,7 @@
           <a:p>
             <a:fld id="{C6FDF62A-CEF3-4A4B-9978-8C575DC3A030}" type="datetimeFigureOut">
               <a:rPr lang="ko-KR" altLang="en-US" smtClean="0"/>
-              <a:t>2026-04-16</a:t>
+              <a:t>2026-04-17</a:t>
             </a:fld>
             <a:endParaRPr lang="ko-KR" altLang="en-US"/>
           </a:p>
@@ -3347,7 +3348,7 @@
         <p:spPr>
           <a:xfrm>
             <a:off x="748145" y="591127"/>
-            <a:ext cx="3712876" cy="4801314"/>
+            <a:ext cx="3712876" cy="5355312"/>
           </a:xfrm>
           <a:prstGeom prst="rect">
             <a:avLst/>
@@ -3394,7 +3395,9 @@
               <a:t>– </a:t>
             </a:r>
             <a:r>
-              <a:rPr lang="ko-KR" altLang="en-US" dirty="0"/>
+              <a:rPr lang="ko-KR" altLang="en-US" dirty="0">
+                <a:hlinkClick r:id="rId2" action="ppaction://hlinksldjump"/>
+              </a:rPr>
               <a:t>타일 타격 연출</a:t>
             </a:r>
             <a:endParaRPr lang="en-US" altLang="ko-KR" dirty="0"/>
@@ -3405,8 +3408,18 @@
               <a:t>	</a:t>
             </a:r>
             <a:r>
-              <a:rPr lang="ko-KR" altLang="en-US" dirty="0" err="1"/>
-              <a:t>인게임</a:t>
+              <a:rPr lang="ko-KR" altLang="en-US" dirty="0"/>
+              <a:t>인 게임 </a:t>
+            </a:r>
+            <a:r>
+              <a:rPr lang="en-US" altLang="ko-KR" dirty="0"/>
+              <a:t>– </a:t>
+            </a:r>
+            <a:r>
+              <a:rPr lang="ko-KR" altLang="en-US" dirty="0">
+                <a:hlinkClick r:id="rId3" action="ppaction://hlinksldjump"/>
+              </a:rPr>
+              <a:t>팝업 접기</a:t>
             </a:r>
             <a:endParaRPr lang="en-US" altLang="ko-KR" dirty="0"/>
           </a:p>
@@ -3443,6 +3456,74 @@
             <a:r>
               <a:rPr lang="ko-KR" altLang="en-US" dirty="0"/>
               <a:t>추가 기능</a:t>
+            </a:r>
+            <a:endParaRPr lang="en-US" altLang="ko-KR" dirty="0"/>
+          </a:p>
+          <a:p>
+            <a:pPr lvl="2"/>
+            <a:r>
+              <a:rPr lang="ko-KR" altLang="en-US" dirty="0">
+                <a:hlinkClick r:id="rId4" action="ppaction://hlinksldjump"/>
+              </a:rPr>
+              <a:t>점수 </a:t>
+            </a:r>
+            <a:r>
+              <a:rPr lang="ko-KR" altLang="en-US" dirty="0" err="1">
+                <a:hlinkClick r:id="rId4" action="ppaction://hlinksldjump"/>
+              </a:rPr>
+              <a:t>정보표</a:t>
+            </a:r>
+            <a:r>
+              <a:rPr lang="en-US" altLang="ko-KR" dirty="0">
+                <a:hlinkClick r:id="rId4" action="ppaction://hlinksldjump"/>
+              </a:rPr>
+              <a:t>(</a:t>
+            </a:r>
+            <a:r>
+              <a:rPr lang="ko-KR" altLang="en-US" dirty="0">
+                <a:hlinkClick r:id="rId4" action="ppaction://hlinksldjump"/>
+              </a:rPr>
+              <a:t>태그</a:t>
+            </a:r>
+            <a:r>
+              <a:rPr lang="en-US" altLang="ko-KR" dirty="0">
+                <a:hlinkClick r:id="rId4" action="ppaction://hlinksldjump"/>
+              </a:rPr>
+              <a:t>)</a:t>
+            </a:r>
+            <a:endParaRPr lang="en-US" altLang="ko-KR" dirty="0"/>
+          </a:p>
+          <a:p>
+            <a:pPr lvl="2"/>
+            <a:r>
+              <a:rPr lang="ko-KR" altLang="en-US" dirty="0">
+                <a:hlinkClick r:id="rId5" action="ppaction://hlinksldjump"/>
+              </a:rPr>
+              <a:t>점수 </a:t>
+            </a:r>
+            <a:r>
+              <a:rPr lang="ko-KR" altLang="en-US" dirty="0" err="1">
+                <a:hlinkClick r:id="rId5" action="ppaction://hlinksldjump"/>
+              </a:rPr>
+              <a:t>정보표</a:t>
+            </a:r>
+            <a:r>
+              <a:rPr lang="en-US" altLang="ko-KR" dirty="0">
+                <a:hlinkClick r:id="rId5" action="ppaction://hlinksldjump"/>
+              </a:rPr>
+              <a:t>(</a:t>
+            </a:r>
+            <a:r>
+              <a:rPr lang="ko-KR" altLang="en-US" dirty="0">
+                <a:hlinkClick r:id="rId5" action="ppaction://hlinksldjump"/>
+              </a:rPr>
+              <a:t>타일</a:t>
+            </a:r>
+            <a:r>
+              <a:rPr lang="en-US" altLang="ko-KR" dirty="0">
+                <a:hlinkClick r:id="rId5" action="ppaction://hlinksldjump"/>
+              </a:rPr>
+              <a:t>)</a:t>
             </a:r>
             <a:endParaRPr lang="en-US" altLang="ko-KR" dirty="0"/>
           </a:p>
@@ -5187,8 +5268,8 @@
         </p:nvSpPr>
         <p:spPr>
           <a:xfrm>
-            <a:off x="6096000" y="563419"/>
-            <a:ext cx="5632548" cy="5355312"/>
+            <a:off x="6096000" y="498764"/>
+            <a:ext cx="5632548" cy="6186309"/>
           </a:xfrm>
           <a:prstGeom prst="rect">
             <a:avLst/>
@@ -5424,6 +5505,38 @@
               <a:t>보상 내용에 골드 추가</a:t>
             </a:r>
             <a:endParaRPr lang="en-US" altLang="ko-KR" dirty="0"/>
+          </a:p>
+          <a:p>
+            <a:endParaRPr lang="en-US" altLang="ko-KR" dirty="0"/>
+          </a:p>
+          <a:p>
+            <a:r>
+              <a:rPr lang="ko-KR" altLang="en-US" dirty="0"/>
+              <a:t>텍스트 버튼</a:t>
+            </a:r>
+            <a:r>
+              <a:rPr lang="en-US" altLang="ko-KR" dirty="0"/>
+              <a:t>(         )</a:t>
+            </a:r>
+            <a:r>
+              <a:rPr lang="ko-KR" altLang="en-US" dirty="0"/>
+              <a:t>은 마우스 오버 시 밑줄로 강조</a:t>
+            </a:r>
+            <a:endParaRPr lang="en-US" altLang="ko-KR" dirty="0"/>
+          </a:p>
+          <a:p>
+            <a:r>
+              <a:rPr lang="en-US" altLang="ko-KR" dirty="0"/>
+              <a:t>(</a:t>
+            </a:r>
+            <a:r>
+              <a:rPr lang="ko-KR" altLang="en-US" dirty="0"/>
+              <a:t>화면의            처럼</a:t>
+            </a:r>
+            <a:r>
+              <a:rPr lang="en-US" altLang="ko-KR" dirty="0"/>
+              <a:t>)</a:t>
+            </a:r>
           </a:p>
         </p:txBody>
       </p:sp>
@@ -5963,6 +6076,228 @@
           </a:p>
         </p:txBody>
       </p:sp>
+      <p:pic>
+        <p:nvPicPr>
+          <p:cNvPr id="3" name="그림 2">
+            <a:extLst>
+              <a:ext uri="{FF2B5EF4-FFF2-40B4-BE49-F238E27FC236}">
+                <a16:creationId xmlns:a16="http://schemas.microsoft.com/office/drawing/2014/main" id="{3FB8E10C-0550-C43C-1436-8F780562C189}"/>
+              </a:ext>
+            </a:extLst>
+          </p:cNvPr>
+          <p:cNvPicPr>
+            <a:picLocks noChangeAspect="1"/>
+          </p:cNvPicPr>
+          <p:nvPr/>
+        </p:nvPicPr>
+        <p:blipFill>
+          <a:blip r:embed="rId3">
+            <a:extLst>
+              <a:ext uri="{28A0092B-C50C-407E-A947-70E740481C1C}">
+                <a14:useLocalDpi xmlns:a14="http://schemas.microsoft.com/office/drawing/2010/main" val="0"/>
+              </a:ext>
+            </a:extLst>
+          </a:blip>
+          <a:stretch>
+            <a:fillRect/>
+          </a:stretch>
+        </p:blipFill>
+        <p:spPr>
+          <a:xfrm>
+            <a:off x="7579378" y="5942200"/>
+            <a:ext cx="571500" cy="123825"/>
+          </a:xfrm>
+          <a:prstGeom prst="rect">
+            <a:avLst/>
+          </a:prstGeom>
+        </p:spPr>
+      </p:pic>
+      <p:pic>
+        <p:nvPicPr>
+          <p:cNvPr id="9" name="그림 8">
+            <a:extLst>
+              <a:ext uri="{FF2B5EF4-FFF2-40B4-BE49-F238E27FC236}">
+                <a16:creationId xmlns:a16="http://schemas.microsoft.com/office/drawing/2014/main" id="{20BA9FB4-BA95-4DA8-54B2-B329E84D677D}"/>
+              </a:ext>
+            </a:extLst>
+          </p:cNvPr>
+          <p:cNvPicPr>
+            <a:picLocks noChangeAspect="1"/>
+          </p:cNvPicPr>
+          <p:nvPr/>
+        </p:nvPicPr>
+        <p:blipFill>
+          <a:blip r:embed="rId4">
+            <a:extLst>
+              <a:ext uri="{28A0092B-C50C-407E-A947-70E740481C1C}">
+                <a14:useLocalDpi xmlns:a14="http://schemas.microsoft.com/office/drawing/2010/main" val="0"/>
+              </a:ext>
+            </a:extLst>
+          </a:blip>
+          <a:stretch>
+            <a:fillRect/>
+          </a:stretch>
+        </p:blipFill>
+        <p:spPr>
+          <a:xfrm>
+            <a:off x="7686176" y="6073865"/>
+            <a:ext cx="400050" cy="114300"/>
+          </a:xfrm>
+          <a:prstGeom prst="rect">
+            <a:avLst/>
+          </a:prstGeom>
+        </p:spPr>
+      </p:pic>
+      <p:sp>
+        <p:nvSpPr>
+          <p:cNvPr id="11" name="TextBox 10">
+            <a:extLst>
+              <a:ext uri="{FF2B5EF4-FFF2-40B4-BE49-F238E27FC236}">
+                <a16:creationId xmlns:a16="http://schemas.microsoft.com/office/drawing/2014/main" id="{4E827A0D-6C5D-3751-5362-192685129FD3}"/>
+              </a:ext>
+            </a:extLst>
+          </p:cNvPr>
+          <p:cNvSpPr txBox="1"/>
+          <p:nvPr/>
+        </p:nvSpPr>
+        <p:spPr>
+          <a:xfrm>
+            <a:off x="5067331" y="4770935"/>
+            <a:ext cx="5632548" cy="276999"/>
+          </a:xfrm>
+          <a:prstGeom prst="rect">
+            <a:avLst/>
+          </a:prstGeom>
+          <a:noFill/>
+        </p:spPr>
+        <p:txBody>
+          <a:bodyPr wrap="square" rtlCol="0">
+            <a:spAutoFit/>
+          </a:bodyPr>
+          <a:lstStyle/>
+          <a:p>
+            <a:r>
+              <a:rPr lang="en-US" altLang="ko-KR" sz="1200" dirty="0"/>
+              <a:t>Select all</a:t>
+            </a:r>
+            <a:r>
+              <a:rPr lang="ko-KR" altLang="en-US" sz="1200" dirty="0"/>
+              <a:t>과 </a:t>
+            </a:r>
+            <a:r>
+              <a:rPr lang="en-US" altLang="ko-KR" sz="1200" dirty="0"/>
+              <a:t>next</a:t>
+            </a:r>
+            <a:r>
+              <a:rPr lang="ko-KR" altLang="en-US" sz="1200" dirty="0"/>
+              <a:t>→</a:t>
+            </a:r>
+            <a:endParaRPr lang="en-US" altLang="ko-KR" sz="1200" dirty="0"/>
+          </a:p>
+        </p:txBody>
+      </p:sp>
+      <p:pic>
+        <p:nvPicPr>
+          <p:cNvPr id="19" name="그림 18">
+            <a:extLst>
+              <a:ext uri="{FF2B5EF4-FFF2-40B4-BE49-F238E27FC236}">
+                <a16:creationId xmlns:a16="http://schemas.microsoft.com/office/drawing/2014/main" id="{CB8C2ED8-19D8-1958-71D9-B08EBC83C8BB}"/>
+              </a:ext>
+            </a:extLst>
+          </p:cNvPr>
+          <p:cNvPicPr>
+            <a:picLocks noChangeAspect="1"/>
+          </p:cNvPicPr>
+          <p:nvPr/>
+        </p:nvPicPr>
+        <p:blipFill>
+          <a:blip r:embed="rId5">
+            <a:extLst>
+              <a:ext uri="{28A0092B-C50C-407E-A947-70E740481C1C}">
+                <a14:useLocalDpi xmlns:a14="http://schemas.microsoft.com/office/drawing/2010/main" val="0"/>
+              </a:ext>
+            </a:extLst>
+          </a:blip>
+          <a:stretch>
+            <a:fillRect/>
+          </a:stretch>
+        </p:blipFill>
+        <p:spPr>
+          <a:xfrm>
+            <a:off x="2746950" y="5745305"/>
+            <a:ext cx="361950" cy="142875"/>
+          </a:xfrm>
+          <a:prstGeom prst="rect">
+            <a:avLst/>
+          </a:prstGeom>
+        </p:spPr>
+      </p:pic>
+      <p:pic>
+        <p:nvPicPr>
+          <p:cNvPr id="20" name="그림 19">
+            <a:extLst>
+              <a:ext uri="{FF2B5EF4-FFF2-40B4-BE49-F238E27FC236}">
+                <a16:creationId xmlns:a16="http://schemas.microsoft.com/office/drawing/2014/main" id="{34B90EFF-89C7-9F20-9320-4D0E17D7A055}"/>
+              </a:ext>
+            </a:extLst>
+          </p:cNvPr>
+          <p:cNvPicPr>
+            <a:picLocks noChangeAspect="1"/>
+          </p:cNvPicPr>
+          <p:nvPr/>
+        </p:nvPicPr>
+        <p:blipFill>
+          <a:blip r:embed="rId5">
+            <a:extLst>
+              <a:ext uri="{28A0092B-C50C-407E-A947-70E740481C1C}">
+                <a14:useLocalDpi xmlns:a14="http://schemas.microsoft.com/office/drawing/2010/main" val="0"/>
+              </a:ext>
+            </a:extLst>
+          </a:blip>
+          <a:stretch>
+            <a:fillRect/>
+          </a:stretch>
+        </p:blipFill>
+        <p:spPr>
+          <a:xfrm>
+            <a:off x="7686176" y="6206637"/>
+            <a:ext cx="361950" cy="142875"/>
+          </a:xfrm>
+          <a:prstGeom prst="rect">
+            <a:avLst/>
+          </a:prstGeom>
+        </p:spPr>
+      </p:pic>
+      <p:pic>
+        <p:nvPicPr>
+          <p:cNvPr id="22" name="그림 21">
+            <a:extLst>
+              <a:ext uri="{FF2B5EF4-FFF2-40B4-BE49-F238E27FC236}">
+                <a16:creationId xmlns:a16="http://schemas.microsoft.com/office/drawing/2014/main" id="{42DE3363-924C-4955-4180-D22F18FC28CD}"/>
+              </a:ext>
+            </a:extLst>
+          </p:cNvPr>
+          <p:cNvPicPr>
+            <a:picLocks noChangeAspect="1"/>
+          </p:cNvPicPr>
+          <p:nvPr/>
+        </p:nvPicPr>
+        <p:blipFill>
+          <a:blip r:embed="rId6"/>
+          <a:stretch>
+            <a:fillRect/>
+          </a:stretch>
+        </p:blipFill>
+        <p:spPr>
+          <a:xfrm>
+            <a:off x="6997656" y="6361057"/>
+            <a:ext cx="885949" cy="247685"/>
+          </a:xfrm>
+          <a:prstGeom prst="rect">
+            <a:avLst/>
+          </a:prstGeom>
+        </p:spPr>
+      </p:pic>
     </p:spTree>
     <p:extLst>
       <p:ext uri="{BB962C8B-B14F-4D97-AF65-F5344CB8AC3E}">
@@ -5977,6 +6312,525 @@
 </file>
 
 <file path=ppt/slides/slide6.xml><?xml version="1.0" encoding="utf-8"?>
+<p:sld xmlns:a="http://schemas.openxmlformats.org/drawingml/2006/main" xmlns:r="http://schemas.openxmlformats.org/officeDocument/2006/relationships" xmlns:p="http://schemas.openxmlformats.org/presentationml/2006/main">
+  <p:cSld>
+    <p:spTree>
+      <p:nvGrpSpPr>
+        <p:cNvPr id="1" name="">
+          <a:extLst>
+            <a:ext uri="{FF2B5EF4-FFF2-40B4-BE49-F238E27FC236}">
+              <a16:creationId xmlns:a16="http://schemas.microsoft.com/office/drawing/2014/main" id="{22B1FFCF-0173-664E-02CD-62329083164B}"/>
+            </a:ext>
+          </a:extLst>
+        </p:cNvPr>
+        <p:cNvGrpSpPr/>
+        <p:nvPr/>
+      </p:nvGrpSpPr>
+      <p:grpSpPr>
+        <a:xfrm>
+          <a:off x="0" y="0"/>
+          <a:ext cx="0" cy="0"/>
+          <a:chOff x="0" y="0"/>
+          <a:chExt cx="0" cy="0"/>
+        </a:xfrm>
+      </p:grpSpPr>
+      <p:sp>
+        <p:nvSpPr>
+          <p:cNvPr id="8" name="TextBox 7">
+            <a:extLst>
+              <a:ext uri="{FF2B5EF4-FFF2-40B4-BE49-F238E27FC236}">
+                <a16:creationId xmlns:a16="http://schemas.microsoft.com/office/drawing/2014/main" id="{4B12B82F-4E26-76D1-C2A8-19F2A1D427DE}"/>
+              </a:ext>
+            </a:extLst>
+          </p:cNvPr>
+          <p:cNvSpPr txBox="1"/>
+          <p:nvPr/>
+        </p:nvSpPr>
+        <p:spPr>
+          <a:xfrm>
+            <a:off x="463452" y="563419"/>
+            <a:ext cx="2076548" cy="369332"/>
+          </a:xfrm>
+          <a:prstGeom prst="rect">
+            <a:avLst/>
+          </a:prstGeom>
+          <a:noFill/>
+        </p:spPr>
+        <p:txBody>
+          <a:bodyPr wrap="square" rtlCol="0">
+            <a:spAutoFit/>
+          </a:bodyPr>
+          <a:lstStyle/>
+          <a:p>
+            <a:r>
+              <a:rPr lang="ko-KR" altLang="en-US" b="1" dirty="0"/>
+              <a:t>팝업 접기</a:t>
+            </a:r>
+          </a:p>
+        </p:txBody>
+      </p:sp>
+      <p:pic>
+        <p:nvPicPr>
+          <p:cNvPr id="3" name="그림 2">
+            <a:extLst>
+              <a:ext uri="{FF2B5EF4-FFF2-40B4-BE49-F238E27FC236}">
+                <a16:creationId xmlns:a16="http://schemas.microsoft.com/office/drawing/2014/main" id="{12FC37F6-4F7D-792F-A53B-93FD55C60B35}"/>
+              </a:ext>
+            </a:extLst>
+          </p:cNvPr>
+          <p:cNvPicPr>
+            <a:picLocks noChangeAspect="1"/>
+          </p:cNvPicPr>
+          <p:nvPr/>
+        </p:nvPicPr>
+        <p:blipFill>
+          <a:blip r:embed="rId2">
+            <a:extLst>
+              <a:ext uri="{28A0092B-C50C-407E-A947-70E740481C1C}">
+                <a14:useLocalDpi xmlns:a14="http://schemas.microsoft.com/office/drawing/2010/main" val="0"/>
+              </a:ext>
+            </a:extLst>
+          </a:blip>
+          <a:stretch>
+            <a:fillRect/>
+          </a:stretch>
+        </p:blipFill>
+        <p:spPr>
+          <a:xfrm>
+            <a:off x="463549" y="1136217"/>
+            <a:ext cx="4497637" cy="969674"/>
+          </a:xfrm>
+          <a:prstGeom prst="rect">
+            <a:avLst/>
+          </a:prstGeom>
+        </p:spPr>
+      </p:pic>
+      <p:sp>
+        <p:nvSpPr>
+          <p:cNvPr id="4" name="TextBox 3">
+            <a:extLst>
+              <a:ext uri="{FF2B5EF4-FFF2-40B4-BE49-F238E27FC236}">
+                <a16:creationId xmlns:a16="http://schemas.microsoft.com/office/drawing/2014/main" id="{B709AC6A-2D6A-00A1-45B7-55DAFFBCD4FB}"/>
+              </a:ext>
+            </a:extLst>
+          </p:cNvPr>
+          <p:cNvSpPr txBox="1"/>
+          <p:nvPr/>
+        </p:nvSpPr>
+        <p:spPr>
+          <a:xfrm>
+            <a:off x="5089237" y="1254099"/>
+            <a:ext cx="5632548" cy="923330"/>
+          </a:xfrm>
+          <a:prstGeom prst="rect">
+            <a:avLst/>
+          </a:prstGeom>
+          <a:noFill/>
+        </p:spPr>
+        <p:txBody>
+          <a:bodyPr wrap="square" rtlCol="0">
+            <a:spAutoFit/>
+          </a:bodyPr>
+          <a:lstStyle/>
+          <a:p>
+            <a:r>
+              <a:rPr lang="ko-KR" altLang="en-US" b="1" dirty="0"/>
+              <a:t>▽접기 버튼</a:t>
+            </a:r>
+            <a:endParaRPr lang="en-US" altLang="ko-KR" b="1" dirty="0"/>
+          </a:p>
+          <a:p>
+            <a:r>
+              <a:rPr lang="ko-KR" altLang="en-US" dirty="0"/>
+              <a:t>빨간색 라인 너머</a:t>
+            </a:r>
+            <a:r>
+              <a:rPr lang="en-US" altLang="ko-KR" dirty="0"/>
+              <a:t> (</a:t>
+            </a:r>
+            <a:r>
+              <a:rPr lang="ko-KR" altLang="en-US" dirty="0"/>
+              <a:t>클릭 범위</a:t>
+            </a:r>
+            <a:r>
+              <a:rPr lang="en-US" altLang="ko-KR" dirty="0"/>
+              <a:t>)</a:t>
+            </a:r>
+            <a:r>
+              <a:rPr lang="ko-KR" altLang="en-US" dirty="0"/>
+              <a:t>로 마우스를 올리면</a:t>
+            </a:r>
+            <a:endParaRPr lang="en-US" altLang="ko-KR" dirty="0"/>
+          </a:p>
+          <a:p>
+            <a:r>
+              <a:rPr lang="ko-KR" altLang="en-US" dirty="0"/>
+              <a:t>튀어나오는 연출</a:t>
+            </a:r>
+            <a:endParaRPr lang="en-US" altLang="ko-KR" dirty="0"/>
+          </a:p>
+        </p:txBody>
+      </p:sp>
+      <p:pic>
+        <p:nvPicPr>
+          <p:cNvPr id="19" name="그림 18">
+            <a:extLst>
+              <a:ext uri="{FF2B5EF4-FFF2-40B4-BE49-F238E27FC236}">
+                <a16:creationId xmlns:a16="http://schemas.microsoft.com/office/drawing/2014/main" id="{9082E08D-C445-70FC-EE19-6443344B3D82}"/>
+              </a:ext>
+            </a:extLst>
+          </p:cNvPr>
+          <p:cNvPicPr>
+            <a:picLocks noChangeAspect="1"/>
+          </p:cNvPicPr>
+          <p:nvPr/>
+        </p:nvPicPr>
+        <p:blipFill>
+          <a:blip r:embed="rId3"/>
+          <a:stretch>
+            <a:fillRect/>
+          </a:stretch>
+        </p:blipFill>
+        <p:spPr>
+          <a:xfrm>
+            <a:off x="463452" y="2341299"/>
+            <a:ext cx="5004475" cy="2819275"/>
+          </a:xfrm>
+          <a:prstGeom prst="rect">
+            <a:avLst/>
+          </a:prstGeom>
+        </p:spPr>
+      </p:pic>
+      <p:sp>
+        <p:nvSpPr>
+          <p:cNvPr id="20" name="TextBox 19">
+            <a:extLst>
+              <a:ext uri="{FF2B5EF4-FFF2-40B4-BE49-F238E27FC236}">
+                <a16:creationId xmlns:a16="http://schemas.microsoft.com/office/drawing/2014/main" id="{8AD259D0-9C4F-355A-8046-0AAEDA291B2F}"/>
+              </a:ext>
+            </a:extLst>
+          </p:cNvPr>
+          <p:cNvSpPr txBox="1"/>
+          <p:nvPr/>
+        </p:nvSpPr>
+        <p:spPr>
+          <a:xfrm>
+            <a:off x="5601855" y="2387481"/>
+            <a:ext cx="5632548" cy="2862322"/>
+          </a:xfrm>
+          <a:prstGeom prst="rect">
+            <a:avLst/>
+          </a:prstGeom>
+          <a:noFill/>
+        </p:spPr>
+        <p:txBody>
+          <a:bodyPr wrap="square" rtlCol="0">
+            <a:spAutoFit/>
+          </a:bodyPr>
+          <a:lstStyle/>
+          <a:p>
+            <a:r>
+              <a:rPr lang="ko-KR" altLang="en-US" dirty="0" err="1"/>
+              <a:t>반툼여</a:t>
+            </a:r>
+            <a:r>
+              <a:rPr lang="ko-KR" altLang="en-US" dirty="0"/>
+              <a:t> 어두운 배경</a:t>
+            </a:r>
+            <a:r>
+              <a:rPr lang="en-US" altLang="ko-KR" dirty="0"/>
+              <a:t>(</a:t>
+            </a:r>
+            <a:r>
+              <a:rPr lang="ko-KR" altLang="en-US" dirty="0" err="1"/>
+              <a:t>틸드처리</a:t>
+            </a:r>
+            <a:r>
+              <a:rPr lang="en-US" altLang="ko-KR" dirty="0"/>
+              <a:t>)</a:t>
+            </a:r>
+            <a:r>
+              <a:rPr lang="ko-KR" altLang="en-US" dirty="0"/>
+              <a:t>째로</a:t>
+            </a:r>
+            <a:endParaRPr lang="en-US" altLang="ko-KR" dirty="0"/>
+          </a:p>
+          <a:p>
+            <a:r>
+              <a:rPr lang="ko-KR" altLang="en-US" dirty="0"/>
+              <a:t>화면 전체가 아래로 접히며</a:t>
+            </a:r>
+            <a:r>
+              <a:rPr lang="en-US" altLang="ko-KR" dirty="0"/>
+              <a:t>,</a:t>
+            </a:r>
+          </a:p>
+          <a:p>
+            <a:r>
+              <a:rPr lang="ko-KR" altLang="en-US" dirty="0"/>
+              <a:t>하단에 △펼치기 버튼이</a:t>
+            </a:r>
+            <a:endParaRPr lang="en-US" altLang="ko-KR" dirty="0"/>
+          </a:p>
+          <a:p>
+            <a:r>
+              <a:rPr lang="ko-KR" altLang="en-US" dirty="0"/>
+              <a:t>▽접기 버튼과 동일하게 위치</a:t>
+            </a:r>
+            <a:endParaRPr lang="en-US" altLang="ko-KR" dirty="0"/>
+          </a:p>
+          <a:p>
+            <a:endParaRPr lang="en-US" altLang="ko-KR" dirty="0"/>
+          </a:p>
+          <a:p>
+            <a:r>
+              <a:rPr lang="ko-KR" altLang="en-US" dirty="0"/>
+              <a:t>상단은 어림잡아 클릭 범위를 넓게 지정해도 되는데</a:t>
+            </a:r>
+            <a:endParaRPr lang="en-US" altLang="ko-KR" dirty="0"/>
+          </a:p>
+          <a:p>
+            <a:endParaRPr lang="en-US" altLang="ko-KR" dirty="0"/>
+          </a:p>
+          <a:p>
+            <a:r>
+              <a:rPr lang="ko-KR" altLang="en-US" dirty="0"/>
+              <a:t>하단은 카드나 덱</a:t>
+            </a:r>
+            <a:r>
+              <a:rPr lang="en-US" altLang="ko-KR" dirty="0"/>
+              <a:t>/</a:t>
+            </a:r>
+            <a:r>
+              <a:rPr lang="ko-KR" altLang="en-US" dirty="0"/>
+              <a:t>묘지를 살펴보기 위한 상호작용이 있어서 </a:t>
+            </a:r>
+            <a:r>
+              <a:rPr lang="ko-KR" altLang="en-US" dirty="0" err="1"/>
+              <a:t>디테일하게</a:t>
+            </a:r>
+            <a:r>
+              <a:rPr lang="ko-KR" altLang="en-US" dirty="0"/>
+              <a:t> 설정해줘야 할 것 같다</a:t>
+            </a:r>
+            <a:endParaRPr lang="en-US" altLang="ko-KR" dirty="0"/>
+          </a:p>
+          <a:p>
+            <a:r>
+              <a:rPr lang="en-US" altLang="ko-KR" dirty="0"/>
+              <a:t>(</a:t>
+            </a:r>
+            <a:r>
+              <a:rPr lang="ko-KR" altLang="en-US" dirty="0"/>
+              <a:t>주황색으로 표시한 부분을 제외하는 작업</a:t>
+            </a:r>
+            <a:r>
+              <a:rPr lang="en-US" altLang="ko-KR" dirty="0"/>
+              <a:t>)</a:t>
+            </a:r>
+          </a:p>
+        </p:txBody>
+      </p:sp>
+      <p:sp>
+        <p:nvSpPr>
+          <p:cNvPr id="21" name="사각형: 둥근 모서리 20">
+            <a:extLst>
+              <a:ext uri="{FF2B5EF4-FFF2-40B4-BE49-F238E27FC236}">
+                <a16:creationId xmlns:a16="http://schemas.microsoft.com/office/drawing/2014/main" id="{7A8D3246-A31F-E36F-D029-045A0505C867}"/>
+              </a:ext>
+            </a:extLst>
+          </p:cNvPr>
+          <p:cNvSpPr/>
+          <p:nvPr/>
+        </p:nvSpPr>
+        <p:spPr>
+          <a:xfrm>
+            <a:off x="2628562" y="5003432"/>
+            <a:ext cx="655782" cy="203322"/>
+          </a:xfrm>
+          <a:prstGeom prst="roundRect">
+            <a:avLst/>
+          </a:prstGeom>
+          <a:noFill/>
+          <a:ln w="38100">
+            <a:solidFill>
+              <a:srgbClr val="FF0000"/>
+            </a:solidFill>
+          </a:ln>
+        </p:spPr>
+        <p:style>
+          <a:lnRef idx="2">
+            <a:schemeClr val="accent1">
+              <a:shade val="15000"/>
+            </a:schemeClr>
+          </a:lnRef>
+          <a:fillRef idx="1">
+            <a:schemeClr val="accent1"/>
+          </a:fillRef>
+          <a:effectRef idx="0">
+            <a:schemeClr val="accent1"/>
+          </a:effectRef>
+          <a:fontRef idx="minor">
+            <a:schemeClr val="lt1"/>
+          </a:fontRef>
+        </p:style>
+        <p:txBody>
+          <a:bodyPr rtlCol="0" anchor="ctr"/>
+          <a:lstStyle/>
+          <a:p>
+            <a:pPr algn="ctr"/>
+            <a:endParaRPr lang="ko-KR" altLang="en-US"/>
+          </a:p>
+        </p:txBody>
+      </p:sp>
+      <p:pic>
+        <p:nvPicPr>
+          <p:cNvPr id="23" name="그림 22">
+            <a:extLst>
+              <a:ext uri="{FF2B5EF4-FFF2-40B4-BE49-F238E27FC236}">
+                <a16:creationId xmlns:a16="http://schemas.microsoft.com/office/drawing/2014/main" id="{5CB5882F-5825-6523-486C-77ECCA9B399D}"/>
+              </a:ext>
+            </a:extLst>
+          </p:cNvPr>
+          <p:cNvPicPr>
+            <a:picLocks noChangeAspect="1"/>
+          </p:cNvPicPr>
+          <p:nvPr/>
+        </p:nvPicPr>
+        <p:blipFill>
+          <a:blip r:embed="rId4"/>
+          <a:stretch>
+            <a:fillRect/>
+          </a:stretch>
+        </p:blipFill>
+        <p:spPr>
+          <a:xfrm>
+            <a:off x="463452" y="5395982"/>
+            <a:ext cx="6654784" cy="449948"/>
+          </a:xfrm>
+          <a:prstGeom prst="rect">
+            <a:avLst/>
+          </a:prstGeom>
+        </p:spPr>
+      </p:pic>
+      <p:sp>
+        <p:nvSpPr>
+          <p:cNvPr id="24" name="사각형: 둥근 모서리 23">
+            <a:extLst>
+              <a:ext uri="{FF2B5EF4-FFF2-40B4-BE49-F238E27FC236}">
+                <a16:creationId xmlns:a16="http://schemas.microsoft.com/office/drawing/2014/main" id="{FFAE41D8-07D9-56C6-D0DE-0ED15B631A2D}"/>
+              </a:ext>
+            </a:extLst>
+          </p:cNvPr>
+          <p:cNvSpPr/>
+          <p:nvPr/>
+        </p:nvSpPr>
+        <p:spPr>
+          <a:xfrm>
+            <a:off x="450414" y="5576513"/>
+            <a:ext cx="3096350" cy="145270"/>
+          </a:xfrm>
+          <a:prstGeom prst="roundRect">
+            <a:avLst/>
+          </a:prstGeom>
+          <a:noFill/>
+          <a:ln w="38100">
+            <a:solidFill>
+              <a:schemeClr val="accent2"/>
+            </a:solidFill>
+          </a:ln>
+        </p:spPr>
+        <p:style>
+          <a:lnRef idx="2">
+            <a:schemeClr val="accent1">
+              <a:shade val="15000"/>
+            </a:schemeClr>
+          </a:lnRef>
+          <a:fillRef idx="1">
+            <a:schemeClr val="accent1"/>
+          </a:fillRef>
+          <a:effectRef idx="0">
+            <a:schemeClr val="accent1"/>
+          </a:effectRef>
+          <a:fontRef idx="minor">
+            <a:schemeClr val="lt1"/>
+          </a:fontRef>
+        </p:style>
+        <p:txBody>
+          <a:bodyPr rtlCol="0" anchor="ctr"/>
+          <a:lstStyle/>
+          <a:p>
+            <a:pPr algn="ctr"/>
+            <a:endParaRPr lang="ko-KR" altLang="en-US"/>
+          </a:p>
+        </p:txBody>
+      </p:sp>
+      <p:sp>
+        <p:nvSpPr>
+          <p:cNvPr id="25" name="사각형: 둥근 모서리 24">
+            <a:extLst>
+              <a:ext uri="{FF2B5EF4-FFF2-40B4-BE49-F238E27FC236}">
+                <a16:creationId xmlns:a16="http://schemas.microsoft.com/office/drawing/2014/main" id="{128B838B-7D58-7E25-26C0-ACC22DD01501}"/>
+              </a:ext>
+            </a:extLst>
+          </p:cNvPr>
+          <p:cNvSpPr/>
+          <p:nvPr/>
+        </p:nvSpPr>
+        <p:spPr>
+          <a:xfrm>
+            <a:off x="4053680" y="5566588"/>
+            <a:ext cx="3096350" cy="145270"/>
+          </a:xfrm>
+          <a:prstGeom prst="roundRect">
+            <a:avLst/>
+          </a:prstGeom>
+          <a:noFill/>
+          <a:ln w="38100">
+            <a:solidFill>
+              <a:schemeClr val="accent2"/>
+            </a:solidFill>
+          </a:ln>
+        </p:spPr>
+        <p:style>
+          <a:lnRef idx="2">
+            <a:schemeClr val="accent1">
+              <a:shade val="15000"/>
+            </a:schemeClr>
+          </a:lnRef>
+          <a:fillRef idx="1">
+            <a:schemeClr val="accent1"/>
+          </a:fillRef>
+          <a:effectRef idx="0">
+            <a:schemeClr val="accent1"/>
+          </a:effectRef>
+          <a:fontRef idx="minor">
+            <a:schemeClr val="lt1"/>
+          </a:fontRef>
+        </p:style>
+        <p:txBody>
+          <a:bodyPr rtlCol="0" anchor="ctr"/>
+          <a:lstStyle/>
+          <a:p>
+            <a:pPr algn="ctr"/>
+            <a:endParaRPr lang="ko-KR" altLang="en-US"/>
+          </a:p>
+        </p:txBody>
+      </p:sp>
+    </p:spTree>
+    <p:extLst>
+      <p:ext uri="{BB962C8B-B14F-4D97-AF65-F5344CB8AC3E}">
+        <p14:creationId xmlns:p14="http://schemas.microsoft.com/office/powerpoint/2010/main" val="1895298479"/>
+      </p:ext>
+    </p:extLst>
+  </p:cSld>
+  <p:clrMapOvr>
+    <a:masterClrMapping/>
+  </p:clrMapOvr>
+</p:sld>
+</file>
+
+<file path=ppt/slides/slide7.xml><?xml version="1.0" encoding="utf-8"?>
 <p:sld xmlns:a="http://schemas.openxmlformats.org/drawingml/2006/main" xmlns:r="http://schemas.openxmlformats.org/officeDocument/2006/relationships" xmlns:p="http://schemas.openxmlformats.org/presentationml/2006/main">
   <p:cSld>
     <p:spTree>
@@ -6267,7 +7121,7 @@
 </p:sld>
 </file>
 
-<file path=ppt/slides/slide7.xml><?xml version="1.0" encoding="utf-8"?>
+<file path=ppt/slides/slide8.xml><?xml version="1.0" encoding="utf-8"?>
 <p:sld xmlns:a="http://schemas.openxmlformats.org/drawingml/2006/main" xmlns:r="http://schemas.openxmlformats.org/officeDocument/2006/relationships" xmlns:p="http://schemas.openxmlformats.org/presentationml/2006/main">
   <p:cSld>
     <p:spTree>

--- a/Plan/기획서/땅부수기2026 ch2.pptx
+++ b/Plan/기획서/땅부수기2026 ch2.pptx
@@ -12,7 +12,9 @@
     <p:sldId id="261" r:id="rId6"/>
     <p:sldId id="263" r:id="rId7"/>
     <p:sldId id="262" r:id="rId8"/>
-    <p:sldId id="260" r:id="rId9"/>
+    <p:sldId id="264" r:id="rId9"/>
+    <p:sldId id="265" r:id="rId10"/>
+    <p:sldId id="260" r:id="rId11"/>
   </p:sldIdLst>
   <p:sldSz cx="12192000" cy="6858000"/>
   <p:notesSz cx="6858000" cy="9144000"/>
@@ -266,7 +268,7 @@
           <a:p>
             <a:fld id="{C6FDF62A-CEF3-4A4B-9978-8C575DC3A030}" type="datetimeFigureOut">
               <a:rPr lang="ko-KR" altLang="en-US" smtClean="0"/>
-              <a:t>2026-04-17</a:t>
+              <a:t>2026-04-24</a:t>
             </a:fld>
             <a:endParaRPr lang="ko-KR" altLang="en-US"/>
           </a:p>
@@ -464,7 +466,7 @@
           <a:p>
             <a:fld id="{C6FDF62A-CEF3-4A4B-9978-8C575DC3A030}" type="datetimeFigureOut">
               <a:rPr lang="ko-KR" altLang="en-US" smtClean="0"/>
-              <a:t>2026-04-17</a:t>
+              <a:t>2026-04-24</a:t>
             </a:fld>
             <a:endParaRPr lang="ko-KR" altLang="en-US"/>
           </a:p>
@@ -672,7 +674,7 @@
           <a:p>
             <a:fld id="{C6FDF62A-CEF3-4A4B-9978-8C575DC3A030}" type="datetimeFigureOut">
               <a:rPr lang="ko-KR" altLang="en-US" smtClean="0"/>
-              <a:t>2026-04-17</a:t>
+              <a:t>2026-04-24</a:t>
             </a:fld>
             <a:endParaRPr lang="ko-KR" altLang="en-US"/>
           </a:p>
@@ -870,7 +872,7 @@
           <a:p>
             <a:fld id="{C6FDF62A-CEF3-4A4B-9978-8C575DC3A030}" type="datetimeFigureOut">
               <a:rPr lang="ko-KR" altLang="en-US" smtClean="0"/>
-              <a:t>2026-04-17</a:t>
+              <a:t>2026-04-24</a:t>
             </a:fld>
             <a:endParaRPr lang="ko-KR" altLang="en-US"/>
           </a:p>
@@ -1145,7 +1147,7 @@
           <a:p>
             <a:fld id="{C6FDF62A-CEF3-4A4B-9978-8C575DC3A030}" type="datetimeFigureOut">
               <a:rPr lang="ko-KR" altLang="en-US" smtClean="0"/>
-              <a:t>2026-04-17</a:t>
+              <a:t>2026-04-24</a:t>
             </a:fld>
             <a:endParaRPr lang="ko-KR" altLang="en-US"/>
           </a:p>
@@ -1410,7 +1412,7 @@
           <a:p>
             <a:fld id="{C6FDF62A-CEF3-4A4B-9978-8C575DC3A030}" type="datetimeFigureOut">
               <a:rPr lang="ko-KR" altLang="en-US" smtClean="0"/>
-              <a:t>2026-04-17</a:t>
+              <a:t>2026-04-24</a:t>
             </a:fld>
             <a:endParaRPr lang="ko-KR" altLang="en-US"/>
           </a:p>
@@ -1822,7 +1824,7 @@
           <a:p>
             <a:fld id="{C6FDF62A-CEF3-4A4B-9978-8C575DC3A030}" type="datetimeFigureOut">
               <a:rPr lang="ko-KR" altLang="en-US" smtClean="0"/>
-              <a:t>2026-04-17</a:t>
+              <a:t>2026-04-24</a:t>
             </a:fld>
             <a:endParaRPr lang="ko-KR" altLang="en-US"/>
           </a:p>
@@ -1963,7 +1965,7 @@
           <a:p>
             <a:fld id="{C6FDF62A-CEF3-4A4B-9978-8C575DC3A030}" type="datetimeFigureOut">
               <a:rPr lang="ko-KR" altLang="en-US" smtClean="0"/>
-              <a:t>2026-04-17</a:t>
+              <a:t>2026-04-24</a:t>
             </a:fld>
             <a:endParaRPr lang="ko-KR" altLang="en-US"/>
           </a:p>
@@ -2076,7 +2078,7 @@
           <a:p>
             <a:fld id="{C6FDF62A-CEF3-4A4B-9978-8C575DC3A030}" type="datetimeFigureOut">
               <a:rPr lang="ko-KR" altLang="en-US" smtClean="0"/>
-              <a:t>2026-04-17</a:t>
+              <a:t>2026-04-24</a:t>
             </a:fld>
             <a:endParaRPr lang="ko-KR" altLang="en-US"/>
           </a:p>
@@ -2387,7 +2389,7 @@
           <a:p>
             <a:fld id="{C6FDF62A-CEF3-4A4B-9978-8C575DC3A030}" type="datetimeFigureOut">
               <a:rPr lang="ko-KR" altLang="en-US" smtClean="0"/>
-              <a:t>2026-04-17</a:t>
+              <a:t>2026-04-24</a:t>
             </a:fld>
             <a:endParaRPr lang="ko-KR" altLang="en-US"/>
           </a:p>
@@ -2675,7 +2677,7 @@
           <a:p>
             <a:fld id="{C6FDF62A-CEF3-4A4B-9978-8C575DC3A030}" type="datetimeFigureOut">
               <a:rPr lang="ko-KR" altLang="en-US" smtClean="0"/>
-              <a:t>2026-04-17</a:t>
+              <a:t>2026-04-24</a:t>
             </a:fld>
             <a:endParaRPr lang="ko-KR" altLang="en-US"/>
           </a:p>
@@ -2916,7 +2918,7 @@
           <a:p>
             <a:fld id="{C6FDF62A-CEF3-4A4B-9978-8C575DC3A030}" type="datetimeFigureOut">
               <a:rPr lang="ko-KR" altLang="en-US" smtClean="0"/>
-              <a:t>2026-04-17</a:t>
+              <a:t>2026-04-24</a:t>
             </a:fld>
             <a:endParaRPr lang="ko-KR" altLang="en-US"/>
           </a:p>
@@ -3599,6 +3601,501 @@
 </p:sld>
 </file>
 
+<file path=ppt/slides/slide10.xml><?xml version="1.0" encoding="utf-8"?>
+<p:sld xmlns:a="http://schemas.openxmlformats.org/drawingml/2006/main" xmlns:r="http://schemas.openxmlformats.org/officeDocument/2006/relationships" xmlns:p="http://schemas.openxmlformats.org/presentationml/2006/main">
+  <p:cSld>
+    <p:spTree>
+      <p:nvGrpSpPr>
+        <p:cNvPr id="1" name="">
+          <a:extLst>
+            <a:ext uri="{FF2B5EF4-FFF2-40B4-BE49-F238E27FC236}">
+              <a16:creationId xmlns:a16="http://schemas.microsoft.com/office/drawing/2014/main" id="{972CACE6-D6A6-4DC4-D160-15AB88D04B90}"/>
+            </a:ext>
+          </a:extLst>
+        </p:cNvPr>
+        <p:cNvGrpSpPr/>
+        <p:nvPr/>
+      </p:nvGrpSpPr>
+      <p:grpSpPr>
+        <a:xfrm>
+          <a:off x="0" y="0"/>
+          <a:ext cx="0" cy="0"/>
+          <a:chOff x="0" y="0"/>
+          <a:chExt cx="0" cy="0"/>
+        </a:xfrm>
+      </p:grpSpPr>
+      <p:sp>
+        <p:nvSpPr>
+          <p:cNvPr id="2" name="AutoShape 2">
+            <a:extLst>
+              <a:ext uri="{FF2B5EF4-FFF2-40B4-BE49-F238E27FC236}">
+                <a16:creationId xmlns:a16="http://schemas.microsoft.com/office/drawing/2014/main" id="{E4392E95-E307-6C5F-33B7-F735601F727C}"/>
+              </a:ext>
+            </a:extLst>
+          </p:cNvPr>
+          <p:cNvSpPr>
+            <a:spLocks noChangeAspect="1" noChangeArrowheads="1"/>
+          </p:cNvSpPr>
+          <p:nvPr/>
+        </p:nvSpPr>
+        <p:spPr bwMode="auto">
+          <a:xfrm>
+            <a:off x="5943600" y="3276600"/>
+            <a:ext cx="304800" cy="304800"/>
+          </a:xfrm>
+          <a:prstGeom prst="rect">
+            <a:avLst/>
+          </a:prstGeom>
+          <a:noFill/>
+          <a:extLst>
+            <a:ext uri="{909E8E84-426E-40DD-AFC4-6F175D3DCCD1}">
+              <a14:hiddenFill xmlns:a14="http://schemas.microsoft.com/office/drawing/2010/main">
+                <a:solidFill>
+                  <a:srgbClr val="FFFFFF"/>
+                </a:solidFill>
+              </a14:hiddenFill>
+            </a:ext>
+          </a:extLst>
+        </p:spPr>
+        <p:txBody>
+          <a:bodyPr vert="horz" wrap="square" lIns="91440" tIns="45720" rIns="91440" bIns="45720" numCol="1" anchor="t" anchorCtr="0" compatLnSpc="1">
+            <a:prstTxWarp prst="textNoShape">
+              <a:avLst/>
+            </a:prstTxWarp>
+          </a:bodyPr>
+          <a:lstStyle/>
+          <a:p>
+            <a:endParaRPr lang="ko-KR" altLang="en-US"/>
+          </a:p>
+        </p:txBody>
+      </p:sp>
+      <p:sp>
+        <p:nvSpPr>
+          <p:cNvPr id="24" name="TextBox 23">
+            <a:extLst>
+              <a:ext uri="{FF2B5EF4-FFF2-40B4-BE49-F238E27FC236}">
+                <a16:creationId xmlns:a16="http://schemas.microsoft.com/office/drawing/2014/main" id="{AE54957C-E100-CC9C-E286-8EEA26B7F850}"/>
+              </a:ext>
+            </a:extLst>
+          </p:cNvPr>
+          <p:cNvSpPr txBox="1"/>
+          <p:nvPr/>
+        </p:nvSpPr>
+        <p:spPr>
+          <a:xfrm>
+            <a:off x="669637" y="563419"/>
+            <a:ext cx="10617199" cy="5078313"/>
+          </a:xfrm>
+          <a:prstGeom prst="rect">
+            <a:avLst/>
+          </a:prstGeom>
+          <a:noFill/>
+        </p:spPr>
+        <p:txBody>
+          <a:bodyPr wrap="square" rtlCol="0">
+            <a:spAutoFit/>
+          </a:bodyPr>
+          <a:lstStyle/>
+          <a:p>
+            <a:r>
+              <a:rPr lang="ko-KR" altLang="en-US" b="1" dirty="0"/>
+              <a:t>방해 타일 타격 금지 유물</a:t>
+            </a:r>
+            <a:endParaRPr lang="en-US" altLang="ko-KR" b="1" dirty="0"/>
+          </a:p>
+          <a:p>
+            <a:endParaRPr lang="en-US" altLang="ko-KR" dirty="0"/>
+          </a:p>
+          <a:p>
+            <a:r>
+              <a:rPr lang="ko-KR" altLang="en-US" dirty="0"/>
+              <a:t>유물 </a:t>
+            </a:r>
+            <a:r>
+              <a:rPr lang="en-US" altLang="ko-KR" dirty="0"/>
+              <a:t>‘</a:t>
+            </a:r>
+            <a:r>
+              <a:rPr lang="ko-KR" altLang="en-US" dirty="0"/>
+              <a:t>흔들리는 발판</a:t>
+            </a:r>
+            <a:r>
+              <a:rPr lang="en-US" altLang="ko-KR" dirty="0"/>
+              <a:t>’(</a:t>
+            </a:r>
+            <a:r>
+              <a:rPr lang="ko-KR" altLang="en-US" dirty="0"/>
+              <a:t>예시</a:t>
+            </a:r>
+            <a:r>
+              <a:rPr lang="en-US" altLang="ko-KR" dirty="0"/>
+              <a:t>)</a:t>
+            </a:r>
+            <a:r>
+              <a:rPr lang="ko-KR" altLang="en-US" dirty="0"/>
+              <a:t> </a:t>
+            </a:r>
+            <a:r>
+              <a:rPr lang="en-US" altLang="ko-KR" dirty="0"/>
+              <a:t> - [</a:t>
+            </a:r>
+            <a:r>
+              <a:rPr lang="ko-KR" altLang="en-US" dirty="0"/>
+              <a:t>불안정</a:t>
+            </a:r>
+            <a:r>
+              <a:rPr lang="en-US" altLang="ko-KR" dirty="0"/>
+              <a:t>] </a:t>
+            </a:r>
+            <a:r>
+              <a:rPr lang="ko-KR" altLang="en-US" dirty="0"/>
+              <a:t>부여</a:t>
+            </a:r>
+            <a:r>
+              <a:rPr lang="en-US" altLang="ko-KR" dirty="0"/>
+              <a:t>, </a:t>
+            </a:r>
+            <a:r>
+              <a:rPr lang="ko-KR" altLang="en-US" dirty="0"/>
+              <a:t>불안정 태그 카드 등장 </a:t>
+            </a:r>
+            <a:r>
+              <a:rPr lang="en-US" altLang="ko-KR" dirty="0">
+                <a:solidFill>
+                  <a:srgbClr val="C00000"/>
+                </a:solidFill>
+              </a:rPr>
+              <a:t>&lt;&lt;</a:t>
+            </a:r>
+            <a:r>
+              <a:rPr lang="ko-KR" altLang="en-US" dirty="0">
+                <a:solidFill>
+                  <a:srgbClr val="C00000"/>
+                </a:solidFill>
+              </a:rPr>
+              <a:t>특정 층 반드시 등장</a:t>
+            </a:r>
+            <a:endParaRPr lang="en-US" altLang="ko-KR" dirty="0">
+              <a:solidFill>
+                <a:srgbClr val="C00000"/>
+              </a:solidFill>
+            </a:endParaRPr>
+          </a:p>
+          <a:p>
+            <a:endParaRPr lang="en-US" altLang="ko-KR" dirty="0"/>
+          </a:p>
+          <a:p>
+            <a:r>
+              <a:rPr lang="ko-KR" altLang="en-US" b="1" dirty="0"/>
+              <a:t>불안정 </a:t>
+            </a:r>
+            <a:r>
+              <a:rPr lang="en-US" altLang="ko-KR" b="1" dirty="0"/>
+              <a:t>UI </a:t>
+            </a:r>
+            <a:r>
+              <a:rPr lang="en-US" altLang="ko-KR" dirty="0"/>
+              <a:t>– </a:t>
+            </a:r>
+            <a:r>
+              <a:rPr lang="ko-KR" altLang="en-US" dirty="0"/>
+              <a:t>캐릭터 옆에 게이지 추가 </a:t>
+            </a:r>
+            <a:r>
+              <a:rPr lang="en-US" altLang="ko-KR" dirty="0"/>
+              <a:t>/ </a:t>
+            </a:r>
+            <a:r>
+              <a:rPr lang="ko-KR" altLang="en-US" dirty="0"/>
+              <a:t>마우스 </a:t>
+            </a:r>
+            <a:r>
+              <a:rPr lang="ko-KR" altLang="en-US" dirty="0" err="1"/>
+              <a:t>오버시</a:t>
+            </a:r>
+            <a:r>
+              <a:rPr lang="ko-KR" altLang="en-US" dirty="0"/>
+              <a:t> 설명 표기</a:t>
+            </a:r>
+            <a:endParaRPr lang="en-US" altLang="ko-KR" dirty="0"/>
+          </a:p>
+          <a:p>
+            <a:r>
+              <a:rPr lang="en-US" altLang="ko-KR" dirty="0"/>
+              <a:t> </a:t>
+            </a:r>
+            <a:r>
+              <a:rPr lang="ko-KR" altLang="en-US" dirty="0"/>
+              <a:t>최대 </a:t>
+            </a:r>
+            <a:r>
+              <a:rPr lang="en-US" altLang="ko-KR" dirty="0"/>
+              <a:t>10 / </a:t>
+            </a:r>
+            <a:r>
+              <a:rPr lang="ko-KR" altLang="en-US" dirty="0"/>
+              <a:t>방해 타일 </a:t>
+            </a:r>
+            <a:r>
+              <a:rPr lang="ko-KR" altLang="en-US" dirty="0" err="1"/>
+              <a:t>타격시</a:t>
+            </a:r>
+            <a:r>
+              <a:rPr lang="ko-KR" altLang="en-US" dirty="0"/>
+              <a:t> </a:t>
+            </a:r>
+            <a:r>
+              <a:rPr lang="en-US" altLang="ko-KR" dirty="0"/>
+              <a:t>+ 1 / 10 </a:t>
+            </a:r>
+            <a:r>
+              <a:rPr lang="ko-KR" altLang="en-US" dirty="0" err="1"/>
+              <a:t>달성시</a:t>
+            </a:r>
+            <a:r>
+              <a:rPr lang="ko-KR" altLang="en-US" dirty="0"/>
+              <a:t> 게임 오버</a:t>
+            </a:r>
+            <a:endParaRPr lang="en-US" altLang="ko-KR" dirty="0"/>
+          </a:p>
+          <a:p>
+            <a:endParaRPr lang="en-US" altLang="ko-KR" dirty="0"/>
+          </a:p>
+          <a:p>
+            <a:r>
+              <a:rPr lang="ko-KR" altLang="en-US" b="1" dirty="0"/>
+              <a:t>유물</a:t>
+            </a:r>
+            <a:endParaRPr lang="en-US" altLang="ko-KR" b="1" dirty="0"/>
+          </a:p>
+          <a:p>
+            <a:r>
+              <a:rPr lang="ko-KR" altLang="en-US" dirty="0"/>
+              <a:t>불안정</a:t>
+            </a:r>
+            <a:r>
+              <a:rPr lang="en-US" altLang="ko-KR" dirty="0"/>
+              <a:t> </a:t>
+            </a:r>
+            <a:r>
+              <a:rPr lang="ko-KR" altLang="en-US" dirty="0"/>
+              <a:t>룬 </a:t>
+            </a:r>
+            <a:r>
+              <a:rPr lang="en-US" altLang="ko-KR" dirty="0"/>
+              <a:t>– </a:t>
+            </a:r>
+            <a:r>
+              <a:rPr lang="ko-KR" altLang="en-US" dirty="0"/>
+              <a:t>불안정이 </a:t>
+            </a:r>
+            <a:r>
+              <a:rPr lang="en-US" altLang="ko-KR" dirty="0"/>
+              <a:t>1 </a:t>
+            </a:r>
+            <a:r>
+              <a:rPr lang="ko-KR" altLang="en-US" dirty="0"/>
+              <a:t>이하로 내려가지 않음</a:t>
+            </a:r>
+            <a:r>
+              <a:rPr lang="en-US" altLang="ko-KR" dirty="0"/>
+              <a:t>(</a:t>
+            </a:r>
+            <a:r>
+              <a:rPr lang="ko-KR" altLang="en-US" dirty="0"/>
+              <a:t>이미 불안정 룬을 가지고 있다면 다음 단계로 변경</a:t>
+            </a:r>
+            <a:r>
+              <a:rPr lang="en-US" altLang="ko-KR" dirty="0"/>
+              <a:t>)</a:t>
+            </a:r>
+          </a:p>
+          <a:p>
+            <a:r>
+              <a:rPr lang="ko-KR" altLang="en-US" dirty="0"/>
+              <a:t>불안정 룬</a:t>
+            </a:r>
+            <a:r>
+              <a:rPr lang="en-US" altLang="ko-KR" dirty="0"/>
+              <a:t>+ - </a:t>
+            </a:r>
+            <a:r>
+              <a:rPr lang="ko-KR" altLang="en-US" dirty="0"/>
+              <a:t>불안정이 </a:t>
+            </a:r>
+            <a:r>
+              <a:rPr lang="en-US" altLang="ko-KR" dirty="0"/>
+              <a:t>2 </a:t>
+            </a:r>
+            <a:r>
+              <a:rPr lang="ko-KR" altLang="en-US" dirty="0"/>
+              <a:t>이하로 내려가지 않음</a:t>
+            </a:r>
+            <a:endParaRPr lang="en-US" altLang="ko-KR" dirty="0"/>
+          </a:p>
+          <a:p>
+            <a:r>
+              <a:rPr lang="ko-KR" altLang="en-US" dirty="0"/>
+              <a:t>불안정 룬</a:t>
+            </a:r>
+            <a:r>
+              <a:rPr lang="en-US" altLang="ko-KR" dirty="0"/>
+              <a:t>++ - </a:t>
+            </a:r>
+            <a:r>
+              <a:rPr lang="ko-KR" altLang="en-US" dirty="0"/>
+              <a:t>불안정이 </a:t>
+            </a:r>
+            <a:r>
+              <a:rPr lang="en-US" altLang="ko-KR" dirty="0"/>
+              <a:t>3 </a:t>
+            </a:r>
+            <a:r>
+              <a:rPr lang="ko-KR" altLang="en-US" dirty="0"/>
+              <a:t>이하로 내려가지 않음</a:t>
+            </a:r>
+            <a:r>
+              <a:rPr lang="en-US" altLang="ko-KR" dirty="0"/>
+              <a:t>… </a:t>
+            </a:r>
+            <a:r>
+              <a:rPr lang="ko-KR" altLang="en-US" dirty="0"/>
+              <a:t>등으로 총 타격 횟수 낮춰 난이도 올리기</a:t>
+            </a:r>
+            <a:endParaRPr lang="en-US" altLang="ko-KR" dirty="0"/>
+          </a:p>
+          <a:p>
+            <a:r>
+              <a:rPr lang="en-US" altLang="ko-KR" dirty="0"/>
+              <a:t>‘</a:t>
+            </a:r>
+            <a:r>
+              <a:rPr lang="ko-KR" altLang="en-US" dirty="0"/>
+              <a:t>무너지는 발판</a:t>
+            </a:r>
+            <a:r>
+              <a:rPr lang="en-US" altLang="ko-KR" dirty="0"/>
+              <a:t>’ – [</a:t>
+            </a:r>
+            <a:r>
+              <a:rPr lang="ko-KR" altLang="en-US" dirty="0"/>
+              <a:t>불안정</a:t>
+            </a:r>
+            <a:r>
+              <a:rPr lang="en-US" altLang="ko-KR" dirty="0"/>
+              <a:t>]</a:t>
+            </a:r>
+            <a:r>
+              <a:rPr lang="ko-KR" altLang="en-US" dirty="0"/>
+              <a:t>이 초기화 되지 않음 </a:t>
+            </a:r>
+            <a:r>
+              <a:rPr lang="en-US" altLang="ko-KR" dirty="0">
+                <a:solidFill>
+                  <a:srgbClr val="C00000"/>
+                </a:solidFill>
+              </a:rPr>
+              <a:t>&lt;&lt;</a:t>
+            </a:r>
+            <a:r>
+              <a:rPr lang="ko-KR" altLang="en-US" dirty="0">
+                <a:solidFill>
+                  <a:srgbClr val="C00000"/>
+                </a:solidFill>
+              </a:rPr>
+              <a:t>특정 층 반드시 등장</a:t>
+            </a:r>
+            <a:endParaRPr lang="en-US" altLang="ko-KR" dirty="0">
+              <a:solidFill>
+                <a:srgbClr val="C00000"/>
+              </a:solidFill>
+            </a:endParaRPr>
+          </a:p>
+          <a:p>
+            <a:endParaRPr lang="en-US" altLang="ko-KR" dirty="0"/>
+          </a:p>
+          <a:p>
+            <a:r>
+              <a:rPr lang="ko-KR" altLang="en-US" b="1" dirty="0"/>
+              <a:t>카드</a:t>
+            </a:r>
+            <a:endParaRPr lang="en-US" altLang="ko-KR" b="1" dirty="0"/>
+          </a:p>
+          <a:p>
+            <a:r>
+              <a:rPr lang="en-US" altLang="ko-KR" dirty="0"/>
+              <a:t> </a:t>
+            </a:r>
+            <a:r>
+              <a:rPr lang="ko-KR" altLang="en-US" dirty="0"/>
+              <a:t>불안정 회복</a:t>
+            </a:r>
+            <a:r>
+              <a:rPr lang="en-US" altLang="ko-KR" dirty="0"/>
+              <a:t>, </a:t>
+            </a:r>
+            <a:r>
+              <a:rPr lang="ko-KR" altLang="en-US" dirty="0"/>
+              <a:t>불안정 방지 카드</a:t>
+            </a:r>
+            <a:r>
+              <a:rPr lang="en-US" altLang="ko-KR" dirty="0"/>
+              <a:t>, </a:t>
+            </a:r>
+            <a:r>
+              <a:rPr lang="ko-KR" altLang="en-US" dirty="0"/>
+              <a:t>불안정을 증가하고 보너스를 받는</a:t>
+            </a:r>
+            <a:endParaRPr lang="en-US" altLang="ko-KR" dirty="0"/>
+          </a:p>
+          <a:p>
+            <a:r>
+              <a:rPr lang="en-US" altLang="ko-KR" dirty="0"/>
+              <a:t> </a:t>
+            </a:r>
+            <a:r>
+              <a:rPr lang="ko-KR" altLang="en-US" dirty="0"/>
+              <a:t>등을 </a:t>
+            </a:r>
+            <a:r>
+              <a:rPr lang="en-US" altLang="ko-KR" dirty="0"/>
+              <a:t>[</a:t>
+            </a:r>
+            <a:r>
+              <a:rPr lang="ko-KR" altLang="en-US" dirty="0"/>
+              <a:t>불안정</a:t>
+            </a:r>
+            <a:r>
+              <a:rPr lang="en-US" altLang="ko-KR" dirty="0"/>
+              <a:t>]</a:t>
+            </a:r>
+            <a:r>
+              <a:rPr lang="ko-KR" altLang="en-US" dirty="0"/>
+              <a:t> 태그 달고 추가</a:t>
+            </a:r>
+            <a:endParaRPr lang="en-US" altLang="ko-KR" dirty="0"/>
+          </a:p>
+          <a:p>
+            <a:endParaRPr lang="en-US" altLang="ko-KR" dirty="0"/>
+          </a:p>
+          <a:p>
+            <a:endParaRPr lang="en-US" altLang="ko-KR" dirty="0"/>
+          </a:p>
+        </p:txBody>
+      </p:sp>
+    </p:spTree>
+    <p:extLst>
+      <p:ext uri="{BB962C8B-B14F-4D97-AF65-F5344CB8AC3E}">
+        <p14:creationId xmlns:p14="http://schemas.microsoft.com/office/powerpoint/2010/main" val="1179173822"/>
+      </p:ext>
+    </p:extLst>
+  </p:cSld>
+  <p:clrMapOvr>
+    <a:masterClrMapping/>
+  </p:clrMapOvr>
+</p:sld>
+</file>
+
 <file path=ppt/slides/slide2.xml><?xml version="1.0" encoding="utf-8"?>
 <p:sld xmlns:a="http://schemas.openxmlformats.org/drawingml/2006/main" xmlns:r="http://schemas.openxmlformats.org/officeDocument/2006/relationships" xmlns:p="http://schemas.openxmlformats.org/presentationml/2006/main">
   <p:cSld>
@@ -7129,7 +7626,7 @@
         <p:cNvPr id="1" name="">
           <a:extLst>
             <a:ext uri="{FF2B5EF4-FFF2-40B4-BE49-F238E27FC236}">
-              <a16:creationId xmlns:a16="http://schemas.microsoft.com/office/drawing/2014/main" id="{972CACE6-D6A6-4DC4-D160-15AB88D04B90}"/>
+              <a16:creationId xmlns:a16="http://schemas.microsoft.com/office/drawing/2014/main" id="{BAE0CF65-8573-38AD-6740-DC4EE5C081C3}"/>
             </a:ext>
           </a:extLst>
         </p:cNvPr>
@@ -7149,7 +7646,7 @@
           <p:cNvPr id="2" name="AutoShape 2">
             <a:extLst>
               <a:ext uri="{FF2B5EF4-FFF2-40B4-BE49-F238E27FC236}">
-                <a16:creationId xmlns:a16="http://schemas.microsoft.com/office/drawing/2014/main" id="{E4392E95-E307-6C5F-33B7-F735601F727C}"/>
+                <a16:creationId xmlns:a16="http://schemas.microsoft.com/office/drawing/2014/main" id="{3BB8A3B0-93A3-0BD5-130B-B94CF503A1EA}"/>
               </a:ext>
             </a:extLst>
           </p:cNvPr>
@@ -7194,7 +7691,7 @@
           <p:cNvPr id="24" name="TextBox 23">
             <a:extLst>
               <a:ext uri="{FF2B5EF4-FFF2-40B4-BE49-F238E27FC236}">
-                <a16:creationId xmlns:a16="http://schemas.microsoft.com/office/drawing/2014/main" id="{AE54957C-E100-CC9C-E286-8EEA26B7F850}"/>
+                <a16:creationId xmlns:a16="http://schemas.microsoft.com/office/drawing/2014/main" id="{CAB29910-7E91-1B9C-23EC-B23C31627BE0}"/>
               </a:ext>
             </a:extLst>
           </p:cNvPr>
@@ -7203,8 +7700,8 @@
         </p:nvSpPr>
         <p:spPr>
           <a:xfrm>
-            <a:off x="669637" y="563419"/>
-            <a:ext cx="10617199" cy="5078313"/>
+            <a:off x="669638" y="563419"/>
+            <a:ext cx="10367818" cy="1754326"/>
           </a:xfrm>
           <a:prstGeom prst="rect">
             <a:avLst/>
@@ -7218,8 +7715,12 @@
           <a:lstStyle/>
           <a:p>
             <a:r>
+              <a:rPr lang="en-US" altLang="ko-KR" b="1" dirty="0"/>
+              <a:t>0425 PD </a:t>
+            </a:r>
+            <a:r>
               <a:rPr lang="ko-KR" altLang="en-US" b="1" dirty="0"/>
-              <a:t>방해 타일 타격 금지 유물</a:t>
+              <a:t>사라짐 사건</a:t>
             </a:r>
             <a:endParaRPr lang="en-US" altLang="ko-KR" b="1" dirty="0"/>
           </a:p>
@@ -7227,386 +7728,1258 @@
             <a:endParaRPr lang="en-US" altLang="ko-KR" dirty="0"/>
           </a:p>
           <a:p>
-            <a:r>
-              <a:rPr lang="ko-KR" altLang="en-US" dirty="0"/>
-              <a:t>유물 </a:t>
-            </a:r>
-            <a:r>
-              <a:rPr lang="en-US" altLang="ko-KR" dirty="0"/>
-              <a:t>‘</a:t>
-            </a:r>
-            <a:r>
-              <a:rPr lang="ko-KR" altLang="en-US" dirty="0"/>
-              <a:t>흔들리는 발판</a:t>
-            </a:r>
-            <a:r>
-              <a:rPr lang="en-US" altLang="ko-KR" dirty="0"/>
-              <a:t>’(</a:t>
-            </a:r>
-            <a:r>
-              <a:rPr lang="ko-KR" altLang="en-US" dirty="0"/>
-              <a:t>예시</a:t>
+            <a:endParaRPr lang="en-US" altLang="ko-KR" dirty="0"/>
+          </a:p>
+          <a:p>
+            <a:endParaRPr lang="en-US" altLang="ko-KR" dirty="0"/>
+          </a:p>
+          <a:p>
+            <a:endParaRPr lang="en-US" altLang="ko-KR" dirty="0"/>
+          </a:p>
+          <a:p>
+            <a:endParaRPr lang="en-US" altLang="ko-KR" dirty="0"/>
+          </a:p>
+        </p:txBody>
+      </p:sp>
+      <p:pic>
+        <p:nvPicPr>
+          <p:cNvPr id="4" name="그림 3">
+            <a:extLst>
+              <a:ext uri="{FF2B5EF4-FFF2-40B4-BE49-F238E27FC236}">
+                <a16:creationId xmlns:a16="http://schemas.microsoft.com/office/drawing/2014/main" id="{2BE86D04-8310-918D-B542-B4E037F24B74}"/>
+              </a:ext>
+            </a:extLst>
+          </p:cNvPr>
+          <p:cNvPicPr>
+            <a:picLocks noChangeAspect="1"/>
+          </p:cNvPicPr>
+          <p:nvPr/>
+        </p:nvPicPr>
+        <p:blipFill>
+          <a:blip r:embed="rId2"/>
+          <a:stretch>
+            <a:fillRect/>
+          </a:stretch>
+        </p:blipFill>
+        <p:spPr>
+          <a:xfrm>
+            <a:off x="5433132" y="2432261"/>
+            <a:ext cx="2286319" cy="1495634"/>
+          </a:xfrm>
+          <a:prstGeom prst="rect">
+            <a:avLst/>
+          </a:prstGeom>
+        </p:spPr>
+      </p:pic>
+      <p:pic>
+        <p:nvPicPr>
+          <p:cNvPr id="6" name="그림 5">
+            <a:extLst>
+              <a:ext uri="{FF2B5EF4-FFF2-40B4-BE49-F238E27FC236}">
+                <a16:creationId xmlns:a16="http://schemas.microsoft.com/office/drawing/2014/main" id="{5B538FC6-9510-F441-E3C1-7BBC42117F5B}"/>
+              </a:ext>
+            </a:extLst>
+          </p:cNvPr>
+          <p:cNvPicPr>
+            <a:picLocks noChangeAspect="1"/>
+          </p:cNvPicPr>
+          <p:nvPr/>
+        </p:nvPicPr>
+        <p:blipFill>
+          <a:blip r:embed="rId3">
+            <a:extLst>
+              <a:ext uri="{28A0092B-C50C-407E-A947-70E740481C1C}">
+                <a14:useLocalDpi xmlns:a14="http://schemas.microsoft.com/office/drawing/2010/main" val="0"/>
+              </a:ext>
+            </a:extLst>
+          </a:blip>
+          <a:stretch>
+            <a:fillRect/>
+          </a:stretch>
+        </p:blipFill>
+        <p:spPr>
+          <a:xfrm>
+            <a:off x="669638" y="1271584"/>
+            <a:ext cx="4572000" cy="2571750"/>
+          </a:xfrm>
+          <a:prstGeom prst="rect">
+            <a:avLst/>
+          </a:prstGeom>
+        </p:spPr>
+      </p:pic>
+      <p:sp>
+        <p:nvSpPr>
+          <p:cNvPr id="7" name="TextBox 6">
+            <a:extLst>
+              <a:ext uri="{FF2B5EF4-FFF2-40B4-BE49-F238E27FC236}">
+                <a16:creationId xmlns:a16="http://schemas.microsoft.com/office/drawing/2014/main" id="{99EC943E-F69D-29E4-8DB9-66CE5FEF36AA}"/>
+              </a:ext>
+            </a:extLst>
+          </p:cNvPr>
+          <p:cNvSpPr txBox="1"/>
+          <p:nvPr/>
+        </p:nvSpPr>
+        <p:spPr>
+          <a:xfrm>
+            <a:off x="5433132" y="1271584"/>
+            <a:ext cx="6204685" cy="1200329"/>
+          </a:xfrm>
+          <a:prstGeom prst="rect">
+            <a:avLst/>
+          </a:prstGeom>
+          <a:noFill/>
+        </p:spPr>
+        <p:txBody>
+          <a:bodyPr wrap="square" rtlCol="0">
+            <a:spAutoFit/>
+          </a:bodyPr>
+          <a:lstStyle/>
+          <a:p>
+            <a:r>
+              <a:rPr lang="en-US" altLang="ko-KR" dirty="0"/>
+              <a:t>3</a:t>
+            </a:r>
+            <a:r>
+              <a:rPr lang="ko-KR" altLang="en-US" dirty="0"/>
+              <a:t>번 레이어와 </a:t>
+            </a:r>
+            <a:r>
+              <a:rPr lang="en-US" altLang="ko-KR" dirty="0"/>
+              <a:t>4</a:t>
+            </a:r>
+            <a:r>
+              <a:rPr lang="ko-KR" altLang="en-US" dirty="0"/>
+              <a:t>번 레이어 사이에</a:t>
+            </a:r>
+            <a:endParaRPr lang="en-US" altLang="ko-KR" dirty="0"/>
+          </a:p>
+          <a:p>
+            <a:r>
+              <a:rPr lang="ko-KR" altLang="en-US" dirty="0"/>
+              <a:t>캐릭터를 둬서 캐릭터의 다리가 가려져야 함</a:t>
+            </a:r>
+            <a:endParaRPr lang="en-US" altLang="ko-KR" dirty="0"/>
+          </a:p>
+          <a:p>
+            <a:r>
+              <a:rPr lang="en-US" altLang="ko-KR" dirty="0"/>
+              <a:t>AD</a:t>
+            </a:r>
+            <a:r>
+              <a:rPr lang="ko-KR" altLang="en-US" dirty="0"/>
+              <a:t>가 주시하고 있으니 배경 </a:t>
+            </a:r>
+            <a:r>
+              <a:rPr lang="ko-KR" altLang="en-US" dirty="0" err="1"/>
+              <a:t>프리팹을</a:t>
+            </a:r>
+            <a:endParaRPr lang="en-US" altLang="ko-KR" dirty="0"/>
+          </a:p>
+          <a:p>
+            <a:r>
+              <a:rPr lang="en-US" altLang="ko-KR" dirty="0"/>
+              <a:t>3</a:t>
+            </a:r>
+            <a:r>
+              <a:rPr lang="ko-KR" altLang="en-US" dirty="0"/>
+              <a:t>번 레이어 앞</a:t>
+            </a:r>
+            <a:r>
+              <a:rPr lang="en-US" altLang="ko-KR" dirty="0"/>
+              <a:t>/</a:t>
+            </a:r>
+            <a:r>
+              <a:rPr lang="ko-KR" altLang="en-US" dirty="0"/>
+              <a:t>뒤 </a:t>
+            </a:r>
+            <a:r>
+              <a:rPr lang="en-US" altLang="ko-KR" dirty="0"/>
+              <a:t>2</a:t>
+            </a:r>
+            <a:r>
+              <a:rPr lang="ko-KR" altLang="en-US" dirty="0"/>
+              <a:t>개로 쪼개서라도 적용하는 게 좋음</a:t>
+            </a:r>
+            <a:endParaRPr lang="en-US" altLang="ko-KR" dirty="0"/>
+          </a:p>
+        </p:txBody>
+      </p:sp>
+      <p:pic>
+        <p:nvPicPr>
+          <p:cNvPr id="10" name="그림 9">
+            <a:extLst>
+              <a:ext uri="{FF2B5EF4-FFF2-40B4-BE49-F238E27FC236}">
+                <a16:creationId xmlns:a16="http://schemas.microsoft.com/office/drawing/2014/main" id="{75BB474F-D3E1-161A-76C2-76E0E5C32DEC}"/>
+              </a:ext>
+            </a:extLst>
+          </p:cNvPr>
+          <p:cNvPicPr>
+            <a:picLocks noChangeAspect="1"/>
+          </p:cNvPicPr>
+          <p:nvPr/>
+        </p:nvPicPr>
+        <p:blipFill>
+          <a:blip r:embed="rId4">
+            <a:extLst>
+              <a:ext uri="{28A0092B-C50C-407E-A947-70E740481C1C}">
+                <a14:useLocalDpi xmlns:a14="http://schemas.microsoft.com/office/drawing/2010/main" val="0"/>
+              </a:ext>
+            </a:extLst>
+          </a:blip>
+          <a:stretch>
+            <a:fillRect/>
+          </a:stretch>
+        </p:blipFill>
+        <p:spPr>
+          <a:xfrm>
+            <a:off x="4269351" y="4161565"/>
+            <a:ext cx="4120434" cy="2317744"/>
+          </a:xfrm>
+          <a:prstGeom prst="rect">
+            <a:avLst/>
+          </a:prstGeom>
+        </p:spPr>
+      </p:pic>
+      <p:pic>
+        <p:nvPicPr>
+          <p:cNvPr id="12" name="그림 11">
+            <a:extLst>
+              <a:ext uri="{FF2B5EF4-FFF2-40B4-BE49-F238E27FC236}">
+                <a16:creationId xmlns:a16="http://schemas.microsoft.com/office/drawing/2014/main" id="{549990EF-93EB-7B97-32E1-6AC7C1F6D6C0}"/>
+              </a:ext>
+            </a:extLst>
+          </p:cNvPr>
+          <p:cNvPicPr>
+            <a:picLocks noChangeAspect="1"/>
+          </p:cNvPicPr>
+          <p:nvPr/>
+        </p:nvPicPr>
+        <p:blipFill>
+          <a:blip r:embed="rId5"/>
+          <a:stretch>
+            <a:fillRect/>
+          </a:stretch>
+        </p:blipFill>
+        <p:spPr>
+          <a:xfrm>
+            <a:off x="669638" y="4077715"/>
+            <a:ext cx="3505198" cy="2401594"/>
+          </a:xfrm>
+          <a:prstGeom prst="rect">
+            <a:avLst/>
+          </a:prstGeom>
+        </p:spPr>
+      </p:pic>
+      <p:sp>
+        <p:nvSpPr>
+          <p:cNvPr id="13" name="TextBox 12">
+            <a:extLst>
+              <a:ext uri="{FF2B5EF4-FFF2-40B4-BE49-F238E27FC236}">
+                <a16:creationId xmlns:a16="http://schemas.microsoft.com/office/drawing/2014/main" id="{08C39408-9F8E-66BA-4797-272C7487AB6E}"/>
+              </a:ext>
+            </a:extLst>
+          </p:cNvPr>
+          <p:cNvSpPr txBox="1"/>
+          <p:nvPr/>
+        </p:nvSpPr>
+        <p:spPr>
+          <a:xfrm>
+            <a:off x="8552873" y="4161565"/>
+            <a:ext cx="3177309" cy="2554545"/>
+          </a:xfrm>
+          <a:prstGeom prst="rect">
+            <a:avLst/>
+          </a:prstGeom>
+          <a:noFill/>
+        </p:spPr>
+        <p:txBody>
+          <a:bodyPr wrap="square" rtlCol="0">
+            <a:spAutoFit/>
+          </a:bodyPr>
+          <a:lstStyle/>
+          <a:p>
+            <a:r>
+              <a:rPr lang="ko-KR" altLang="en-US" dirty="0"/>
+              <a:t>덱 리스트 스크롤을 세로로</a:t>
+            </a:r>
+            <a:r>
+              <a:rPr lang="en-US" altLang="ko-KR" dirty="0"/>
+              <a:t>!</a:t>
+            </a:r>
+          </a:p>
+          <a:p>
+            <a:r>
+              <a:rPr lang="ko-KR" altLang="en-US" dirty="0"/>
+              <a:t>스크롤 오브젝트를 어떻게 수정하는지 잘 </a:t>
+            </a:r>
+            <a:r>
+              <a:rPr lang="ko-KR" altLang="en-US" dirty="0" err="1"/>
+              <a:t>모르겠어서</a:t>
+            </a:r>
+            <a:endParaRPr lang="en-US" altLang="ko-KR" dirty="0"/>
+          </a:p>
+          <a:p>
+            <a:r>
+              <a:rPr lang="ko-KR" altLang="en-US" dirty="0"/>
+              <a:t>방치했음</a:t>
+            </a:r>
+            <a:r>
+              <a:rPr lang="en-US" altLang="ko-KR" dirty="0"/>
+              <a:t>(</a:t>
+            </a:r>
+            <a:r>
+              <a:rPr lang="ko-KR" altLang="en-US" dirty="0" err="1"/>
+              <a:t>잘못건들면</a:t>
+            </a:r>
+            <a:r>
+              <a:rPr lang="ko-KR" altLang="en-US" dirty="0"/>
+              <a:t> 빨간 </a:t>
+            </a:r>
+            <a:r>
+              <a:rPr lang="en-US" altLang="ko-KR" dirty="0"/>
+              <a:t>X</a:t>
+            </a:r>
+            <a:r>
+              <a:rPr lang="ko-KR" altLang="en-US" dirty="0"/>
+              <a:t>뜨면서 깨지던</a:t>
             </a:r>
             <a:r>
               <a:rPr lang="en-US" altLang="ko-KR" dirty="0"/>
               <a:t>)</a:t>
             </a:r>
-            <a:r>
-              <a:rPr lang="ko-KR" altLang="en-US" dirty="0"/>
-              <a:t> </a:t>
-            </a:r>
-            <a:r>
-              <a:rPr lang="en-US" altLang="ko-KR" dirty="0"/>
-              <a:t> - [</a:t>
-            </a:r>
-            <a:r>
-              <a:rPr lang="ko-KR" altLang="en-US" dirty="0"/>
-              <a:t>불안정</a:t>
-            </a:r>
-            <a:r>
-              <a:rPr lang="en-US" altLang="ko-KR" dirty="0"/>
-              <a:t>] </a:t>
-            </a:r>
-            <a:r>
-              <a:rPr lang="ko-KR" altLang="en-US" dirty="0"/>
-              <a:t>부여</a:t>
-            </a:r>
-            <a:r>
-              <a:rPr lang="en-US" altLang="ko-KR" dirty="0"/>
-              <a:t>, </a:t>
-            </a:r>
-            <a:r>
-              <a:rPr lang="ko-KR" altLang="en-US" dirty="0"/>
-              <a:t>불안정 태그 카드 등장 </a:t>
-            </a:r>
-            <a:r>
-              <a:rPr lang="en-US" altLang="ko-KR" dirty="0">
-                <a:solidFill>
-                  <a:srgbClr val="C00000"/>
-                </a:solidFill>
-              </a:rPr>
-              <a:t>&lt;&lt;</a:t>
-            </a:r>
-            <a:r>
-              <a:rPr lang="ko-KR" altLang="en-US" dirty="0">
-                <a:solidFill>
-                  <a:srgbClr val="C00000"/>
-                </a:solidFill>
-              </a:rPr>
-              <a:t>특정 층 반드시 등장</a:t>
-            </a:r>
-            <a:endParaRPr lang="en-US" altLang="ko-KR" dirty="0">
-              <a:solidFill>
-                <a:srgbClr val="C00000"/>
-              </a:solidFill>
-            </a:endParaRPr>
-          </a:p>
-          <a:p>
-            <a:endParaRPr lang="en-US" altLang="ko-KR" dirty="0"/>
-          </a:p>
-          <a:p>
-            <a:r>
-              <a:rPr lang="ko-KR" altLang="en-US" b="1" dirty="0"/>
-              <a:t>불안정 </a:t>
-            </a:r>
-            <a:r>
-              <a:rPr lang="en-US" altLang="ko-KR" b="1" dirty="0"/>
-              <a:t>UI </a:t>
-            </a:r>
-            <a:r>
-              <a:rPr lang="en-US" altLang="ko-KR" dirty="0"/>
-              <a:t>– </a:t>
-            </a:r>
-            <a:r>
-              <a:rPr lang="ko-KR" altLang="en-US" dirty="0"/>
-              <a:t>캐릭터 옆에 게이지 추가 </a:t>
-            </a:r>
-            <a:r>
-              <a:rPr lang="en-US" altLang="ko-KR" dirty="0"/>
-              <a:t>/ </a:t>
-            </a:r>
-            <a:r>
-              <a:rPr lang="ko-KR" altLang="en-US" dirty="0"/>
-              <a:t>마우스 </a:t>
-            </a:r>
-            <a:r>
-              <a:rPr lang="ko-KR" altLang="en-US" dirty="0" err="1"/>
-              <a:t>오버시</a:t>
-            </a:r>
-            <a:r>
-              <a:rPr lang="ko-KR" altLang="en-US" dirty="0"/>
-              <a:t> 설명 표기</a:t>
-            </a:r>
-            <a:endParaRPr lang="en-US" altLang="ko-KR" dirty="0"/>
-          </a:p>
-          <a:p>
-            <a:r>
-              <a:rPr lang="en-US" altLang="ko-KR" dirty="0"/>
-              <a:t> </a:t>
-            </a:r>
-            <a:r>
-              <a:rPr lang="ko-KR" altLang="en-US" dirty="0"/>
-              <a:t>최대 </a:t>
-            </a:r>
-            <a:r>
-              <a:rPr lang="en-US" altLang="ko-KR" dirty="0"/>
-              <a:t>10 / </a:t>
-            </a:r>
-            <a:r>
-              <a:rPr lang="ko-KR" altLang="en-US" dirty="0"/>
-              <a:t>방해 타일 </a:t>
-            </a:r>
-            <a:r>
-              <a:rPr lang="ko-KR" altLang="en-US" dirty="0" err="1"/>
-              <a:t>타격시</a:t>
-            </a:r>
-            <a:r>
-              <a:rPr lang="ko-KR" altLang="en-US" dirty="0"/>
-              <a:t> </a:t>
-            </a:r>
-            <a:r>
-              <a:rPr lang="en-US" altLang="ko-KR" dirty="0"/>
-              <a:t>+ 1 / 10 </a:t>
-            </a:r>
-            <a:r>
-              <a:rPr lang="ko-KR" altLang="en-US" dirty="0" err="1"/>
-              <a:t>달성시</a:t>
-            </a:r>
-            <a:r>
-              <a:rPr lang="ko-KR" altLang="en-US" dirty="0"/>
-              <a:t> 게임 오버</a:t>
-            </a:r>
-            <a:endParaRPr lang="en-US" altLang="ko-KR" dirty="0"/>
-          </a:p>
-          <a:p>
-            <a:endParaRPr lang="en-US" altLang="ko-KR" dirty="0"/>
-          </a:p>
-          <a:p>
-            <a:r>
-              <a:rPr lang="ko-KR" altLang="en-US" b="1" dirty="0"/>
-              <a:t>유물</a:t>
-            </a:r>
-            <a:endParaRPr lang="en-US" altLang="ko-KR" b="1" dirty="0"/>
-          </a:p>
-          <a:p>
-            <a:r>
-              <a:rPr lang="ko-KR" altLang="en-US" dirty="0"/>
-              <a:t>불안정</a:t>
-            </a:r>
-            <a:r>
-              <a:rPr lang="en-US" altLang="ko-KR" dirty="0"/>
-              <a:t> </a:t>
-            </a:r>
-            <a:r>
-              <a:rPr lang="ko-KR" altLang="en-US" dirty="0"/>
-              <a:t>룬 </a:t>
-            </a:r>
-            <a:r>
-              <a:rPr lang="en-US" altLang="ko-KR" dirty="0"/>
-              <a:t>– </a:t>
-            </a:r>
-            <a:r>
-              <a:rPr lang="ko-KR" altLang="en-US" dirty="0"/>
-              <a:t>불안정이 </a:t>
-            </a:r>
-            <a:r>
-              <a:rPr lang="en-US" altLang="ko-KR" dirty="0"/>
-              <a:t>1 </a:t>
-            </a:r>
-            <a:r>
-              <a:rPr lang="ko-KR" altLang="en-US" dirty="0"/>
-              <a:t>이하로 내려가지 않음</a:t>
-            </a:r>
-            <a:r>
-              <a:rPr lang="en-US" altLang="ko-KR" dirty="0"/>
+          </a:p>
+          <a:p>
+            <a:r>
+              <a:rPr lang="ko-KR" altLang="en-US" sz="1400" dirty="0" err="1"/>
+              <a:t>덱→카드</a:t>
+            </a:r>
+            <a:r>
+              <a:rPr lang="ko-KR" altLang="en-US" sz="1400" dirty="0"/>
+              <a:t> 전체보기 버튼</a:t>
+            </a:r>
+            <a:r>
+              <a:rPr lang="en-US" altLang="ko-KR" sz="1400" dirty="0"/>
+              <a:t>,</a:t>
+            </a:r>
+          </a:p>
+          <a:p>
+            <a:r>
+              <a:rPr lang="ko-KR" altLang="en-US" sz="1400" dirty="0"/>
+              <a:t>카드 </a:t>
+            </a:r>
+            <a:r>
+              <a:rPr lang="ko-KR" altLang="en-US" sz="1400" dirty="0" err="1"/>
+              <a:t>전체보기→덱으로</a:t>
+            </a:r>
+            <a:r>
+              <a:rPr lang="ko-KR" altLang="en-US" sz="1400" dirty="0"/>
+              <a:t> 돌아가는 버튼</a:t>
+            </a:r>
+            <a:r>
+              <a:rPr lang="en-US" altLang="ko-KR" sz="1400" dirty="0"/>
               <a:t>(</a:t>
             </a:r>
             <a:r>
-              <a:rPr lang="ko-KR" altLang="en-US" dirty="0"/>
-              <a:t>이미 불안정 룬을 가지고 있다면 다음 단계로 변경</a:t>
-            </a:r>
-            <a:r>
-              <a:rPr lang="en-US" altLang="ko-KR" dirty="0"/>
-              <a:t>)</a:t>
-            </a:r>
-          </a:p>
-          <a:p>
-            <a:r>
-              <a:rPr lang="ko-KR" altLang="en-US" dirty="0"/>
-              <a:t>불안정 룬</a:t>
-            </a:r>
-            <a:r>
-              <a:rPr lang="en-US" altLang="ko-KR" dirty="0"/>
-              <a:t>+ - </a:t>
-            </a:r>
-            <a:r>
-              <a:rPr lang="ko-KR" altLang="en-US" dirty="0"/>
-              <a:t>불안정이 </a:t>
-            </a:r>
-            <a:r>
-              <a:rPr lang="en-US" altLang="ko-KR" dirty="0"/>
-              <a:t>2 </a:t>
-            </a:r>
-            <a:r>
-              <a:rPr lang="ko-KR" altLang="en-US" dirty="0"/>
-              <a:t>이하로 내려가지 않음</a:t>
-            </a:r>
-            <a:endParaRPr lang="en-US" altLang="ko-KR" dirty="0"/>
-          </a:p>
-          <a:p>
-            <a:r>
-              <a:rPr lang="ko-KR" altLang="en-US" dirty="0"/>
-              <a:t>불안정 룬</a:t>
-            </a:r>
-            <a:r>
-              <a:rPr lang="en-US" altLang="ko-KR" dirty="0"/>
-              <a:t>++ - </a:t>
-            </a:r>
-            <a:r>
-              <a:rPr lang="ko-KR" altLang="en-US" dirty="0"/>
-              <a:t>불안정이 </a:t>
-            </a:r>
-            <a:r>
-              <a:rPr lang="en-US" altLang="ko-KR" dirty="0"/>
-              <a:t>3 </a:t>
-            </a:r>
-            <a:r>
-              <a:rPr lang="ko-KR" altLang="en-US" dirty="0"/>
-              <a:t>이하로 내려가지 않음</a:t>
-            </a:r>
-            <a:r>
-              <a:rPr lang="en-US" altLang="ko-KR" dirty="0"/>
-              <a:t>… </a:t>
-            </a:r>
-            <a:r>
-              <a:rPr lang="ko-KR" altLang="en-US" dirty="0"/>
-              <a:t>등으로 총 타격 횟수 낮춰 난이도 올리기</a:t>
-            </a:r>
-            <a:endParaRPr lang="en-US" altLang="ko-KR" dirty="0"/>
-          </a:p>
-          <a:p>
-            <a:r>
-              <a:rPr lang="en-US" altLang="ko-KR" dirty="0"/>
-              <a:t>‘</a:t>
-            </a:r>
-            <a:r>
-              <a:rPr lang="ko-KR" altLang="en-US" dirty="0"/>
-              <a:t>무너지는 발판</a:t>
-            </a:r>
-            <a:r>
-              <a:rPr lang="en-US" altLang="ko-KR" dirty="0"/>
-              <a:t>’ – [</a:t>
-            </a:r>
-            <a:r>
-              <a:rPr lang="ko-KR" altLang="en-US" dirty="0"/>
-              <a:t>불안정</a:t>
-            </a:r>
-            <a:r>
-              <a:rPr lang="en-US" altLang="ko-KR" dirty="0"/>
-              <a:t>]</a:t>
-            </a:r>
-            <a:r>
-              <a:rPr lang="ko-KR" altLang="en-US" dirty="0"/>
-              <a:t>이 초기화 되지 않음 </a:t>
-            </a:r>
-            <a:r>
-              <a:rPr lang="en-US" altLang="ko-KR" dirty="0">
-                <a:solidFill>
-                  <a:srgbClr val="C00000"/>
-                </a:solidFill>
-              </a:rPr>
-              <a:t>&lt;&lt;</a:t>
-            </a:r>
-            <a:r>
-              <a:rPr lang="ko-KR" altLang="en-US" dirty="0">
-                <a:solidFill>
-                  <a:srgbClr val="C00000"/>
-                </a:solidFill>
-              </a:rPr>
-              <a:t>특정 층 반드시 등장</a:t>
-            </a:r>
-            <a:endParaRPr lang="en-US" altLang="ko-KR" dirty="0">
-              <a:solidFill>
-                <a:srgbClr val="C00000"/>
-              </a:solidFill>
-            </a:endParaRPr>
-          </a:p>
-          <a:p>
-            <a:endParaRPr lang="en-US" altLang="ko-KR" dirty="0"/>
-          </a:p>
-          <a:p>
-            <a:r>
-              <a:rPr lang="ko-KR" altLang="en-US" b="1" dirty="0"/>
-              <a:t>카드</a:t>
-            </a:r>
-            <a:endParaRPr lang="en-US" altLang="ko-KR" b="1" dirty="0"/>
-          </a:p>
-          <a:p>
-            <a:r>
-              <a:rPr lang="en-US" altLang="ko-KR" dirty="0"/>
-              <a:t> </a:t>
-            </a:r>
-            <a:r>
-              <a:rPr lang="ko-KR" altLang="en-US" dirty="0"/>
-              <a:t>불안정 회복</a:t>
-            </a:r>
-            <a:r>
-              <a:rPr lang="en-US" altLang="ko-KR" dirty="0"/>
-              <a:t>, </a:t>
-            </a:r>
-            <a:r>
-              <a:rPr lang="ko-KR" altLang="en-US" dirty="0"/>
-              <a:t>불안정 방지 카드</a:t>
-            </a:r>
-            <a:r>
-              <a:rPr lang="en-US" altLang="ko-KR" dirty="0"/>
-              <a:t>, </a:t>
-            </a:r>
-            <a:r>
-              <a:rPr lang="ko-KR" altLang="en-US" dirty="0"/>
-              <a:t>불안정을 증가하고 보너스를 받는</a:t>
-            </a:r>
-            <a:endParaRPr lang="en-US" altLang="ko-KR" dirty="0"/>
-          </a:p>
-          <a:p>
-            <a:r>
-              <a:rPr lang="en-US" altLang="ko-KR" dirty="0"/>
-              <a:t> </a:t>
-            </a:r>
-            <a:r>
-              <a:rPr lang="ko-KR" altLang="en-US" dirty="0"/>
-              <a:t>등을 </a:t>
-            </a:r>
-            <a:r>
-              <a:rPr lang="en-US" altLang="ko-KR" dirty="0"/>
-              <a:t>[</a:t>
-            </a:r>
-            <a:r>
-              <a:rPr lang="ko-KR" altLang="en-US" dirty="0"/>
-              <a:t>불안정</a:t>
-            </a:r>
-            <a:r>
-              <a:rPr lang="en-US" altLang="ko-KR" dirty="0"/>
-              <a:t>]</a:t>
-            </a:r>
-            <a:r>
-              <a:rPr lang="ko-KR" altLang="en-US" dirty="0"/>
-              <a:t> 태그 달고 추가</a:t>
-            </a:r>
-            <a:endParaRPr lang="en-US" altLang="ko-KR" dirty="0"/>
-          </a:p>
-          <a:p>
-            <a:endParaRPr lang="en-US" altLang="ko-KR" dirty="0"/>
-          </a:p>
-          <a:p>
-            <a:endParaRPr lang="en-US" altLang="ko-KR" dirty="0"/>
-          </a:p>
-        </p:txBody>
-      </p:sp>
+              <a:rPr lang="ko-KR" altLang="en-US" sz="1400" dirty="0"/>
+              <a:t>빨간 네모</a:t>
+            </a:r>
+            <a:r>
+              <a:rPr lang="en-US" altLang="ko-KR" sz="1400" dirty="0"/>
+              <a:t>) </a:t>
+            </a:r>
+            <a:r>
+              <a:rPr lang="ko-KR" altLang="en-US" sz="1400" dirty="0"/>
+              <a:t>추가해두면</a:t>
+            </a:r>
+            <a:endParaRPr lang="en-US" altLang="ko-KR" sz="1400" dirty="0"/>
+          </a:p>
+          <a:p>
+            <a:r>
+              <a:rPr lang="ko-KR" altLang="en-US" sz="1400" dirty="0"/>
+              <a:t>아이콘 배치</a:t>
+            </a:r>
+            <a:r>
+              <a:rPr lang="en-US" altLang="ko-KR" sz="1400" dirty="0"/>
+              <a:t>/</a:t>
+            </a:r>
+            <a:r>
+              <a:rPr lang="ko-KR" altLang="en-US" sz="1400" dirty="0"/>
+              <a:t>이미지 수정 </a:t>
+            </a:r>
+            <a:r>
+              <a:rPr lang="ko-KR" altLang="en-US" sz="1400" dirty="0" err="1"/>
+              <a:t>해두겠음</a:t>
+            </a:r>
+            <a:endParaRPr lang="en-US" altLang="ko-KR" sz="1400" dirty="0"/>
+          </a:p>
+          <a:p>
+            <a:r>
+              <a:rPr lang="en-US" altLang="ko-KR" sz="1400" dirty="0"/>
+              <a:t>   </a:t>
+            </a:r>
+            <a:r>
+              <a:rPr lang="ko-KR" altLang="en-US" sz="1400" dirty="0"/>
+              <a:t>←이 아이콘 써두면 됨</a:t>
+            </a:r>
+            <a:endParaRPr lang="en-US" altLang="ko-KR" sz="1400" dirty="0"/>
+          </a:p>
+        </p:txBody>
+      </p:sp>
+      <p:sp>
+        <p:nvSpPr>
+          <p:cNvPr id="14" name="직사각형 13">
+            <a:extLst>
+              <a:ext uri="{FF2B5EF4-FFF2-40B4-BE49-F238E27FC236}">
+                <a16:creationId xmlns:a16="http://schemas.microsoft.com/office/drawing/2014/main" id="{343E8DD9-C4B4-32C5-AC16-DAC4F5CDF7B5}"/>
+              </a:ext>
+            </a:extLst>
+          </p:cNvPr>
+          <p:cNvSpPr/>
+          <p:nvPr/>
+        </p:nvSpPr>
+        <p:spPr>
+          <a:xfrm>
+            <a:off x="4396509" y="6096000"/>
+            <a:ext cx="277091" cy="383309"/>
+          </a:xfrm>
+          <a:prstGeom prst="rect">
+            <a:avLst/>
+          </a:prstGeom>
+          <a:noFill/>
+          <a:ln>
+            <a:solidFill>
+              <a:srgbClr val="FF0000"/>
+            </a:solidFill>
+          </a:ln>
+        </p:spPr>
+        <p:style>
+          <a:lnRef idx="2">
+            <a:schemeClr val="accent1">
+              <a:shade val="15000"/>
+            </a:schemeClr>
+          </a:lnRef>
+          <a:fillRef idx="1">
+            <a:schemeClr val="accent1"/>
+          </a:fillRef>
+          <a:effectRef idx="0">
+            <a:schemeClr val="accent1"/>
+          </a:effectRef>
+          <a:fontRef idx="minor">
+            <a:schemeClr val="lt1"/>
+          </a:fontRef>
+        </p:style>
+        <p:txBody>
+          <a:bodyPr rtlCol="0" anchor="ctr"/>
+          <a:lstStyle/>
+          <a:p>
+            <a:pPr algn="ctr"/>
+            <a:endParaRPr lang="ko-KR" altLang="en-US"/>
+          </a:p>
+        </p:txBody>
+      </p:sp>
+      <p:pic>
+        <p:nvPicPr>
+          <p:cNvPr id="16" name="그림 15">
+            <a:extLst>
+              <a:ext uri="{FF2B5EF4-FFF2-40B4-BE49-F238E27FC236}">
+                <a16:creationId xmlns:a16="http://schemas.microsoft.com/office/drawing/2014/main" id="{FCE538F6-F3E9-553E-1C85-EBD6F8ED0D38}"/>
+              </a:ext>
+            </a:extLst>
+          </p:cNvPr>
+          <p:cNvPicPr>
+            <a:picLocks noChangeAspect="1"/>
+          </p:cNvPicPr>
+          <p:nvPr/>
+        </p:nvPicPr>
+        <p:blipFill>
+          <a:blip r:embed="rId6">
+            <a:extLst>
+              <a:ext uri="{28A0092B-C50C-407E-A947-70E740481C1C}">
+                <a14:useLocalDpi xmlns:a14="http://schemas.microsoft.com/office/drawing/2010/main" val="0"/>
+              </a:ext>
+            </a:extLst>
+          </a:blip>
+          <a:stretch>
+            <a:fillRect/>
+          </a:stretch>
+        </p:blipFill>
+        <p:spPr>
+          <a:xfrm>
+            <a:off x="8552873" y="6453909"/>
+            <a:ext cx="228600" cy="228600"/>
+          </a:xfrm>
+          <a:prstGeom prst="rect">
+            <a:avLst/>
+          </a:prstGeom>
+        </p:spPr>
+      </p:pic>
     </p:spTree>
     <p:extLst>
       <p:ext uri="{BB962C8B-B14F-4D97-AF65-F5344CB8AC3E}">
-        <p14:creationId xmlns:p14="http://schemas.microsoft.com/office/powerpoint/2010/main" val="1179173822"/>
+        <p14:creationId xmlns:p14="http://schemas.microsoft.com/office/powerpoint/2010/main" val="482144358"/>
+      </p:ext>
+    </p:extLst>
+  </p:cSld>
+  <p:clrMapOvr>
+    <a:masterClrMapping/>
+  </p:clrMapOvr>
+</p:sld>
+</file>
+
+<file path=ppt/slides/slide9.xml><?xml version="1.0" encoding="utf-8"?>
+<p:sld xmlns:a="http://schemas.openxmlformats.org/drawingml/2006/main" xmlns:r="http://schemas.openxmlformats.org/officeDocument/2006/relationships" xmlns:p="http://schemas.openxmlformats.org/presentationml/2006/main">
+  <p:cSld>
+    <p:spTree>
+      <p:nvGrpSpPr>
+        <p:cNvPr id="1" name="">
+          <a:extLst>
+            <a:ext uri="{FF2B5EF4-FFF2-40B4-BE49-F238E27FC236}">
+              <a16:creationId xmlns:a16="http://schemas.microsoft.com/office/drawing/2014/main" id="{A6729EE9-76A6-FE22-10F6-0641BF360CD3}"/>
+            </a:ext>
+          </a:extLst>
+        </p:cNvPr>
+        <p:cNvGrpSpPr/>
+        <p:nvPr/>
+      </p:nvGrpSpPr>
+      <p:grpSpPr>
+        <a:xfrm>
+          <a:off x="0" y="0"/>
+          <a:ext cx="0" cy="0"/>
+          <a:chOff x="0" y="0"/>
+          <a:chExt cx="0" cy="0"/>
+        </a:xfrm>
+      </p:grpSpPr>
+      <p:sp>
+        <p:nvSpPr>
+          <p:cNvPr id="2" name="AutoShape 2">
+            <a:extLst>
+              <a:ext uri="{FF2B5EF4-FFF2-40B4-BE49-F238E27FC236}">
+                <a16:creationId xmlns:a16="http://schemas.microsoft.com/office/drawing/2014/main" id="{9AC92590-A3F4-A76F-52CC-7E80FE3377E7}"/>
+              </a:ext>
+            </a:extLst>
+          </p:cNvPr>
+          <p:cNvSpPr>
+            <a:spLocks noChangeAspect="1" noChangeArrowheads="1"/>
+          </p:cNvSpPr>
+          <p:nvPr/>
+        </p:nvSpPr>
+        <p:spPr bwMode="auto">
+          <a:xfrm>
+            <a:off x="5943600" y="3276600"/>
+            <a:ext cx="304800" cy="304800"/>
+          </a:xfrm>
+          <a:prstGeom prst="rect">
+            <a:avLst/>
+          </a:prstGeom>
+          <a:noFill/>
+          <a:extLst>
+            <a:ext uri="{909E8E84-426E-40DD-AFC4-6F175D3DCCD1}">
+              <a14:hiddenFill xmlns:a14="http://schemas.microsoft.com/office/drawing/2010/main">
+                <a:solidFill>
+                  <a:srgbClr val="FFFFFF"/>
+                </a:solidFill>
+              </a14:hiddenFill>
+            </a:ext>
+          </a:extLst>
+        </p:spPr>
+        <p:txBody>
+          <a:bodyPr vert="horz" wrap="square" lIns="91440" tIns="45720" rIns="91440" bIns="45720" numCol="1" anchor="t" anchorCtr="0" compatLnSpc="1">
+            <a:prstTxWarp prst="textNoShape">
+              <a:avLst/>
+            </a:prstTxWarp>
+          </a:bodyPr>
+          <a:lstStyle/>
+          <a:p>
+            <a:endParaRPr lang="ko-KR" altLang="en-US"/>
+          </a:p>
+        </p:txBody>
+      </p:sp>
+      <p:sp>
+        <p:nvSpPr>
+          <p:cNvPr id="24" name="TextBox 23">
+            <a:extLst>
+              <a:ext uri="{FF2B5EF4-FFF2-40B4-BE49-F238E27FC236}">
+                <a16:creationId xmlns:a16="http://schemas.microsoft.com/office/drawing/2014/main" id="{AD3E083E-B01E-1930-5D08-74EE051599D7}"/>
+              </a:ext>
+            </a:extLst>
+          </p:cNvPr>
+          <p:cNvSpPr txBox="1"/>
+          <p:nvPr/>
+        </p:nvSpPr>
+        <p:spPr>
+          <a:xfrm>
+            <a:off x="669638" y="563419"/>
+            <a:ext cx="10367818" cy="1754326"/>
+          </a:xfrm>
+          <a:prstGeom prst="rect">
+            <a:avLst/>
+          </a:prstGeom>
+          <a:noFill/>
+        </p:spPr>
+        <p:txBody>
+          <a:bodyPr wrap="square" rtlCol="0">
+            <a:spAutoFit/>
+          </a:bodyPr>
+          <a:lstStyle/>
+          <a:p>
+            <a:r>
+              <a:rPr lang="en-US" altLang="ko-KR" b="1" dirty="0"/>
+              <a:t>0425 PD </a:t>
+            </a:r>
+            <a:r>
+              <a:rPr lang="ko-KR" altLang="en-US" b="1" dirty="0"/>
+              <a:t>사라짐 사건</a:t>
+            </a:r>
+            <a:r>
+              <a:rPr lang="en-US" altLang="ko-KR" b="1" dirty="0"/>
+              <a:t>2</a:t>
+            </a:r>
+          </a:p>
+          <a:p>
+            <a:endParaRPr lang="en-US" altLang="ko-KR" dirty="0"/>
+          </a:p>
+          <a:p>
+            <a:endParaRPr lang="en-US" altLang="ko-KR" dirty="0"/>
+          </a:p>
+          <a:p>
+            <a:endParaRPr lang="en-US" altLang="ko-KR" dirty="0"/>
+          </a:p>
+          <a:p>
+            <a:endParaRPr lang="en-US" altLang="ko-KR" dirty="0"/>
+          </a:p>
+          <a:p>
+            <a:endParaRPr lang="en-US" altLang="ko-KR" dirty="0"/>
+          </a:p>
+        </p:txBody>
+      </p:sp>
+      <p:pic>
+        <p:nvPicPr>
+          <p:cNvPr id="10" name="그림 9">
+            <a:extLst>
+              <a:ext uri="{FF2B5EF4-FFF2-40B4-BE49-F238E27FC236}">
+                <a16:creationId xmlns:a16="http://schemas.microsoft.com/office/drawing/2014/main" id="{11A60A88-1BEF-ED99-4A95-4D8728348081}"/>
+              </a:ext>
+            </a:extLst>
+          </p:cNvPr>
+          <p:cNvPicPr>
+            <a:picLocks noChangeAspect="1"/>
+          </p:cNvPicPr>
+          <p:nvPr/>
+        </p:nvPicPr>
+        <p:blipFill>
+          <a:blip r:embed="rId2">
+            <a:extLst>
+              <a:ext uri="{28A0092B-C50C-407E-A947-70E740481C1C}">
+                <a14:useLocalDpi xmlns:a14="http://schemas.microsoft.com/office/drawing/2010/main" val="0"/>
+              </a:ext>
+            </a:extLst>
+          </a:blip>
+          <a:stretch>
+            <a:fillRect/>
+          </a:stretch>
+        </p:blipFill>
+        <p:spPr>
+          <a:xfrm>
+            <a:off x="553166" y="1158873"/>
+            <a:ext cx="4120434" cy="2317744"/>
+          </a:xfrm>
+          <a:prstGeom prst="rect">
+            <a:avLst/>
+          </a:prstGeom>
+        </p:spPr>
+      </p:pic>
+      <p:sp>
+        <p:nvSpPr>
+          <p:cNvPr id="13" name="TextBox 12">
+            <a:extLst>
+              <a:ext uri="{FF2B5EF4-FFF2-40B4-BE49-F238E27FC236}">
+                <a16:creationId xmlns:a16="http://schemas.microsoft.com/office/drawing/2014/main" id="{5ADCD0AF-1D17-94E3-9597-240DE34583BA}"/>
+              </a:ext>
+            </a:extLst>
+          </p:cNvPr>
+          <p:cNvSpPr txBox="1"/>
+          <p:nvPr/>
+        </p:nvSpPr>
+        <p:spPr>
+          <a:xfrm>
+            <a:off x="4790072" y="1158873"/>
+            <a:ext cx="6995528" cy="5909310"/>
+          </a:xfrm>
+          <a:prstGeom prst="rect">
+            <a:avLst/>
+          </a:prstGeom>
+          <a:noFill/>
+        </p:spPr>
+        <p:txBody>
+          <a:bodyPr wrap="square" rtlCol="0">
+            <a:spAutoFit/>
+          </a:bodyPr>
+          <a:lstStyle/>
+          <a:p>
+            <a:r>
+              <a:rPr lang="ko-KR" altLang="en-US" sz="1400" dirty="0"/>
+              <a:t>덱 볼 때는 </a:t>
+            </a:r>
+            <a:r>
+              <a:rPr lang="en-US" altLang="ko-KR" sz="1400" dirty="0"/>
+              <a:t>DECK, </a:t>
+            </a:r>
+            <a:r>
+              <a:rPr lang="ko-KR" altLang="en-US" sz="1400" dirty="0"/>
+              <a:t>카드 </a:t>
+            </a:r>
+            <a:r>
+              <a:rPr lang="ko-KR" altLang="en-US" sz="1400" dirty="0" err="1"/>
+              <a:t>전체볼때는</a:t>
+            </a:r>
+            <a:r>
+              <a:rPr lang="ko-KR" altLang="en-US" sz="1400" dirty="0"/>
+              <a:t> </a:t>
+            </a:r>
+            <a:r>
+              <a:rPr lang="en-US" altLang="ko-KR" sz="1400" dirty="0"/>
+              <a:t>CARDS, </a:t>
+            </a:r>
+            <a:r>
+              <a:rPr lang="ko-KR" altLang="en-US" sz="1400" dirty="0" err="1"/>
+              <a:t>묘지볼때는</a:t>
+            </a:r>
+            <a:r>
+              <a:rPr lang="ko-KR" altLang="en-US" sz="1400" dirty="0"/>
+              <a:t> </a:t>
+            </a:r>
+            <a:r>
+              <a:rPr lang="en-US" altLang="ko-KR" sz="1400" dirty="0"/>
+              <a:t>TRASH</a:t>
+            </a:r>
+            <a:r>
+              <a:rPr lang="ko-KR" altLang="en-US" sz="1400" dirty="0"/>
+              <a:t>라고 적어두면 될 듯</a:t>
+            </a:r>
+            <a:endParaRPr lang="en-US" altLang="ko-KR" sz="1400" dirty="0"/>
+          </a:p>
+          <a:p>
+            <a:endParaRPr lang="en-US" altLang="ko-KR" sz="1400" dirty="0"/>
+          </a:p>
+          <a:p>
+            <a:r>
+              <a:rPr lang="en-US" altLang="ko-KR" sz="1400" dirty="0" err="1"/>
+              <a:t>UIDeckListPopup</a:t>
+            </a:r>
+            <a:r>
+              <a:rPr lang="en-US" altLang="ko-KR" sz="1400" dirty="0"/>
+              <a:t> </a:t>
+            </a:r>
+            <a:r>
+              <a:rPr lang="ko-KR" altLang="en-US" sz="1400" dirty="0" err="1"/>
+              <a:t>프리팹만</a:t>
+            </a:r>
+            <a:r>
+              <a:rPr lang="ko-KR" altLang="en-US" sz="1400" dirty="0"/>
+              <a:t> </a:t>
+            </a:r>
+            <a:r>
+              <a:rPr lang="ko-KR" altLang="en-US" sz="1400" dirty="0" err="1"/>
+              <a:t>수정해뒀는데</a:t>
+            </a:r>
+            <a:r>
+              <a:rPr lang="en-US" altLang="ko-KR" sz="1400" dirty="0"/>
+              <a:t>,</a:t>
+            </a:r>
+          </a:p>
+          <a:p>
+            <a:r>
+              <a:rPr lang="ko-KR" altLang="en-US" sz="1400" dirty="0"/>
+              <a:t>형태도 크기도 구조도 같으니까</a:t>
+            </a:r>
+            <a:r>
+              <a:rPr lang="en-US" altLang="ko-KR" sz="1400" dirty="0"/>
+              <a:t> </a:t>
+            </a:r>
+            <a:r>
+              <a:rPr lang="ko-KR" altLang="en-US" sz="1400" dirty="0"/>
+              <a:t>팝업 형태를 </a:t>
+            </a:r>
+            <a:r>
+              <a:rPr lang="ko-KR" altLang="en-US" sz="1400" dirty="0" err="1"/>
+              <a:t>프리팹화시키든</a:t>
+            </a:r>
+            <a:endParaRPr lang="en-US" altLang="ko-KR" sz="1400" dirty="0"/>
+          </a:p>
+          <a:p>
+            <a:r>
+              <a:rPr lang="ko-KR" altLang="en-US" sz="1400" dirty="0"/>
+              <a:t>잘 </a:t>
+            </a:r>
+            <a:r>
+              <a:rPr lang="ko-KR" altLang="en-US" sz="1400" dirty="0" err="1"/>
+              <a:t>복붙해서</a:t>
+            </a:r>
+            <a:r>
+              <a:rPr lang="ko-KR" altLang="en-US" sz="1400" dirty="0"/>
+              <a:t> 모두 </a:t>
+            </a:r>
+            <a:r>
+              <a:rPr lang="ko-KR" altLang="en-US" sz="1400" dirty="0" err="1"/>
+              <a:t>적용해주셈</a:t>
+            </a:r>
+            <a:endParaRPr lang="en-US" altLang="ko-KR" sz="1400" dirty="0"/>
+          </a:p>
+          <a:p>
+            <a:endParaRPr lang="en-US" altLang="ko-KR" sz="1400" dirty="0"/>
+          </a:p>
+          <a:p>
+            <a:r>
+              <a:rPr lang="en-US" altLang="ko-KR" sz="1400" dirty="0"/>
+              <a:t>-</a:t>
+            </a:r>
+          </a:p>
+          <a:p>
+            <a:endParaRPr lang="en-US" altLang="ko-KR" sz="1400" dirty="0"/>
+          </a:p>
+          <a:p>
+            <a:r>
+              <a:rPr lang="ko-KR" altLang="en-US" sz="1400" dirty="0"/>
+              <a:t>아 텍스트 </a:t>
+            </a:r>
+            <a:r>
+              <a:rPr lang="en-US" altLang="ko-KR" sz="1400" dirty="0"/>
+              <a:t>4</a:t>
+            </a:r>
+            <a:r>
+              <a:rPr lang="ko-KR" altLang="en-US" sz="1400" dirty="0"/>
+              <a:t>개 </a:t>
+            </a:r>
+            <a:r>
+              <a:rPr lang="ko-KR" altLang="en-US" sz="1400" dirty="0" err="1"/>
+              <a:t>겹쳐놓은</a:t>
+            </a:r>
+            <a:r>
+              <a:rPr lang="ko-KR" altLang="en-US" sz="1400" dirty="0"/>
+              <a:t> 아웃라인 폰트</a:t>
+            </a:r>
+            <a:endParaRPr lang="en-US" altLang="ko-KR" sz="1400" dirty="0"/>
+          </a:p>
+          <a:p>
+            <a:r>
+              <a:rPr lang="ko-KR" altLang="en-US" sz="1400" dirty="0" err="1"/>
+              <a:t>프리팹화</a:t>
+            </a:r>
+            <a:r>
+              <a:rPr lang="ko-KR" altLang="en-US" sz="1400" dirty="0"/>
+              <a:t> </a:t>
+            </a:r>
+            <a:r>
+              <a:rPr lang="ko-KR" altLang="en-US" sz="1400" dirty="0" err="1"/>
+              <a:t>언제해줄거야</a:t>
+            </a:r>
+            <a:endParaRPr lang="en-US" altLang="ko-KR" sz="1400" dirty="0"/>
+          </a:p>
+          <a:p>
+            <a:endParaRPr lang="en-US" altLang="ko-KR" sz="1400" dirty="0"/>
+          </a:p>
+          <a:p>
+            <a:r>
+              <a:rPr lang="ko-KR" altLang="en-US" sz="1400" dirty="0"/>
+              <a:t>특히 상점에 아웃라인 폰트 부분이 너무 많아서</a:t>
+            </a:r>
+            <a:endParaRPr lang="en-US" altLang="ko-KR" sz="1400" dirty="0"/>
+          </a:p>
+          <a:p>
+            <a:r>
+              <a:rPr lang="ko-KR" altLang="en-US" sz="1400" dirty="0"/>
+              <a:t>얼른 이 기능이 생겼으면 좋겠다</a:t>
+            </a:r>
+            <a:r>
+              <a:rPr lang="en-US" altLang="ko-KR" sz="1400" dirty="0"/>
+              <a:t>.</a:t>
+            </a:r>
+          </a:p>
+          <a:p>
+            <a:endParaRPr lang="en-US" altLang="ko-KR" sz="1400" dirty="0"/>
+          </a:p>
+          <a:p>
+            <a:r>
+              <a:rPr lang="en-US" altLang="ko-KR" sz="1400" dirty="0"/>
+              <a:t>-</a:t>
+            </a:r>
+          </a:p>
+          <a:p>
+            <a:endParaRPr lang="en-US" altLang="ko-KR" sz="1400" dirty="0"/>
+          </a:p>
+          <a:p>
+            <a:r>
+              <a:rPr lang="en-US" altLang="ko-KR" sz="1400" dirty="0"/>
+              <a:t>Request </a:t>
+            </a:r>
+            <a:r>
+              <a:rPr lang="en-US" altLang="ko-KR" sz="1400" dirty="0" err="1"/>
+              <a:t>Seccess</a:t>
+            </a:r>
+            <a:r>
+              <a:rPr lang="ko-KR" altLang="en-US" sz="1400" dirty="0"/>
+              <a:t>인가</a:t>
+            </a:r>
+            <a:r>
+              <a:rPr lang="en-US" altLang="ko-KR" sz="1400" dirty="0"/>
+              <a:t>? </a:t>
+            </a:r>
+            <a:r>
+              <a:rPr lang="ko-KR" altLang="en-US" sz="1400" dirty="0"/>
+              <a:t>그거를 이미지로 바꿨음</a:t>
+            </a:r>
+            <a:endParaRPr lang="en-US" altLang="ko-KR" sz="1400" dirty="0"/>
+          </a:p>
+          <a:p>
+            <a:r>
+              <a:rPr lang="ko-KR" altLang="en-US" sz="1400" dirty="0"/>
+              <a:t>문제는 </a:t>
+            </a:r>
+            <a:r>
+              <a:rPr lang="en-US" altLang="ko-KR" sz="1400" dirty="0"/>
+              <a:t>1</a:t>
+            </a:r>
+            <a:r>
+              <a:rPr lang="ko-KR" altLang="en-US" sz="1400" dirty="0"/>
+              <a:t>종류밖에 없었는데</a:t>
+            </a:r>
+            <a:r>
+              <a:rPr lang="en-US" altLang="ko-KR" sz="1400" dirty="0"/>
+              <a:t>,</a:t>
+            </a:r>
+          </a:p>
+          <a:p>
+            <a:r>
+              <a:rPr lang="ko-KR" altLang="en-US" sz="1400" dirty="0"/>
+              <a:t>수령</a:t>
+            </a:r>
+            <a:r>
+              <a:rPr lang="en-US" altLang="ko-KR" sz="1400" dirty="0"/>
+              <a:t>/</a:t>
+            </a:r>
+            <a:r>
+              <a:rPr lang="ko-KR" altLang="en-US" sz="1400" dirty="0"/>
+              <a:t>연장이 가능했던 </a:t>
+            </a:r>
+            <a:r>
+              <a:rPr lang="en-US" altLang="ko-KR" sz="1400" dirty="0" err="1"/>
+              <a:t>RequestAddArea</a:t>
+            </a:r>
+            <a:r>
+              <a:rPr lang="ko-KR" altLang="en-US" sz="1400" dirty="0"/>
+              <a:t>에서는</a:t>
+            </a:r>
+            <a:endParaRPr lang="en-US" altLang="ko-KR" sz="1400" dirty="0"/>
+          </a:p>
+          <a:p>
+            <a:r>
+              <a:rPr lang="ko-KR" altLang="en-US" sz="1400" dirty="0"/>
+              <a:t>수령하면 </a:t>
+            </a:r>
+            <a:r>
+              <a:rPr lang="en-US" altLang="ko-KR" sz="1400" dirty="0"/>
+              <a:t>RECEIVED</a:t>
+            </a:r>
+            <a:r>
+              <a:rPr lang="ko-KR" altLang="en-US" sz="1400" dirty="0"/>
+              <a:t>가</a:t>
+            </a:r>
+            <a:r>
+              <a:rPr lang="en-US" altLang="ko-KR" sz="1400" dirty="0"/>
+              <a:t>,</a:t>
+            </a:r>
+          </a:p>
+          <a:p>
+            <a:r>
+              <a:rPr lang="ko-KR" altLang="en-US" sz="1400" dirty="0" err="1"/>
+              <a:t>추가의뢰했으면</a:t>
+            </a:r>
+            <a:r>
+              <a:rPr lang="ko-KR" altLang="en-US" sz="1400" dirty="0"/>
+              <a:t> </a:t>
+            </a:r>
+            <a:r>
+              <a:rPr lang="en-US" altLang="ko-KR" sz="1400" dirty="0"/>
+              <a:t>REQUESTED</a:t>
+            </a:r>
+            <a:r>
+              <a:rPr lang="ko-KR" altLang="en-US" sz="1400" dirty="0"/>
+              <a:t>가 </a:t>
+            </a:r>
+            <a:r>
+              <a:rPr lang="ko-KR" altLang="en-US" sz="1400" dirty="0" err="1"/>
+              <a:t>떠야해서</a:t>
+            </a:r>
+            <a:r>
+              <a:rPr lang="ko-KR" altLang="en-US" sz="1400" dirty="0"/>
+              <a:t> 하나 늘렸음→</a:t>
+            </a:r>
+            <a:endParaRPr lang="en-US" altLang="ko-KR" sz="1400" dirty="0"/>
+          </a:p>
+          <a:p>
+            <a:r>
+              <a:rPr lang="ko-KR" altLang="en-US" sz="1400" dirty="0"/>
+              <a:t>이거 </a:t>
+            </a:r>
+            <a:r>
+              <a:rPr lang="ko-KR" altLang="en-US" sz="1400" dirty="0" err="1"/>
+              <a:t>적용해줘야함</a:t>
+            </a:r>
+            <a:r>
+              <a:rPr lang="en-US" altLang="ko-KR" sz="1400" dirty="0"/>
+              <a:t>. </a:t>
+            </a:r>
+            <a:r>
+              <a:rPr lang="ko-KR" altLang="en-US" sz="1400" dirty="0"/>
+              <a:t>내가 실수로 </a:t>
+            </a:r>
+            <a:r>
+              <a:rPr lang="en-US" altLang="ko-KR" sz="1400" dirty="0"/>
+              <a:t>RECEIVED </a:t>
+            </a:r>
+            <a:r>
+              <a:rPr lang="ko-KR" altLang="en-US" sz="1400" dirty="0"/>
+              <a:t>이미지 </a:t>
+            </a:r>
+            <a:r>
+              <a:rPr lang="ko-KR" altLang="en-US" sz="1400" dirty="0" err="1"/>
+              <a:t>반투명하게</a:t>
+            </a:r>
+            <a:r>
+              <a:rPr lang="ko-KR" altLang="en-US" sz="1400" dirty="0"/>
+              <a:t> </a:t>
+            </a:r>
+            <a:r>
+              <a:rPr lang="ko-KR" altLang="en-US" sz="1400" dirty="0" err="1"/>
+              <a:t>넣어놨으니까</a:t>
+            </a:r>
+            <a:endParaRPr lang="en-US" altLang="ko-KR" sz="1400" dirty="0"/>
+          </a:p>
+          <a:p>
+            <a:r>
+              <a:rPr lang="ko-KR" altLang="en-US" sz="1400" dirty="0"/>
+              <a:t>이거 하면서 불투명으로 </a:t>
+            </a:r>
+            <a:r>
+              <a:rPr lang="ko-KR" altLang="en-US" sz="1400" dirty="0" err="1"/>
+              <a:t>고쳐주셈</a:t>
+            </a:r>
+            <a:r>
+              <a:rPr lang="ko-KR" altLang="en-US" sz="1400" dirty="0"/>
+              <a:t> </a:t>
+            </a:r>
+            <a:r>
+              <a:rPr lang="ko-KR" altLang="en-US" sz="1400" dirty="0" err="1"/>
+              <a:t>ㅋㅋ</a:t>
+            </a:r>
+            <a:r>
+              <a:rPr lang="en-US" altLang="ko-KR" sz="1400" dirty="0"/>
+              <a:t>;</a:t>
+            </a:r>
+          </a:p>
+          <a:p>
+            <a:r>
+              <a:rPr lang="en-US" altLang="ko-KR" sz="1400" dirty="0"/>
+              <a:t>DAY -1</a:t>
+            </a:r>
+            <a:r>
+              <a:rPr lang="ko-KR" altLang="en-US" sz="1400" dirty="0"/>
+              <a:t>이라고 며칠차인지 표기하는 텍스트 </a:t>
+            </a:r>
+            <a:r>
+              <a:rPr lang="ko-KR" altLang="en-US" sz="1400" dirty="0" err="1"/>
+              <a:t>넣어놨고</a:t>
+            </a:r>
+            <a:r>
+              <a:rPr lang="en-US" altLang="ko-KR" sz="1400" dirty="0"/>
+              <a:t>,</a:t>
+            </a:r>
+          </a:p>
+          <a:p>
+            <a:r>
+              <a:rPr lang="ko-KR" altLang="en-US" sz="1400" dirty="0"/>
+              <a:t>상단에 체크마크도 </a:t>
+            </a:r>
+            <a:r>
+              <a:rPr lang="ko-KR" altLang="en-US" sz="1400" dirty="0" err="1"/>
+              <a:t>배치해놓음</a:t>
+            </a:r>
+            <a:r>
+              <a:rPr lang="en-US" altLang="ko-KR" sz="1400" dirty="0"/>
+              <a:t>.</a:t>
+            </a:r>
+          </a:p>
+          <a:p>
+            <a:r>
+              <a:rPr lang="ko-KR" altLang="en-US" sz="1400" dirty="0"/>
+              <a:t>추가 의뢰 기능이 </a:t>
+            </a:r>
+            <a:r>
+              <a:rPr lang="en-US" altLang="ko-KR" sz="1400" dirty="0"/>
+              <a:t>3</a:t>
+            </a:r>
+            <a:r>
+              <a:rPr lang="ko-KR" altLang="en-US" sz="1400" dirty="0"/>
+              <a:t>번까지 되기 때문에 그걸 표기하는 기능임</a:t>
+            </a:r>
+            <a:endParaRPr lang="en-US" altLang="ko-KR" sz="1400" dirty="0"/>
+          </a:p>
+        </p:txBody>
+      </p:sp>
+      <p:pic>
+        <p:nvPicPr>
+          <p:cNvPr id="5" name="그림 4">
+            <a:extLst>
+              <a:ext uri="{FF2B5EF4-FFF2-40B4-BE49-F238E27FC236}">
+                <a16:creationId xmlns:a16="http://schemas.microsoft.com/office/drawing/2014/main" id="{7A05CA03-6C47-AEF8-B806-242F92957EAE}"/>
+              </a:ext>
+            </a:extLst>
+          </p:cNvPr>
+          <p:cNvPicPr>
+            <a:picLocks noChangeAspect="1"/>
+          </p:cNvPicPr>
+          <p:nvPr/>
+        </p:nvPicPr>
+        <p:blipFill>
+          <a:blip r:embed="rId3"/>
+          <a:stretch>
+            <a:fillRect/>
+          </a:stretch>
+        </p:blipFill>
+        <p:spPr>
+          <a:xfrm>
+            <a:off x="8908266" y="2550174"/>
+            <a:ext cx="2730568" cy="1852885"/>
+          </a:xfrm>
+          <a:prstGeom prst="rect">
+            <a:avLst/>
+          </a:prstGeom>
+        </p:spPr>
+      </p:pic>
+      <p:pic>
+        <p:nvPicPr>
+          <p:cNvPr id="9" name="그림 8">
+            <a:extLst>
+              <a:ext uri="{FF2B5EF4-FFF2-40B4-BE49-F238E27FC236}">
+                <a16:creationId xmlns:a16="http://schemas.microsoft.com/office/drawing/2014/main" id="{A4E09FD7-166A-9E15-4F61-7B67091E9BD5}"/>
+              </a:ext>
+            </a:extLst>
+          </p:cNvPr>
+          <p:cNvPicPr>
+            <a:picLocks noChangeAspect="1"/>
+          </p:cNvPicPr>
+          <p:nvPr/>
+        </p:nvPicPr>
+        <p:blipFill>
+          <a:blip r:embed="rId4"/>
+          <a:stretch>
+            <a:fillRect/>
+          </a:stretch>
+        </p:blipFill>
+        <p:spPr>
+          <a:xfrm>
+            <a:off x="2719810" y="5211723"/>
+            <a:ext cx="1721801" cy="1434834"/>
+          </a:xfrm>
+          <a:prstGeom prst="rect">
+            <a:avLst/>
+          </a:prstGeom>
+        </p:spPr>
+      </p:pic>
+      <p:pic>
+        <p:nvPicPr>
+          <p:cNvPr id="15" name="그림 14">
+            <a:extLst>
+              <a:ext uri="{FF2B5EF4-FFF2-40B4-BE49-F238E27FC236}">
+                <a16:creationId xmlns:a16="http://schemas.microsoft.com/office/drawing/2014/main" id="{05C1C33C-1E2C-387C-0EC6-2E60513ECCF1}"/>
+              </a:ext>
+            </a:extLst>
+          </p:cNvPr>
+          <p:cNvPicPr>
+            <a:picLocks noChangeAspect="1"/>
+          </p:cNvPicPr>
+          <p:nvPr/>
+        </p:nvPicPr>
+        <p:blipFill>
+          <a:blip r:embed="rId5"/>
+          <a:stretch>
+            <a:fillRect/>
+          </a:stretch>
+        </p:blipFill>
+        <p:spPr>
+          <a:xfrm>
+            <a:off x="2778227" y="3752504"/>
+            <a:ext cx="1663384" cy="1396531"/>
+          </a:xfrm>
+          <a:prstGeom prst="rect">
+            <a:avLst/>
+          </a:prstGeom>
+        </p:spPr>
+      </p:pic>
+      <p:pic>
+        <p:nvPicPr>
+          <p:cNvPr id="18" name="그림 17">
+            <a:extLst>
+              <a:ext uri="{FF2B5EF4-FFF2-40B4-BE49-F238E27FC236}">
+                <a16:creationId xmlns:a16="http://schemas.microsoft.com/office/drawing/2014/main" id="{669F0049-3444-56D1-7639-CBA8BF451B41}"/>
+              </a:ext>
+            </a:extLst>
+          </p:cNvPr>
+          <p:cNvPicPr>
+            <a:picLocks noChangeAspect="1"/>
+          </p:cNvPicPr>
+          <p:nvPr/>
+        </p:nvPicPr>
+        <p:blipFill>
+          <a:blip r:embed="rId6"/>
+          <a:stretch>
+            <a:fillRect/>
+          </a:stretch>
+        </p:blipFill>
+        <p:spPr>
+          <a:xfrm>
+            <a:off x="523181" y="4349403"/>
+            <a:ext cx="1721801" cy="1487237"/>
+          </a:xfrm>
+          <a:prstGeom prst="rect">
+            <a:avLst/>
+          </a:prstGeom>
+        </p:spPr>
+      </p:pic>
+      <p:pic>
+        <p:nvPicPr>
+          <p:cNvPr id="20" name="그림 19">
+            <a:extLst>
+              <a:ext uri="{FF2B5EF4-FFF2-40B4-BE49-F238E27FC236}">
+                <a16:creationId xmlns:a16="http://schemas.microsoft.com/office/drawing/2014/main" id="{21CD9371-5452-4D72-880A-38866FFE19A9}"/>
+              </a:ext>
+            </a:extLst>
+          </p:cNvPr>
+          <p:cNvPicPr>
+            <a:picLocks noChangeAspect="1"/>
+          </p:cNvPicPr>
+          <p:nvPr/>
+        </p:nvPicPr>
+        <p:blipFill>
+          <a:blip r:embed="rId7"/>
+          <a:stretch>
+            <a:fillRect/>
+          </a:stretch>
+        </p:blipFill>
+        <p:spPr>
+          <a:xfrm>
+            <a:off x="9413773" y="5066820"/>
+            <a:ext cx="1838582" cy="571580"/>
+          </a:xfrm>
+          <a:prstGeom prst="rect">
+            <a:avLst/>
+          </a:prstGeom>
+        </p:spPr>
+      </p:pic>
+    </p:spTree>
+    <p:extLst>
+      <p:ext uri="{BB962C8B-B14F-4D97-AF65-F5344CB8AC3E}">
+        <p14:creationId xmlns:p14="http://schemas.microsoft.com/office/powerpoint/2010/main" val="513648589"/>
       </p:ext>
     </p:extLst>
   </p:cSld>

--- a/Plan/기획서/땅부수기2026 ch2.pptx
+++ b/Plan/기획서/땅부수기2026 ch2.pptx
@@ -4,6 +4,9 @@
   <p:sldMasterIdLst>
     <p:sldMasterId id="2147483648" r:id="rId1"/>
   </p:sldMasterIdLst>
+  <p:notesMasterIdLst>
+    <p:notesMasterId r:id="rId13"/>
+  </p:notesMasterIdLst>
   <p:sldIdLst>
     <p:sldId id="256" r:id="rId2"/>
     <p:sldId id="257" r:id="rId3"/>
@@ -15,6 +18,7 @@
     <p:sldId id="264" r:id="rId9"/>
     <p:sldId id="265" r:id="rId10"/>
     <p:sldId id="260" r:id="rId11"/>
+    <p:sldId id="266" r:id="rId12"/>
   </p:sldIdLst>
   <p:sldSz cx="12192000" cy="6858000"/>
   <p:notesSz cx="6858000" cy="9144000"/>
@@ -121,6 +125,439 @@
 </p:presentation>
 </file>
 
+<file path=ppt/notesMasters/notesMaster1.xml><?xml version="1.0" encoding="utf-8"?>
+<p:notesMaster xmlns:a="http://schemas.openxmlformats.org/drawingml/2006/main" xmlns:r="http://schemas.openxmlformats.org/officeDocument/2006/relationships" xmlns:p="http://schemas.openxmlformats.org/presentationml/2006/main">
+  <p:cSld>
+    <p:bg>
+      <p:bgRef idx="1001">
+        <a:schemeClr val="bg1"/>
+      </p:bgRef>
+    </p:bg>
+    <p:spTree>
+      <p:nvGrpSpPr>
+        <p:cNvPr id="1" name=""/>
+        <p:cNvGrpSpPr/>
+        <p:nvPr/>
+      </p:nvGrpSpPr>
+      <p:grpSpPr>
+        <a:xfrm>
+          <a:off x="0" y="0"/>
+          <a:ext cx="0" cy="0"/>
+          <a:chOff x="0" y="0"/>
+          <a:chExt cx="0" cy="0"/>
+        </a:xfrm>
+      </p:grpSpPr>
+      <p:sp>
+        <p:nvSpPr>
+          <p:cNvPr id="2" name="머리글 개체 틀 1"/>
+          <p:cNvSpPr>
+            <a:spLocks noGrp="1"/>
+          </p:cNvSpPr>
+          <p:nvPr>
+            <p:ph type="hdr" sz="quarter"/>
+          </p:nvPr>
+        </p:nvSpPr>
+        <p:spPr>
+          <a:xfrm>
+            <a:off x="0" y="0"/>
+            <a:ext cx="2971800" cy="458788"/>
+          </a:xfrm>
+          <a:prstGeom prst="rect">
+            <a:avLst/>
+          </a:prstGeom>
+        </p:spPr>
+        <p:txBody>
+          <a:bodyPr vert="horz" lIns="91440" tIns="45720" rIns="91440" bIns="45720" rtlCol="0"/>
+          <a:lstStyle>
+            <a:lvl1pPr algn="l">
+              <a:defRPr sz="1200"/>
+            </a:lvl1pPr>
+          </a:lstStyle>
+          <a:p>
+            <a:endParaRPr lang="ko-KR" altLang="en-US"/>
+          </a:p>
+        </p:txBody>
+      </p:sp>
+      <p:sp>
+        <p:nvSpPr>
+          <p:cNvPr id="3" name="날짜 개체 틀 2"/>
+          <p:cNvSpPr>
+            <a:spLocks noGrp="1"/>
+          </p:cNvSpPr>
+          <p:nvPr>
+            <p:ph type="dt" idx="1"/>
+          </p:nvPr>
+        </p:nvSpPr>
+        <p:spPr>
+          <a:xfrm>
+            <a:off x="3884613" y="0"/>
+            <a:ext cx="2971800" cy="458788"/>
+          </a:xfrm>
+          <a:prstGeom prst="rect">
+            <a:avLst/>
+          </a:prstGeom>
+        </p:spPr>
+        <p:txBody>
+          <a:bodyPr vert="horz" lIns="91440" tIns="45720" rIns="91440" bIns="45720" rtlCol="0"/>
+          <a:lstStyle>
+            <a:lvl1pPr algn="r">
+              <a:defRPr sz="1200"/>
+            </a:lvl1pPr>
+          </a:lstStyle>
+          <a:p>
+            <a:fld id="{543E24B9-7E34-44AC-84F3-4EDCA69811A9}" type="datetimeFigureOut">
+              <a:rPr lang="ko-KR" altLang="en-US" smtClean="0"/>
+              <a:t>2026-05-26</a:t>
+            </a:fld>
+            <a:endParaRPr lang="ko-KR" altLang="en-US"/>
+          </a:p>
+        </p:txBody>
+      </p:sp>
+      <p:sp>
+        <p:nvSpPr>
+          <p:cNvPr id="4" name="슬라이드 이미지 개체 틀 3"/>
+          <p:cNvSpPr>
+            <a:spLocks noGrp="1" noRot="1" noChangeAspect="1"/>
+          </p:cNvSpPr>
+          <p:nvPr>
+            <p:ph type="sldImg" idx="2"/>
+          </p:nvPr>
+        </p:nvSpPr>
+        <p:spPr>
+          <a:xfrm>
+            <a:off x="685800" y="1143000"/>
+            <a:ext cx="5486400" cy="3086100"/>
+          </a:xfrm>
+          <a:prstGeom prst="rect">
+            <a:avLst/>
+          </a:prstGeom>
+          <a:noFill/>
+          <a:ln w="12700">
+            <a:solidFill>
+              <a:prstClr val="black"/>
+            </a:solidFill>
+          </a:ln>
+        </p:spPr>
+        <p:txBody>
+          <a:bodyPr vert="horz" lIns="91440" tIns="45720" rIns="91440" bIns="45720" rtlCol="0" anchor="ctr"/>
+          <a:lstStyle/>
+          <a:p>
+            <a:endParaRPr lang="ko-KR" altLang="en-US"/>
+          </a:p>
+        </p:txBody>
+      </p:sp>
+      <p:sp>
+        <p:nvSpPr>
+          <p:cNvPr id="5" name="슬라이드 노트 개체 틀 4"/>
+          <p:cNvSpPr>
+            <a:spLocks noGrp="1"/>
+          </p:cNvSpPr>
+          <p:nvPr>
+            <p:ph type="body" sz="quarter" idx="3"/>
+          </p:nvPr>
+        </p:nvSpPr>
+        <p:spPr>
+          <a:xfrm>
+            <a:off x="685800" y="4400550"/>
+            <a:ext cx="5486400" cy="3600450"/>
+          </a:xfrm>
+          <a:prstGeom prst="rect">
+            <a:avLst/>
+          </a:prstGeom>
+        </p:spPr>
+        <p:txBody>
+          <a:bodyPr vert="horz" lIns="91440" tIns="45720" rIns="91440" bIns="45720" rtlCol="0"/>
+          <a:lstStyle/>
+          <a:p>
+            <a:pPr lvl="0"/>
+            <a:r>
+              <a:rPr lang="ko-KR" altLang="en-US"/>
+              <a:t>마스터 텍스트 스타일을 편집하려면 클릭</a:t>
+            </a:r>
+          </a:p>
+          <a:p>
+            <a:pPr lvl="1"/>
+            <a:r>
+              <a:rPr lang="ko-KR" altLang="en-US"/>
+              <a:t>두 번째 수준</a:t>
+            </a:r>
+          </a:p>
+          <a:p>
+            <a:pPr lvl="2"/>
+            <a:r>
+              <a:rPr lang="ko-KR" altLang="en-US"/>
+              <a:t>세 번째 수준</a:t>
+            </a:r>
+          </a:p>
+          <a:p>
+            <a:pPr lvl="3"/>
+            <a:r>
+              <a:rPr lang="ko-KR" altLang="en-US"/>
+              <a:t>네 번째 수준</a:t>
+            </a:r>
+          </a:p>
+          <a:p>
+            <a:pPr lvl="4"/>
+            <a:r>
+              <a:rPr lang="ko-KR" altLang="en-US"/>
+              <a:t>다섯 번째 수준</a:t>
+            </a:r>
+          </a:p>
+        </p:txBody>
+      </p:sp>
+      <p:sp>
+        <p:nvSpPr>
+          <p:cNvPr id="6" name="바닥글 개체 틀 5"/>
+          <p:cNvSpPr>
+            <a:spLocks noGrp="1"/>
+          </p:cNvSpPr>
+          <p:nvPr>
+            <p:ph type="ftr" sz="quarter" idx="4"/>
+          </p:nvPr>
+        </p:nvSpPr>
+        <p:spPr>
+          <a:xfrm>
+            <a:off x="0" y="8685213"/>
+            <a:ext cx="2971800" cy="458787"/>
+          </a:xfrm>
+          <a:prstGeom prst="rect">
+            <a:avLst/>
+          </a:prstGeom>
+        </p:spPr>
+        <p:txBody>
+          <a:bodyPr vert="horz" lIns="91440" tIns="45720" rIns="91440" bIns="45720" rtlCol="0" anchor="b"/>
+          <a:lstStyle>
+            <a:lvl1pPr algn="l">
+              <a:defRPr sz="1200"/>
+            </a:lvl1pPr>
+          </a:lstStyle>
+          <a:p>
+            <a:endParaRPr lang="ko-KR" altLang="en-US"/>
+          </a:p>
+        </p:txBody>
+      </p:sp>
+      <p:sp>
+        <p:nvSpPr>
+          <p:cNvPr id="7" name="슬라이드 번호 개체 틀 6"/>
+          <p:cNvSpPr>
+            <a:spLocks noGrp="1"/>
+          </p:cNvSpPr>
+          <p:nvPr>
+            <p:ph type="sldNum" sz="quarter" idx="5"/>
+          </p:nvPr>
+        </p:nvSpPr>
+        <p:spPr>
+          <a:xfrm>
+            <a:off x="3884613" y="8685213"/>
+            <a:ext cx="2971800" cy="458787"/>
+          </a:xfrm>
+          <a:prstGeom prst="rect">
+            <a:avLst/>
+          </a:prstGeom>
+        </p:spPr>
+        <p:txBody>
+          <a:bodyPr vert="horz" lIns="91440" tIns="45720" rIns="91440" bIns="45720" rtlCol="0" anchor="b"/>
+          <a:lstStyle>
+            <a:lvl1pPr algn="r">
+              <a:defRPr sz="1200"/>
+            </a:lvl1pPr>
+          </a:lstStyle>
+          <a:p>
+            <a:fld id="{2E0139E7-B41F-44EB-9691-265EF159DEB1}" type="slidenum">
+              <a:rPr lang="ko-KR" altLang="en-US" smtClean="0"/>
+              <a:t>‹#›</a:t>
+            </a:fld>
+            <a:endParaRPr lang="ko-KR" altLang="en-US"/>
+          </a:p>
+        </p:txBody>
+      </p:sp>
+    </p:spTree>
+    <p:extLst>
+      <p:ext uri="{BB962C8B-B14F-4D97-AF65-F5344CB8AC3E}">
+        <p14:creationId xmlns:p14="http://schemas.microsoft.com/office/powerpoint/2010/main" val="4189356610"/>
+      </p:ext>
+    </p:extLst>
+  </p:cSld>
+  <p:clrMap bg1="lt1" tx1="dk1" bg2="lt2" tx2="dk2" accent1="accent1" accent2="accent2" accent3="accent3" accent4="accent4" accent5="accent5" accent6="accent6" hlink="hlink" folHlink="folHlink"/>
+  <p:notesStyle>
+    <a:lvl1pPr marL="0" algn="l" defTabSz="914400" rtl="0" eaLnBrk="1" latinLnBrk="1" hangingPunct="1">
+      <a:defRPr sz="1200" kern="1200">
+        <a:solidFill>
+          <a:schemeClr val="tx1"/>
+        </a:solidFill>
+        <a:latin typeface="+mn-lt"/>
+        <a:ea typeface="+mn-ea"/>
+        <a:cs typeface="+mn-cs"/>
+      </a:defRPr>
+    </a:lvl1pPr>
+    <a:lvl2pPr marL="457200" algn="l" defTabSz="914400" rtl="0" eaLnBrk="1" latinLnBrk="1" hangingPunct="1">
+      <a:defRPr sz="1200" kern="1200">
+        <a:solidFill>
+          <a:schemeClr val="tx1"/>
+        </a:solidFill>
+        <a:latin typeface="+mn-lt"/>
+        <a:ea typeface="+mn-ea"/>
+        <a:cs typeface="+mn-cs"/>
+      </a:defRPr>
+    </a:lvl2pPr>
+    <a:lvl3pPr marL="914400" algn="l" defTabSz="914400" rtl="0" eaLnBrk="1" latinLnBrk="1" hangingPunct="1">
+      <a:defRPr sz="1200" kern="1200">
+        <a:solidFill>
+          <a:schemeClr val="tx1"/>
+        </a:solidFill>
+        <a:latin typeface="+mn-lt"/>
+        <a:ea typeface="+mn-ea"/>
+        <a:cs typeface="+mn-cs"/>
+      </a:defRPr>
+    </a:lvl3pPr>
+    <a:lvl4pPr marL="1371600" algn="l" defTabSz="914400" rtl="0" eaLnBrk="1" latinLnBrk="1" hangingPunct="1">
+      <a:defRPr sz="1200" kern="1200">
+        <a:solidFill>
+          <a:schemeClr val="tx1"/>
+        </a:solidFill>
+        <a:latin typeface="+mn-lt"/>
+        <a:ea typeface="+mn-ea"/>
+        <a:cs typeface="+mn-cs"/>
+      </a:defRPr>
+    </a:lvl4pPr>
+    <a:lvl5pPr marL="1828800" algn="l" defTabSz="914400" rtl="0" eaLnBrk="1" latinLnBrk="1" hangingPunct="1">
+      <a:defRPr sz="1200" kern="1200">
+        <a:solidFill>
+          <a:schemeClr val="tx1"/>
+        </a:solidFill>
+        <a:latin typeface="+mn-lt"/>
+        <a:ea typeface="+mn-ea"/>
+        <a:cs typeface="+mn-cs"/>
+      </a:defRPr>
+    </a:lvl5pPr>
+    <a:lvl6pPr marL="2286000" algn="l" defTabSz="914400" rtl="0" eaLnBrk="1" latinLnBrk="1" hangingPunct="1">
+      <a:defRPr sz="1200" kern="1200">
+        <a:solidFill>
+          <a:schemeClr val="tx1"/>
+        </a:solidFill>
+        <a:latin typeface="+mn-lt"/>
+        <a:ea typeface="+mn-ea"/>
+        <a:cs typeface="+mn-cs"/>
+      </a:defRPr>
+    </a:lvl6pPr>
+    <a:lvl7pPr marL="2743200" algn="l" defTabSz="914400" rtl="0" eaLnBrk="1" latinLnBrk="1" hangingPunct="1">
+      <a:defRPr sz="1200" kern="1200">
+        <a:solidFill>
+          <a:schemeClr val="tx1"/>
+        </a:solidFill>
+        <a:latin typeface="+mn-lt"/>
+        <a:ea typeface="+mn-ea"/>
+        <a:cs typeface="+mn-cs"/>
+      </a:defRPr>
+    </a:lvl7pPr>
+    <a:lvl8pPr marL="3200400" algn="l" defTabSz="914400" rtl="0" eaLnBrk="1" latinLnBrk="1" hangingPunct="1">
+      <a:defRPr sz="1200" kern="1200">
+        <a:solidFill>
+          <a:schemeClr val="tx1"/>
+        </a:solidFill>
+        <a:latin typeface="+mn-lt"/>
+        <a:ea typeface="+mn-ea"/>
+        <a:cs typeface="+mn-cs"/>
+      </a:defRPr>
+    </a:lvl8pPr>
+    <a:lvl9pPr marL="3657600" algn="l" defTabSz="914400" rtl="0" eaLnBrk="1" latinLnBrk="1" hangingPunct="1">
+      <a:defRPr sz="1200" kern="1200">
+        <a:solidFill>
+          <a:schemeClr val="tx1"/>
+        </a:solidFill>
+        <a:latin typeface="+mn-lt"/>
+        <a:ea typeface="+mn-ea"/>
+        <a:cs typeface="+mn-cs"/>
+      </a:defRPr>
+    </a:lvl9pPr>
+  </p:notesStyle>
+</p:notesMaster>
+</file>
+
+<file path=ppt/notesSlides/notesSlide1.xml><?xml version="1.0" encoding="utf-8"?>
+<p:notes xmlns:a="http://schemas.openxmlformats.org/drawingml/2006/main" xmlns:r="http://schemas.openxmlformats.org/officeDocument/2006/relationships" xmlns:p="http://schemas.openxmlformats.org/presentationml/2006/main">
+  <p:cSld>
+    <p:spTree>
+      <p:nvGrpSpPr>
+        <p:cNvPr id="1" name=""/>
+        <p:cNvGrpSpPr/>
+        <p:nvPr/>
+      </p:nvGrpSpPr>
+      <p:grpSpPr>
+        <a:xfrm>
+          <a:off x="0" y="0"/>
+          <a:ext cx="0" cy="0"/>
+          <a:chOff x="0" y="0"/>
+          <a:chExt cx="0" cy="0"/>
+        </a:xfrm>
+      </p:grpSpPr>
+      <p:sp>
+        <p:nvSpPr>
+          <p:cNvPr id="2" name="슬라이드 이미지 개체 틀 1"/>
+          <p:cNvSpPr>
+            <a:spLocks noGrp="1" noRot="1" noChangeAspect="1"/>
+          </p:cNvSpPr>
+          <p:nvPr>
+            <p:ph type="sldImg"/>
+          </p:nvPr>
+        </p:nvSpPr>
+        <p:spPr/>
+      </p:sp>
+      <p:sp>
+        <p:nvSpPr>
+          <p:cNvPr id="3" name="슬라이드 노트 개체 틀 2"/>
+          <p:cNvSpPr>
+            <a:spLocks noGrp="1"/>
+          </p:cNvSpPr>
+          <p:nvPr>
+            <p:ph type="body" idx="1"/>
+          </p:nvPr>
+        </p:nvSpPr>
+        <p:spPr/>
+        <p:txBody>
+          <a:bodyPr/>
+          <a:lstStyle/>
+          <a:p>
+            <a:endParaRPr lang="ko-KR" altLang="en-US" dirty="0"/>
+          </a:p>
+        </p:txBody>
+      </p:sp>
+      <p:sp>
+        <p:nvSpPr>
+          <p:cNvPr id="4" name="슬라이드 번호 개체 틀 3"/>
+          <p:cNvSpPr>
+            <a:spLocks noGrp="1"/>
+          </p:cNvSpPr>
+          <p:nvPr>
+            <p:ph type="sldNum" sz="quarter" idx="5"/>
+          </p:nvPr>
+        </p:nvSpPr>
+        <p:spPr/>
+        <p:txBody>
+          <a:bodyPr/>
+          <a:lstStyle/>
+          <a:p>
+            <a:fld id="{2E0139E7-B41F-44EB-9691-265EF159DEB1}" type="slidenum">
+              <a:rPr lang="ko-KR" altLang="en-US" smtClean="0"/>
+              <a:t>11</a:t>
+            </a:fld>
+            <a:endParaRPr lang="ko-KR" altLang="en-US"/>
+          </a:p>
+        </p:txBody>
+      </p:sp>
+    </p:spTree>
+    <p:extLst>
+      <p:ext uri="{BB962C8B-B14F-4D97-AF65-F5344CB8AC3E}">
+        <p14:creationId xmlns:p14="http://schemas.microsoft.com/office/powerpoint/2010/main" val="113206540"/>
+      </p:ext>
+    </p:extLst>
+  </p:cSld>
+  <p:clrMapOvr>
+    <a:masterClrMapping/>
+  </p:clrMapOvr>
+</p:notes>
+</file>
+
 <file path=ppt/slideLayouts/slideLayout1.xml><?xml version="1.0" encoding="utf-8"?>
 <p:sldLayout xmlns:a="http://schemas.openxmlformats.org/drawingml/2006/main" xmlns:r="http://schemas.openxmlformats.org/officeDocument/2006/relationships" xmlns:p="http://schemas.openxmlformats.org/presentationml/2006/main" type="title" preserve="1">
   <p:cSld name="제목 슬라이드">
@@ -268,7 +705,7 @@
           <a:p>
             <a:fld id="{C6FDF62A-CEF3-4A4B-9978-8C575DC3A030}" type="datetimeFigureOut">
               <a:rPr lang="ko-KR" altLang="en-US" smtClean="0"/>
-              <a:t>2026-04-24</a:t>
+              <a:t>2026-05-26</a:t>
             </a:fld>
             <a:endParaRPr lang="ko-KR" altLang="en-US"/>
           </a:p>
@@ -466,7 +903,7 @@
           <a:p>
             <a:fld id="{C6FDF62A-CEF3-4A4B-9978-8C575DC3A030}" type="datetimeFigureOut">
               <a:rPr lang="ko-KR" altLang="en-US" smtClean="0"/>
-              <a:t>2026-04-24</a:t>
+              <a:t>2026-05-26</a:t>
             </a:fld>
             <a:endParaRPr lang="ko-KR" altLang="en-US"/>
           </a:p>
@@ -674,7 +1111,7 @@
           <a:p>
             <a:fld id="{C6FDF62A-CEF3-4A4B-9978-8C575DC3A030}" type="datetimeFigureOut">
               <a:rPr lang="ko-KR" altLang="en-US" smtClean="0"/>
-              <a:t>2026-04-24</a:t>
+              <a:t>2026-05-26</a:t>
             </a:fld>
             <a:endParaRPr lang="ko-KR" altLang="en-US"/>
           </a:p>
@@ -872,7 +1309,7 @@
           <a:p>
             <a:fld id="{C6FDF62A-CEF3-4A4B-9978-8C575DC3A030}" type="datetimeFigureOut">
               <a:rPr lang="ko-KR" altLang="en-US" smtClean="0"/>
-              <a:t>2026-04-24</a:t>
+              <a:t>2026-05-26</a:t>
             </a:fld>
             <a:endParaRPr lang="ko-KR" altLang="en-US"/>
           </a:p>
@@ -1147,7 +1584,7 @@
           <a:p>
             <a:fld id="{C6FDF62A-CEF3-4A4B-9978-8C575DC3A030}" type="datetimeFigureOut">
               <a:rPr lang="ko-KR" altLang="en-US" smtClean="0"/>
-              <a:t>2026-04-24</a:t>
+              <a:t>2026-05-26</a:t>
             </a:fld>
             <a:endParaRPr lang="ko-KR" altLang="en-US"/>
           </a:p>
@@ -1412,7 +1849,7 @@
           <a:p>
             <a:fld id="{C6FDF62A-CEF3-4A4B-9978-8C575DC3A030}" type="datetimeFigureOut">
               <a:rPr lang="ko-KR" altLang="en-US" smtClean="0"/>
-              <a:t>2026-04-24</a:t>
+              <a:t>2026-05-26</a:t>
             </a:fld>
             <a:endParaRPr lang="ko-KR" altLang="en-US"/>
           </a:p>
@@ -1824,7 +2261,7 @@
           <a:p>
             <a:fld id="{C6FDF62A-CEF3-4A4B-9978-8C575DC3A030}" type="datetimeFigureOut">
               <a:rPr lang="ko-KR" altLang="en-US" smtClean="0"/>
-              <a:t>2026-04-24</a:t>
+              <a:t>2026-05-26</a:t>
             </a:fld>
             <a:endParaRPr lang="ko-KR" altLang="en-US"/>
           </a:p>
@@ -1965,7 +2402,7 @@
           <a:p>
             <a:fld id="{C6FDF62A-CEF3-4A4B-9978-8C575DC3A030}" type="datetimeFigureOut">
               <a:rPr lang="ko-KR" altLang="en-US" smtClean="0"/>
-              <a:t>2026-04-24</a:t>
+              <a:t>2026-05-26</a:t>
             </a:fld>
             <a:endParaRPr lang="ko-KR" altLang="en-US"/>
           </a:p>
@@ -2078,7 +2515,7 @@
           <a:p>
             <a:fld id="{C6FDF62A-CEF3-4A4B-9978-8C575DC3A030}" type="datetimeFigureOut">
               <a:rPr lang="ko-KR" altLang="en-US" smtClean="0"/>
-              <a:t>2026-04-24</a:t>
+              <a:t>2026-05-26</a:t>
             </a:fld>
             <a:endParaRPr lang="ko-KR" altLang="en-US"/>
           </a:p>
@@ -2389,7 +2826,7 @@
           <a:p>
             <a:fld id="{C6FDF62A-CEF3-4A4B-9978-8C575DC3A030}" type="datetimeFigureOut">
               <a:rPr lang="ko-KR" altLang="en-US" smtClean="0"/>
-              <a:t>2026-04-24</a:t>
+              <a:t>2026-05-26</a:t>
             </a:fld>
             <a:endParaRPr lang="ko-KR" altLang="en-US"/>
           </a:p>
@@ -2677,7 +3114,7 @@
           <a:p>
             <a:fld id="{C6FDF62A-CEF3-4A4B-9978-8C575DC3A030}" type="datetimeFigureOut">
               <a:rPr lang="ko-KR" altLang="en-US" smtClean="0"/>
-              <a:t>2026-04-24</a:t>
+              <a:t>2026-05-26</a:t>
             </a:fld>
             <a:endParaRPr lang="ko-KR" altLang="en-US"/>
           </a:p>
@@ -2918,7 +3355,7 @@
           <a:p>
             <a:fld id="{C6FDF62A-CEF3-4A4B-9978-8C575DC3A030}" type="datetimeFigureOut">
               <a:rPr lang="ko-KR" altLang="en-US" smtClean="0"/>
-              <a:t>2026-04-24</a:t>
+              <a:t>2026-05-26</a:t>
             </a:fld>
             <a:endParaRPr lang="ko-KR" altLang="en-US"/>
           </a:p>
@@ -3807,7 +4244,15 @@
             </a:r>
             <a:r>
               <a:rPr lang="ko-KR" altLang="en-US" dirty="0"/>
-              <a:t>마우스 </a:t>
+              <a:t>게이지 </a:t>
+            </a:r>
+            <a:r>
+              <a:rPr lang="en-US" altLang="ko-KR" dirty="0"/>
+              <a:t>UI</a:t>
+            </a:r>
+            <a:r>
+              <a:rPr lang="ko-KR" altLang="en-US" dirty="0"/>
+              <a:t>에 마우스 </a:t>
             </a:r>
             <a:r>
               <a:rPr lang="ko-KR" altLang="en-US" dirty="0" err="1"/>
@@ -4087,6 +4532,1163 @@
     <p:extLst>
       <p:ext uri="{BB962C8B-B14F-4D97-AF65-F5344CB8AC3E}">
         <p14:creationId xmlns:p14="http://schemas.microsoft.com/office/powerpoint/2010/main" val="1179173822"/>
+      </p:ext>
+    </p:extLst>
+  </p:cSld>
+  <p:clrMapOvr>
+    <a:masterClrMapping/>
+  </p:clrMapOvr>
+</p:sld>
+</file>
+
+<file path=ppt/slides/slide11.xml><?xml version="1.0" encoding="utf-8"?>
+<p:sld xmlns:a="http://schemas.openxmlformats.org/drawingml/2006/main" xmlns:r="http://schemas.openxmlformats.org/officeDocument/2006/relationships" xmlns:p="http://schemas.openxmlformats.org/presentationml/2006/main">
+  <p:cSld>
+    <p:spTree>
+      <p:nvGrpSpPr>
+        <p:cNvPr id="1" name="">
+          <a:extLst>
+            <a:ext uri="{FF2B5EF4-FFF2-40B4-BE49-F238E27FC236}">
+              <a16:creationId xmlns:a16="http://schemas.microsoft.com/office/drawing/2014/main" id="{D2669C0B-AEDE-1A8B-43C6-0882E943A39B}"/>
+            </a:ext>
+          </a:extLst>
+        </p:cNvPr>
+        <p:cNvGrpSpPr/>
+        <p:nvPr/>
+      </p:nvGrpSpPr>
+      <p:grpSpPr>
+        <a:xfrm>
+          <a:off x="0" y="0"/>
+          <a:ext cx="0" cy="0"/>
+          <a:chOff x="0" y="0"/>
+          <a:chExt cx="0" cy="0"/>
+        </a:xfrm>
+      </p:grpSpPr>
+      <p:pic>
+        <p:nvPicPr>
+          <p:cNvPr id="1026" name="Picture 2" descr="이미지">
+            <a:extLst>
+              <a:ext uri="{FF2B5EF4-FFF2-40B4-BE49-F238E27FC236}">
+                <a16:creationId xmlns:a16="http://schemas.microsoft.com/office/drawing/2014/main" id="{898F9542-4E26-03C7-CCDB-55A9AC6DDAD8}"/>
+              </a:ext>
+            </a:extLst>
+          </p:cNvPr>
+          <p:cNvPicPr>
+            <a:picLocks noChangeAspect="1" noChangeArrowheads="1"/>
+          </p:cNvPicPr>
+          <p:nvPr/>
+        </p:nvPicPr>
+        <p:blipFill>
+          <a:blip r:embed="rId3">
+            <a:extLst>
+              <a:ext uri="{28A0092B-C50C-407E-A947-70E740481C1C}">
+                <a14:useLocalDpi xmlns:a14="http://schemas.microsoft.com/office/drawing/2010/main" val="0"/>
+              </a:ext>
+            </a:extLst>
+          </a:blip>
+          <a:srcRect/>
+          <a:stretch>
+            <a:fillRect/>
+          </a:stretch>
+        </p:blipFill>
+        <p:spPr bwMode="auto">
+          <a:xfrm>
+            <a:off x="290946" y="1007051"/>
+            <a:ext cx="5805054" cy="3265343"/>
+          </a:xfrm>
+          <a:prstGeom prst="rect">
+            <a:avLst/>
+          </a:prstGeom>
+          <a:noFill/>
+          <a:extLst>
+            <a:ext uri="{909E8E84-426E-40DD-AFC4-6F175D3DCCD1}">
+              <a14:hiddenFill xmlns:a14="http://schemas.microsoft.com/office/drawing/2010/main">
+                <a:solidFill>
+                  <a:srgbClr val="FFFFFF"/>
+                </a:solidFill>
+              </a14:hiddenFill>
+            </a:ext>
+          </a:extLst>
+        </p:spPr>
+      </p:pic>
+      <p:sp>
+        <p:nvSpPr>
+          <p:cNvPr id="3" name="TextBox 2">
+            <a:extLst>
+              <a:ext uri="{FF2B5EF4-FFF2-40B4-BE49-F238E27FC236}">
+                <a16:creationId xmlns:a16="http://schemas.microsoft.com/office/drawing/2014/main" id="{76C0111D-AE8B-B586-D799-FB33CD69B1A9}"/>
+              </a:ext>
+            </a:extLst>
+          </p:cNvPr>
+          <p:cNvSpPr txBox="1"/>
+          <p:nvPr/>
+        </p:nvSpPr>
+        <p:spPr>
+          <a:xfrm>
+            <a:off x="715820" y="572655"/>
+            <a:ext cx="10367818" cy="646331"/>
+          </a:xfrm>
+          <a:prstGeom prst="rect">
+            <a:avLst/>
+          </a:prstGeom>
+          <a:noFill/>
+        </p:spPr>
+        <p:txBody>
+          <a:bodyPr wrap="square" rtlCol="0">
+            <a:spAutoFit/>
+          </a:bodyPr>
+          <a:lstStyle/>
+          <a:p>
+            <a:r>
+              <a:rPr lang="ko-KR" altLang="en-US" b="1" dirty="0"/>
+              <a:t>스테이지 클리어 </a:t>
+            </a:r>
+            <a:r>
+              <a:rPr lang="en-US" altLang="ko-KR" b="1" dirty="0"/>
+              <a:t>– </a:t>
+            </a:r>
+            <a:r>
+              <a:rPr lang="ko-KR" altLang="en-US" b="1" dirty="0"/>
+              <a:t>획득 골드 </a:t>
+            </a:r>
+            <a:r>
+              <a:rPr lang="en-US" altLang="ko-KR" b="1" dirty="0"/>
+              <a:t>UI </a:t>
+            </a:r>
+            <a:r>
+              <a:rPr lang="ko-KR" altLang="en-US" b="1" dirty="0"/>
+              <a:t>변경</a:t>
+            </a:r>
+            <a:endParaRPr lang="en-US" altLang="ko-KR" dirty="0"/>
+          </a:p>
+          <a:p>
+            <a:endParaRPr lang="en-US" altLang="ko-KR" dirty="0"/>
+          </a:p>
+        </p:txBody>
+      </p:sp>
+      <p:sp>
+        <p:nvSpPr>
+          <p:cNvPr id="4" name="TextBox 3">
+            <a:extLst>
+              <a:ext uri="{FF2B5EF4-FFF2-40B4-BE49-F238E27FC236}">
+                <a16:creationId xmlns:a16="http://schemas.microsoft.com/office/drawing/2014/main" id="{3BC63FB7-DC4C-E65B-E3D1-84AAD9F75CA5}"/>
+              </a:ext>
+            </a:extLst>
+          </p:cNvPr>
+          <p:cNvSpPr txBox="1"/>
+          <p:nvPr/>
+        </p:nvSpPr>
+        <p:spPr>
+          <a:xfrm>
+            <a:off x="6216073" y="1007338"/>
+            <a:ext cx="5805054" cy="1384995"/>
+          </a:xfrm>
+          <a:prstGeom prst="rect">
+            <a:avLst/>
+          </a:prstGeom>
+          <a:noFill/>
+        </p:spPr>
+        <p:txBody>
+          <a:bodyPr wrap="square" rtlCol="0">
+            <a:spAutoFit/>
+          </a:bodyPr>
+          <a:lstStyle/>
+          <a:p>
+            <a:r>
+              <a:rPr lang="en-US" altLang="ko-KR" sz="1400" b="1" dirty="0"/>
+              <a:t>“</a:t>
+            </a:r>
+            <a:r>
+              <a:rPr lang="ko-KR" altLang="en-US" sz="1400" b="1" dirty="0"/>
+              <a:t>무엇에 의해 획득 골드가 증가했는지 다 보여주는 게 좋지 않음</a:t>
+            </a:r>
+            <a:r>
+              <a:rPr lang="en-US" altLang="ko-KR" sz="1400" b="1" dirty="0"/>
+              <a:t>?”</a:t>
+            </a:r>
+          </a:p>
+          <a:p>
+            <a:r>
+              <a:rPr lang="ko-KR" altLang="en-US" sz="1400" dirty="0"/>
+              <a:t>이라는 의견으로 인해 변경됨</a:t>
+            </a:r>
+            <a:endParaRPr lang="en-US" altLang="ko-KR" sz="1400" dirty="0"/>
+          </a:p>
+          <a:p>
+            <a:endParaRPr lang="en-US" altLang="ko-KR" sz="1400" dirty="0"/>
+          </a:p>
+          <a:p>
+            <a:r>
+              <a:rPr lang="ko-KR" altLang="en-US" sz="1400" dirty="0"/>
+              <a:t>기존 심플한 연출의 이유였던 </a:t>
+            </a:r>
+            <a:r>
+              <a:rPr lang="en-US" altLang="ko-KR" sz="1400" dirty="0"/>
+              <a:t>“</a:t>
+            </a:r>
+            <a:r>
+              <a:rPr lang="ko-KR" altLang="en-US" sz="1400" dirty="0"/>
+              <a:t>획득한 골드의 출처를 모두 설명하면 연출이 너무 복잡하거나 길어질 수 있어서</a:t>
+            </a:r>
+            <a:r>
+              <a:rPr lang="en-US" altLang="ko-KR" sz="1400" dirty="0"/>
+              <a:t>”</a:t>
+            </a:r>
+            <a:r>
+              <a:rPr lang="ko-KR" altLang="en-US" sz="1400" dirty="0"/>
+              <a:t>라는 문제를 해결하기 위해 </a:t>
+            </a:r>
+            <a:r>
+              <a:rPr lang="en-US" altLang="ko-KR" sz="1400" dirty="0"/>
+              <a:t>UI </a:t>
+            </a:r>
+            <a:r>
+              <a:rPr lang="ko-KR" altLang="en-US" sz="1400" dirty="0"/>
+              <a:t>배치가 크게 수정됨</a:t>
+            </a:r>
+            <a:endParaRPr lang="en-US" altLang="ko-KR" sz="1400" dirty="0"/>
+          </a:p>
+        </p:txBody>
+      </p:sp>
+      <p:sp>
+        <p:nvSpPr>
+          <p:cNvPr id="5" name="직사각형 4">
+            <a:extLst>
+              <a:ext uri="{FF2B5EF4-FFF2-40B4-BE49-F238E27FC236}">
+                <a16:creationId xmlns:a16="http://schemas.microsoft.com/office/drawing/2014/main" id="{AED1CBA9-277B-8684-C455-B4E567AF1F03}"/>
+              </a:ext>
+            </a:extLst>
+          </p:cNvPr>
+          <p:cNvSpPr/>
+          <p:nvPr/>
+        </p:nvSpPr>
+        <p:spPr>
+          <a:xfrm>
+            <a:off x="2724727" y="2530764"/>
+            <a:ext cx="942109" cy="314036"/>
+          </a:xfrm>
+          <a:prstGeom prst="rect">
+            <a:avLst/>
+          </a:prstGeom>
+          <a:noFill/>
+          <a:ln>
+            <a:solidFill>
+              <a:srgbClr val="FF0000"/>
+            </a:solidFill>
+          </a:ln>
+        </p:spPr>
+        <p:style>
+          <a:lnRef idx="2">
+            <a:schemeClr val="accent1">
+              <a:shade val="15000"/>
+            </a:schemeClr>
+          </a:lnRef>
+          <a:fillRef idx="1">
+            <a:schemeClr val="accent1"/>
+          </a:fillRef>
+          <a:effectRef idx="0">
+            <a:schemeClr val="accent1"/>
+          </a:effectRef>
+          <a:fontRef idx="minor">
+            <a:schemeClr val="lt1"/>
+          </a:fontRef>
+        </p:style>
+        <p:txBody>
+          <a:bodyPr rtlCol="0" anchor="ctr"/>
+          <a:lstStyle/>
+          <a:p>
+            <a:pPr algn="ctr"/>
+            <a:endParaRPr lang="ko-KR" altLang="en-US"/>
+          </a:p>
+        </p:txBody>
+      </p:sp>
+      <p:cxnSp>
+        <p:nvCxnSpPr>
+          <p:cNvPr id="7" name="직선 화살표 연결선 6">
+            <a:extLst>
+              <a:ext uri="{FF2B5EF4-FFF2-40B4-BE49-F238E27FC236}">
+                <a16:creationId xmlns:a16="http://schemas.microsoft.com/office/drawing/2014/main" id="{6C71FC5B-39E9-F8CF-696D-D43679E3C183}"/>
+              </a:ext>
+            </a:extLst>
+          </p:cNvPr>
+          <p:cNvCxnSpPr>
+            <a:cxnSpLocks/>
+          </p:cNvCxnSpPr>
+          <p:nvPr/>
+        </p:nvCxnSpPr>
+        <p:spPr>
+          <a:xfrm>
+            <a:off x="3666836" y="2669310"/>
+            <a:ext cx="2549237" cy="0"/>
+          </a:xfrm>
+          <a:prstGeom prst="straightConnector1">
+            <a:avLst/>
+          </a:prstGeom>
+          <a:ln>
+            <a:solidFill>
+              <a:srgbClr val="FF0000"/>
+            </a:solidFill>
+            <a:tailEnd type="triangle"/>
+          </a:ln>
+        </p:spPr>
+        <p:style>
+          <a:lnRef idx="2">
+            <a:schemeClr val="accent1"/>
+          </a:lnRef>
+          <a:fillRef idx="0">
+            <a:schemeClr val="accent1"/>
+          </a:fillRef>
+          <a:effectRef idx="1">
+            <a:schemeClr val="accent1"/>
+          </a:effectRef>
+          <a:fontRef idx="minor">
+            <a:schemeClr val="tx1"/>
+          </a:fontRef>
+        </p:style>
+      </p:cxnSp>
+      <p:sp>
+        <p:nvSpPr>
+          <p:cNvPr id="9" name="TextBox 8">
+            <a:extLst>
+              <a:ext uri="{FF2B5EF4-FFF2-40B4-BE49-F238E27FC236}">
+                <a16:creationId xmlns:a16="http://schemas.microsoft.com/office/drawing/2014/main" id="{FF8471C2-34ED-81C3-B3A7-8E1E3A5939EB}"/>
+              </a:ext>
+            </a:extLst>
+          </p:cNvPr>
+          <p:cNvSpPr txBox="1"/>
+          <p:nvPr/>
+        </p:nvSpPr>
+        <p:spPr>
+          <a:xfrm>
+            <a:off x="6216073" y="2475459"/>
+            <a:ext cx="5805054" cy="1384995"/>
+          </a:xfrm>
+          <a:prstGeom prst="rect">
+            <a:avLst/>
+          </a:prstGeom>
+          <a:noFill/>
+        </p:spPr>
+        <p:txBody>
+          <a:bodyPr wrap="square" rtlCol="0">
+            <a:spAutoFit/>
+          </a:bodyPr>
+          <a:lstStyle/>
+          <a:p>
+            <a:r>
+              <a:rPr lang="ko-KR" altLang="en-US" sz="1400" dirty="0"/>
+              <a:t>이건 원래 있던 것 </a:t>
+            </a:r>
+            <a:r>
+              <a:rPr lang="en-US" altLang="ko-KR" sz="1400" dirty="0"/>
+              <a:t>“</a:t>
+            </a:r>
+            <a:r>
+              <a:rPr lang="ko-KR" altLang="en-US" sz="1400" dirty="0"/>
+              <a:t>획득한  카드 수</a:t>
+            </a:r>
+            <a:r>
+              <a:rPr lang="en-US" altLang="ko-KR" sz="1400" dirty="0"/>
+              <a:t>”</a:t>
+            </a:r>
+            <a:r>
+              <a:rPr lang="ko-KR" altLang="en-US" sz="1400" dirty="0"/>
+              <a:t>임</a:t>
+            </a:r>
+            <a:endParaRPr lang="en-US" altLang="ko-KR" sz="1400" dirty="0"/>
+          </a:p>
+          <a:p>
+            <a:r>
+              <a:rPr lang="en-US" altLang="ko-KR" sz="1400" dirty="0"/>
+              <a:t>’</a:t>
+            </a:r>
+            <a:r>
+              <a:rPr lang="ko-KR" altLang="en-US" sz="1400" dirty="0"/>
+              <a:t>카드 선택창 횟수</a:t>
+            </a:r>
+            <a:r>
+              <a:rPr lang="en-US" altLang="ko-KR" sz="1400" dirty="0"/>
+              <a:t>’x’</a:t>
+            </a:r>
+            <a:r>
+              <a:rPr lang="ko-KR" altLang="en-US" sz="1400" dirty="0"/>
+              <a:t>한번의 선택창에서 가져갈 수 있는 카드 매수</a:t>
+            </a:r>
+            <a:r>
+              <a:rPr lang="en-US" altLang="ko-KR" sz="1400" dirty="0"/>
+              <a:t>’</a:t>
+            </a:r>
+            <a:r>
+              <a:rPr lang="ko-KR" altLang="en-US" sz="1400" dirty="0"/>
+              <a:t>가 늘어나는 만큼 표시되어야 함</a:t>
+            </a:r>
+            <a:endParaRPr lang="en-US" altLang="ko-KR" sz="1400" dirty="0"/>
+          </a:p>
+          <a:p>
+            <a:r>
+              <a:rPr lang="ko-KR" altLang="en-US" sz="1400" dirty="0"/>
+              <a:t>아직 리소스는 없지만</a:t>
+            </a:r>
+            <a:r>
+              <a:rPr lang="en-US" altLang="ko-KR" sz="1400" dirty="0"/>
+              <a:t>, </a:t>
+            </a:r>
+            <a:r>
+              <a:rPr lang="ko-KR" altLang="en-US" sz="1400" dirty="0"/>
+              <a:t>일정 스테이지마다 </a:t>
+            </a:r>
+            <a:r>
+              <a:rPr lang="ko-KR" altLang="en-US" sz="1400" dirty="0" err="1"/>
+              <a:t>고레어</a:t>
+            </a:r>
+            <a:r>
+              <a:rPr lang="ko-KR" altLang="en-US" sz="1400" dirty="0"/>
+              <a:t> 카드가 보상으로 나오는 경우</a:t>
+            </a:r>
+            <a:r>
+              <a:rPr lang="en-US" altLang="ko-KR" sz="1400" dirty="0"/>
+              <a:t>, </a:t>
+            </a:r>
+            <a:r>
+              <a:rPr lang="ko-KR" altLang="en-US" sz="1400" dirty="0" err="1"/>
+              <a:t>고레어</a:t>
+            </a:r>
+            <a:r>
+              <a:rPr lang="ko-KR" altLang="en-US" sz="1400" dirty="0"/>
+              <a:t> 카드라는 걸 알 수 있는 차별화된 아이콘을 </a:t>
+            </a:r>
+            <a:r>
+              <a:rPr lang="ko-KR" altLang="en-US" sz="1400" dirty="0" err="1"/>
+              <a:t>띄울거니까</a:t>
+            </a:r>
+            <a:r>
+              <a:rPr lang="ko-KR" altLang="en-US" sz="1400" dirty="0"/>
+              <a:t> 이건 고려해 두는 게 좋을 듯 →</a:t>
+            </a:r>
+            <a:endParaRPr lang="en-US" altLang="ko-KR" sz="1400" dirty="0"/>
+          </a:p>
+        </p:txBody>
+      </p:sp>
+      <p:sp>
+        <p:nvSpPr>
+          <p:cNvPr id="10" name="TextBox 9">
+            <a:extLst>
+              <a:ext uri="{FF2B5EF4-FFF2-40B4-BE49-F238E27FC236}">
+                <a16:creationId xmlns:a16="http://schemas.microsoft.com/office/drawing/2014/main" id="{28A1B680-2377-5FFE-14F5-E15BDE2804D9}"/>
+              </a:ext>
+            </a:extLst>
+          </p:cNvPr>
+          <p:cNvSpPr txBox="1"/>
+          <p:nvPr/>
+        </p:nvSpPr>
+        <p:spPr>
+          <a:xfrm>
+            <a:off x="6216073" y="3925783"/>
+            <a:ext cx="5805054" cy="1169551"/>
+          </a:xfrm>
+          <a:prstGeom prst="rect">
+            <a:avLst/>
+          </a:prstGeom>
+          <a:noFill/>
+        </p:spPr>
+        <p:txBody>
+          <a:bodyPr wrap="square" rtlCol="0">
+            <a:spAutoFit/>
+          </a:bodyPr>
+          <a:lstStyle/>
+          <a:p>
+            <a:r>
+              <a:rPr lang="ko-KR" altLang="en-US" sz="1400" dirty="0"/>
+              <a:t>유물 효과</a:t>
+            </a:r>
+            <a:r>
+              <a:rPr lang="en-US" altLang="ko-KR" sz="1400" dirty="0"/>
+              <a:t>(</a:t>
+            </a:r>
+            <a:r>
+              <a:rPr lang="ko-KR" altLang="en-US" sz="1400" dirty="0"/>
+              <a:t>좌측</a:t>
+            </a:r>
+            <a:r>
+              <a:rPr lang="en-US" altLang="ko-KR" sz="1400" dirty="0"/>
+              <a:t>,</a:t>
+            </a:r>
+            <a:r>
+              <a:rPr lang="ko-KR" altLang="en-US" sz="1400" dirty="0"/>
+              <a:t>먼저 획득한 유물부터</a:t>
+            </a:r>
+            <a:r>
+              <a:rPr lang="en-US" altLang="ko-KR" sz="1400" dirty="0"/>
+              <a:t>)</a:t>
+            </a:r>
+            <a:r>
+              <a:rPr lang="ko-KR" altLang="en-US" sz="1400" dirty="0"/>
+              <a:t>부터 순차적으로</a:t>
+            </a:r>
+            <a:r>
+              <a:rPr lang="en-US" altLang="ko-KR" sz="1400" dirty="0"/>
+              <a:t>,</a:t>
+            </a:r>
+          </a:p>
+          <a:p>
+            <a:r>
+              <a:rPr lang="ko-KR" altLang="en-US" sz="1400" dirty="0"/>
+              <a:t>→ </a:t>
+            </a:r>
+            <a:r>
+              <a:rPr lang="en-US" altLang="ko-KR" sz="1400" dirty="0"/>
+              <a:t>x1.5 score </a:t>
+            </a:r>
+            <a:r>
+              <a:rPr lang="ko-KR" altLang="en-US" sz="1400" dirty="0"/>
+              <a:t>→ 퍼펙트 보너스</a:t>
+            </a:r>
+            <a:r>
+              <a:rPr lang="en-US" altLang="ko-KR" sz="1400" dirty="0"/>
+              <a:t> </a:t>
+            </a:r>
+            <a:r>
+              <a:rPr lang="ko-KR" altLang="en-US" sz="1400" dirty="0"/>
+              <a:t>순으로 </a:t>
+            </a:r>
+            <a:r>
+              <a:rPr lang="en-US" altLang="ko-KR" sz="1400" dirty="0">
+                <a:solidFill>
+                  <a:schemeClr val="bg2">
+                    <a:lumMod val="75000"/>
+                  </a:schemeClr>
+                </a:solidFill>
+              </a:rPr>
+              <a:t>(</a:t>
+            </a:r>
+            <a:r>
+              <a:rPr lang="ko-KR" altLang="en-US" sz="1400" dirty="0" err="1">
+                <a:solidFill>
+                  <a:schemeClr val="bg2">
+                    <a:lumMod val="75000"/>
+                  </a:schemeClr>
+                </a:solidFill>
+              </a:rPr>
+              <a:t>이미지랑</a:t>
+            </a:r>
+            <a:r>
+              <a:rPr lang="ko-KR" altLang="en-US" sz="1400" dirty="0">
+                <a:solidFill>
+                  <a:schemeClr val="bg2">
+                    <a:lumMod val="75000"/>
+                  </a:schemeClr>
+                </a:solidFill>
+              </a:rPr>
+              <a:t> 순서 다름</a:t>
+            </a:r>
+            <a:r>
+              <a:rPr lang="en-US" altLang="ko-KR" sz="1400" dirty="0">
+                <a:solidFill>
+                  <a:schemeClr val="bg2">
+                    <a:lumMod val="75000"/>
+                  </a:schemeClr>
+                </a:solidFill>
+              </a:rPr>
+              <a:t>)</a:t>
+            </a:r>
+          </a:p>
+          <a:p>
+            <a:r>
+              <a:rPr lang="ko-KR" altLang="en-US" sz="1400" dirty="0"/>
+              <a:t>정산되듯이 나올 것임</a:t>
+            </a:r>
+            <a:r>
+              <a:rPr lang="en-US" altLang="ko-KR" sz="1400" dirty="0"/>
+              <a:t>. </a:t>
+            </a:r>
+            <a:r>
+              <a:rPr lang="ko-KR" altLang="en-US" sz="1400" dirty="0"/>
+              <a:t>연출 템포는 매우 </a:t>
+            </a:r>
+            <a:r>
+              <a:rPr lang="ko-KR" altLang="en-US" sz="1400" dirty="0" err="1"/>
+              <a:t>빠르길</a:t>
+            </a:r>
+            <a:r>
+              <a:rPr lang="ko-KR" altLang="en-US" sz="1400" dirty="0"/>
+              <a:t> 원함</a:t>
+            </a:r>
+            <a:endParaRPr lang="en-US" altLang="ko-KR" sz="1400" dirty="0"/>
+          </a:p>
+          <a:p>
+            <a:r>
+              <a:rPr lang="en-US" altLang="ko-KR" sz="1400" dirty="0"/>
+              <a:t>(</a:t>
+            </a:r>
+            <a:r>
+              <a:rPr lang="ko-KR" altLang="en-US" sz="1400" dirty="0"/>
+              <a:t>그러면서도 클릭으로 </a:t>
+            </a:r>
+            <a:r>
+              <a:rPr lang="ko-KR" altLang="en-US" sz="1400" dirty="0" err="1"/>
+              <a:t>스킵되는게</a:t>
+            </a:r>
+            <a:r>
+              <a:rPr lang="ko-KR" altLang="en-US" sz="1400" dirty="0"/>
+              <a:t> 좋겠지</a:t>
+            </a:r>
+            <a:r>
+              <a:rPr lang="en-US" altLang="ko-KR" sz="1400" dirty="0"/>
+              <a:t>…?)</a:t>
+            </a:r>
+          </a:p>
+          <a:p>
+            <a:r>
+              <a:rPr lang="ko-KR" altLang="en-US" sz="1400" dirty="0"/>
+              <a:t>△▽버튼으로 살펴볼 수 있음</a:t>
+            </a:r>
+            <a:r>
+              <a:rPr lang="en-US" altLang="ko-KR" sz="1400" dirty="0"/>
+              <a:t>, </a:t>
+            </a:r>
+            <a:r>
+              <a:rPr lang="en-US" altLang="ko-KR" sz="1400" b="1" dirty="0">
+                <a:solidFill>
+                  <a:srgbClr val="FF0000"/>
+                </a:solidFill>
+              </a:rPr>
+              <a:t>※</a:t>
+            </a:r>
+            <a:r>
+              <a:rPr lang="ko-KR" altLang="en-US" sz="1400" b="1" dirty="0" err="1">
+                <a:solidFill>
+                  <a:srgbClr val="FF0000"/>
+                </a:solidFill>
+              </a:rPr>
+              <a:t>버튼식이고</a:t>
+            </a:r>
+            <a:r>
+              <a:rPr lang="ko-KR" altLang="en-US" sz="1400" b="1" dirty="0">
+                <a:solidFill>
+                  <a:srgbClr val="FF0000"/>
+                </a:solidFill>
+              </a:rPr>
+              <a:t> 스크롤 아님</a:t>
+            </a:r>
+            <a:r>
+              <a:rPr lang="en-US" altLang="ko-KR" sz="1400" dirty="0"/>
+              <a:t>.</a:t>
+            </a:r>
+          </a:p>
+        </p:txBody>
+      </p:sp>
+      <p:sp>
+        <p:nvSpPr>
+          <p:cNvPr id="11" name="직사각형 10">
+            <a:extLst>
+              <a:ext uri="{FF2B5EF4-FFF2-40B4-BE49-F238E27FC236}">
+                <a16:creationId xmlns:a16="http://schemas.microsoft.com/office/drawing/2014/main" id="{8B4F8D3C-E580-A230-0E57-BB2643F1CA72}"/>
+              </a:ext>
+            </a:extLst>
+          </p:cNvPr>
+          <p:cNvSpPr/>
+          <p:nvPr/>
+        </p:nvSpPr>
+        <p:spPr>
+          <a:xfrm>
+            <a:off x="2373746" y="2854206"/>
+            <a:ext cx="1671782" cy="692557"/>
+          </a:xfrm>
+          <a:prstGeom prst="rect">
+            <a:avLst/>
+          </a:prstGeom>
+          <a:noFill/>
+          <a:ln>
+            <a:solidFill>
+              <a:srgbClr val="FF0000"/>
+            </a:solidFill>
+          </a:ln>
+        </p:spPr>
+        <p:style>
+          <a:lnRef idx="2">
+            <a:schemeClr val="accent1">
+              <a:shade val="15000"/>
+            </a:schemeClr>
+          </a:lnRef>
+          <a:fillRef idx="1">
+            <a:schemeClr val="accent1"/>
+          </a:fillRef>
+          <a:effectRef idx="0">
+            <a:schemeClr val="accent1"/>
+          </a:effectRef>
+          <a:fontRef idx="minor">
+            <a:schemeClr val="lt1"/>
+          </a:fontRef>
+        </p:style>
+        <p:txBody>
+          <a:bodyPr rtlCol="0" anchor="ctr"/>
+          <a:lstStyle/>
+          <a:p>
+            <a:pPr algn="ctr"/>
+            <a:endParaRPr lang="ko-KR" altLang="en-US"/>
+          </a:p>
+        </p:txBody>
+      </p:sp>
+      <p:cxnSp>
+        <p:nvCxnSpPr>
+          <p:cNvPr id="12" name="직선 화살표 연결선 11">
+            <a:extLst>
+              <a:ext uri="{FF2B5EF4-FFF2-40B4-BE49-F238E27FC236}">
+                <a16:creationId xmlns:a16="http://schemas.microsoft.com/office/drawing/2014/main" id="{38352806-6F9F-7DDB-B7F3-71C070AA533B}"/>
+              </a:ext>
+            </a:extLst>
+          </p:cNvPr>
+          <p:cNvCxnSpPr>
+            <a:cxnSpLocks/>
+          </p:cNvCxnSpPr>
+          <p:nvPr/>
+        </p:nvCxnSpPr>
+        <p:spPr>
+          <a:xfrm>
+            <a:off x="4045528" y="3191164"/>
+            <a:ext cx="2170545" cy="882072"/>
+          </a:xfrm>
+          <a:prstGeom prst="straightConnector1">
+            <a:avLst/>
+          </a:prstGeom>
+          <a:ln>
+            <a:solidFill>
+              <a:srgbClr val="FF0000"/>
+            </a:solidFill>
+            <a:tailEnd type="triangle"/>
+          </a:ln>
+        </p:spPr>
+        <p:style>
+          <a:lnRef idx="2">
+            <a:schemeClr val="accent1"/>
+          </a:lnRef>
+          <a:fillRef idx="0">
+            <a:schemeClr val="accent1"/>
+          </a:fillRef>
+          <a:effectRef idx="1">
+            <a:schemeClr val="accent1"/>
+          </a:effectRef>
+          <a:fontRef idx="minor">
+            <a:schemeClr val="tx1"/>
+          </a:fontRef>
+        </p:style>
+      </p:cxnSp>
+      <p:sp>
+        <p:nvSpPr>
+          <p:cNvPr id="14" name="직사각형 13">
+            <a:extLst>
+              <a:ext uri="{FF2B5EF4-FFF2-40B4-BE49-F238E27FC236}">
+                <a16:creationId xmlns:a16="http://schemas.microsoft.com/office/drawing/2014/main" id="{727A481C-A4FE-EDAD-1C19-C12D5C8E18E4}"/>
+              </a:ext>
+            </a:extLst>
+          </p:cNvPr>
+          <p:cNvSpPr/>
+          <p:nvPr/>
+        </p:nvSpPr>
+        <p:spPr>
+          <a:xfrm>
+            <a:off x="2373746" y="3556169"/>
+            <a:ext cx="1671782" cy="175489"/>
+          </a:xfrm>
+          <a:prstGeom prst="rect">
+            <a:avLst/>
+          </a:prstGeom>
+          <a:noFill/>
+          <a:ln>
+            <a:solidFill>
+              <a:srgbClr val="FF0000"/>
+            </a:solidFill>
+          </a:ln>
+        </p:spPr>
+        <p:style>
+          <a:lnRef idx="2">
+            <a:schemeClr val="accent1">
+              <a:shade val="15000"/>
+            </a:schemeClr>
+          </a:lnRef>
+          <a:fillRef idx="1">
+            <a:schemeClr val="accent1"/>
+          </a:fillRef>
+          <a:effectRef idx="0">
+            <a:schemeClr val="accent1"/>
+          </a:effectRef>
+          <a:fontRef idx="minor">
+            <a:schemeClr val="lt1"/>
+          </a:fontRef>
+        </p:style>
+        <p:txBody>
+          <a:bodyPr rtlCol="0" anchor="ctr"/>
+          <a:lstStyle/>
+          <a:p>
+            <a:pPr algn="ctr"/>
+            <a:endParaRPr lang="ko-KR" altLang="en-US"/>
+          </a:p>
+        </p:txBody>
+      </p:sp>
+      <p:cxnSp>
+        <p:nvCxnSpPr>
+          <p:cNvPr id="15" name="직선 화살표 연결선 14">
+            <a:extLst>
+              <a:ext uri="{FF2B5EF4-FFF2-40B4-BE49-F238E27FC236}">
+                <a16:creationId xmlns:a16="http://schemas.microsoft.com/office/drawing/2014/main" id="{D0FA4681-E1A4-7647-4EE4-174D50D3E9D7}"/>
+              </a:ext>
+            </a:extLst>
+          </p:cNvPr>
+          <p:cNvCxnSpPr>
+            <a:cxnSpLocks/>
+          </p:cNvCxnSpPr>
+          <p:nvPr/>
+        </p:nvCxnSpPr>
+        <p:spPr>
+          <a:xfrm>
+            <a:off x="4045528" y="3643913"/>
+            <a:ext cx="2170545" cy="1677013"/>
+          </a:xfrm>
+          <a:prstGeom prst="straightConnector1">
+            <a:avLst/>
+          </a:prstGeom>
+          <a:ln>
+            <a:solidFill>
+              <a:srgbClr val="FF0000"/>
+            </a:solidFill>
+            <a:tailEnd type="triangle"/>
+          </a:ln>
+        </p:spPr>
+        <p:style>
+          <a:lnRef idx="2">
+            <a:schemeClr val="accent1"/>
+          </a:lnRef>
+          <a:fillRef idx="0">
+            <a:schemeClr val="accent1"/>
+          </a:fillRef>
+          <a:effectRef idx="1">
+            <a:schemeClr val="accent1"/>
+          </a:effectRef>
+          <a:fontRef idx="minor">
+            <a:schemeClr val="tx1"/>
+          </a:fontRef>
+        </p:style>
+      </p:cxnSp>
+      <p:sp>
+        <p:nvSpPr>
+          <p:cNvPr id="17" name="TextBox 16">
+            <a:extLst>
+              <a:ext uri="{FF2B5EF4-FFF2-40B4-BE49-F238E27FC236}">
+                <a16:creationId xmlns:a16="http://schemas.microsoft.com/office/drawing/2014/main" id="{5CFB7EA8-1EC7-2B58-7DC5-9883010A28DE}"/>
+              </a:ext>
+            </a:extLst>
+          </p:cNvPr>
+          <p:cNvSpPr txBox="1"/>
+          <p:nvPr/>
+        </p:nvSpPr>
+        <p:spPr>
+          <a:xfrm>
+            <a:off x="6216073" y="5160663"/>
+            <a:ext cx="5805054" cy="1600438"/>
+          </a:xfrm>
+          <a:prstGeom prst="rect">
+            <a:avLst/>
+          </a:prstGeom>
+          <a:noFill/>
+        </p:spPr>
+        <p:txBody>
+          <a:bodyPr wrap="square" rtlCol="0">
+            <a:spAutoFit/>
+          </a:bodyPr>
+          <a:lstStyle/>
+          <a:p>
+            <a:r>
+              <a:rPr lang="ko-KR" altLang="en-US" sz="1400" dirty="0" err="1"/>
+              <a:t>네자릿수까지</a:t>
+            </a:r>
+            <a:r>
+              <a:rPr lang="ko-KR" altLang="en-US" sz="1400" dirty="0"/>
+              <a:t> 표시됨</a:t>
+            </a:r>
+            <a:r>
+              <a:rPr lang="en-US" altLang="ko-KR" sz="1400" dirty="0"/>
+              <a:t>. 9999G</a:t>
+            </a:r>
+            <a:r>
+              <a:rPr lang="ko-KR" altLang="en-US" sz="1400" dirty="0"/>
+              <a:t>넘어가면 </a:t>
+            </a:r>
+            <a:r>
+              <a:rPr lang="en-US" altLang="ko-KR" sz="1400" dirty="0"/>
+              <a:t>10K</a:t>
+            </a:r>
+            <a:r>
+              <a:rPr lang="ko-KR" altLang="en-US" sz="1400" dirty="0"/>
+              <a:t>부터 표시됨</a:t>
+            </a:r>
+            <a:r>
+              <a:rPr lang="en-US" altLang="ko-KR" sz="1400" dirty="0"/>
+              <a:t>. (</a:t>
+            </a:r>
+            <a:r>
+              <a:rPr lang="ko-KR" altLang="en-US" sz="1400" dirty="0"/>
+              <a:t>소수점 날림</a:t>
+            </a:r>
+            <a:r>
+              <a:rPr lang="en-US" altLang="ko-KR" sz="1400" dirty="0"/>
+              <a:t>)</a:t>
+            </a:r>
+          </a:p>
+          <a:p>
+            <a:r>
+              <a:rPr lang="ko-KR" altLang="en-US" sz="1400" dirty="0"/>
+              <a:t>리스트가 정산되는 순간</a:t>
+            </a:r>
+            <a:r>
+              <a:rPr lang="en-US" altLang="ko-KR" sz="1400" dirty="0"/>
+              <a:t>,</a:t>
+            </a:r>
+            <a:r>
+              <a:rPr lang="ko-KR" altLang="en-US" sz="1400" dirty="0"/>
+              <a:t> 바로바로 그 수치만큼 올라가고</a:t>
+            </a:r>
+            <a:endParaRPr lang="en-US" altLang="ko-KR" sz="1400" dirty="0"/>
+          </a:p>
+          <a:p>
+            <a:r>
+              <a:rPr lang="ko-KR" altLang="en-US" sz="1400" dirty="0"/>
+              <a:t>다 끝난 뒤 클릭하면 똑같이 지갑으로 들어가는 연출 재생</a:t>
+            </a:r>
+            <a:endParaRPr lang="en-US" altLang="ko-KR" sz="1400" dirty="0"/>
+          </a:p>
+          <a:p>
+            <a:r>
+              <a:rPr lang="ko-KR" altLang="en-US" sz="1400" dirty="0"/>
+              <a:t>이 때 연출은 일정 프레임마다 돈이 떨어지는 속도감이 있어야 되니까</a:t>
+            </a:r>
+            <a:endParaRPr lang="en-US" altLang="ko-KR" sz="1400" dirty="0"/>
+          </a:p>
+          <a:p>
+            <a:r>
+              <a:rPr lang="ko-KR" altLang="en-US" sz="1400" dirty="0"/>
+              <a:t>빨리 끝나는 건 가능한데</a:t>
+            </a:r>
+            <a:r>
+              <a:rPr lang="en-US" altLang="ko-KR" sz="1400" dirty="0"/>
+              <a:t>,</a:t>
+            </a:r>
+          </a:p>
+          <a:p>
+            <a:r>
+              <a:rPr lang="ko-KR" altLang="en-US" sz="1400" dirty="0"/>
+              <a:t>반대로 너무 수가 커지면</a:t>
+            </a:r>
+            <a:r>
+              <a:rPr lang="en-US" altLang="ko-KR" sz="1400" dirty="0"/>
+              <a:t>, </a:t>
+            </a:r>
+            <a:r>
+              <a:rPr lang="ko-KR" altLang="en-US" sz="1400" dirty="0"/>
+              <a:t>최대 연출 시간은 </a:t>
+            </a:r>
+            <a:r>
+              <a:rPr lang="ko-KR" altLang="en-US" sz="1400" dirty="0" err="1"/>
+              <a:t>정해뒀으면</a:t>
+            </a:r>
+            <a:r>
+              <a:rPr lang="ko-KR" altLang="en-US" sz="1400" dirty="0"/>
+              <a:t> 해서</a:t>
+            </a:r>
+            <a:r>
+              <a:rPr lang="en-US" altLang="ko-KR" sz="1400" dirty="0"/>
+              <a:t>,</a:t>
+            </a:r>
+          </a:p>
+          <a:p>
+            <a:r>
+              <a:rPr lang="ko-KR" altLang="en-US" sz="1400" dirty="0"/>
+              <a:t>줄어드는 수도 비례하게 해서 시간 맞췄으면 </a:t>
+            </a:r>
+            <a:r>
+              <a:rPr lang="en-US" altLang="ko-KR" sz="1400" dirty="0"/>
+              <a:t>(</a:t>
+            </a:r>
+            <a:r>
+              <a:rPr lang="ko-KR" altLang="en-US" sz="1400" dirty="0"/>
+              <a:t>약 </a:t>
+            </a:r>
+            <a:r>
+              <a:rPr lang="en-US" altLang="ko-KR" sz="1400" dirty="0"/>
+              <a:t>2</a:t>
+            </a:r>
+            <a:r>
+              <a:rPr lang="ko-KR" altLang="en-US" sz="1400" dirty="0"/>
+              <a:t>초 정도로 생각 중</a:t>
+            </a:r>
+            <a:r>
+              <a:rPr lang="en-US" altLang="ko-KR" sz="1400" dirty="0"/>
+              <a:t>)</a:t>
+            </a:r>
+          </a:p>
+        </p:txBody>
+      </p:sp>
+      <p:pic>
+        <p:nvPicPr>
+          <p:cNvPr id="19" name="그림 18">
+            <a:extLst>
+              <a:ext uri="{FF2B5EF4-FFF2-40B4-BE49-F238E27FC236}">
+                <a16:creationId xmlns:a16="http://schemas.microsoft.com/office/drawing/2014/main" id="{672960C6-9C53-A789-CBA3-21CEB7F4B0EA}"/>
+              </a:ext>
+            </a:extLst>
+          </p:cNvPr>
+          <p:cNvPicPr>
+            <a:picLocks noChangeAspect="1"/>
+          </p:cNvPicPr>
+          <p:nvPr/>
+        </p:nvPicPr>
+        <p:blipFill>
+          <a:blip r:embed="rId4"/>
+          <a:stretch>
+            <a:fillRect/>
+          </a:stretch>
+        </p:blipFill>
+        <p:spPr>
+          <a:xfrm>
+            <a:off x="11406184" y="3632200"/>
+            <a:ext cx="383460" cy="378523"/>
+          </a:xfrm>
+          <a:prstGeom prst="rect">
+            <a:avLst/>
+          </a:prstGeom>
+        </p:spPr>
+      </p:pic>
+      <p:pic>
+        <p:nvPicPr>
+          <p:cNvPr id="21" name="그림 20">
+            <a:extLst>
+              <a:ext uri="{FF2B5EF4-FFF2-40B4-BE49-F238E27FC236}">
+                <a16:creationId xmlns:a16="http://schemas.microsoft.com/office/drawing/2014/main" id="{5B86E4D3-D154-9450-E363-1915A7029F75}"/>
+              </a:ext>
+            </a:extLst>
+          </p:cNvPr>
+          <p:cNvPicPr>
+            <a:picLocks noChangeAspect="1"/>
+          </p:cNvPicPr>
+          <p:nvPr/>
+        </p:nvPicPr>
+        <p:blipFill>
+          <a:blip r:embed="rId5">
+            <a:extLst>
+              <a:ext uri="{28A0092B-C50C-407E-A947-70E740481C1C}">
+                <a14:useLocalDpi xmlns:a14="http://schemas.microsoft.com/office/drawing/2010/main" val="0"/>
+              </a:ext>
+            </a:extLst>
+          </a:blip>
+          <a:stretch>
+            <a:fillRect/>
+          </a:stretch>
+        </p:blipFill>
+        <p:spPr>
+          <a:xfrm>
+            <a:off x="300182" y="4412902"/>
+            <a:ext cx="2676235" cy="2360641"/>
+          </a:xfrm>
+          <a:prstGeom prst="rect">
+            <a:avLst/>
+          </a:prstGeom>
+        </p:spPr>
+      </p:pic>
+      <p:sp>
+        <p:nvSpPr>
+          <p:cNvPr id="22" name="TextBox 21">
+            <a:extLst>
+              <a:ext uri="{FF2B5EF4-FFF2-40B4-BE49-F238E27FC236}">
+                <a16:creationId xmlns:a16="http://schemas.microsoft.com/office/drawing/2014/main" id="{918ADC38-28F7-26A9-210C-72EE012E0096}"/>
+              </a:ext>
+            </a:extLst>
+          </p:cNvPr>
+          <p:cNvSpPr txBox="1"/>
+          <p:nvPr/>
+        </p:nvSpPr>
+        <p:spPr>
+          <a:xfrm>
+            <a:off x="2976417" y="4402836"/>
+            <a:ext cx="2295236" cy="1384995"/>
+          </a:xfrm>
+          <a:prstGeom prst="rect">
+            <a:avLst/>
+          </a:prstGeom>
+          <a:noFill/>
+        </p:spPr>
+        <p:txBody>
+          <a:bodyPr wrap="square" rtlCol="0">
+            <a:spAutoFit/>
+          </a:bodyPr>
+          <a:lstStyle/>
+          <a:p>
+            <a:r>
+              <a:rPr lang="en-US" altLang="ko-KR" sz="1400" dirty="0"/>
+              <a:t>*Se: </a:t>
+            </a:r>
+          </a:p>
+          <a:p>
+            <a:r>
+              <a:rPr lang="ko-KR" altLang="en-US" sz="1400" dirty="0"/>
+              <a:t>리스트 하나 올라갈 때마</a:t>
+            </a:r>
+            <a:endParaRPr lang="en-US" altLang="ko-KR" sz="1400" dirty="0"/>
+          </a:p>
+          <a:p>
+            <a:r>
+              <a:rPr lang="ko-KR" altLang="en-US" sz="1400" dirty="0"/>
+              <a:t>다 시스템 </a:t>
+            </a:r>
+            <a:r>
+              <a:rPr lang="en-US" altLang="ko-KR" sz="1400" dirty="0"/>
+              <a:t>BEEP</a:t>
+            </a:r>
+            <a:r>
+              <a:rPr lang="ko-KR" altLang="en-US" sz="1400" dirty="0"/>
+              <a:t>음</a:t>
+            </a:r>
+            <a:endParaRPr lang="en-US" altLang="ko-KR" sz="1400" dirty="0"/>
+          </a:p>
+          <a:p>
+            <a:endParaRPr lang="en-US" altLang="ko-KR" sz="1400" dirty="0"/>
+          </a:p>
+          <a:p>
+            <a:r>
+              <a:rPr lang="ko-KR" altLang="en-US" sz="1400" b="1" dirty="0">
+                <a:solidFill>
+                  <a:srgbClr val="FF0000"/>
+                </a:solidFill>
+              </a:rPr>
+              <a:t>△▽ 버튼은</a:t>
+            </a:r>
+            <a:endParaRPr lang="en-US" altLang="ko-KR" sz="1400" b="1" dirty="0">
+              <a:solidFill>
+                <a:srgbClr val="FF0000"/>
+              </a:solidFill>
+            </a:endParaRPr>
+          </a:p>
+          <a:p>
+            <a:r>
+              <a:rPr lang="ko-KR" altLang="en-US" sz="1400" b="1" dirty="0">
+                <a:solidFill>
+                  <a:srgbClr val="FF0000"/>
+                </a:solidFill>
+              </a:rPr>
+              <a:t>넘길 게 있을 때만 등장</a:t>
+            </a:r>
+            <a:r>
+              <a:rPr lang="en-US" altLang="ko-KR" sz="1400" b="1" dirty="0">
+                <a:solidFill>
+                  <a:srgbClr val="FF0000"/>
+                </a:solidFill>
+              </a:rPr>
+              <a:t>!</a:t>
+            </a:r>
+          </a:p>
+        </p:txBody>
+      </p:sp>
+    </p:spTree>
+    <p:extLst>
+      <p:ext uri="{BB962C8B-B14F-4D97-AF65-F5344CB8AC3E}">
+        <p14:creationId xmlns:p14="http://schemas.microsoft.com/office/powerpoint/2010/main" val="255586243"/>
       </p:ext>
     </p:extLst>
   </p:cSld>
@@ -9302,4 +10904,299 @@
     </a:ext>
   </a:extLst>
 </a:theme>
+</file>
+
+<file path=ppt/theme/theme2.xml><?xml version="1.0" encoding="utf-8"?>
+<a:theme xmlns:a="http://schemas.openxmlformats.org/drawingml/2006/main" name="Office 테마">
+  <a:themeElements>
+    <a:clrScheme name="Office">
+      <a:dk1>
+        <a:sysClr val="windowText" lastClr="000000"/>
+      </a:dk1>
+      <a:lt1>
+        <a:sysClr val="window" lastClr="FFFFFF"/>
+      </a:lt1>
+      <a:dk2>
+        <a:srgbClr val="44546A"/>
+      </a:dk2>
+      <a:lt2>
+        <a:srgbClr val="E7E6E6"/>
+      </a:lt2>
+      <a:accent1>
+        <a:srgbClr val="4472C4"/>
+      </a:accent1>
+      <a:accent2>
+        <a:srgbClr val="ED7D31"/>
+      </a:accent2>
+      <a:accent3>
+        <a:srgbClr val="A5A5A5"/>
+      </a:accent3>
+      <a:accent4>
+        <a:srgbClr val="FFC000"/>
+      </a:accent4>
+      <a:accent5>
+        <a:srgbClr val="5B9BD5"/>
+      </a:accent5>
+      <a:accent6>
+        <a:srgbClr val="70AD47"/>
+      </a:accent6>
+      <a:hlink>
+        <a:srgbClr val="0563C1"/>
+      </a:hlink>
+      <a:folHlink>
+        <a:srgbClr val="954F72"/>
+      </a:folHlink>
+    </a:clrScheme>
+    <a:fontScheme name="Office">
+      <a:majorFont>
+        <a:latin typeface="맑은 고딕" panose="020F0302020204030204"/>
+        <a:ea typeface=""/>
+        <a:cs typeface=""/>
+        <a:font script="Jpan" typeface="游ゴシック Light"/>
+        <a:font script="Hang" typeface="맑은 고딕"/>
+        <a:font script="Hans" typeface="等线 Light"/>
+        <a:font script="Hant" typeface="新細明體"/>
+        <a:font script="Arab" typeface="Times New Roman"/>
+        <a:font script="Hebr" typeface="Times New Roman"/>
+        <a:font script="Thai" typeface="Angsana New"/>
+        <a:font script="Ethi" typeface="Nyala"/>
+        <a:font script="Beng" typeface="Vrinda"/>
+        <a:font script="Gujr" typeface="Shruti"/>
+        <a:font script="Khmr" typeface="MoolBoran"/>
+        <a:font script="Knda" typeface="Tunga"/>
+        <a:font script="Guru" typeface="Raavi"/>
+        <a:font script="Cans" typeface="Euphemia"/>
+        <a:font script="Cher" typeface="Plantagenet Cherokee"/>
+        <a:font script="Yiii" typeface="Microsoft Yi Baiti"/>
+        <a:font script="Tibt" typeface="Microsoft Himalaya"/>
+        <a:font script="Thaa" typeface="MV Boli"/>
+        <a:font script="Deva" typeface="Mangal"/>
+        <a:font script="Telu" typeface="Gautami"/>
+        <a:font script="Taml" typeface="Latha"/>
+        <a:font script="Syrc" typeface="Estrangelo Edessa"/>
+        <a:font script="Orya" typeface="Kalinga"/>
+        <a:font script="Mlym" typeface="Kartika"/>
+        <a:font script="Laoo" typeface="DokChampa"/>
+        <a:font script="Sinh" typeface="Iskoola Pota"/>
+        <a:font script="Mong" typeface="Mongolian Baiti"/>
+        <a:font script="Viet" typeface="Times New Roman"/>
+        <a:font script="Uigh" typeface="Microsoft Uighur"/>
+        <a:font script="Geor" typeface="Sylfaen"/>
+        <a:font script="Armn" typeface="Arial"/>
+        <a:font script="Bugi" typeface="Leelawadee UI"/>
+        <a:font script="Bopo" typeface="Microsoft JhengHei"/>
+        <a:font script="Java" typeface="Javanese Text"/>
+        <a:font script="Lisu" typeface="Segoe UI"/>
+        <a:font script="Mymr" typeface="Myanmar Text"/>
+        <a:font script="Nkoo" typeface="Ebrima"/>
+        <a:font script="Olck" typeface="Nirmala UI"/>
+        <a:font script="Osma" typeface="Ebrima"/>
+        <a:font script="Phag" typeface="Phagspa"/>
+        <a:font script="Syrn" typeface="Estrangelo Edessa"/>
+        <a:font script="Syrj" typeface="Estrangelo Edessa"/>
+        <a:font script="Syre" typeface="Estrangelo Edessa"/>
+        <a:font script="Sora" typeface="Nirmala UI"/>
+        <a:font script="Tale" typeface="Microsoft Tai Le"/>
+        <a:font script="Talu" typeface="Microsoft New Tai Lue"/>
+        <a:font script="Tfng" typeface="Ebrima"/>
+      </a:majorFont>
+      <a:minorFont>
+        <a:latin typeface="맑은 고딕" panose="020F0502020204030204"/>
+        <a:ea typeface=""/>
+        <a:cs typeface=""/>
+        <a:font script="Jpan" typeface="游ゴシック"/>
+        <a:font script="Hang" typeface="맑은 고딕"/>
+        <a:font script="Hans" typeface="等线"/>
+        <a:font script="Hant" typeface="新細明體"/>
+        <a:font script="Arab" typeface="Arial"/>
+        <a:font script="Hebr" typeface="Arial"/>
+        <a:font script="Thai" typeface="Cordia New"/>
+        <a:font script="Ethi" typeface="Nyala"/>
+        <a:font script="Beng" typeface="Vrinda"/>
+        <a:font script="Gujr" typeface="Shruti"/>
+        <a:font script="Khmr" typeface="DaunPenh"/>
+        <a:font script="Knda" typeface="Tunga"/>
+        <a:font script="Guru" typeface="Raavi"/>
+        <a:font script="Cans" typeface="Euphemia"/>
+        <a:font script="Cher" typeface="Plantagenet Cherokee"/>
+        <a:font script="Yiii" typeface="Microsoft Yi Baiti"/>
+        <a:font script="Tibt" typeface="Microsoft Himalaya"/>
+        <a:font script="Thaa" typeface="MV Boli"/>
+        <a:font script="Deva" typeface="Mangal"/>
+        <a:font script="Telu" typeface="Gautami"/>
+        <a:font script="Taml" typeface="Latha"/>
+        <a:font script="Syrc" typeface="Estrangelo Edessa"/>
+        <a:font script="Orya" typeface="Kalinga"/>
+        <a:font script="Mlym" typeface="Kartika"/>
+        <a:font script="Laoo" typeface="DokChampa"/>
+        <a:font script="Sinh" typeface="Iskoola Pota"/>
+        <a:font script="Mong" typeface="Mongolian Baiti"/>
+        <a:font script="Viet" typeface="Arial"/>
+        <a:font script="Uigh" typeface="Microsoft Uighur"/>
+        <a:font script="Geor" typeface="Sylfaen"/>
+        <a:font script="Armn" typeface="Arial"/>
+        <a:font script="Bugi" typeface="Leelawadee UI"/>
+        <a:font script="Bopo" typeface="Microsoft JhengHei"/>
+        <a:font script="Java" typeface="Javanese Text"/>
+        <a:font script="Lisu" typeface="Segoe UI"/>
+        <a:font script="Mymr" typeface="Myanmar Text"/>
+        <a:font script="Nkoo" typeface="Ebrima"/>
+        <a:font script="Olck" typeface="Nirmala UI"/>
+        <a:font script="Osma" typeface="Ebrima"/>
+        <a:font script="Phag" typeface="Phagspa"/>
+        <a:font script="Syrn" typeface="Estrangelo Edessa"/>
+        <a:font script="Syrj" typeface="Estrangelo Edessa"/>
+        <a:font script="Syre" typeface="Estrangelo Edessa"/>
+        <a:font script="Sora" typeface="Nirmala UI"/>
+        <a:font script="Tale" typeface="Microsoft Tai Le"/>
+        <a:font script="Talu" typeface="Microsoft New Tai Lue"/>
+        <a:font script="Tfng" typeface="Ebrima"/>
+      </a:minorFont>
+    </a:fontScheme>
+    <a:fmtScheme name="Office">
+      <a:fillStyleLst>
+        <a:solidFill>
+          <a:schemeClr val="phClr"/>
+        </a:solidFill>
+        <a:gradFill rotWithShape="1">
+          <a:gsLst>
+            <a:gs pos="0">
+              <a:schemeClr val="phClr">
+                <a:lumMod val="110000"/>
+                <a:satMod val="105000"/>
+                <a:tint val="67000"/>
+              </a:schemeClr>
+            </a:gs>
+            <a:gs pos="50000">
+              <a:schemeClr val="phClr">
+                <a:lumMod val="105000"/>
+                <a:satMod val="103000"/>
+                <a:tint val="73000"/>
+              </a:schemeClr>
+            </a:gs>
+            <a:gs pos="100000">
+              <a:schemeClr val="phClr">
+                <a:lumMod val="105000"/>
+                <a:satMod val="109000"/>
+                <a:tint val="81000"/>
+              </a:schemeClr>
+            </a:gs>
+          </a:gsLst>
+          <a:lin ang="5400000" scaled="0"/>
+        </a:gradFill>
+        <a:gradFill rotWithShape="1">
+          <a:gsLst>
+            <a:gs pos="0">
+              <a:schemeClr val="phClr">
+                <a:satMod val="103000"/>
+                <a:lumMod val="102000"/>
+                <a:tint val="94000"/>
+              </a:schemeClr>
+            </a:gs>
+            <a:gs pos="50000">
+              <a:schemeClr val="phClr">
+                <a:satMod val="110000"/>
+                <a:lumMod val="100000"/>
+                <a:shade val="100000"/>
+              </a:schemeClr>
+            </a:gs>
+            <a:gs pos="100000">
+              <a:schemeClr val="phClr">
+                <a:lumMod val="99000"/>
+                <a:satMod val="120000"/>
+                <a:shade val="78000"/>
+              </a:schemeClr>
+            </a:gs>
+          </a:gsLst>
+          <a:lin ang="5400000" scaled="0"/>
+        </a:gradFill>
+      </a:fillStyleLst>
+      <a:lnStyleLst>
+        <a:ln w="6350" cap="flat" cmpd="sng" algn="ctr">
+          <a:solidFill>
+            <a:schemeClr val="phClr"/>
+          </a:solidFill>
+          <a:prstDash val="solid"/>
+          <a:miter lim="800000"/>
+        </a:ln>
+        <a:ln w="12700" cap="flat" cmpd="sng" algn="ctr">
+          <a:solidFill>
+            <a:schemeClr val="phClr"/>
+          </a:solidFill>
+          <a:prstDash val="solid"/>
+          <a:miter lim="800000"/>
+        </a:ln>
+        <a:ln w="19050" cap="flat" cmpd="sng" algn="ctr">
+          <a:solidFill>
+            <a:schemeClr val="phClr"/>
+          </a:solidFill>
+          <a:prstDash val="solid"/>
+          <a:miter lim="800000"/>
+        </a:ln>
+      </a:lnStyleLst>
+      <a:effectStyleLst>
+        <a:effectStyle>
+          <a:effectLst/>
+        </a:effectStyle>
+        <a:effectStyle>
+          <a:effectLst/>
+        </a:effectStyle>
+        <a:effectStyle>
+          <a:effectLst>
+            <a:outerShdw blurRad="57150" dist="19050" dir="5400000" algn="ctr" rotWithShape="0">
+              <a:srgbClr val="000000">
+                <a:alpha val="63000"/>
+              </a:srgbClr>
+            </a:outerShdw>
+          </a:effectLst>
+        </a:effectStyle>
+      </a:effectStyleLst>
+      <a:bgFillStyleLst>
+        <a:solidFill>
+          <a:schemeClr val="phClr"/>
+        </a:solidFill>
+        <a:solidFill>
+          <a:schemeClr val="phClr">
+            <a:tint val="95000"/>
+            <a:satMod val="170000"/>
+          </a:schemeClr>
+        </a:solidFill>
+        <a:gradFill rotWithShape="1">
+          <a:gsLst>
+            <a:gs pos="0">
+              <a:schemeClr val="phClr">
+                <a:tint val="93000"/>
+                <a:satMod val="150000"/>
+                <a:shade val="98000"/>
+                <a:lumMod val="102000"/>
+              </a:schemeClr>
+            </a:gs>
+            <a:gs pos="50000">
+              <a:schemeClr val="phClr">
+                <a:tint val="98000"/>
+                <a:satMod val="130000"/>
+                <a:shade val="90000"/>
+                <a:lumMod val="103000"/>
+              </a:schemeClr>
+            </a:gs>
+            <a:gs pos="100000">
+              <a:schemeClr val="phClr">
+                <a:shade val="63000"/>
+                <a:satMod val="120000"/>
+              </a:schemeClr>
+            </a:gs>
+          </a:gsLst>
+          <a:lin ang="5400000" scaled="0"/>
+        </a:gradFill>
+      </a:bgFillStyleLst>
+    </a:fmtScheme>
+  </a:themeElements>
+  <a:objectDefaults/>
+  <a:extraClrSchemeLst/>
+  <a:extLst>
+    <a:ext uri="{05A4C25C-085E-4340-85A3-A5531E510DB2}">
+      <thm15:themeFamily xmlns:thm15="http://schemas.microsoft.com/office/thememl/2012/main" name="Office Theme" id="{62F939B6-93AF-4DB8-9C6B-D6C7DFDC589F}" vid="{4A3C46E8-61CC-4603-A589-7422A47A8E4A}"/>
+    </a:ext>
+  </a:extLst>
+</a:theme>
 </file>
--- a/Plan/기획서/땅부수기2026 ch2.pptx
+++ b/Plan/기획서/땅부수기2026 ch2.pptx
@@ -5,7 +5,7 @@
     <p:sldMasterId id="2147483648" r:id="rId1"/>
   </p:sldMasterIdLst>
   <p:notesMasterIdLst>
-    <p:notesMasterId r:id="rId13"/>
+    <p:notesMasterId r:id="rId15"/>
   </p:notesMasterIdLst>
   <p:sldIdLst>
     <p:sldId id="256" r:id="rId2"/>
@@ -19,6 +19,8 @@
     <p:sldId id="265" r:id="rId10"/>
     <p:sldId id="260" r:id="rId11"/>
     <p:sldId id="266" r:id="rId12"/>
+    <p:sldId id="267" r:id="rId13"/>
+    <p:sldId id="268" r:id="rId14"/>
   </p:sldIdLst>
   <p:sldSz cx="12192000" cy="6858000"/>
   <p:notesSz cx="6858000" cy="9144000"/>
@@ -207,7 +209,7 @@
           <a:p>
             <a:fld id="{543E24B9-7E34-44AC-84F3-4EDCA69811A9}" type="datetimeFigureOut">
               <a:rPr lang="ko-KR" altLang="en-US" smtClean="0"/>
-              <a:t>2026-05-26</a:t>
+              <a:t>2026-05-28</a:t>
             </a:fld>
             <a:endParaRPr lang="ko-KR" altLang="en-US"/>
           </a:p>
@@ -558,6 +560,222 @@
 </p:notes>
 </file>
 
+<file path=ppt/notesSlides/notesSlide2.xml><?xml version="1.0" encoding="utf-8"?>
+<p:notes xmlns:a="http://schemas.openxmlformats.org/drawingml/2006/main" xmlns:r="http://schemas.openxmlformats.org/officeDocument/2006/relationships" xmlns:p="http://schemas.openxmlformats.org/presentationml/2006/main">
+  <p:cSld>
+    <p:spTree>
+      <p:nvGrpSpPr>
+        <p:cNvPr id="1" name="">
+          <a:extLst>
+            <a:ext uri="{FF2B5EF4-FFF2-40B4-BE49-F238E27FC236}">
+              <a16:creationId xmlns:a16="http://schemas.microsoft.com/office/drawing/2014/main" id="{C72895FF-4C37-5809-5296-8A5DF3B85756}"/>
+            </a:ext>
+          </a:extLst>
+        </p:cNvPr>
+        <p:cNvGrpSpPr/>
+        <p:nvPr/>
+      </p:nvGrpSpPr>
+      <p:grpSpPr>
+        <a:xfrm>
+          <a:off x="0" y="0"/>
+          <a:ext cx="0" cy="0"/>
+          <a:chOff x="0" y="0"/>
+          <a:chExt cx="0" cy="0"/>
+        </a:xfrm>
+      </p:grpSpPr>
+      <p:sp>
+        <p:nvSpPr>
+          <p:cNvPr id="2" name="슬라이드 이미지 개체 틀 1">
+            <a:extLst>
+              <a:ext uri="{FF2B5EF4-FFF2-40B4-BE49-F238E27FC236}">
+                <a16:creationId xmlns:a16="http://schemas.microsoft.com/office/drawing/2014/main" id="{2A7586F9-0A3D-4775-9165-6243010975C9}"/>
+              </a:ext>
+            </a:extLst>
+          </p:cNvPr>
+          <p:cNvSpPr>
+            <a:spLocks noGrp="1" noRot="1" noChangeAspect="1"/>
+          </p:cNvSpPr>
+          <p:nvPr>
+            <p:ph type="sldImg"/>
+          </p:nvPr>
+        </p:nvSpPr>
+        <p:spPr/>
+      </p:sp>
+      <p:sp>
+        <p:nvSpPr>
+          <p:cNvPr id="3" name="슬라이드 노트 개체 틀 2">
+            <a:extLst>
+              <a:ext uri="{FF2B5EF4-FFF2-40B4-BE49-F238E27FC236}">
+                <a16:creationId xmlns:a16="http://schemas.microsoft.com/office/drawing/2014/main" id="{5066B9F8-FF40-3329-402F-05B1177E3464}"/>
+              </a:ext>
+            </a:extLst>
+          </p:cNvPr>
+          <p:cNvSpPr>
+            <a:spLocks noGrp="1"/>
+          </p:cNvSpPr>
+          <p:nvPr>
+            <p:ph type="body" idx="1"/>
+          </p:nvPr>
+        </p:nvSpPr>
+        <p:spPr/>
+        <p:txBody>
+          <a:bodyPr/>
+          <a:lstStyle/>
+          <a:p>
+            <a:endParaRPr lang="ko-KR" altLang="en-US" dirty="0"/>
+          </a:p>
+        </p:txBody>
+      </p:sp>
+      <p:sp>
+        <p:nvSpPr>
+          <p:cNvPr id="4" name="슬라이드 번호 개체 틀 3">
+            <a:extLst>
+              <a:ext uri="{FF2B5EF4-FFF2-40B4-BE49-F238E27FC236}">
+                <a16:creationId xmlns:a16="http://schemas.microsoft.com/office/drawing/2014/main" id="{40DD329A-340D-E835-EF90-0563FBA7309E}"/>
+              </a:ext>
+            </a:extLst>
+          </p:cNvPr>
+          <p:cNvSpPr>
+            <a:spLocks noGrp="1"/>
+          </p:cNvSpPr>
+          <p:nvPr>
+            <p:ph type="sldNum" sz="quarter" idx="5"/>
+          </p:nvPr>
+        </p:nvSpPr>
+        <p:spPr/>
+        <p:txBody>
+          <a:bodyPr/>
+          <a:lstStyle/>
+          <a:p>
+            <a:fld id="{2E0139E7-B41F-44EB-9691-265EF159DEB1}" type="slidenum">
+              <a:rPr lang="ko-KR" altLang="en-US" smtClean="0"/>
+              <a:t>12</a:t>
+            </a:fld>
+            <a:endParaRPr lang="ko-KR" altLang="en-US"/>
+          </a:p>
+        </p:txBody>
+      </p:sp>
+    </p:spTree>
+    <p:extLst>
+      <p:ext uri="{BB962C8B-B14F-4D97-AF65-F5344CB8AC3E}">
+        <p14:creationId xmlns:p14="http://schemas.microsoft.com/office/powerpoint/2010/main" val="4206799498"/>
+      </p:ext>
+    </p:extLst>
+  </p:cSld>
+  <p:clrMapOvr>
+    <a:masterClrMapping/>
+  </p:clrMapOvr>
+</p:notes>
+</file>
+
+<file path=ppt/notesSlides/notesSlide3.xml><?xml version="1.0" encoding="utf-8"?>
+<p:notes xmlns:a="http://schemas.openxmlformats.org/drawingml/2006/main" xmlns:r="http://schemas.openxmlformats.org/officeDocument/2006/relationships" xmlns:p="http://schemas.openxmlformats.org/presentationml/2006/main">
+  <p:cSld>
+    <p:spTree>
+      <p:nvGrpSpPr>
+        <p:cNvPr id="1" name="">
+          <a:extLst>
+            <a:ext uri="{FF2B5EF4-FFF2-40B4-BE49-F238E27FC236}">
+              <a16:creationId xmlns:a16="http://schemas.microsoft.com/office/drawing/2014/main" id="{083873AE-5298-4E83-4F63-71CCEE92AC62}"/>
+            </a:ext>
+          </a:extLst>
+        </p:cNvPr>
+        <p:cNvGrpSpPr/>
+        <p:nvPr/>
+      </p:nvGrpSpPr>
+      <p:grpSpPr>
+        <a:xfrm>
+          <a:off x="0" y="0"/>
+          <a:ext cx="0" cy="0"/>
+          <a:chOff x="0" y="0"/>
+          <a:chExt cx="0" cy="0"/>
+        </a:xfrm>
+      </p:grpSpPr>
+      <p:sp>
+        <p:nvSpPr>
+          <p:cNvPr id="2" name="슬라이드 이미지 개체 틀 1">
+            <a:extLst>
+              <a:ext uri="{FF2B5EF4-FFF2-40B4-BE49-F238E27FC236}">
+                <a16:creationId xmlns:a16="http://schemas.microsoft.com/office/drawing/2014/main" id="{FE18C6A1-FDAD-BB22-066C-AA30E44E2A7E}"/>
+              </a:ext>
+            </a:extLst>
+          </p:cNvPr>
+          <p:cNvSpPr>
+            <a:spLocks noGrp="1" noRot="1" noChangeAspect="1"/>
+          </p:cNvSpPr>
+          <p:nvPr>
+            <p:ph type="sldImg"/>
+          </p:nvPr>
+        </p:nvSpPr>
+        <p:spPr/>
+      </p:sp>
+      <p:sp>
+        <p:nvSpPr>
+          <p:cNvPr id="3" name="슬라이드 노트 개체 틀 2">
+            <a:extLst>
+              <a:ext uri="{FF2B5EF4-FFF2-40B4-BE49-F238E27FC236}">
+                <a16:creationId xmlns:a16="http://schemas.microsoft.com/office/drawing/2014/main" id="{330DA1FB-1AA9-DD53-2ED0-469AC3D21A93}"/>
+              </a:ext>
+            </a:extLst>
+          </p:cNvPr>
+          <p:cNvSpPr>
+            <a:spLocks noGrp="1"/>
+          </p:cNvSpPr>
+          <p:nvPr>
+            <p:ph type="body" idx="1"/>
+          </p:nvPr>
+        </p:nvSpPr>
+        <p:spPr/>
+        <p:txBody>
+          <a:bodyPr/>
+          <a:lstStyle/>
+          <a:p>
+            <a:endParaRPr lang="ko-KR" altLang="en-US" dirty="0"/>
+          </a:p>
+        </p:txBody>
+      </p:sp>
+      <p:sp>
+        <p:nvSpPr>
+          <p:cNvPr id="4" name="슬라이드 번호 개체 틀 3">
+            <a:extLst>
+              <a:ext uri="{FF2B5EF4-FFF2-40B4-BE49-F238E27FC236}">
+                <a16:creationId xmlns:a16="http://schemas.microsoft.com/office/drawing/2014/main" id="{4B9E61C4-1C84-89F4-0796-2840EB7DB2CD}"/>
+              </a:ext>
+            </a:extLst>
+          </p:cNvPr>
+          <p:cNvSpPr>
+            <a:spLocks noGrp="1"/>
+          </p:cNvSpPr>
+          <p:nvPr>
+            <p:ph type="sldNum" sz="quarter" idx="5"/>
+          </p:nvPr>
+        </p:nvSpPr>
+        <p:spPr/>
+        <p:txBody>
+          <a:bodyPr/>
+          <a:lstStyle/>
+          <a:p>
+            <a:fld id="{2E0139E7-B41F-44EB-9691-265EF159DEB1}" type="slidenum">
+              <a:rPr lang="ko-KR" altLang="en-US" smtClean="0"/>
+              <a:t>13</a:t>
+            </a:fld>
+            <a:endParaRPr lang="ko-KR" altLang="en-US"/>
+          </a:p>
+        </p:txBody>
+      </p:sp>
+    </p:spTree>
+    <p:extLst>
+      <p:ext uri="{BB962C8B-B14F-4D97-AF65-F5344CB8AC3E}">
+        <p14:creationId xmlns:p14="http://schemas.microsoft.com/office/powerpoint/2010/main" val="1476563135"/>
+      </p:ext>
+    </p:extLst>
+  </p:cSld>
+  <p:clrMapOvr>
+    <a:masterClrMapping/>
+  </p:clrMapOvr>
+</p:notes>
+</file>
+
 <file path=ppt/slideLayouts/slideLayout1.xml><?xml version="1.0" encoding="utf-8"?>
 <p:sldLayout xmlns:a="http://schemas.openxmlformats.org/drawingml/2006/main" xmlns:r="http://schemas.openxmlformats.org/officeDocument/2006/relationships" xmlns:p="http://schemas.openxmlformats.org/presentationml/2006/main" type="title" preserve="1">
   <p:cSld name="제목 슬라이드">
@@ -705,7 +923,7 @@
           <a:p>
             <a:fld id="{C6FDF62A-CEF3-4A4B-9978-8C575DC3A030}" type="datetimeFigureOut">
               <a:rPr lang="ko-KR" altLang="en-US" smtClean="0"/>
-              <a:t>2026-05-26</a:t>
+              <a:t>2026-05-28</a:t>
             </a:fld>
             <a:endParaRPr lang="ko-KR" altLang="en-US"/>
           </a:p>
@@ -903,7 +1121,7 @@
           <a:p>
             <a:fld id="{C6FDF62A-CEF3-4A4B-9978-8C575DC3A030}" type="datetimeFigureOut">
               <a:rPr lang="ko-KR" altLang="en-US" smtClean="0"/>
-              <a:t>2026-05-26</a:t>
+              <a:t>2026-05-28</a:t>
             </a:fld>
             <a:endParaRPr lang="ko-KR" altLang="en-US"/>
           </a:p>
@@ -1111,7 +1329,7 @@
           <a:p>
             <a:fld id="{C6FDF62A-CEF3-4A4B-9978-8C575DC3A030}" type="datetimeFigureOut">
               <a:rPr lang="ko-KR" altLang="en-US" smtClean="0"/>
-              <a:t>2026-05-26</a:t>
+              <a:t>2026-05-28</a:t>
             </a:fld>
             <a:endParaRPr lang="ko-KR" altLang="en-US"/>
           </a:p>
@@ -1309,7 +1527,7 @@
           <a:p>
             <a:fld id="{C6FDF62A-CEF3-4A4B-9978-8C575DC3A030}" type="datetimeFigureOut">
               <a:rPr lang="ko-KR" altLang="en-US" smtClean="0"/>
-              <a:t>2026-05-26</a:t>
+              <a:t>2026-05-28</a:t>
             </a:fld>
             <a:endParaRPr lang="ko-KR" altLang="en-US"/>
           </a:p>
@@ -1584,7 +1802,7 @@
           <a:p>
             <a:fld id="{C6FDF62A-CEF3-4A4B-9978-8C575DC3A030}" type="datetimeFigureOut">
               <a:rPr lang="ko-KR" altLang="en-US" smtClean="0"/>
-              <a:t>2026-05-26</a:t>
+              <a:t>2026-05-28</a:t>
             </a:fld>
             <a:endParaRPr lang="ko-KR" altLang="en-US"/>
           </a:p>
@@ -1849,7 +2067,7 @@
           <a:p>
             <a:fld id="{C6FDF62A-CEF3-4A4B-9978-8C575DC3A030}" type="datetimeFigureOut">
               <a:rPr lang="ko-KR" altLang="en-US" smtClean="0"/>
-              <a:t>2026-05-26</a:t>
+              <a:t>2026-05-28</a:t>
             </a:fld>
             <a:endParaRPr lang="ko-KR" altLang="en-US"/>
           </a:p>
@@ -2261,7 +2479,7 @@
           <a:p>
             <a:fld id="{C6FDF62A-CEF3-4A4B-9978-8C575DC3A030}" type="datetimeFigureOut">
               <a:rPr lang="ko-KR" altLang="en-US" smtClean="0"/>
-              <a:t>2026-05-26</a:t>
+              <a:t>2026-05-28</a:t>
             </a:fld>
             <a:endParaRPr lang="ko-KR" altLang="en-US"/>
           </a:p>
@@ -2402,7 +2620,7 @@
           <a:p>
             <a:fld id="{C6FDF62A-CEF3-4A4B-9978-8C575DC3A030}" type="datetimeFigureOut">
               <a:rPr lang="ko-KR" altLang="en-US" smtClean="0"/>
-              <a:t>2026-05-26</a:t>
+              <a:t>2026-05-28</a:t>
             </a:fld>
             <a:endParaRPr lang="ko-KR" altLang="en-US"/>
           </a:p>
@@ -2515,7 +2733,7 @@
           <a:p>
             <a:fld id="{C6FDF62A-CEF3-4A4B-9978-8C575DC3A030}" type="datetimeFigureOut">
               <a:rPr lang="ko-KR" altLang="en-US" smtClean="0"/>
-              <a:t>2026-05-26</a:t>
+              <a:t>2026-05-28</a:t>
             </a:fld>
             <a:endParaRPr lang="ko-KR" altLang="en-US"/>
           </a:p>
@@ -2826,7 +3044,7 @@
           <a:p>
             <a:fld id="{C6FDF62A-CEF3-4A4B-9978-8C575DC3A030}" type="datetimeFigureOut">
               <a:rPr lang="ko-KR" altLang="en-US" smtClean="0"/>
-              <a:t>2026-05-26</a:t>
+              <a:t>2026-05-28</a:t>
             </a:fld>
             <a:endParaRPr lang="ko-KR" altLang="en-US"/>
           </a:p>
@@ -3114,7 +3332,7 @@
           <a:p>
             <a:fld id="{C6FDF62A-CEF3-4A4B-9978-8C575DC3A030}" type="datetimeFigureOut">
               <a:rPr lang="ko-KR" altLang="en-US" smtClean="0"/>
-              <a:t>2026-05-26</a:t>
+              <a:t>2026-05-28</a:t>
             </a:fld>
             <a:endParaRPr lang="ko-KR" altLang="en-US"/>
           </a:p>
@@ -3355,7 +3573,7 @@
           <a:p>
             <a:fld id="{C6FDF62A-CEF3-4A4B-9978-8C575DC3A030}" type="datetimeFigureOut">
               <a:rPr lang="ko-KR" altLang="en-US" smtClean="0"/>
-              <a:t>2026-05-26</a:t>
+              <a:t>2026-05-28</a:t>
             </a:fld>
             <a:endParaRPr lang="ko-KR" altLang="en-US"/>
           </a:p>
@@ -5685,10 +5903,3165 @@
           </a:p>
         </p:txBody>
       </p:sp>
+      <p:pic>
+        <p:nvPicPr>
+          <p:cNvPr id="6" name="그림 5">
+            <a:extLst>
+              <a:ext uri="{FF2B5EF4-FFF2-40B4-BE49-F238E27FC236}">
+                <a16:creationId xmlns:a16="http://schemas.microsoft.com/office/drawing/2014/main" id="{3F8EC50E-44DD-A5D3-E4A9-A81DA68DE5DC}"/>
+              </a:ext>
+            </a:extLst>
+          </p:cNvPr>
+          <p:cNvPicPr>
+            <a:picLocks noChangeAspect="1"/>
+          </p:cNvPicPr>
+          <p:nvPr/>
+        </p:nvPicPr>
+        <p:blipFill>
+          <a:blip r:embed="rId6">
+            <a:extLst>
+              <a:ext uri="{28A0092B-C50C-407E-A947-70E740481C1C}">
+                <a14:useLocalDpi xmlns:a14="http://schemas.microsoft.com/office/drawing/2010/main" val="0"/>
+              </a:ext>
+            </a:extLst>
+          </a:blip>
+          <a:stretch>
+            <a:fillRect/>
+          </a:stretch>
+        </p:blipFill>
+        <p:spPr>
+          <a:xfrm>
+            <a:off x="457204" y="572655"/>
+            <a:ext cx="281709" cy="281709"/>
+          </a:xfrm>
+          <a:prstGeom prst="rect">
+            <a:avLst/>
+          </a:prstGeom>
+        </p:spPr>
+      </p:pic>
     </p:spTree>
     <p:extLst>
       <p:ext uri="{BB962C8B-B14F-4D97-AF65-F5344CB8AC3E}">
         <p14:creationId xmlns:p14="http://schemas.microsoft.com/office/powerpoint/2010/main" val="255586243"/>
+      </p:ext>
+    </p:extLst>
+  </p:cSld>
+  <p:clrMapOvr>
+    <a:masterClrMapping/>
+  </p:clrMapOvr>
+</p:sld>
+</file>
+
+<file path=ppt/slides/slide12.xml><?xml version="1.0" encoding="utf-8"?>
+<p:sld xmlns:a="http://schemas.openxmlformats.org/drawingml/2006/main" xmlns:r="http://schemas.openxmlformats.org/officeDocument/2006/relationships" xmlns:p="http://schemas.openxmlformats.org/presentationml/2006/main">
+  <p:cSld>
+    <p:spTree>
+      <p:nvGrpSpPr>
+        <p:cNvPr id="1" name="">
+          <a:extLst>
+            <a:ext uri="{FF2B5EF4-FFF2-40B4-BE49-F238E27FC236}">
+              <a16:creationId xmlns:a16="http://schemas.microsoft.com/office/drawing/2014/main" id="{FE490A43-7337-358A-5DAB-E945E5921F37}"/>
+            </a:ext>
+          </a:extLst>
+        </p:cNvPr>
+        <p:cNvGrpSpPr/>
+        <p:nvPr/>
+      </p:nvGrpSpPr>
+      <p:grpSpPr>
+        <a:xfrm>
+          <a:off x="0" y="0"/>
+          <a:ext cx="0" cy="0"/>
+          <a:chOff x="0" y="0"/>
+          <a:chExt cx="0" cy="0"/>
+        </a:xfrm>
+      </p:grpSpPr>
+      <p:sp>
+        <p:nvSpPr>
+          <p:cNvPr id="3" name="TextBox 2">
+            <a:extLst>
+              <a:ext uri="{FF2B5EF4-FFF2-40B4-BE49-F238E27FC236}">
+                <a16:creationId xmlns:a16="http://schemas.microsoft.com/office/drawing/2014/main" id="{85001250-F8B1-3BE1-D5A8-2BB2B5B3347F}"/>
+              </a:ext>
+            </a:extLst>
+          </p:cNvPr>
+          <p:cNvSpPr txBox="1"/>
+          <p:nvPr/>
+        </p:nvSpPr>
+        <p:spPr>
+          <a:xfrm>
+            <a:off x="715820" y="572655"/>
+            <a:ext cx="10367818" cy="369332"/>
+          </a:xfrm>
+          <a:prstGeom prst="rect">
+            <a:avLst/>
+          </a:prstGeom>
+          <a:noFill/>
+        </p:spPr>
+        <p:txBody>
+          <a:bodyPr wrap="square" rtlCol="0">
+            <a:spAutoFit/>
+          </a:bodyPr>
+          <a:lstStyle/>
+          <a:p>
+            <a:r>
+              <a:rPr lang="ko-KR" altLang="en-US" b="1" dirty="0"/>
+              <a:t>카드 강화</a:t>
+            </a:r>
+            <a:endParaRPr lang="en-US" altLang="ko-KR" dirty="0"/>
+          </a:p>
+        </p:txBody>
+      </p:sp>
+      <p:sp>
+        <p:nvSpPr>
+          <p:cNvPr id="4" name="TextBox 3">
+            <a:extLst>
+              <a:ext uri="{FF2B5EF4-FFF2-40B4-BE49-F238E27FC236}">
+                <a16:creationId xmlns:a16="http://schemas.microsoft.com/office/drawing/2014/main" id="{766EF36C-4980-4B96-BD48-C89991D28EF7}"/>
+              </a:ext>
+            </a:extLst>
+          </p:cNvPr>
+          <p:cNvSpPr txBox="1"/>
+          <p:nvPr/>
+        </p:nvSpPr>
+        <p:spPr>
+          <a:xfrm>
+            <a:off x="6216073" y="1007338"/>
+            <a:ext cx="5805054" cy="523220"/>
+          </a:xfrm>
+          <a:prstGeom prst="rect">
+            <a:avLst/>
+          </a:prstGeom>
+          <a:noFill/>
+        </p:spPr>
+        <p:txBody>
+          <a:bodyPr wrap="square" rtlCol="0">
+            <a:spAutoFit/>
+          </a:bodyPr>
+          <a:lstStyle/>
+          <a:p>
+            <a:r>
+              <a:rPr lang="ko-KR" altLang="en-US" sz="1400" dirty="0"/>
+              <a:t>보상</a:t>
+            </a:r>
+            <a:r>
+              <a:rPr lang="en-US" altLang="ko-KR" sz="1400" dirty="0"/>
+              <a:t>(</a:t>
+            </a:r>
+            <a:r>
+              <a:rPr lang="ko-KR" altLang="en-US" sz="1400" dirty="0"/>
+              <a:t>스테이지 클리어</a:t>
+            </a:r>
+            <a:r>
+              <a:rPr lang="en-US" altLang="ko-KR" sz="1400" dirty="0"/>
+              <a:t>/</a:t>
+            </a:r>
+            <a:r>
+              <a:rPr lang="ko-KR" altLang="en-US" sz="1400" dirty="0" err="1"/>
+              <a:t>카드팩</a:t>
+            </a:r>
+            <a:r>
+              <a:rPr lang="en-US" altLang="ko-KR" sz="1400" dirty="0"/>
+              <a:t>)</a:t>
+            </a:r>
+            <a:r>
+              <a:rPr lang="ko-KR" altLang="en-US" sz="1400" dirty="0"/>
+              <a:t>에서 카드 형태의 </a:t>
+            </a:r>
+            <a:r>
+              <a:rPr lang="en-US" altLang="ko-KR" sz="1400" dirty="0"/>
+              <a:t>‘</a:t>
+            </a:r>
+            <a:r>
+              <a:rPr lang="ko-KR" altLang="en-US" sz="1400" dirty="0"/>
+              <a:t>카드 강화</a:t>
+            </a:r>
+            <a:r>
+              <a:rPr lang="en-US" altLang="ko-KR" sz="1400" dirty="0"/>
+              <a:t>’</a:t>
+            </a:r>
+            <a:r>
+              <a:rPr lang="ko-KR" altLang="en-US" sz="1400" dirty="0"/>
+              <a:t>를 선택하고 넘어간 경우</a:t>
+            </a:r>
+            <a:r>
+              <a:rPr lang="en-US" altLang="ko-KR" sz="1400" dirty="0"/>
+              <a:t>, </a:t>
+            </a:r>
+            <a:r>
+              <a:rPr lang="ko-KR" altLang="en-US" sz="1400" dirty="0"/>
+              <a:t>혹은 상점 </a:t>
+            </a:r>
+            <a:r>
+              <a:rPr lang="en-US" altLang="ko-KR" sz="1400" dirty="0"/>
+              <a:t>limited</a:t>
+            </a:r>
+            <a:r>
+              <a:rPr lang="ko-KR" altLang="en-US" sz="1400" dirty="0"/>
+              <a:t>에서 </a:t>
+            </a:r>
+            <a:r>
+              <a:rPr lang="en-US" altLang="ko-KR" sz="1400" dirty="0"/>
+              <a:t>‘</a:t>
+            </a:r>
+            <a:r>
+              <a:rPr lang="ko-KR" altLang="en-US" sz="1400" dirty="0"/>
+              <a:t>카드 강화</a:t>
+            </a:r>
+            <a:r>
+              <a:rPr lang="en-US" altLang="ko-KR" sz="1400" dirty="0"/>
+              <a:t>’</a:t>
+            </a:r>
+            <a:r>
+              <a:rPr lang="ko-KR" altLang="en-US" sz="1400" dirty="0"/>
+              <a:t>를 구매한 경우</a:t>
+            </a:r>
+            <a:r>
+              <a:rPr lang="en-US" altLang="ko-KR" sz="1400" dirty="0"/>
+              <a:t> </a:t>
+            </a:r>
+            <a:r>
+              <a:rPr lang="ko-KR" altLang="en-US" sz="1400" dirty="0"/>
+              <a:t>진행</a:t>
+            </a:r>
+            <a:r>
+              <a:rPr lang="en-US" altLang="ko-KR" sz="1400" dirty="0"/>
+              <a:t>.</a:t>
+            </a:r>
+          </a:p>
+        </p:txBody>
+      </p:sp>
+      <p:pic>
+        <p:nvPicPr>
+          <p:cNvPr id="13" name="그림 12">
+            <a:extLst>
+              <a:ext uri="{FF2B5EF4-FFF2-40B4-BE49-F238E27FC236}">
+                <a16:creationId xmlns:a16="http://schemas.microsoft.com/office/drawing/2014/main" id="{87FD20C8-AA9C-F354-46C0-A7F46729F665}"/>
+              </a:ext>
+            </a:extLst>
+          </p:cNvPr>
+          <p:cNvPicPr>
+            <a:picLocks noChangeAspect="1"/>
+          </p:cNvPicPr>
+          <p:nvPr/>
+        </p:nvPicPr>
+        <p:blipFill>
+          <a:blip r:embed="rId3"/>
+          <a:stretch>
+            <a:fillRect/>
+          </a:stretch>
+        </p:blipFill>
+        <p:spPr>
+          <a:xfrm>
+            <a:off x="715820" y="1007338"/>
+            <a:ext cx="4525006" cy="2514951"/>
+          </a:xfrm>
+          <a:prstGeom prst="rect">
+            <a:avLst/>
+          </a:prstGeom>
+        </p:spPr>
+      </p:pic>
+      <p:pic>
+        <p:nvPicPr>
+          <p:cNvPr id="18" name="그림 17">
+            <a:extLst>
+              <a:ext uri="{FF2B5EF4-FFF2-40B4-BE49-F238E27FC236}">
+                <a16:creationId xmlns:a16="http://schemas.microsoft.com/office/drawing/2014/main" id="{D2F5FEAF-E7E8-F375-68A9-44205DAC4A2D}"/>
+              </a:ext>
+            </a:extLst>
+          </p:cNvPr>
+          <p:cNvPicPr>
+            <a:picLocks noChangeAspect="1"/>
+          </p:cNvPicPr>
+          <p:nvPr/>
+        </p:nvPicPr>
+        <p:blipFill>
+          <a:blip r:embed="rId4">
+            <a:extLst>
+              <a:ext uri="{28A0092B-C50C-407E-A947-70E740481C1C}">
+                <a14:useLocalDpi xmlns:a14="http://schemas.microsoft.com/office/drawing/2010/main" val="0"/>
+              </a:ext>
+            </a:extLst>
+          </a:blip>
+          <a:stretch>
+            <a:fillRect/>
+          </a:stretch>
+        </p:blipFill>
+        <p:spPr>
+          <a:xfrm>
+            <a:off x="4355579" y="1699835"/>
+            <a:ext cx="866775" cy="1143000"/>
+          </a:xfrm>
+          <a:prstGeom prst="rect">
+            <a:avLst/>
+          </a:prstGeom>
+        </p:spPr>
+      </p:pic>
+      <p:pic>
+        <p:nvPicPr>
+          <p:cNvPr id="23" name="그림 22">
+            <a:extLst>
+              <a:ext uri="{FF2B5EF4-FFF2-40B4-BE49-F238E27FC236}">
+                <a16:creationId xmlns:a16="http://schemas.microsoft.com/office/drawing/2014/main" id="{ABD9B786-5C11-826B-0821-B0A947A86922}"/>
+              </a:ext>
+            </a:extLst>
+          </p:cNvPr>
+          <p:cNvPicPr>
+            <a:picLocks noChangeAspect="1"/>
+          </p:cNvPicPr>
+          <p:nvPr/>
+        </p:nvPicPr>
+        <p:blipFill>
+          <a:blip r:embed="rId5">
+            <a:extLst>
+              <a:ext uri="{28A0092B-C50C-407E-A947-70E740481C1C}">
+                <a14:useLocalDpi xmlns:a14="http://schemas.microsoft.com/office/drawing/2010/main" val="0"/>
+              </a:ext>
+            </a:extLst>
+          </a:blip>
+          <a:stretch>
+            <a:fillRect/>
+          </a:stretch>
+        </p:blipFill>
+        <p:spPr>
+          <a:xfrm>
+            <a:off x="4660233" y="1888515"/>
+            <a:ext cx="262748" cy="262748"/>
+          </a:xfrm>
+          <a:prstGeom prst="rect">
+            <a:avLst/>
+          </a:prstGeom>
+        </p:spPr>
+      </p:pic>
+      <p:sp>
+        <p:nvSpPr>
+          <p:cNvPr id="24" name="직사각형 23">
+            <a:extLst>
+              <a:ext uri="{FF2B5EF4-FFF2-40B4-BE49-F238E27FC236}">
+                <a16:creationId xmlns:a16="http://schemas.microsoft.com/office/drawing/2014/main" id="{AD1DBAFA-F9C7-EFFF-60F3-4A96D41A6D44}"/>
+              </a:ext>
+            </a:extLst>
+          </p:cNvPr>
+          <p:cNvSpPr/>
+          <p:nvPr/>
+        </p:nvSpPr>
+        <p:spPr>
+          <a:xfrm>
+            <a:off x="4346343" y="1651106"/>
+            <a:ext cx="885247" cy="1210316"/>
+          </a:xfrm>
+          <a:prstGeom prst="rect">
+            <a:avLst/>
+          </a:prstGeom>
+          <a:noFill/>
+          <a:ln>
+            <a:solidFill>
+              <a:srgbClr val="FF0000"/>
+            </a:solidFill>
+          </a:ln>
+        </p:spPr>
+        <p:style>
+          <a:lnRef idx="2">
+            <a:schemeClr val="accent1">
+              <a:shade val="15000"/>
+            </a:schemeClr>
+          </a:lnRef>
+          <a:fillRef idx="1">
+            <a:schemeClr val="accent1"/>
+          </a:fillRef>
+          <a:effectRef idx="0">
+            <a:schemeClr val="accent1"/>
+          </a:effectRef>
+          <a:fontRef idx="minor">
+            <a:schemeClr val="lt1"/>
+          </a:fontRef>
+        </p:style>
+        <p:txBody>
+          <a:bodyPr rtlCol="0" anchor="ctr"/>
+          <a:lstStyle/>
+          <a:p>
+            <a:pPr algn="ctr"/>
+            <a:endParaRPr lang="ko-KR" altLang="en-US" b="1" dirty="0"/>
+          </a:p>
+        </p:txBody>
+      </p:sp>
+      <p:sp>
+        <p:nvSpPr>
+          <p:cNvPr id="25" name="직사각형 24">
+            <a:extLst>
+              <a:ext uri="{FF2B5EF4-FFF2-40B4-BE49-F238E27FC236}">
+                <a16:creationId xmlns:a16="http://schemas.microsoft.com/office/drawing/2014/main" id="{2EAD2B12-BB58-44A6-5546-3526028975E4}"/>
+              </a:ext>
+            </a:extLst>
+          </p:cNvPr>
+          <p:cNvSpPr/>
+          <p:nvPr/>
+        </p:nvSpPr>
+        <p:spPr>
+          <a:xfrm>
+            <a:off x="4451930" y="3260436"/>
+            <a:ext cx="687300" cy="187035"/>
+          </a:xfrm>
+          <a:prstGeom prst="rect">
+            <a:avLst/>
+          </a:prstGeom>
+          <a:noFill/>
+          <a:ln>
+            <a:solidFill>
+              <a:srgbClr val="FF0000"/>
+            </a:solidFill>
+          </a:ln>
+        </p:spPr>
+        <p:style>
+          <a:lnRef idx="2">
+            <a:schemeClr val="accent1">
+              <a:shade val="15000"/>
+            </a:schemeClr>
+          </a:lnRef>
+          <a:fillRef idx="1">
+            <a:schemeClr val="accent1"/>
+          </a:fillRef>
+          <a:effectRef idx="0">
+            <a:schemeClr val="accent1"/>
+          </a:effectRef>
+          <a:fontRef idx="minor">
+            <a:schemeClr val="lt1"/>
+          </a:fontRef>
+        </p:style>
+        <p:txBody>
+          <a:bodyPr rtlCol="0" anchor="ctr"/>
+          <a:lstStyle/>
+          <a:p>
+            <a:pPr algn="ctr"/>
+            <a:endParaRPr lang="ko-KR" altLang="en-US" b="1" dirty="0"/>
+          </a:p>
+        </p:txBody>
+      </p:sp>
+      <p:cxnSp>
+        <p:nvCxnSpPr>
+          <p:cNvPr id="26" name="직선 화살표 연결선 25">
+            <a:extLst>
+              <a:ext uri="{FF2B5EF4-FFF2-40B4-BE49-F238E27FC236}">
+                <a16:creationId xmlns:a16="http://schemas.microsoft.com/office/drawing/2014/main" id="{927EFE8F-6EBE-5A74-7ACD-78F6739D3320}"/>
+              </a:ext>
+            </a:extLst>
+          </p:cNvPr>
+          <p:cNvCxnSpPr>
+            <a:cxnSpLocks/>
+          </p:cNvCxnSpPr>
+          <p:nvPr/>
+        </p:nvCxnSpPr>
+        <p:spPr>
+          <a:xfrm>
+            <a:off x="4821381" y="2861422"/>
+            <a:ext cx="0" cy="399014"/>
+          </a:xfrm>
+          <a:prstGeom prst="straightConnector1">
+            <a:avLst/>
+          </a:prstGeom>
+          <a:ln>
+            <a:solidFill>
+              <a:srgbClr val="FF0000"/>
+            </a:solidFill>
+            <a:tailEnd type="triangle"/>
+          </a:ln>
+        </p:spPr>
+        <p:style>
+          <a:lnRef idx="2">
+            <a:schemeClr val="accent1"/>
+          </a:lnRef>
+          <a:fillRef idx="0">
+            <a:schemeClr val="accent1"/>
+          </a:fillRef>
+          <a:effectRef idx="1">
+            <a:schemeClr val="accent1"/>
+          </a:effectRef>
+          <a:fontRef idx="minor">
+            <a:schemeClr val="tx1"/>
+          </a:fontRef>
+        </p:style>
+      </p:cxnSp>
+      <p:cxnSp>
+        <p:nvCxnSpPr>
+          <p:cNvPr id="28" name="직선 화살표 연결선 27">
+            <a:extLst>
+              <a:ext uri="{FF2B5EF4-FFF2-40B4-BE49-F238E27FC236}">
+                <a16:creationId xmlns:a16="http://schemas.microsoft.com/office/drawing/2014/main" id="{A0B008E2-07C0-6F06-3BE7-A90B8908AD88}"/>
+              </a:ext>
+            </a:extLst>
+          </p:cNvPr>
+          <p:cNvCxnSpPr>
+            <a:cxnSpLocks/>
+          </p:cNvCxnSpPr>
+          <p:nvPr/>
+        </p:nvCxnSpPr>
+        <p:spPr>
+          <a:xfrm flipV="1">
+            <a:off x="5139230" y="1256145"/>
+            <a:ext cx="956770" cy="2066637"/>
+          </a:xfrm>
+          <a:prstGeom prst="straightConnector1">
+            <a:avLst/>
+          </a:prstGeom>
+          <a:ln>
+            <a:solidFill>
+              <a:srgbClr val="FF0000"/>
+            </a:solidFill>
+            <a:tailEnd type="triangle"/>
+          </a:ln>
+        </p:spPr>
+        <p:style>
+          <a:lnRef idx="2">
+            <a:schemeClr val="accent1"/>
+          </a:lnRef>
+          <a:fillRef idx="0">
+            <a:schemeClr val="accent1"/>
+          </a:fillRef>
+          <a:effectRef idx="1">
+            <a:schemeClr val="accent1"/>
+          </a:effectRef>
+          <a:fontRef idx="minor">
+            <a:schemeClr val="tx1"/>
+          </a:fontRef>
+        </p:style>
+      </p:cxnSp>
+      <p:pic>
+        <p:nvPicPr>
+          <p:cNvPr id="31" name="그림 30">
+            <a:extLst>
+              <a:ext uri="{FF2B5EF4-FFF2-40B4-BE49-F238E27FC236}">
+                <a16:creationId xmlns:a16="http://schemas.microsoft.com/office/drawing/2014/main" id="{500CCA21-174E-73D7-A16E-D215BB445330}"/>
+              </a:ext>
+            </a:extLst>
+          </p:cNvPr>
+          <p:cNvPicPr>
+            <a:picLocks noChangeAspect="1"/>
+          </p:cNvPicPr>
+          <p:nvPr/>
+        </p:nvPicPr>
+        <p:blipFill>
+          <a:blip r:embed="rId5">
+            <a:extLst>
+              <a:ext uri="{28A0092B-C50C-407E-A947-70E740481C1C}">
+                <a14:useLocalDpi xmlns:a14="http://schemas.microsoft.com/office/drawing/2010/main" val="0"/>
+              </a:ext>
+            </a:extLst>
+          </a:blip>
+          <a:stretch>
+            <a:fillRect/>
+          </a:stretch>
+        </p:blipFill>
+        <p:spPr>
+          <a:xfrm>
+            <a:off x="411142" y="581893"/>
+            <a:ext cx="304678" cy="304678"/>
+          </a:xfrm>
+          <a:prstGeom prst="rect">
+            <a:avLst/>
+          </a:prstGeom>
+        </p:spPr>
+      </p:pic>
+      <p:graphicFrame>
+        <p:nvGraphicFramePr>
+          <p:cNvPr id="39" name="개체 38">
+            <a:extLst>
+              <a:ext uri="{FF2B5EF4-FFF2-40B4-BE49-F238E27FC236}">
+                <a16:creationId xmlns:a16="http://schemas.microsoft.com/office/drawing/2014/main" id="{7A0BC1A8-BCCF-61DB-B20A-02C663B8FF8B}"/>
+              </a:ext>
+            </a:extLst>
+          </p:cNvPr>
+          <p:cNvGraphicFramePr>
+            <a:graphicFrameLocks noChangeAspect="1"/>
+          </p:cNvGraphicFramePr>
+          <p:nvPr>
+            <p:extLst>
+              <p:ext uri="{D42A27DB-BD31-4B8C-83A1-F6EECF244321}">
+                <p14:modId xmlns:p14="http://schemas.microsoft.com/office/powerpoint/2010/main" val="245405771"/>
+              </p:ext>
+            </p:extLst>
+          </p:nvPr>
+        </p:nvGraphicFramePr>
+        <p:xfrm>
+          <a:off x="6312249" y="1530558"/>
+          <a:ext cx="5163931" cy="2904711"/>
+        </p:xfrm>
+        <a:graphic>
+          <a:graphicData uri="http://schemas.openxmlformats.org/presentationml/2006/ole">
+            <mc:AlternateContent xmlns:mc="http://schemas.openxmlformats.org/markup-compatibility/2006">
+              <mc:Choice xmlns:v="urn:schemas-microsoft-com:vml" Requires="v">
+                <p:oleObj name="Image" r:id="rId6" imgW="25802844" imgH="14514195" progId="Photoshop.Image.26">
+                  <p:embed/>
+                </p:oleObj>
+              </mc:Choice>
+              <mc:Fallback>
+                <p:oleObj name="Image" r:id="rId6" imgW="25802844" imgH="14514195" progId="Photoshop.Image.26">
+                  <p:embed/>
+                  <p:pic>
+                    <p:nvPicPr>
+                      <p:cNvPr id="0" name=""/>
+                      <p:cNvPicPr/>
+                      <p:nvPr/>
+                    </p:nvPicPr>
+                    <p:blipFill>
+                      <a:blip r:embed="rId7"/>
+                      <a:stretch>
+                        <a:fillRect/>
+                      </a:stretch>
+                    </p:blipFill>
+                    <p:spPr>
+                      <a:xfrm>
+                        <a:off x="6312249" y="1530558"/>
+                        <a:ext cx="5163931" cy="2904711"/>
+                      </a:xfrm>
+                      <a:prstGeom prst="rect">
+                        <a:avLst/>
+                      </a:prstGeom>
+                    </p:spPr>
+                  </p:pic>
+                </p:oleObj>
+              </mc:Fallback>
+            </mc:AlternateContent>
+          </a:graphicData>
+        </a:graphic>
+      </p:graphicFrame>
+      <p:sp>
+        <p:nvSpPr>
+          <p:cNvPr id="41" name="직사각형 40">
+            <a:extLst>
+              <a:ext uri="{FF2B5EF4-FFF2-40B4-BE49-F238E27FC236}">
+                <a16:creationId xmlns:a16="http://schemas.microsoft.com/office/drawing/2014/main" id="{E2025A78-4E4A-FFA5-64F4-F2AD385933B2}"/>
+              </a:ext>
+            </a:extLst>
+          </p:cNvPr>
+          <p:cNvSpPr/>
+          <p:nvPr/>
+        </p:nvSpPr>
+        <p:spPr>
+          <a:xfrm>
+            <a:off x="6410036" y="4013200"/>
+            <a:ext cx="377076" cy="318655"/>
+          </a:xfrm>
+          <a:prstGeom prst="rect">
+            <a:avLst/>
+          </a:prstGeom>
+          <a:noFill/>
+          <a:ln>
+            <a:solidFill>
+              <a:srgbClr val="FF0000"/>
+            </a:solidFill>
+          </a:ln>
+        </p:spPr>
+        <p:style>
+          <a:lnRef idx="2">
+            <a:schemeClr val="accent1">
+              <a:shade val="15000"/>
+            </a:schemeClr>
+          </a:lnRef>
+          <a:fillRef idx="1">
+            <a:schemeClr val="accent1"/>
+          </a:fillRef>
+          <a:effectRef idx="0">
+            <a:schemeClr val="accent1"/>
+          </a:effectRef>
+          <a:fontRef idx="minor">
+            <a:schemeClr val="lt1"/>
+          </a:fontRef>
+        </p:style>
+        <p:txBody>
+          <a:bodyPr rtlCol="0" anchor="ctr"/>
+          <a:lstStyle/>
+          <a:p>
+            <a:pPr algn="ctr"/>
+            <a:endParaRPr lang="ko-KR" altLang="en-US" b="1" dirty="0"/>
+          </a:p>
+        </p:txBody>
+      </p:sp>
+      <p:cxnSp>
+        <p:nvCxnSpPr>
+          <p:cNvPr id="45" name="직선 화살표 연결선 44">
+            <a:extLst>
+              <a:ext uri="{FF2B5EF4-FFF2-40B4-BE49-F238E27FC236}">
+                <a16:creationId xmlns:a16="http://schemas.microsoft.com/office/drawing/2014/main" id="{8B1C031F-E3B1-AE22-1104-0EB5882931A0}"/>
+              </a:ext>
+            </a:extLst>
+          </p:cNvPr>
+          <p:cNvCxnSpPr/>
+          <p:nvPr/>
+        </p:nvCxnSpPr>
+        <p:spPr>
+          <a:xfrm flipH="1">
+            <a:off x="5975927" y="4165600"/>
+            <a:ext cx="336322" cy="0"/>
+          </a:xfrm>
+          <a:prstGeom prst="straightConnector1">
+            <a:avLst/>
+          </a:prstGeom>
+          <a:ln>
+            <a:solidFill>
+              <a:srgbClr val="FF0000"/>
+            </a:solidFill>
+            <a:headEnd type="triangle"/>
+            <a:tailEnd type="triangle"/>
+          </a:ln>
+        </p:spPr>
+        <p:style>
+          <a:lnRef idx="2">
+            <a:schemeClr val="accent1"/>
+          </a:lnRef>
+          <a:fillRef idx="0">
+            <a:schemeClr val="accent1"/>
+          </a:fillRef>
+          <a:effectRef idx="1">
+            <a:schemeClr val="accent1"/>
+          </a:effectRef>
+          <a:fontRef idx="minor">
+            <a:schemeClr val="tx1"/>
+          </a:fontRef>
+        </p:style>
+      </p:cxnSp>
+      <p:pic>
+        <p:nvPicPr>
+          <p:cNvPr id="47" name="그림 46">
+            <a:extLst>
+              <a:ext uri="{FF2B5EF4-FFF2-40B4-BE49-F238E27FC236}">
+                <a16:creationId xmlns:a16="http://schemas.microsoft.com/office/drawing/2014/main" id="{DE459BD1-DF1B-C3A2-B390-9547BF0D1CD9}"/>
+              </a:ext>
+            </a:extLst>
+          </p:cNvPr>
+          <p:cNvPicPr>
+            <a:picLocks noChangeAspect="1"/>
+          </p:cNvPicPr>
+          <p:nvPr/>
+        </p:nvPicPr>
+        <p:blipFill>
+          <a:blip r:embed="rId8">
+            <a:extLst>
+              <a:ext uri="{28A0092B-C50C-407E-A947-70E740481C1C}">
+                <a14:useLocalDpi xmlns:a14="http://schemas.microsoft.com/office/drawing/2010/main" val="0"/>
+              </a:ext>
+            </a:extLst>
+          </a:blip>
+          <a:stretch>
+            <a:fillRect/>
+          </a:stretch>
+        </p:blipFill>
+        <p:spPr>
+          <a:xfrm>
+            <a:off x="5731277" y="4072514"/>
+            <a:ext cx="171450" cy="200025"/>
+          </a:xfrm>
+          <a:prstGeom prst="rect">
+            <a:avLst/>
+          </a:prstGeom>
+        </p:spPr>
+      </p:pic>
+      <p:sp>
+        <p:nvSpPr>
+          <p:cNvPr id="48" name="TextBox 47">
+            <a:extLst>
+              <a:ext uri="{FF2B5EF4-FFF2-40B4-BE49-F238E27FC236}">
+                <a16:creationId xmlns:a16="http://schemas.microsoft.com/office/drawing/2014/main" id="{1495E968-9E04-FAFB-72E5-4A49C7880597}"/>
+              </a:ext>
+            </a:extLst>
+          </p:cNvPr>
+          <p:cNvSpPr txBox="1"/>
+          <p:nvPr/>
+        </p:nvSpPr>
+        <p:spPr>
+          <a:xfrm>
+            <a:off x="2136771" y="4024078"/>
+            <a:ext cx="3680231" cy="307777"/>
+          </a:xfrm>
+          <a:prstGeom prst="rect">
+            <a:avLst/>
+          </a:prstGeom>
+          <a:noFill/>
+        </p:spPr>
+        <p:txBody>
+          <a:bodyPr wrap="square" rtlCol="0">
+            <a:spAutoFit/>
+          </a:bodyPr>
+          <a:lstStyle/>
+          <a:p>
+            <a:r>
+              <a:rPr lang="ko-KR" altLang="en-US" sz="1400" dirty="0"/>
+              <a:t>유물 포함해서 덱 전체 보러 갔다 오기 기능</a:t>
+            </a:r>
+            <a:endParaRPr lang="en-US" altLang="ko-KR" sz="1400" dirty="0"/>
+          </a:p>
+        </p:txBody>
+      </p:sp>
+      <p:pic>
+        <p:nvPicPr>
+          <p:cNvPr id="50" name="그림 49">
+            <a:extLst>
+              <a:ext uri="{FF2B5EF4-FFF2-40B4-BE49-F238E27FC236}">
+                <a16:creationId xmlns:a16="http://schemas.microsoft.com/office/drawing/2014/main" id="{18D14741-654C-000A-4955-D392AACD4E79}"/>
+              </a:ext>
+            </a:extLst>
+          </p:cNvPr>
+          <p:cNvPicPr>
+            <a:picLocks noChangeAspect="1"/>
+          </p:cNvPicPr>
+          <p:nvPr/>
+        </p:nvPicPr>
+        <p:blipFill>
+          <a:blip r:embed="rId9">
+            <a:extLst>
+              <a:ext uri="{28A0092B-C50C-407E-A947-70E740481C1C}">
+                <a14:useLocalDpi xmlns:a14="http://schemas.microsoft.com/office/drawing/2010/main" val="0"/>
+              </a:ext>
+            </a:extLst>
+          </a:blip>
+          <a:stretch>
+            <a:fillRect/>
+          </a:stretch>
+        </p:blipFill>
+        <p:spPr>
+          <a:xfrm>
+            <a:off x="10902663" y="4129664"/>
+            <a:ext cx="361950" cy="142875"/>
+          </a:xfrm>
+          <a:prstGeom prst="rect">
+            <a:avLst/>
+          </a:prstGeom>
+        </p:spPr>
+      </p:pic>
+      <p:sp>
+        <p:nvSpPr>
+          <p:cNvPr id="51" name="직사각형 50">
+            <a:extLst>
+              <a:ext uri="{FF2B5EF4-FFF2-40B4-BE49-F238E27FC236}">
+                <a16:creationId xmlns:a16="http://schemas.microsoft.com/office/drawing/2014/main" id="{5B4F2B76-99C8-B2F4-BFF8-46B58FE8B9A3}"/>
+              </a:ext>
+            </a:extLst>
+          </p:cNvPr>
+          <p:cNvSpPr/>
+          <p:nvPr/>
+        </p:nvSpPr>
+        <p:spPr>
+          <a:xfrm>
+            <a:off x="10778836" y="4072514"/>
+            <a:ext cx="557557" cy="271686"/>
+          </a:xfrm>
+          <a:prstGeom prst="rect">
+            <a:avLst/>
+          </a:prstGeom>
+          <a:noFill/>
+          <a:ln>
+            <a:solidFill>
+              <a:srgbClr val="FF0000"/>
+            </a:solidFill>
+          </a:ln>
+        </p:spPr>
+        <p:style>
+          <a:lnRef idx="2">
+            <a:schemeClr val="accent1">
+              <a:shade val="15000"/>
+            </a:schemeClr>
+          </a:lnRef>
+          <a:fillRef idx="1">
+            <a:schemeClr val="accent1"/>
+          </a:fillRef>
+          <a:effectRef idx="0">
+            <a:schemeClr val="accent1"/>
+          </a:effectRef>
+          <a:fontRef idx="minor">
+            <a:schemeClr val="lt1"/>
+          </a:fontRef>
+        </p:style>
+        <p:txBody>
+          <a:bodyPr rtlCol="0" anchor="ctr"/>
+          <a:lstStyle/>
+          <a:p>
+            <a:pPr algn="ctr"/>
+            <a:endParaRPr lang="ko-KR" altLang="en-US" b="1" dirty="0"/>
+          </a:p>
+        </p:txBody>
+      </p:sp>
+      <p:cxnSp>
+        <p:nvCxnSpPr>
+          <p:cNvPr id="52" name="직선 화살표 연결선 51">
+            <a:extLst>
+              <a:ext uri="{FF2B5EF4-FFF2-40B4-BE49-F238E27FC236}">
+                <a16:creationId xmlns:a16="http://schemas.microsoft.com/office/drawing/2014/main" id="{4D1FEED0-6D75-5187-583B-53B799052591}"/>
+              </a:ext>
+            </a:extLst>
+          </p:cNvPr>
+          <p:cNvCxnSpPr>
+            <a:cxnSpLocks/>
+          </p:cNvCxnSpPr>
+          <p:nvPr/>
+        </p:nvCxnSpPr>
+        <p:spPr>
+          <a:xfrm>
+            <a:off x="11044785" y="4331855"/>
+            <a:ext cx="0" cy="995587"/>
+          </a:xfrm>
+          <a:prstGeom prst="straightConnector1">
+            <a:avLst/>
+          </a:prstGeom>
+          <a:ln>
+            <a:solidFill>
+              <a:srgbClr val="FF0000"/>
+            </a:solidFill>
+            <a:tailEnd type="triangle"/>
+          </a:ln>
+        </p:spPr>
+        <p:style>
+          <a:lnRef idx="2">
+            <a:schemeClr val="accent1"/>
+          </a:lnRef>
+          <a:fillRef idx="0">
+            <a:schemeClr val="accent1"/>
+          </a:fillRef>
+          <a:effectRef idx="1">
+            <a:schemeClr val="accent1"/>
+          </a:effectRef>
+          <a:fontRef idx="minor">
+            <a:schemeClr val="tx1"/>
+          </a:fontRef>
+        </p:style>
+      </p:cxnSp>
+      <p:sp>
+        <p:nvSpPr>
+          <p:cNvPr id="34" name="TextBox 33">
+            <a:extLst>
+              <a:ext uri="{FF2B5EF4-FFF2-40B4-BE49-F238E27FC236}">
+                <a16:creationId xmlns:a16="http://schemas.microsoft.com/office/drawing/2014/main" id="{81DEBA90-C909-1DD6-6918-9C867186CB5C}"/>
+              </a:ext>
+            </a:extLst>
+          </p:cNvPr>
+          <p:cNvSpPr txBox="1"/>
+          <p:nvPr/>
+        </p:nvSpPr>
+        <p:spPr>
+          <a:xfrm>
+            <a:off x="6216073" y="4522800"/>
+            <a:ext cx="5805054" cy="738664"/>
+          </a:xfrm>
+          <a:prstGeom prst="rect">
+            <a:avLst/>
+          </a:prstGeom>
+          <a:noFill/>
+        </p:spPr>
+        <p:txBody>
+          <a:bodyPr wrap="square" rtlCol="0">
+            <a:spAutoFit/>
+          </a:bodyPr>
+          <a:lstStyle/>
+          <a:p>
+            <a:r>
+              <a:rPr lang="ko-KR" altLang="en-US" sz="1400" dirty="0"/>
+              <a:t>창 이름 </a:t>
+            </a:r>
+            <a:r>
+              <a:rPr lang="en-US" altLang="ko-KR" sz="1400" dirty="0"/>
+              <a:t>‘Enchant’</a:t>
+            </a:r>
+            <a:r>
+              <a:rPr lang="ko-KR" altLang="en-US" sz="1400" dirty="0"/>
+              <a:t>로 표기</a:t>
+            </a:r>
+            <a:r>
+              <a:rPr lang="en-US" altLang="ko-KR" sz="1400" dirty="0"/>
+              <a:t>. </a:t>
+            </a:r>
+            <a:r>
+              <a:rPr lang="ko-KR" altLang="en-US" sz="1400" dirty="0"/>
+              <a:t>덱 리스트에서 강화가 가능한</a:t>
+            </a:r>
+            <a:endParaRPr lang="en-US" altLang="ko-KR" sz="1400" dirty="0"/>
+          </a:p>
+          <a:p>
+            <a:r>
+              <a:rPr lang="ko-KR" altLang="en-US" sz="1400" dirty="0"/>
+              <a:t>강화 전 카드를 상단에 우선 표기</a:t>
+            </a:r>
+            <a:r>
+              <a:rPr lang="en-US" altLang="ko-KR" sz="1400" dirty="0"/>
+              <a:t>, </a:t>
+            </a:r>
+            <a:r>
+              <a:rPr lang="ko-KR" altLang="en-US" sz="1400" dirty="0"/>
+              <a:t>이미 강화가 되었거나 강화가 없는 카드는 </a:t>
+            </a:r>
+            <a:r>
+              <a:rPr lang="en-US" altLang="ko-KR" sz="1400" dirty="0"/>
+              <a:t>‘</a:t>
+            </a:r>
+            <a:r>
+              <a:rPr lang="ko-KR" altLang="en-US" sz="1400" dirty="0"/>
+              <a:t>강화불가</a:t>
+            </a:r>
+            <a:r>
+              <a:rPr lang="en-US" altLang="ko-KR" sz="1400" dirty="0"/>
+              <a:t>’</a:t>
+            </a:r>
+            <a:r>
+              <a:rPr lang="ko-KR" altLang="en-US" sz="1400" dirty="0"/>
+              <a:t>로 어둡게 표기</a:t>
+            </a:r>
+            <a:endParaRPr lang="en-US" altLang="ko-KR" sz="1400" dirty="0"/>
+          </a:p>
+        </p:txBody>
+      </p:sp>
+      <p:sp>
+        <p:nvSpPr>
+          <p:cNvPr id="55" name="TextBox 54">
+            <a:extLst>
+              <a:ext uri="{FF2B5EF4-FFF2-40B4-BE49-F238E27FC236}">
+                <a16:creationId xmlns:a16="http://schemas.microsoft.com/office/drawing/2014/main" id="{91B86A4E-1E1F-0050-B6C4-9AC90EBF1401}"/>
+              </a:ext>
+            </a:extLst>
+          </p:cNvPr>
+          <p:cNvSpPr txBox="1"/>
+          <p:nvPr/>
+        </p:nvSpPr>
+        <p:spPr>
+          <a:xfrm>
+            <a:off x="8821794" y="5386758"/>
+            <a:ext cx="3587260" cy="1384995"/>
+          </a:xfrm>
+          <a:prstGeom prst="rect">
+            <a:avLst/>
+          </a:prstGeom>
+          <a:noFill/>
+        </p:spPr>
+        <p:txBody>
+          <a:bodyPr wrap="square" rtlCol="0">
+            <a:spAutoFit/>
+          </a:bodyPr>
+          <a:lstStyle/>
+          <a:p>
+            <a:r>
+              <a:rPr lang="ko-KR" altLang="en-US" sz="1400" dirty="0"/>
+              <a:t>강화 가능한 카드가 없거나</a:t>
+            </a:r>
+            <a:r>
+              <a:rPr lang="en-US" altLang="ko-KR" sz="1400" dirty="0"/>
+              <a:t>,</a:t>
+            </a:r>
+          </a:p>
+          <a:p>
+            <a:r>
+              <a:rPr lang="ko-KR" altLang="en-US" sz="1400" dirty="0"/>
+              <a:t>강화할 생각이 사라졌을 때를 위한 </a:t>
+            </a:r>
+            <a:r>
+              <a:rPr lang="en-US" altLang="ko-KR" sz="1400" dirty="0"/>
+              <a:t>Skip.</a:t>
+            </a:r>
+          </a:p>
+          <a:p>
+            <a:r>
+              <a:rPr lang="ko-KR" altLang="en-US" sz="1400" dirty="0"/>
+              <a:t>원래 진행하던 </a:t>
+            </a:r>
+            <a:r>
+              <a:rPr lang="ko-KR" altLang="en-US" sz="1400" dirty="0" err="1"/>
+              <a:t>스탭</a:t>
+            </a:r>
+            <a:r>
+              <a:rPr lang="en-US" altLang="ko-KR" sz="1400" dirty="0"/>
+              <a:t>(</a:t>
+            </a:r>
+            <a:r>
+              <a:rPr lang="ko-KR" altLang="en-US" sz="1400" dirty="0"/>
+              <a:t>보상</a:t>
+            </a:r>
+            <a:r>
+              <a:rPr lang="en-US" altLang="ko-KR" sz="1400" dirty="0"/>
+              <a:t>/</a:t>
+            </a:r>
+            <a:r>
+              <a:rPr lang="ko-KR" altLang="en-US" sz="1400" dirty="0"/>
+              <a:t>상점구매</a:t>
+            </a:r>
+            <a:r>
+              <a:rPr lang="en-US" altLang="ko-KR" sz="1400" dirty="0"/>
+              <a:t>)</a:t>
+            </a:r>
+            <a:r>
+              <a:rPr lang="ko-KR" altLang="en-US" sz="1400" dirty="0"/>
+              <a:t>의</a:t>
+            </a:r>
+            <a:endParaRPr lang="en-US" altLang="ko-KR" sz="1400" dirty="0"/>
+          </a:p>
+          <a:p>
+            <a:r>
+              <a:rPr lang="ko-KR" altLang="en-US" sz="1400" dirty="0"/>
+              <a:t>다음 단계로 넘어 감</a:t>
+            </a:r>
+            <a:r>
+              <a:rPr lang="en-US" altLang="ko-KR" sz="1400" dirty="0"/>
+              <a:t>.</a:t>
+            </a:r>
+          </a:p>
+          <a:p>
+            <a:r>
+              <a:rPr lang="ko-KR" altLang="en-US" sz="1400" dirty="0"/>
+              <a:t>강화하지 않았다고 해서</a:t>
+            </a:r>
+            <a:endParaRPr lang="en-US" altLang="ko-KR" sz="1400" dirty="0"/>
+          </a:p>
+          <a:p>
+            <a:r>
+              <a:rPr lang="ko-KR" altLang="en-US" sz="1400" dirty="0"/>
+              <a:t>보상 선택</a:t>
+            </a:r>
+            <a:r>
+              <a:rPr lang="en-US" altLang="ko-KR" sz="1400" dirty="0"/>
+              <a:t>/</a:t>
+            </a:r>
+            <a:r>
+              <a:rPr lang="ko-KR" altLang="en-US" sz="1400" dirty="0"/>
+              <a:t>구매 전으로 돌아갈 수는 없다</a:t>
+            </a:r>
+            <a:r>
+              <a:rPr lang="en-US" altLang="ko-KR" sz="1400" dirty="0"/>
+              <a:t>.</a:t>
+            </a:r>
+          </a:p>
+        </p:txBody>
+      </p:sp>
+      <p:sp>
+        <p:nvSpPr>
+          <p:cNvPr id="56" name="직사각형 55">
+            <a:extLst>
+              <a:ext uri="{FF2B5EF4-FFF2-40B4-BE49-F238E27FC236}">
+                <a16:creationId xmlns:a16="http://schemas.microsoft.com/office/drawing/2014/main" id="{4ED75F05-7EA7-19E4-E31F-F66A6E02DEC9}"/>
+              </a:ext>
+            </a:extLst>
+          </p:cNvPr>
+          <p:cNvSpPr/>
+          <p:nvPr/>
+        </p:nvSpPr>
+        <p:spPr>
+          <a:xfrm>
+            <a:off x="7458363" y="1984577"/>
+            <a:ext cx="595746" cy="675495"/>
+          </a:xfrm>
+          <a:prstGeom prst="rect">
+            <a:avLst/>
+          </a:prstGeom>
+          <a:noFill/>
+          <a:ln>
+            <a:solidFill>
+              <a:srgbClr val="FF0000"/>
+            </a:solidFill>
+          </a:ln>
+        </p:spPr>
+        <p:style>
+          <a:lnRef idx="2">
+            <a:schemeClr val="accent1">
+              <a:shade val="15000"/>
+            </a:schemeClr>
+          </a:lnRef>
+          <a:fillRef idx="1">
+            <a:schemeClr val="accent1"/>
+          </a:fillRef>
+          <a:effectRef idx="0">
+            <a:schemeClr val="accent1"/>
+          </a:effectRef>
+          <a:fontRef idx="minor">
+            <a:schemeClr val="lt1"/>
+          </a:fontRef>
+        </p:style>
+        <p:txBody>
+          <a:bodyPr rtlCol="0" anchor="ctr"/>
+          <a:lstStyle/>
+          <a:p>
+            <a:pPr algn="ctr"/>
+            <a:endParaRPr lang="ko-KR" altLang="en-US" b="1" dirty="0"/>
+          </a:p>
+        </p:txBody>
+      </p:sp>
+      <p:cxnSp>
+        <p:nvCxnSpPr>
+          <p:cNvPr id="57" name="직선 화살표 연결선 56">
+            <a:extLst>
+              <a:ext uri="{FF2B5EF4-FFF2-40B4-BE49-F238E27FC236}">
+                <a16:creationId xmlns:a16="http://schemas.microsoft.com/office/drawing/2014/main" id="{61070582-7955-C121-F70D-E25ADCDF384C}"/>
+              </a:ext>
+            </a:extLst>
+          </p:cNvPr>
+          <p:cNvCxnSpPr>
+            <a:cxnSpLocks/>
+          </p:cNvCxnSpPr>
+          <p:nvPr/>
+        </p:nvCxnSpPr>
+        <p:spPr>
+          <a:xfrm flipH="1">
+            <a:off x="5222354" y="2618509"/>
+            <a:ext cx="2236009" cy="2642955"/>
+          </a:xfrm>
+          <a:prstGeom prst="straightConnector1">
+            <a:avLst/>
+          </a:prstGeom>
+          <a:ln>
+            <a:solidFill>
+              <a:srgbClr val="FF0000"/>
+            </a:solidFill>
+            <a:tailEnd type="triangle"/>
+          </a:ln>
+        </p:spPr>
+        <p:style>
+          <a:lnRef idx="2">
+            <a:schemeClr val="accent1"/>
+          </a:lnRef>
+          <a:fillRef idx="0">
+            <a:schemeClr val="accent1"/>
+          </a:fillRef>
+          <a:effectRef idx="1">
+            <a:schemeClr val="accent1"/>
+          </a:effectRef>
+          <a:fontRef idx="minor">
+            <a:schemeClr val="tx1"/>
+          </a:fontRef>
+        </p:style>
+      </p:cxnSp>
+      <p:graphicFrame>
+        <p:nvGraphicFramePr>
+          <p:cNvPr id="60" name="개체 59">
+            <a:extLst>
+              <a:ext uri="{FF2B5EF4-FFF2-40B4-BE49-F238E27FC236}">
+                <a16:creationId xmlns:a16="http://schemas.microsoft.com/office/drawing/2014/main" id="{12C86CE0-A5F8-2717-8CAE-8E5AC62D919F}"/>
+              </a:ext>
+            </a:extLst>
+          </p:cNvPr>
+          <p:cNvGraphicFramePr>
+            <a:graphicFrameLocks noChangeAspect="1"/>
+          </p:cNvGraphicFramePr>
+          <p:nvPr>
+            <p:extLst>
+              <p:ext uri="{D42A27DB-BD31-4B8C-83A1-F6EECF244321}">
+                <p14:modId xmlns:p14="http://schemas.microsoft.com/office/powerpoint/2010/main" val="3358975791"/>
+              </p:ext>
+            </p:extLst>
+          </p:nvPr>
+        </p:nvGraphicFramePr>
+        <p:xfrm>
+          <a:off x="1220066" y="4522800"/>
+          <a:ext cx="3872345" cy="2178194"/>
+        </p:xfrm>
+        <a:graphic>
+          <a:graphicData uri="http://schemas.openxmlformats.org/presentationml/2006/ole">
+            <mc:AlternateContent xmlns:mc="http://schemas.openxmlformats.org/markup-compatibility/2006">
+              <mc:Choice xmlns:v="urn:schemas-microsoft-com:vml" Requires="v">
+                <p:oleObj name="Image" r:id="rId10" imgW="25802844" imgH="14514195" progId="Photoshop.Image.26">
+                  <p:embed/>
+                </p:oleObj>
+              </mc:Choice>
+              <mc:Fallback>
+                <p:oleObj name="Image" r:id="rId10" imgW="25802844" imgH="14514195" progId="Photoshop.Image.26">
+                  <p:embed/>
+                  <p:pic>
+                    <p:nvPicPr>
+                      <p:cNvPr id="0" name=""/>
+                      <p:cNvPicPr/>
+                      <p:nvPr/>
+                    </p:nvPicPr>
+                    <p:blipFill>
+                      <a:blip r:embed="rId11"/>
+                      <a:stretch>
+                        <a:fillRect/>
+                      </a:stretch>
+                    </p:blipFill>
+                    <p:spPr>
+                      <a:xfrm>
+                        <a:off x="1220066" y="4522800"/>
+                        <a:ext cx="3872345" cy="2178194"/>
+                      </a:xfrm>
+                      <a:prstGeom prst="rect">
+                        <a:avLst/>
+                      </a:prstGeom>
+                    </p:spPr>
+                  </p:pic>
+                </p:oleObj>
+              </mc:Fallback>
+            </mc:AlternateContent>
+          </a:graphicData>
+        </a:graphic>
+      </p:graphicFrame>
+      <p:sp>
+        <p:nvSpPr>
+          <p:cNvPr id="61" name="TextBox 60">
+            <a:extLst>
+              <a:ext uri="{FF2B5EF4-FFF2-40B4-BE49-F238E27FC236}">
+                <a16:creationId xmlns:a16="http://schemas.microsoft.com/office/drawing/2014/main" id="{B7D64F6D-4847-B60A-BFA4-E34C257E339A}"/>
+              </a:ext>
+            </a:extLst>
+          </p:cNvPr>
+          <p:cNvSpPr txBox="1"/>
+          <p:nvPr/>
+        </p:nvSpPr>
+        <p:spPr>
+          <a:xfrm>
+            <a:off x="5222354" y="5208117"/>
+            <a:ext cx="3367464" cy="1600438"/>
+          </a:xfrm>
+          <a:prstGeom prst="rect">
+            <a:avLst/>
+          </a:prstGeom>
+          <a:noFill/>
+        </p:spPr>
+        <p:txBody>
+          <a:bodyPr wrap="square" rtlCol="0">
+            <a:spAutoFit/>
+          </a:bodyPr>
+          <a:lstStyle/>
+          <a:p>
+            <a:r>
+              <a:rPr lang="ko-KR" altLang="en-US" sz="1400" dirty="0"/>
+              <a:t>활성화된 카드 클릭 시</a:t>
+            </a:r>
+            <a:r>
+              <a:rPr lang="en-US" altLang="ko-KR" sz="1400" dirty="0"/>
+              <a:t>,</a:t>
+            </a:r>
+          </a:p>
+          <a:p>
+            <a:r>
+              <a:rPr lang="ko-KR" altLang="en-US" sz="1400" dirty="0" err="1"/>
+              <a:t>인챈트</a:t>
+            </a:r>
+            <a:r>
+              <a:rPr lang="ko-KR" altLang="en-US" sz="1400" dirty="0"/>
+              <a:t> 전</a:t>
+            </a:r>
+            <a:r>
+              <a:rPr lang="en-US" altLang="ko-KR" sz="1400" dirty="0"/>
+              <a:t>/</a:t>
+            </a:r>
+            <a:r>
+              <a:rPr lang="ko-KR" altLang="en-US" sz="1400" dirty="0"/>
+              <a:t>후 카드를</a:t>
+            </a:r>
+            <a:endParaRPr lang="en-US" altLang="ko-KR" sz="1400" dirty="0"/>
+          </a:p>
+          <a:p>
+            <a:r>
+              <a:rPr lang="ko-KR" altLang="en-US" sz="1400" dirty="0"/>
+              <a:t>띄워주고 </a:t>
+            </a:r>
+            <a:r>
+              <a:rPr lang="ko-KR" altLang="en-US" sz="1400" dirty="0" err="1"/>
+              <a:t>인챈트</a:t>
+            </a:r>
+            <a:r>
+              <a:rPr lang="ko-KR" altLang="en-US" sz="1400" dirty="0"/>
+              <a:t> 여부를 물어봄</a:t>
+            </a:r>
+            <a:endParaRPr lang="en-US" altLang="ko-KR" sz="1400" dirty="0"/>
+          </a:p>
+          <a:p>
+            <a:r>
+              <a:rPr lang="ko-KR" altLang="en-US" sz="1400" dirty="0"/>
+              <a:t>취소 </a:t>
+            </a:r>
+            <a:r>
+              <a:rPr lang="en-US" altLang="ko-KR" sz="1400" dirty="0"/>
+              <a:t>: </a:t>
+            </a:r>
+            <a:r>
+              <a:rPr lang="ko-KR" altLang="en-US" sz="1400" dirty="0"/>
+              <a:t>카드를 클릭하기 전의 </a:t>
+            </a:r>
+            <a:r>
+              <a:rPr lang="en-US" altLang="ko-KR" sz="1400" dirty="0"/>
+              <a:t>ENCHANT </a:t>
+            </a:r>
+            <a:r>
+              <a:rPr lang="ko-KR" altLang="en-US" sz="1400" dirty="0"/>
+              <a:t>팝업으로 돌아옴</a:t>
+            </a:r>
+            <a:endParaRPr lang="en-US" altLang="ko-KR" sz="1400" dirty="0"/>
+          </a:p>
+          <a:p>
+            <a:r>
+              <a:rPr lang="ko-KR" altLang="en-US" sz="1400" dirty="0"/>
+              <a:t>확인 </a:t>
+            </a:r>
+            <a:r>
+              <a:rPr lang="en-US" altLang="ko-KR" sz="1400" dirty="0"/>
+              <a:t>: </a:t>
+            </a:r>
+            <a:r>
+              <a:rPr lang="ko-KR" altLang="en-US" sz="1400" dirty="0"/>
+              <a:t>해당 카드 강화 후</a:t>
+            </a:r>
+            <a:r>
+              <a:rPr lang="en-US" altLang="ko-KR" sz="1400" dirty="0"/>
+              <a:t>,</a:t>
+            </a:r>
+            <a:r>
+              <a:rPr lang="ko-KR" altLang="en-US" sz="1400" dirty="0"/>
+              <a:t> 다음 단계로 넘어 감</a:t>
+            </a:r>
+            <a:r>
+              <a:rPr lang="en-US" altLang="ko-KR" sz="1400" dirty="0"/>
+              <a:t>.</a:t>
+            </a:r>
+          </a:p>
+        </p:txBody>
+      </p:sp>
+      <p:cxnSp>
+        <p:nvCxnSpPr>
+          <p:cNvPr id="62" name="직선 화살표 연결선 61">
+            <a:extLst>
+              <a:ext uri="{FF2B5EF4-FFF2-40B4-BE49-F238E27FC236}">
+                <a16:creationId xmlns:a16="http://schemas.microsoft.com/office/drawing/2014/main" id="{7B58BDC3-F328-22A4-22B0-FEBD72BB76BF}"/>
+              </a:ext>
+            </a:extLst>
+          </p:cNvPr>
+          <p:cNvCxnSpPr>
+            <a:cxnSpLocks/>
+          </p:cNvCxnSpPr>
+          <p:nvPr/>
+        </p:nvCxnSpPr>
+        <p:spPr>
+          <a:xfrm flipV="1">
+            <a:off x="4870566" y="699324"/>
+            <a:ext cx="1225434" cy="1787620"/>
+          </a:xfrm>
+          <a:prstGeom prst="straightConnector1">
+            <a:avLst/>
+          </a:prstGeom>
+          <a:ln>
+            <a:solidFill>
+              <a:schemeClr val="accent2"/>
+            </a:solidFill>
+            <a:tailEnd type="triangle"/>
+          </a:ln>
+        </p:spPr>
+        <p:style>
+          <a:lnRef idx="2">
+            <a:schemeClr val="accent1"/>
+          </a:lnRef>
+          <a:fillRef idx="0">
+            <a:schemeClr val="accent1"/>
+          </a:fillRef>
+          <a:effectRef idx="1">
+            <a:schemeClr val="accent1"/>
+          </a:effectRef>
+          <a:fontRef idx="minor">
+            <a:schemeClr val="tx1"/>
+          </a:fontRef>
+        </p:style>
+      </p:cxnSp>
+      <p:sp>
+        <p:nvSpPr>
+          <p:cNvPr id="1024" name="TextBox 1023">
+            <a:extLst>
+              <a:ext uri="{FF2B5EF4-FFF2-40B4-BE49-F238E27FC236}">
+                <a16:creationId xmlns:a16="http://schemas.microsoft.com/office/drawing/2014/main" id="{05187A01-9E7A-1C8F-103B-DC48A8600AFA}"/>
+              </a:ext>
+            </a:extLst>
+          </p:cNvPr>
+          <p:cNvSpPr txBox="1"/>
+          <p:nvPr/>
+        </p:nvSpPr>
+        <p:spPr>
+          <a:xfrm>
+            <a:off x="6216073" y="393049"/>
+            <a:ext cx="5805054" cy="523220"/>
+          </a:xfrm>
+          <a:prstGeom prst="rect">
+            <a:avLst/>
+          </a:prstGeom>
+          <a:noFill/>
+        </p:spPr>
+        <p:txBody>
+          <a:bodyPr wrap="square" rtlCol="0">
+            <a:spAutoFit/>
+          </a:bodyPr>
+          <a:lstStyle/>
+          <a:p>
+            <a:r>
+              <a:rPr lang="ko-KR" altLang="en-US" sz="1400" dirty="0">
+                <a:solidFill>
+                  <a:schemeClr val="accent2"/>
+                </a:solidFill>
+              </a:rPr>
+              <a:t>설명 란에 카드 강화에 대한 설명 외에도</a:t>
+            </a:r>
+            <a:r>
+              <a:rPr lang="en-US" altLang="ko-KR" sz="1400" dirty="0">
+                <a:solidFill>
+                  <a:schemeClr val="accent2"/>
+                </a:solidFill>
+              </a:rPr>
+              <a:t>,</a:t>
+            </a:r>
+          </a:p>
+          <a:p>
+            <a:r>
+              <a:rPr lang="en-US" altLang="ko-KR" sz="1400" dirty="0">
+                <a:solidFill>
+                  <a:schemeClr val="accent2"/>
+                </a:solidFill>
+              </a:rPr>
+              <a:t>“</a:t>
+            </a:r>
+            <a:r>
+              <a:rPr lang="ko-KR" altLang="en-US" sz="1400" dirty="0" err="1">
+                <a:solidFill>
+                  <a:schemeClr val="accent2"/>
+                </a:solidFill>
+              </a:rPr>
+              <a:t>덱에</a:t>
+            </a:r>
+            <a:r>
+              <a:rPr lang="ko-KR" altLang="en-US" sz="1400" dirty="0">
+                <a:solidFill>
+                  <a:schemeClr val="accent2"/>
+                </a:solidFill>
+              </a:rPr>
+              <a:t> 있는 현재 강화 가능한 카드 수</a:t>
+            </a:r>
+            <a:r>
+              <a:rPr lang="en-US" altLang="ko-KR" sz="1400" dirty="0">
+                <a:solidFill>
+                  <a:schemeClr val="accent2"/>
+                </a:solidFill>
+              </a:rPr>
+              <a:t>” </a:t>
+            </a:r>
+            <a:r>
+              <a:rPr lang="ko-KR" altLang="en-US" sz="1400" dirty="0">
+                <a:solidFill>
+                  <a:schemeClr val="accent2"/>
+                </a:solidFill>
+              </a:rPr>
+              <a:t>를 띄워주고 싶어</a:t>
+            </a:r>
+            <a:r>
+              <a:rPr lang="en-US" altLang="ko-KR" sz="1400" dirty="0">
+                <a:solidFill>
+                  <a:schemeClr val="accent2"/>
+                </a:solidFill>
+              </a:rPr>
+              <a:t>.</a:t>
+            </a:r>
+          </a:p>
+        </p:txBody>
+      </p:sp>
+      <p:sp>
+        <p:nvSpPr>
+          <p:cNvPr id="1027" name="직사각형 1026">
+            <a:extLst>
+              <a:ext uri="{FF2B5EF4-FFF2-40B4-BE49-F238E27FC236}">
+                <a16:creationId xmlns:a16="http://schemas.microsoft.com/office/drawing/2014/main" id="{8DB46745-9AC5-0C66-722F-0E84B1F1BE5E}"/>
+              </a:ext>
+            </a:extLst>
+          </p:cNvPr>
+          <p:cNvSpPr/>
+          <p:nvPr/>
+        </p:nvSpPr>
+        <p:spPr>
+          <a:xfrm>
+            <a:off x="10437091" y="2130135"/>
+            <a:ext cx="899302" cy="1353808"/>
+          </a:xfrm>
+          <a:prstGeom prst="rect">
+            <a:avLst/>
+          </a:prstGeom>
+          <a:noFill/>
+          <a:ln>
+            <a:solidFill>
+              <a:srgbClr val="FF0000"/>
+            </a:solidFill>
+          </a:ln>
+        </p:spPr>
+        <p:style>
+          <a:lnRef idx="2">
+            <a:schemeClr val="accent1">
+              <a:shade val="15000"/>
+            </a:schemeClr>
+          </a:lnRef>
+          <a:fillRef idx="1">
+            <a:schemeClr val="accent1"/>
+          </a:fillRef>
+          <a:effectRef idx="0">
+            <a:schemeClr val="accent1"/>
+          </a:effectRef>
+          <a:fontRef idx="minor">
+            <a:schemeClr val="lt1"/>
+          </a:fontRef>
+        </p:style>
+        <p:txBody>
+          <a:bodyPr rtlCol="0" anchor="ctr"/>
+          <a:lstStyle/>
+          <a:p>
+            <a:pPr algn="ctr"/>
+            <a:endParaRPr lang="ko-KR" altLang="en-US" b="1" dirty="0"/>
+          </a:p>
+        </p:txBody>
+      </p:sp>
+      <p:cxnSp>
+        <p:nvCxnSpPr>
+          <p:cNvPr id="1028" name="직선 화살표 연결선 1027">
+            <a:extLst>
+              <a:ext uri="{FF2B5EF4-FFF2-40B4-BE49-F238E27FC236}">
+                <a16:creationId xmlns:a16="http://schemas.microsoft.com/office/drawing/2014/main" id="{CD017BD7-F8F6-7B00-653A-30E09859717B}"/>
+              </a:ext>
+            </a:extLst>
+          </p:cNvPr>
+          <p:cNvCxnSpPr>
+            <a:cxnSpLocks/>
+          </p:cNvCxnSpPr>
+          <p:nvPr/>
+        </p:nvCxnSpPr>
+        <p:spPr>
+          <a:xfrm>
+            <a:off x="10778836" y="3038224"/>
+            <a:ext cx="697344" cy="0"/>
+          </a:xfrm>
+          <a:prstGeom prst="straightConnector1">
+            <a:avLst/>
+          </a:prstGeom>
+          <a:ln>
+            <a:solidFill>
+              <a:schemeClr val="accent2"/>
+            </a:solidFill>
+            <a:tailEnd type="triangle"/>
+          </a:ln>
+        </p:spPr>
+        <p:style>
+          <a:lnRef idx="2">
+            <a:schemeClr val="accent1"/>
+          </a:lnRef>
+          <a:fillRef idx="0">
+            <a:schemeClr val="accent1"/>
+          </a:fillRef>
+          <a:effectRef idx="1">
+            <a:schemeClr val="accent1"/>
+          </a:effectRef>
+          <a:fontRef idx="minor">
+            <a:schemeClr val="tx1"/>
+          </a:fontRef>
+        </p:style>
+      </p:cxnSp>
+      <p:sp>
+        <p:nvSpPr>
+          <p:cNvPr id="1031" name="TextBox 1030">
+            <a:extLst>
+              <a:ext uri="{FF2B5EF4-FFF2-40B4-BE49-F238E27FC236}">
+                <a16:creationId xmlns:a16="http://schemas.microsoft.com/office/drawing/2014/main" id="{582D3EE4-D8F1-DF35-9BC9-A627640B1E25}"/>
+              </a:ext>
+            </a:extLst>
+          </p:cNvPr>
+          <p:cNvSpPr txBox="1"/>
+          <p:nvPr/>
+        </p:nvSpPr>
+        <p:spPr>
+          <a:xfrm>
+            <a:off x="11455400" y="1618089"/>
+            <a:ext cx="975250" cy="3108543"/>
+          </a:xfrm>
+          <a:prstGeom prst="rect">
+            <a:avLst/>
+          </a:prstGeom>
+          <a:noFill/>
+        </p:spPr>
+        <p:txBody>
+          <a:bodyPr wrap="square" rtlCol="0">
+            <a:spAutoFit/>
+          </a:bodyPr>
+          <a:lstStyle/>
+          <a:p>
+            <a:r>
+              <a:rPr lang="ko-KR" altLang="en-US" sz="1400" dirty="0">
+                <a:solidFill>
+                  <a:schemeClr val="accent2"/>
+                </a:solidFill>
+              </a:rPr>
+              <a:t>팝업을</a:t>
+            </a:r>
+            <a:endParaRPr lang="en-US" altLang="ko-KR" sz="1400" dirty="0">
+              <a:solidFill>
+                <a:schemeClr val="accent2"/>
+              </a:solidFill>
+            </a:endParaRPr>
+          </a:p>
+          <a:p>
+            <a:r>
+              <a:rPr lang="ko-KR" altLang="en-US" sz="1400" dirty="0">
+                <a:solidFill>
+                  <a:schemeClr val="accent2"/>
+                </a:solidFill>
+              </a:rPr>
+              <a:t>살짝 좌</a:t>
+            </a:r>
+            <a:endParaRPr lang="en-US" altLang="ko-KR" sz="1400" dirty="0">
+              <a:solidFill>
+                <a:schemeClr val="accent2"/>
+              </a:solidFill>
+            </a:endParaRPr>
+          </a:p>
+          <a:p>
+            <a:r>
+              <a:rPr lang="ko-KR" altLang="en-US" sz="1400" dirty="0">
+                <a:solidFill>
+                  <a:schemeClr val="accent2"/>
+                </a:solidFill>
+              </a:rPr>
+              <a:t>로</a:t>
+            </a:r>
+            <a:r>
+              <a:rPr lang="en-US" altLang="ko-KR" sz="1400" dirty="0">
+                <a:solidFill>
+                  <a:schemeClr val="accent2"/>
+                </a:solidFill>
+              </a:rPr>
+              <a:t> </a:t>
+            </a:r>
+            <a:r>
+              <a:rPr lang="ko-KR" altLang="en-US" sz="1400" dirty="0">
+                <a:solidFill>
+                  <a:schemeClr val="accent2"/>
+                </a:solidFill>
+              </a:rPr>
+              <a:t>배치</a:t>
+            </a:r>
+            <a:endParaRPr lang="en-US" altLang="ko-KR" sz="1400" dirty="0">
+              <a:solidFill>
+                <a:schemeClr val="accent2"/>
+              </a:solidFill>
+            </a:endParaRPr>
+          </a:p>
+          <a:p>
+            <a:r>
+              <a:rPr lang="ko-KR" altLang="en-US" sz="1400" dirty="0">
+                <a:solidFill>
+                  <a:schemeClr val="accent2"/>
+                </a:solidFill>
+              </a:rPr>
+              <a:t>하고 이</a:t>
+            </a:r>
+            <a:endParaRPr lang="en-US" altLang="ko-KR" sz="1400" dirty="0">
+              <a:solidFill>
+                <a:schemeClr val="accent2"/>
+              </a:solidFill>
+            </a:endParaRPr>
+          </a:p>
+          <a:p>
+            <a:r>
+              <a:rPr lang="ko-KR" altLang="en-US" sz="1400" dirty="0">
+                <a:solidFill>
+                  <a:schemeClr val="accent2"/>
+                </a:solidFill>
+              </a:rPr>
+              <a:t>공간 못</a:t>
+            </a:r>
+            <a:endParaRPr lang="en-US" altLang="ko-KR" sz="1400" dirty="0">
+              <a:solidFill>
+                <a:schemeClr val="accent2"/>
+              </a:solidFill>
+            </a:endParaRPr>
+          </a:p>
+          <a:p>
+            <a:r>
+              <a:rPr lang="ko-KR" altLang="en-US" sz="1400" dirty="0" err="1">
+                <a:solidFill>
+                  <a:schemeClr val="accent2"/>
+                </a:solidFill>
+              </a:rPr>
+              <a:t>쓰려나</a:t>
+            </a:r>
+            <a:r>
+              <a:rPr lang="en-US" altLang="ko-KR" sz="1400" dirty="0">
+                <a:solidFill>
+                  <a:schemeClr val="accent2"/>
+                </a:solidFill>
+              </a:rPr>
+              <a:t>?</a:t>
+            </a:r>
+          </a:p>
+          <a:p>
+            <a:r>
+              <a:rPr lang="en-US" altLang="ko-KR" sz="1400" dirty="0">
+                <a:solidFill>
+                  <a:schemeClr val="accent2"/>
+                </a:solidFill>
+              </a:rPr>
+              <a:t>AD</a:t>
+            </a:r>
+            <a:r>
+              <a:rPr lang="ko-KR" altLang="en-US" sz="1400" dirty="0">
+                <a:solidFill>
+                  <a:schemeClr val="accent2"/>
+                </a:solidFill>
+              </a:rPr>
+              <a:t>와 상</a:t>
+            </a:r>
+            <a:endParaRPr lang="en-US" altLang="ko-KR" sz="1400" dirty="0">
+              <a:solidFill>
+                <a:schemeClr val="accent2"/>
+              </a:solidFill>
+            </a:endParaRPr>
+          </a:p>
+          <a:p>
+            <a:r>
+              <a:rPr lang="ko-KR" altLang="en-US" sz="1400" dirty="0">
+                <a:solidFill>
+                  <a:schemeClr val="accent2"/>
+                </a:solidFill>
+              </a:rPr>
+              <a:t>의</a:t>
+            </a:r>
+            <a:endParaRPr lang="en-US" altLang="ko-KR" sz="1400" dirty="0">
+              <a:solidFill>
+                <a:schemeClr val="accent2"/>
+              </a:solidFill>
+            </a:endParaRPr>
+          </a:p>
+          <a:p>
+            <a:endParaRPr lang="en-US" altLang="ko-KR" sz="1400" dirty="0">
+              <a:solidFill>
+                <a:schemeClr val="accent2"/>
+              </a:solidFill>
+            </a:endParaRPr>
+          </a:p>
+          <a:p>
+            <a:r>
+              <a:rPr lang="ko-KR" altLang="en-US" sz="1400" dirty="0" err="1">
+                <a:solidFill>
+                  <a:schemeClr val="accent2"/>
+                </a:solidFill>
+              </a:rPr>
+              <a:t>대신귀</a:t>
+            </a:r>
+            <a:endParaRPr lang="en-US" altLang="ko-KR" sz="1400" dirty="0">
+              <a:solidFill>
+                <a:schemeClr val="accent2"/>
+              </a:solidFill>
+            </a:endParaRPr>
+          </a:p>
+          <a:p>
+            <a:r>
+              <a:rPr lang="ko-KR" altLang="en-US" sz="1400" dirty="0" err="1">
+                <a:solidFill>
+                  <a:schemeClr val="accent2"/>
+                </a:solidFill>
+              </a:rPr>
+              <a:t>여운알</a:t>
+            </a:r>
+            <a:endParaRPr lang="en-US" altLang="ko-KR" sz="1400" dirty="0">
+              <a:solidFill>
+                <a:schemeClr val="accent2"/>
+              </a:solidFill>
+            </a:endParaRPr>
+          </a:p>
+          <a:p>
+            <a:r>
+              <a:rPr lang="ko-KR" altLang="en-US" sz="1400" dirty="0">
+                <a:solidFill>
+                  <a:schemeClr val="accent2"/>
+                </a:solidFill>
+              </a:rPr>
+              <a:t>파카를</a:t>
+            </a:r>
+            <a:endParaRPr lang="en-US" altLang="ko-KR" sz="1400" dirty="0">
+              <a:solidFill>
+                <a:schemeClr val="accent2"/>
+              </a:solidFill>
+            </a:endParaRPr>
+          </a:p>
+          <a:p>
+            <a:r>
+              <a:rPr lang="ko-KR" altLang="en-US" sz="1400" dirty="0" err="1">
+                <a:solidFill>
+                  <a:schemeClr val="accent2"/>
+                </a:solidFill>
+              </a:rPr>
+              <a:t>드리겟</a:t>
+            </a:r>
+            <a:endParaRPr lang="en-US" altLang="ko-KR" sz="1400" dirty="0">
+              <a:solidFill>
+                <a:schemeClr val="accent2"/>
+              </a:solidFill>
+            </a:endParaRPr>
+          </a:p>
+          <a:p>
+            <a:r>
+              <a:rPr lang="ko-KR" altLang="en-US" sz="1400" dirty="0">
+                <a:solidFill>
+                  <a:schemeClr val="accent2"/>
+                </a:solidFill>
+              </a:rPr>
+              <a:t>습니다</a:t>
+            </a:r>
+            <a:endParaRPr lang="en-US" altLang="ko-KR" sz="1400" dirty="0">
+              <a:solidFill>
+                <a:schemeClr val="accent2"/>
+              </a:solidFill>
+            </a:endParaRPr>
+          </a:p>
+        </p:txBody>
+      </p:sp>
+    </p:spTree>
+    <p:extLst>
+      <p:ext uri="{BB962C8B-B14F-4D97-AF65-F5344CB8AC3E}">
+        <p14:creationId xmlns:p14="http://schemas.microsoft.com/office/powerpoint/2010/main" val="3972604730"/>
+      </p:ext>
+    </p:extLst>
+  </p:cSld>
+  <p:clrMapOvr>
+    <a:masterClrMapping/>
+  </p:clrMapOvr>
+</p:sld>
+</file>
+
+<file path=ppt/slides/slide13.xml><?xml version="1.0" encoding="utf-8"?>
+<p:sld xmlns:a="http://schemas.openxmlformats.org/drawingml/2006/main" xmlns:r="http://schemas.openxmlformats.org/officeDocument/2006/relationships" xmlns:p="http://schemas.openxmlformats.org/presentationml/2006/main">
+  <p:cSld>
+    <p:spTree>
+      <p:nvGrpSpPr>
+        <p:cNvPr id="1" name="">
+          <a:extLst>
+            <a:ext uri="{FF2B5EF4-FFF2-40B4-BE49-F238E27FC236}">
+              <a16:creationId xmlns:a16="http://schemas.microsoft.com/office/drawing/2014/main" id="{9B908EA6-10E4-52F9-0A02-8F574B27FB8A}"/>
+            </a:ext>
+          </a:extLst>
+        </p:cNvPr>
+        <p:cNvGrpSpPr/>
+        <p:nvPr/>
+      </p:nvGrpSpPr>
+      <p:grpSpPr>
+        <a:xfrm>
+          <a:off x="0" y="0"/>
+          <a:ext cx="0" cy="0"/>
+          <a:chOff x="0" y="0"/>
+          <a:chExt cx="0" cy="0"/>
+        </a:xfrm>
+      </p:grpSpPr>
+      <p:sp>
+        <p:nvSpPr>
+          <p:cNvPr id="3" name="TextBox 2">
+            <a:extLst>
+              <a:ext uri="{FF2B5EF4-FFF2-40B4-BE49-F238E27FC236}">
+                <a16:creationId xmlns:a16="http://schemas.microsoft.com/office/drawing/2014/main" id="{D7050CF2-3F31-7AE1-CD49-A59CAF4CB5F9}"/>
+              </a:ext>
+            </a:extLst>
+          </p:cNvPr>
+          <p:cNvSpPr txBox="1"/>
+          <p:nvPr/>
+        </p:nvSpPr>
+        <p:spPr>
+          <a:xfrm>
+            <a:off x="715820" y="572655"/>
+            <a:ext cx="10367818" cy="369332"/>
+          </a:xfrm>
+          <a:prstGeom prst="rect">
+            <a:avLst/>
+          </a:prstGeom>
+          <a:noFill/>
+        </p:spPr>
+        <p:txBody>
+          <a:bodyPr wrap="square" rtlCol="0">
+            <a:spAutoFit/>
+          </a:bodyPr>
+          <a:lstStyle/>
+          <a:p>
+            <a:r>
+              <a:rPr lang="ko-KR" altLang="en-US" b="1" dirty="0"/>
+              <a:t>카드 제거</a:t>
+            </a:r>
+            <a:endParaRPr lang="en-US" altLang="ko-KR" dirty="0"/>
+          </a:p>
+        </p:txBody>
+      </p:sp>
+      <p:sp>
+        <p:nvSpPr>
+          <p:cNvPr id="4" name="TextBox 3">
+            <a:extLst>
+              <a:ext uri="{FF2B5EF4-FFF2-40B4-BE49-F238E27FC236}">
+                <a16:creationId xmlns:a16="http://schemas.microsoft.com/office/drawing/2014/main" id="{B3299263-791D-1779-418C-72EBE6097C7B}"/>
+              </a:ext>
+            </a:extLst>
+          </p:cNvPr>
+          <p:cNvSpPr txBox="1"/>
+          <p:nvPr/>
+        </p:nvSpPr>
+        <p:spPr>
+          <a:xfrm>
+            <a:off x="6216073" y="1007338"/>
+            <a:ext cx="5805054" cy="307777"/>
+          </a:xfrm>
+          <a:prstGeom prst="rect">
+            <a:avLst/>
+          </a:prstGeom>
+          <a:noFill/>
+        </p:spPr>
+        <p:txBody>
+          <a:bodyPr wrap="square" rtlCol="0">
+            <a:spAutoFit/>
+          </a:bodyPr>
+          <a:lstStyle/>
+          <a:p>
+            <a:r>
+              <a:rPr lang="en-US" altLang="ko-KR" sz="1400" dirty="0"/>
+              <a:t>‘</a:t>
+            </a:r>
+            <a:r>
+              <a:rPr lang="ko-KR" altLang="en-US" sz="1400" dirty="0"/>
+              <a:t>카드 강화</a:t>
+            </a:r>
+            <a:r>
+              <a:rPr lang="en-US" altLang="ko-KR" sz="1400" dirty="0"/>
+              <a:t>’</a:t>
+            </a:r>
+            <a:r>
+              <a:rPr lang="ko-KR" altLang="en-US" sz="1400" dirty="0"/>
+              <a:t>와 같은 스텝으로 진행</a:t>
+            </a:r>
+            <a:endParaRPr lang="en-US" altLang="ko-KR" sz="1400" dirty="0"/>
+          </a:p>
+        </p:txBody>
+      </p:sp>
+      <p:pic>
+        <p:nvPicPr>
+          <p:cNvPr id="13" name="그림 12">
+            <a:extLst>
+              <a:ext uri="{FF2B5EF4-FFF2-40B4-BE49-F238E27FC236}">
+                <a16:creationId xmlns:a16="http://schemas.microsoft.com/office/drawing/2014/main" id="{8B59B83A-92A5-0A72-4F8E-10DF93E399BF}"/>
+              </a:ext>
+            </a:extLst>
+          </p:cNvPr>
+          <p:cNvPicPr>
+            <a:picLocks noChangeAspect="1"/>
+          </p:cNvPicPr>
+          <p:nvPr/>
+        </p:nvPicPr>
+        <p:blipFill>
+          <a:blip r:embed="rId3"/>
+          <a:stretch>
+            <a:fillRect/>
+          </a:stretch>
+        </p:blipFill>
+        <p:spPr>
+          <a:xfrm>
+            <a:off x="715820" y="1007338"/>
+            <a:ext cx="4525006" cy="2514951"/>
+          </a:xfrm>
+          <a:prstGeom prst="rect">
+            <a:avLst/>
+          </a:prstGeom>
+        </p:spPr>
+      </p:pic>
+      <p:pic>
+        <p:nvPicPr>
+          <p:cNvPr id="18" name="그림 17">
+            <a:extLst>
+              <a:ext uri="{FF2B5EF4-FFF2-40B4-BE49-F238E27FC236}">
+                <a16:creationId xmlns:a16="http://schemas.microsoft.com/office/drawing/2014/main" id="{A5A1BC35-403D-C184-B676-7FCF61A21B25}"/>
+              </a:ext>
+            </a:extLst>
+          </p:cNvPr>
+          <p:cNvPicPr>
+            <a:picLocks noChangeAspect="1"/>
+          </p:cNvPicPr>
+          <p:nvPr/>
+        </p:nvPicPr>
+        <p:blipFill>
+          <a:blip r:embed="rId4">
+            <a:extLst>
+              <a:ext uri="{28A0092B-C50C-407E-A947-70E740481C1C}">
+                <a14:useLocalDpi xmlns:a14="http://schemas.microsoft.com/office/drawing/2010/main" val="0"/>
+              </a:ext>
+            </a:extLst>
+          </a:blip>
+          <a:stretch>
+            <a:fillRect/>
+          </a:stretch>
+        </p:blipFill>
+        <p:spPr>
+          <a:xfrm>
+            <a:off x="4355579" y="1699835"/>
+            <a:ext cx="866775" cy="1143000"/>
+          </a:xfrm>
+          <a:prstGeom prst="rect">
+            <a:avLst/>
+          </a:prstGeom>
+        </p:spPr>
+      </p:pic>
+      <p:sp>
+        <p:nvSpPr>
+          <p:cNvPr id="24" name="직사각형 23">
+            <a:extLst>
+              <a:ext uri="{FF2B5EF4-FFF2-40B4-BE49-F238E27FC236}">
+                <a16:creationId xmlns:a16="http://schemas.microsoft.com/office/drawing/2014/main" id="{2ED3EDD5-F3F9-ABD8-05BF-194F67419E15}"/>
+              </a:ext>
+            </a:extLst>
+          </p:cNvPr>
+          <p:cNvSpPr/>
+          <p:nvPr/>
+        </p:nvSpPr>
+        <p:spPr>
+          <a:xfrm>
+            <a:off x="4346343" y="1651106"/>
+            <a:ext cx="885247" cy="1210316"/>
+          </a:xfrm>
+          <a:prstGeom prst="rect">
+            <a:avLst/>
+          </a:prstGeom>
+          <a:noFill/>
+          <a:ln>
+            <a:solidFill>
+              <a:srgbClr val="FF0000"/>
+            </a:solidFill>
+          </a:ln>
+        </p:spPr>
+        <p:style>
+          <a:lnRef idx="2">
+            <a:schemeClr val="accent1">
+              <a:shade val="15000"/>
+            </a:schemeClr>
+          </a:lnRef>
+          <a:fillRef idx="1">
+            <a:schemeClr val="accent1"/>
+          </a:fillRef>
+          <a:effectRef idx="0">
+            <a:schemeClr val="accent1"/>
+          </a:effectRef>
+          <a:fontRef idx="minor">
+            <a:schemeClr val="lt1"/>
+          </a:fontRef>
+        </p:style>
+        <p:txBody>
+          <a:bodyPr rtlCol="0" anchor="ctr"/>
+          <a:lstStyle/>
+          <a:p>
+            <a:pPr algn="ctr"/>
+            <a:endParaRPr lang="ko-KR" altLang="en-US" b="1" dirty="0"/>
+          </a:p>
+        </p:txBody>
+      </p:sp>
+      <p:sp>
+        <p:nvSpPr>
+          <p:cNvPr id="25" name="직사각형 24">
+            <a:extLst>
+              <a:ext uri="{FF2B5EF4-FFF2-40B4-BE49-F238E27FC236}">
+                <a16:creationId xmlns:a16="http://schemas.microsoft.com/office/drawing/2014/main" id="{2FDD2EF0-075D-F709-95E5-06D95B955D74}"/>
+              </a:ext>
+            </a:extLst>
+          </p:cNvPr>
+          <p:cNvSpPr/>
+          <p:nvPr/>
+        </p:nvSpPr>
+        <p:spPr>
+          <a:xfrm>
+            <a:off x="4451930" y="3260436"/>
+            <a:ext cx="687300" cy="187035"/>
+          </a:xfrm>
+          <a:prstGeom prst="rect">
+            <a:avLst/>
+          </a:prstGeom>
+          <a:noFill/>
+          <a:ln>
+            <a:solidFill>
+              <a:srgbClr val="FF0000"/>
+            </a:solidFill>
+          </a:ln>
+        </p:spPr>
+        <p:style>
+          <a:lnRef idx="2">
+            <a:schemeClr val="accent1">
+              <a:shade val="15000"/>
+            </a:schemeClr>
+          </a:lnRef>
+          <a:fillRef idx="1">
+            <a:schemeClr val="accent1"/>
+          </a:fillRef>
+          <a:effectRef idx="0">
+            <a:schemeClr val="accent1"/>
+          </a:effectRef>
+          <a:fontRef idx="minor">
+            <a:schemeClr val="lt1"/>
+          </a:fontRef>
+        </p:style>
+        <p:txBody>
+          <a:bodyPr rtlCol="0" anchor="ctr"/>
+          <a:lstStyle/>
+          <a:p>
+            <a:pPr algn="ctr"/>
+            <a:endParaRPr lang="ko-KR" altLang="en-US" b="1" dirty="0"/>
+          </a:p>
+        </p:txBody>
+      </p:sp>
+      <p:cxnSp>
+        <p:nvCxnSpPr>
+          <p:cNvPr id="26" name="직선 화살표 연결선 25">
+            <a:extLst>
+              <a:ext uri="{FF2B5EF4-FFF2-40B4-BE49-F238E27FC236}">
+                <a16:creationId xmlns:a16="http://schemas.microsoft.com/office/drawing/2014/main" id="{893A3B10-0594-56BD-9277-412D3543F50A}"/>
+              </a:ext>
+            </a:extLst>
+          </p:cNvPr>
+          <p:cNvCxnSpPr>
+            <a:cxnSpLocks/>
+          </p:cNvCxnSpPr>
+          <p:nvPr/>
+        </p:nvCxnSpPr>
+        <p:spPr>
+          <a:xfrm>
+            <a:off x="4821381" y="2861422"/>
+            <a:ext cx="0" cy="399014"/>
+          </a:xfrm>
+          <a:prstGeom prst="straightConnector1">
+            <a:avLst/>
+          </a:prstGeom>
+          <a:ln>
+            <a:solidFill>
+              <a:srgbClr val="FF0000"/>
+            </a:solidFill>
+            <a:tailEnd type="triangle"/>
+          </a:ln>
+        </p:spPr>
+        <p:style>
+          <a:lnRef idx="2">
+            <a:schemeClr val="accent1"/>
+          </a:lnRef>
+          <a:fillRef idx="0">
+            <a:schemeClr val="accent1"/>
+          </a:fillRef>
+          <a:effectRef idx="1">
+            <a:schemeClr val="accent1"/>
+          </a:effectRef>
+          <a:fontRef idx="minor">
+            <a:schemeClr val="tx1"/>
+          </a:fontRef>
+        </p:style>
+      </p:cxnSp>
+      <p:cxnSp>
+        <p:nvCxnSpPr>
+          <p:cNvPr id="28" name="직선 화살표 연결선 27">
+            <a:extLst>
+              <a:ext uri="{FF2B5EF4-FFF2-40B4-BE49-F238E27FC236}">
+                <a16:creationId xmlns:a16="http://schemas.microsoft.com/office/drawing/2014/main" id="{78902772-088B-3141-B2D0-8959C65AB044}"/>
+              </a:ext>
+            </a:extLst>
+          </p:cNvPr>
+          <p:cNvCxnSpPr>
+            <a:cxnSpLocks/>
+            <a:endCxn id="4" idx="1"/>
+          </p:cNvCxnSpPr>
+          <p:nvPr/>
+        </p:nvCxnSpPr>
+        <p:spPr>
+          <a:xfrm flipV="1">
+            <a:off x="5139230" y="1161227"/>
+            <a:ext cx="1076843" cy="2161555"/>
+          </a:xfrm>
+          <a:prstGeom prst="straightConnector1">
+            <a:avLst/>
+          </a:prstGeom>
+          <a:ln>
+            <a:solidFill>
+              <a:srgbClr val="FF0000"/>
+            </a:solidFill>
+            <a:tailEnd type="triangle"/>
+          </a:ln>
+        </p:spPr>
+        <p:style>
+          <a:lnRef idx="2">
+            <a:schemeClr val="accent1"/>
+          </a:lnRef>
+          <a:fillRef idx="0">
+            <a:schemeClr val="accent1"/>
+          </a:fillRef>
+          <a:effectRef idx="1">
+            <a:schemeClr val="accent1"/>
+          </a:effectRef>
+          <a:fontRef idx="minor">
+            <a:schemeClr val="tx1"/>
+          </a:fontRef>
+        </p:style>
+      </p:cxnSp>
+      <p:graphicFrame>
+        <p:nvGraphicFramePr>
+          <p:cNvPr id="39" name="개체 38">
+            <a:extLst>
+              <a:ext uri="{FF2B5EF4-FFF2-40B4-BE49-F238E27FC236}">
+                <a16:creationId xmlns:a16="http://schemas.microsoft.com/office/drawing/2014/main" id="{DC1E0DDE-9828-1A96-CDB2-0F53D7D9DA5E}"/>
+              </a:ext>
+            </a:extLst>
+          </p:cNvPr>
+          <p:cNvGraphicFramePr>
+            <a:graphicFrameLocks noChangeAspect="1"/>
+          </p:cNvGraphicFramePr>
+          <p:nvPr>
+            <p:extLst>
+              <p:ext uri="{D42A27DB-BD31-4B8C-83A1-F6EECF244321}">
+                <p14:modId xmlns:p14="http://schemas.microsoft.com/office/powerpoint/2010/main" val="2080689300"/>
+              </p:ext>
+            </p:extLst>
+          </p:nvPr>
+        </p:nvGraphicFramePr>
+        <p:xfrm>
+          <a:off x="6312249" y="1318507"/>
+          <a:ext cx="5163931" cy="2904711"/>
+        </p:xfrm>
+        <a:graphic>
+          <a:graphicData uri="http://schemas.openxmlformats.org/presentationml/2006/ole">
+            <mc:AlternateContent xmlns:mc="http://schemas.openxmlformats.org/markup-compatibility/2006">
+              <mc:Choice xmlns:v="urn:schemas-microsoft-com:vml" Requires="v">
+                <p:oleObj name="Image" r:id="rId5" imgW="25802844" imgH="14514195" progId="Photoshop.Image.26">
+                  <p:embed/>
+                </p:oleObj>
+              </mc:Choice>
+              <mc:Fallback>
+                <p:oleObj name="Image" r:id="rId5" imgW="25802844" imgH="14514195" progId="Photoshop.Image.26">
+                  <p:embed/>
+                  <p:pic>
+                    <p:nvPicPr>
+                      <p:cNvPr id="39" name="개체 38">
+                        <a:extLst>
+                          <a:ext uri="{FF2B5EF4-FFF2-40B4-BE49-F238E27FC236}">
+                            <a16:creationId xmlns:a16="http://schemas.microsoft.com/office/drawing/2014/main" id="{7A0BC1A8-BCCF-61DB-B20A-02C663B8FF8B}"/>
+                          </a:ext>
+                        </a:extLst>
+                      </p:cNvPr>
+                      <p:cNvPicPr/>
+                      <p:nvPr/>
+                    </p:nvPicPr>
+                    <p:blipFill>
+                      <a:blip r:embed="rId6"/>
+                      <a:stretch>
+                        <a:fillRect/>
+                      </a:stretch>
+                    </p:blipFill>
+                    <p:spPr>
+                      <a:xfrm>
+                        <a:off x="6312249" y="1318507"/>
+                        <a:ext cx="5163931" cy="2904711"/>
+                      </a:xfrm>
+                      <a:prstGeom prst="rect">
+                        <a:avLst/>
+                      </a:prstGeom>
+                    </p:spPr>
+                  </p:pic>
+                </p:oleObj>
+              </mc:Fallback>
+            </mc:AlternateContent>
+          </a:graphicData>
+        </a:graphic>
+      </p:graphicFrame>
+      <p:sp>
+        <p:nvSpPr>
+          <p:cNvPr id="41" name="직사각형 40">
+            <a:extLst>
+              <a:ext uri="{FF2B5EF4-FFF2-40B4-BE49-F238E27FC236}">
+                <a16:creationId xmlns:a16="http://schemas.microsoft.com/office/drawing/2014/main" id="{C3308096-7B9D-708B-AC12-718E6ED5055D}"/>
+              </a:ext>
+            </a:extLst>
+          </p:cNvPr>
+          <p:cNvSpPr/>
+          <p:nvPr/>
+        </p:nvSpPr>
+        <p:spPr>
+          <a:xfrm>
+            <a:off x="6410036" y="3821249"/>
+            <a:ext cx="377076" cy="318655"/>
+          </a:xfrm>
+          <a:prstGeom prst="rect">
+            <a:avLst/>
+          </a:prstGeom>
+          <a:noFill/>
+          <a:ln>
+            <a:solidFill>
+              <a:srgbClr val="FF0000"/>
+            </a:solidFill>
+          </a:ln>
+        </p:spPr>
+        <p:style>
+          <a:lnRef idx="2">
+            <a:schemeClr val="accent1">
+              <a:shade val="15000"/>
+            </a:schemeClr>
+          </a:lnRef>
+          <a:fillRef idx="1">
+            <a:schemeClr val="accent1"/>
+          </a:fillRef>
+          <a:effectRef idx="0">
+            <a:schemeClr val="accent1"/>
+          </a:effectRef>
+          <a:fontRef idx="minor">
+            <a:schemeClr val="lt1"/>
+          </a:fontRef>
+        </p:style>
+        <p:txBody>
+          <a:bodyPr rtlCol="0" anchor="ctr"/>
+          <a:lstStyle/>
+          <a:p>
+            <a:pPr algn="ctr"/>
+            <a:endParaRPr lang="ko-KR" altLang="en-US" b="1" dirty="0"/>
+          </a:p>
+        </p:txBody>
+      </p:sp>
+      <p:cxnSp>
+        <p:nvCxnSpPr>
+          <p:cNvPr id="45" name="직선 화살표 연결선 44">
+            <a:extLst>
+              <a:ext uri="{FF2B5EF4-FFF2-40B4-BE49-F238E27FC236}">
+                <a16:creationId xmlns:a16="http://schemas.microsoft.com/office/drawing/2014/main" id="{966DB141-EA42-F7F4-B77D-F299D5525FFB}"/>
+              </a:ext>
+            </a:extLst>
+          </p:cNvPr>
+          <p:cNvCxnSpPr/>
+          <p:nvPr/>
+        </p:nvCxnSpPr>
+        <p:spPr>
+          <a:xfrm flipH="1">
+            <a:off x="5975927" y="3973649"/>
+            <a:ext cx="336322" cy="0"/>
+          </a:xfrm>
+          <a:prstGeom prst="straightConnector1">
+            <a:avLst/>
+          </a:prstGeom>
+          <a:ln>
+            <a:solidFill>
+              <a:srgbClr val="FF0000"/>
+            </a:solidFill>
+            <a:headEnd type="triangle"/>
+            <a:tailEnd type="triangle"/>
+          </a:ln>
+        </p:spPr>
+        <p:style>
+          <a:lnRef idx="2">
+            <a:schemeClr val="accent1"/>
+          </a:lnRef>
+          <a:fillRef idx="0">
+            <a:schemeClr val="accent1"/>
+          </a:fillRef>
+          <a:effectRef idx="1">
+            <a:schemeClr val="accent1"/>
+          </a:effectRef>
+          <a:fontRef idx="minor">
+            <a:schemeClr val="tx1"/>
+          </a:fontRef>
+        </p:style>
+      </p:cxnSp>
+      <p:pic>
+        <p:nvPicPr>
+          <p:cNvPr id="47" name="그림 46">
+            <a:extLst>
+              <a:ext uri="{FF2B5EF4-FFF2-40B4-BE49-F238E27FC236}">
+                <a16:creationId xmlns:a16="http://schemas.microsoft.com/office/drawing/2014/main" id="{FC339ED2-B713-AF13-EA58-B946FD5DBA95}"/>
+              </a:ext>
+            </a:extLst>
+          </p:cNvPr>
+          <p:cNvPicPr>
+            <a:picLocks noChangeAspect="1"/>
+          </p:cNvPicPr>
+          <p:nvPr/>
+        </p:nvPicPr>
+        <p:blipFill>
+          <a:blip r:embed="rId7">
+            <a:extLst>
+              <a:ext uri="{28A0092B-C50C-407E-A947-70E740481C1C}">
+                <a14:useLocalDpi xmlns:a14="http://schemas.microsoft.com/office/drawing/2010/main" val="0"/>
+              </a:ext>
+            </a:extLst>
+          </a:blip>
+          <a:stretch>
+            <a:fillRect/>
+          </a:stretch>
+        </p:blipFill>
+        <p:spPr>
+          <a:xfrm>
+            <a:off x="5731277" y="3880563"/>
+            <a:ext cx="171450" cy="200025"/>
+          </a:xfrm>
+          <a:prstGeom prst="rect">
+            <a:avLst/>
+          </a:prstGeom>
+        </p:spPr>
+      </p:pic>
+      <p:sp>
+        <p:nvSpPr>
+          <p:cNvPr id="48" name="TextBox 47">
+            <a:extLst>
+              <a:ext uri="{FF2B5EF4-FFF2-40B4-BE49-F238E27FC236}">
+                <a16:creationId xmlns:a16="http://schemas.microsoft.com/office/drawing/2014/main" id="{24FF3690-5250-828B-9A1D-045D21C64DEC}"/>
+              </a:ext>
+            </a:extLst>
+          </p:cNvPr>
+          <p:cNvSpPr txBox="1"/>
+          <p:nvPr/>
+        </p:nvSpPr>
+        <p:spPr>
+          <a:xfrm>
+            <a:off x="2136771" y="3832127"/>
+            <a:ext cx="3680231" cy="307777"/>
+          </a:xfrm>
+          <a:prstGeom prst="rect">
+            <a:avLst/>
+          </a:prstGeom>
+          <a:noFill/>
+        </p:spPr>
+        <p:txBody>
+          <a:bodyPr wrap="square" rtlCol="0">
+            <a:spAutoFit/>
+          </a:bodyPr>
+          <a:lstStyle/>
+          <a:p>
+            <a:r>
+              <a:rPr lang="ko-KR" altLang="en-US" sz="1400" dirty="0"/>
+              <a:t>유물 포함해서 덱 전체 보러 갔다 오기 기능</a:t>
+            </a:r>
+            <a:endParaRPr lang="en-US" altLang="ko-KR" sz="1400" dirty="0"/>
+          </a:p>
+        </p:txBody>
+      </p:sp>
+      <p:pic>
+        <p:nvPicPr>
+          <p:cNvPr id="50" name="그림 49">
+            <a:extLst>
+              <a:ext uri="{FF2B5EF4-FFF2-40B4-BE49-F238E27FC236}">
+                <a16:creationId xmlns:a16="http://schemas.microsoft.com/office/drawing/2014/main" id="{8A5EB558-BCD2-0FE1-14AE-6E52E430A5EA}"/>
+              </a:ext>
+            </a:extLst>
+          </p:cNvPr>
+          <p:cNvPicPr>
+            <a:picLocks noChangeAspect="1"/>
+          </p:cNvPicPr>
+          <p:nvPr/>
+        </p:nvPicPr>
+        <p:blipFill>
+          <a:blip r:embed="rId8">
+            <a:extLst>
+              <a:ext uri="{28A0092B-C50C-407E-A947-70E740481C1C}">
+                <a14:useLocalDpi xmlns:a14="http://schemas.microsoft.com/office/drawing/2010/main" val="0"/>
+              </a:ext>
+            </a:extLst>
+          </a:blip>
+          <a:stretch>
+            <a:fillRect/>
+          </a:stretch>
+        </p:blipFill>
+        <p:spPr>
+          <a:xfrm>
+            <a:off x="10902663" y="3991120"/>
+            <a:ext cx="361950" cy="142875"/>
+          </a:xfrm>
+          <a:prstGeom prst="rect">
+            <a:avLst/>
+          </a:prstGeom>
+        </p:spPr>
+      </p:pic>
+      <p:sp>
+        <p:nvSpPr>
+          <p:cNvPr id="51" name="직사각형 50">
+            <a:extLst>
+              <a:ext uri="{FF2B5EF4-FFF2-40B4-BE49-F238E27FC236}">
+                <a16:creationId xmlns:a16="http://schemas.microsoft.com/office/drawing/2014/main" id="{057A3D22-A27F-E777-9300-6B003067C628}"/>
+              </a:ext>
+            </a:extLst>
+          </p:cNvPr>
+          <p:cNvSpPr/>
+          <p:nvPr/>
+        </p:nvSpPr>
+        <p:spPr>
+          <a:xfrm>
+            <a:off x="10778836" y="3933970"/>
+            <a:ext cx="557557" cy="271686"/>
+          </a:xfrm>
+          <a:prstGeom prst="rect">
+            <a:avLst/>
+          </a:prstGeom>
+          <a:noFill/>
+          <a:ln>
+            <a:solidFill>
+              <a:srgbClr val="FF0000"/>
+            </a:solidFill>
+          </a:ln>
+        </p:spPr>
+        <p:style>
+          <a:lnRef idx="2">
+            <a:schemeClr val="accent1">
+              <a:shade val="15000"/>
+            </a:schemeClr>
+          </a:lnRef>
+          <a:fillRef idx="1">
+            <a:schemeClr val="accent1"/>
+          </a:fillRef>
+          <a:effectRef idx="0">
+            <a:schemeClr val="accent1"/>
+          </a:effectRef>
+          <a:fontRef idx="minor">
+            <a:schemeClr val="lt1"/>
+          </a:fontRef>
+        </p:style>
+        <p:txBody>
+          <a:bodyPr rtlCol="0" anchor="ctr"/>
+          <a:lstStyle/>
+          <a:p>
+            <a:pPr algn="ctr"/>
+            <a:endParaRPr lang="ko-KR" altLang="en-US" b="1" dirty="0"/>
+          </a:p>
+        </p:txBody>
+      </p:sp>
+      <p:cxnSp>
+        <p:nvCxnSpPr>
+          <p:cNvPr id="52" name="직선 화살표 연결선 51">
+            <a:extLst>
+              <a:ext uri="{FF2B5EF4-FFF2-40B4-BE49-F238E27FC236}">
+                <a16:creationId xmlns:a16="http://schemas.microsoft.com/office/drawing/2014/main" id="{06695881-429A-EF4B-E73E-3A2C5752C147}"/>
+              </a:ext>
+            </a:extLst>
+          </p:cNvPr>
+          <p:cNvCxnSpPr>
+            <a:cxnSpLocks/>
+          </p:cNvCxnSpPr>
+          <p:nvPr/>
+        </p:nvCxnSpPr>
+        <p:spPr>
+          <a:xfrm>
+            <a:off x="11044785" y="4193311"/>
+            <a:ext cx="0" cy="1193447"/>
+          </a:xfrm>
+          <a:prstGeom prst="straightConnector1">
+            <a:avLst/>
+          </a:prstGeom>
+          <a:ln>
+            <a:solidFill>
+              <a:srgbClr val="FF0000"/>
+            </a:solidFill>
+            <a:tailEnd type="triangle"/>
+          </a:ln>
+        </p:spPr>
+        <p:style>
+          <a:lnRef idx="2">
+            <a:schemeClr val="accent1"/>
+          </a:lnRef>
+          <a:fillRef idx="0">
+            <a:schemeClr val="accent1"/>
+          </a:fillRef>
+          <a:effectRef idx="1">
+            <a:schemeClr val="accent1"/>
+          </a:effectRef>
+          <a:fontRef idx="minor">
+            <a:schemeClr val="tx1"/>
+          </a:fontRef>
+        </p:style>
+      </p:cxnSp>
+      <p:sp>
+        <p:nvSpPr>
+          <p:cNvPr id="34" name="TextBox 33">
+            <a:extLst>
+              <a:ext uri="{FF2B5EF4-FFF2-40B4-BE49-F238E27FC236}">
+                <a16:creationId xmlns:a16="http://schemas.microsoft.com/office/drawing/2014/main" id="{664D59E4-DA5F-ECF3-3718-5D333120F1A0}"/>
+              </a:ext>
+            </a:extLst>
+          </p:cNvPr>
+          <p:cNvSpPr txBox="1"/>
+          <p:nvPr/>
+        </p:nvSpPr>
+        <p:spPr>
+          <a:xfrm>
+            <a:off x="6216073" y="4262806"/>
+            <a:ext cx="5805054" cy="954107"/>
+          </a:xfrm>
+          <a:prstGeom prst="rect">
+            <a:avLst/>
+          </a:prstGeom>
+          <a:noFill/>
+        </p:spPr>
+        <p:txBody>
+          <a:bodyPr wrap="square" rtlCol="0">
+            <a:spAutoFit/>
+          </a:bodyPr>
+          <a:lstStyle/>
+          <a:p>
+            <a:r>
+              <a:rPr lang="ko-KR" altLang="en-US" sz="1400" dirty="0"/>
+              <a:t>창 이름 </a:t>
+            </a:r>
+            <a:r>
+              <a:rPr lang="en-US" altLang="ko-KR" sz="1400" dirty="0"/>
+              <a:t>‘Delete’</a:t>
+            </a:r>
+            <a:r>
+              <a:rPr lang="ko-KR" altLang="en-US" sz="1400" dirty="0"/>
+              <a:t>로 표기</a:t>
+            </a:r>
+            <a:br>
+              <a:rPr lang="en-US" altLang="ko-KR" sz="1400" dirty="0"/>
+            </a:br>
+            <a:r>
+              <a:rPr lang="ko-KR" altLang="en-US" sz="1400" dirty="0"/>
+              <a:t>해당 카드가 </a:t>
+            </a:r>
+            <a:r>
+              <a:rPr lang="ko-KR" altLang="en-US" sz="1400" dirty="0" err="1"/>
+              <a:t>덱의</a:t>
+            </a:r>
+            <a:r>
+              <a:rPr lang="ko-KR" altLang="en-US" sz="1400" dirty="0"/>
+              <a:t> 마지막 한 장인 경우</a:t>
+            </a:r>
+            <a:r>
+              <a:rPr lang="en-US" altLang="ko-KR" sz="1400" dirty="0"/>
+              <a:t>, </a:t>
+            </a:r>
+            <a:r>
+              <a:rPr lang="ko-KR" altLang="en-US" sz="1400" dirty="0"/>
+              <a:t>혹은 카드의 태그 등으로 카드가 제거 불가능한 효과를 가지고 있다면</a:t>
+            </a:r>
+            <a:r>
+              <a:rPr lang="en-US" altLang="ko-KR" sz="1400" dirty="0"/>
+              <a:t>,</a:t>
+            </a:r>
+            <a:r>
+              <a:rPr lang="ko-KR" altLang="en-US" sz="1400" dirty="0"/>
+              <a:t> </a:t>
+            </a:r>
+            <a:r>
+              <a:rPr lang="en-US" altLang="ko-KR" sz="1400" dirty="0"/>
+              <a:t>“</a:t>
+            </a:r>
+            <a:r>
+              <a:rPr lang="ko-KR" altLang="en-US" sz="1400" dirty="0"/>
+              <a:t>제거 불가</a:t>
+            </a:r>
+            <a:r>
+              <a:rPr lang="en-US" altLang="ko-KR" sz="1400" dirty="0"/>
+              <a:t>”</a:t>
+            </a:r>
+            <a:r>
+              <a:rPr lang="ko-KR" altLang="en-US" sz="1400" dirty="0"/>
+              <a:t>로 표기하고 뒤로 정렬</a:t>
+            </a:r>
+            <a:r>
+              <a:rPr lang="en-US" altLang="ko-KR" sz="1400" dirty="0"/>
+              <a:t>.</a:t>
+            </a:r>
+          </a:p>
+        </p:txBody>
+      </p:sp>
+      <p:sp>
+        <p:nvSpPr>
+          <p:cNvPr id="55" name="TextBox 54">
+            <a:extLst>
+              <a:ext uri="{FF2B5EF4-FFF2-40B4-BE49-F238E27FC236}">
+                <a16:creationId xmlns:a16="http://schemas.microsoft.com/office/drawing/2014/main" id="{D439C55C-5373-8256-7E48-BE923E8CD656}"/>
+              </a:ext>
+            </a:extLst>
+          </p:cNvPr>
+          <p:cNvSpPr txBox="1"/>
+          <p:nvPr/>
+        </p:nvSpPr>
+        <p:spPr>
+          <a:xfrm>
+            <a:off x="8821794" y="5386758"/>
+            <a:ext cx="3587260" cy="1169551"/>
+          </a:xfrm>
+          <a:prstGeom prst="rect">
+            <a:avLst/>
+          </a:prstGeom>
+          <a:noFill/>
+        </p:spPr>
+        <p:txBody>
+          <a:bodyPr wrap="square" rtlCol="0">
+            <a:spAutoFit/>
+          </a:bodyPr>
+          <a:lstStyle/>
+          <a:p>
+            <a:r>
+              <a:rPr lang="ko-KR" altLang="en-US" sz="1400" dirty="0"/>
+              <a:t>제거 가능한 카드가 없거나</a:t>
+            </a:r>
+            <a:r>
+              <a:rPr lang="en-US" altLang="ko-KR" sz="1400" dirty="0"/>
+              <a:t>(1</a:t>
+            </a:r>
+            <a:r>
+              <a:rPr lang="ko-KR" altLang="en-US" sz="1400" dirty="0" err="1"/>
+              <a:t>장밖에</a:t>
+            </a:r>
+            <a:r>
+              <a:rPr lang="ko-KR" altLang="en-US" sz="1400" dirty="0"/>
+              <a:t> 없거나</a:t>
+            </a:r>
+            <a:r>
+              <a:rPr lang="en-US" altLang="ko-KR" sz="1400" dirty="0"/>
+              <a:t>), </a:t>
+            </a:r>
+            <a:r>
+              <a:rPr lang="ko-KR" altLang="en-US" sz="1400" dirty="0"/>
+              <a:t>제거할 생각이 사라졌을 때를 위한 </a:t>
+            </a:r>
+            <a:r>
+              <a:rPr lang="en-US" altLang="ko-KR" sz="1400" dirty="0"/>
+              <a:t>Skip.</a:t>
+            </a:r>
+          </a:p>
+          <a:p>
+            <a:r>
+              <a:rPr lang="ko-KR" altLang="en-US" sz="1400" dirty="0"/>
+              <a:t>강화하지 않았다고 해서</a:t>
+            </a:r>
+            <a:endParaRPr lang="en-US" altLang="ko-KR" sz="1400" dirty="0"/>
+          </a:p>
+          <a:p>
+            <a:r>
+              <a:rPr lang="ko-KR" altLang="en-US" sz="1400" dirty="0"/>
+              <a:t>보상 선택</a:t>
+            </a:r>
+            <a:r>
+              <a:rPr lang="en-US" altLang="ko-KR" sz="1400" dirty="0"/>
+              <a:t>/</a:t>
+            </a:r>
+            <a:r>
+              <a:rPr lang="ko-KR" altLang="en-US" sz="1400" dirty="0"/>
+              <a:t>구매 전으로 돌아갈 수는 없다</a:t>
+            </a:r>
+            <a:r>
+              <a:rPr lang="en-US" altLang="ko-KR" sz="1400" dirty="0"/>
+              <a:t>.</a:t>
+            </a:r>
+          </a:p>
+        </p:txBody>
+      </p:sp>
+      <p:sp>
+        <p:nvSpPr>
+          <p:cNvPr id="56" name="직사각형 55">
+            <a:extLst>
+              <a:ext uri="{FF2B5EF4-FFF2-40B4-BE49-F238E27FC236}">
+                <a16:creationId xmlns:a16="http://schemas.microsoft.com/office/drawing/2014/main" id="{F12368C6-5BDE-6A74-3D6B-A348603A4FCA}"/>
+              </a:ext>
+            </a:extLst>
+          </p:cNvPr>
+          <p:cNvSpPr/>
+          <p:nvPr/>
+        </p:nvSpPr>
+        <p:spPr>
+          <a:xfrm>
+            <a:off x="7458363" y="1772143"/>
+            <a:ext cx="595746" cy="675495"/>
+          </a:xfrm>
+          <a:prstGeom prst="rect">
+            <a:avLst/>
+          </a:prstGeom>
+          <a:noFill/>
+          <a:ln>
+            <a:solidFill>
+              <a:srgbClr val="FF0000"/>
+            </a:solidFill>
+          </a:ln>
+        </p:spPr>
+        <p:style>
+          <a:lnRef idx="2">
+            <a:schemeClr val="accent1">
+              <a:shade val="15000"/>
+            </a:schemeClr>
+          </a:lnRef>
+          <a:fillRef idx="1">
+            <a:schemeClr val="accent1"/>
+          </a:fillRef>
+          <a:effectRef idx="0">
+            <a:schemeClr val="accent1"/>
+          </a:effectRef>
+          <a:fontRef idx="minor">
+            <a:schemeClr val="lt1"/>
+          </a:fontRef>
+        </p:style>
+        <p:txBody>
+          <a:bodyPr rtlCol="0" anchor="ctr"/>
+          <a:lstStyle/>
+          <a:p>
+            <a:pPr algn="ctr"/>
+            <a:endParaRPr lang="ko-KR" altLang="en-US" b="1" dirty="0"/>
+          </a:p>
+        </p:txBody>
+      </p:sp>
+      <p:cxnSp>
+        <p:nvCxnSpPr>
+          <p:cNvPr id="57" name="직선 화살표 연결선 56">
+            <a:extLst>
+              <a:ext uri="{FF2B5EF4-FFF2-40B4-BE49-F238E27FC236}">
+                <a16:creationId xmlns:a16="http://schemas.microsoft.com/office/drawing/2014/main" id="{85F1BFF7-BC8D-235B-5FBB-05F97E9B2FD5}"/>
+              </a:ext>
+            </a:extLst>
+          </p:cNvPr>
+          <p:cNvCxnSpPr>
+            <a:cxnSpLocks/>
+          </p:cNvCxnSpPr>
+          <p:nvPr/>
+        </p:nvCxnSpPr>
+        <p:spPr>
+          <a:xfrm flipH="1">
+            <a:off x="5250062" y="2447638"/>
+            <a:ext cx="2208301" cy="2103713"/>
+          </a:xfrm>
+          <a:prstGeom prst="straightConnector1">
+            <a:avLst/>
+          </a:prstGeom>
+          <a:ln>
+            <a:solidFill>
+              <a:srgbClr val="FF0000"/>
+            </a:solidFill>
+            <a:tailEnd type="triangle"/>
+          </a:ln>
+        </p:spPr>
+        <p:style>
+          <a:lnRef idx="2">
+            <a:schemeClr val="accent1"/>
+          </a:lnRef>
+          <a:fillRef idx="0">
+            <a:schemeClr val="accent1"/>
+          </a:fillRef>
+          <a:effectRef idx="1">
+            <a:schemeClr val="accent1"/>
+          </a:effectRef>
+          <a:fontRef idx="minor">
+            <a:schemeClr val="tx1"/>
+          </a:fontRef>
+        </p:style>
+      </p:cxnSp>
+      <p:sp>
+        <p:nvSpPr>
+          <p:cNvPr id="61" name="TextBox 60">
+            <a:extLst>
+              <a:ext uri="{FF2B5EF4-FFF2-40B4-BE49-F238E27FC236}">
+                <a16:creationId xmlns:a16="http://schemas.microsoft.com/office/drawing/2014/main" id="{33CC4F49-3351-D40C-A511-A90F99B10BBC}"/>
+              </a:ext>
+            </a:extLst>
+          </p:cNvPr>
+          <p:cNvSpPr txBox="1"/>
+          <p:nvPr/>
+        </p:nvSpPr>
+        <p:spPr>
+          <a:xfrm>
+            <a:off x="5222354" y="5256501"/>
+            <a:ext cx="3367464" cy="1600438"/>
+          </a:xfrm>
+          <a:prstGeom prst="rect">
+            <a:avLst/>
+          </a:prstGeom>
+          <a:noFill/>
+        </p:spPr>
+        <p:txBody>
+          <a:bodyPr wrap="square" rtlCol="0">
+            <a:spAutoFit/>
+          </a:bodyPr>
+          <a:lstStyle/>
+          <a:p>
+            <a:r>
+              <a:rPr lang="ko-KR" altLang="en-US" sz="1400" dirty="0"/>
+              <a:t>활성화된 카드 클릭 시</a:t>
+            </a:r>
+            <a:r>
+              <a:rPr lang="en-US" altLang="ko-KR" sz="1400" dirty="0"/>
+              <a:t>,</a:t>
+            </a:r>
+          </a:p>
+          <a:p>
+            <a:r>
+              <a:rPr lang="ko-KR" altLang="en-US" sz="1400" dirty="0"/>
+              <a:t>삭제할 카드를 강조하여</a:t>
+            </a:r>
+            <a:endParaRPr lang="en-US" altLang="ko-KR" sz="1400" dirty="0"/>
+          </a:p>
+          <a:p>
+            <a:r>
+              <a:rPr lang="ko-KR" altLang="en-US" sz="1400" dirty="0"/>
+              <a:t>띄워주고 제거 여부를 물어봄</a:t>
+            </a:r>
+            <a:endParaRPr lang="en-US" altLang="ko-KR" sz="1400" dirty="0"/>
+          </a:p>
+          <a:p>
+            <a:r>
+              <a:rPr lang="ko-KR" altLang="en-US" sz="1400" dirty="0"/>
+              <a:t>취소 </a:t>
+            </a:r>
+            <a:r>
+              <a:rPr lang="en-US" altLang="ko-KR" sz="1400" dirty="0"/>
+              <a:t>: </a:t>
+            </a:r>
+            <a:r>
+              <a:rPr lang="ko-KR" altLang="en-US" sz="1400" dirty="0"/>
+              <a:t>카드를 클릭하기 전의 </a:t>
+            </a:r>
+            <a:r>
+              <a:rPr lang="en-US" altLang="ko-KR" sz="1400" dirty="0"/>
+              <a:t>DELETE </a:t>
+            </a:r>
+            <a:r>
+              <a:rPr lang="ko-KR" altLang="en-US" sz="1400" dirty="0"/>
+              <a:t>팝업으로 돌아옴</a:t>
+            </a:r>
+            <a:endParaRPr lang="en-US" altLang="ko-KR" sz="1400" dirty="0"/>
+          </a:p>
+          <a:p>
+            <a:r>
+              <a:rPr lang="ko-KR" altLang="en-US" sz="1400" dirty="0"/>
+              <a:t>확인 </a:t>
+            </a:r>
+            <a:r>
+              <a:rPr lang="en-US" altLang="ko-KR" sz="1400" dirty="0"/>
+              <a:t>: </a:t>
+            </a:r>
+            <a:r>
+              <a:rPr lang="ko-KR" altLang="en-US" sz="1400" dirty="0"/>
+              <a:t>해당 카드 강화 후</a:t>
+            </a:r>
+            <a:r>
+              <a:rPr lang="en-US" altLang="ko-KR" sz="1400" dirty="0"/>
+              <a:t>,</a:t>
+            </a:r>
+            <a:r>
+              <a:rPr lang="ko-KR" altLang="en-US" sz="1400" dirty="0"/>
+              <a:t> 다음 단계로 넘어 감</a:t>
+            </a:r>
+            <a:r>
+              <a:rPr lang="en-US" altLang="ko-KR" sz="1400" dirty="0"/>
+              <a:t>.</a:t>
+            </a:r>
+          </a:p>
+        </p:txBody>
+      </p:sp>
+      <p:pic>
+        <p:nvPicPr>
+          <p:cNvPr id="5" name="그림 4">
+            <a:extLst>
+              <a:ext uri="{FF2B5EF4-FFF2-40B4-BE49-F238E27FC236}">
+                <a16:creationId xmlns:a16="http://schemas.microsoft.com/office/drawing/2014/main" id="{5D6AFCF8-E1DD-3B85-7561-8D8B54123206}"/>
+              </a:ext>
+            </a:extLst>
+          </p:cNvPr>
+          <p:cNvPicPr>
+            <a:picLocks noChangeAspect="1"/>
+          </p:cNvPicPr>
+          <p:nvPr/>
+        </p:nvPicPr>
+        <p:blipFill>
+          <a:blip r:embed="rId9">
+            <a:extLst>
+              <a:ext uri="{28A0092B-C50C-407E-A947-70E740481C1C}">
+                <a14:useLocalDpi xmlns:a14="http://schemas.microsoft.com/office/drawing/2010/main" val="0"/>
+              </a:ext>
+            </a:extLst>
+          </a:blip>
+          <a:stretch>
+            <a:fillRect/>
+          </a:stretch>
+        </p:blipFill>
+        <p:spPr>
+          <a:xfrm>
+            <a:off x="411142" y="572655"/>
+            <a:ext cx="304678" cy="304678"/>
+          </a:xfrm>
+          <a:prstGeom prst="rect">
+            <a:avLst/>
+          </a:prstGeom>
+        </p:spPr>
+      </p:pic>
+      <p:pic>
+        <p:nvPicPr>
+          <p:cNvPr id="6" name="그림 5">
+            <a:extLst>
+              <a:ext uri="{FF2B5EF4-FFF2-40B4-BE49-F238E27FC236}">
+                <a16:creationId xmlns:a16="http://schemas.microsoft.com/office/drawing/2014/main" id="{EB47327A-EF12-74DD-372A-AAF8E7E96463}"/>
+              </a:ext>
+            </a:extLst>
+          </p:cNvPr>
+          <p:cNvPicPr>
+            <a:picLocks noChangeAspect="1"/>
+          </p:cNvPicPr>
+          <p:nvPr/>
+        </p:nvPicPr>
+        <p:blipFill>
+          <a:blip r:embed="rId9">
+            <a:extLst>
+              <a:ext uri="{28A0092B-C50C-407E-A947-70E740481C1C}">
+                <a14:useLocalDpi xmlns:a14="http://schemas.microsoft.com/office/drawing/2010/main" val="0"/>
+              </a:ext>
+            </a:extLst>
+          </a:blip>
+          <a:stretch>
+            <a:fillRect/>
+          </a:stretch>
+        </p:blipFill>
+        <p:spPr>
+          <a:xfrm>
+            <a:off x="4654505" y="1840732"/>
+            <a:ext cx="296184" cy="296184"/>
+          </a:xfrm>
+          <a:prstGeom prst="rect">
+            <a:avLst/>
+          </a:prstGeom>
+        </p:spPr>
+      </p:pic>
+      <p:graphicFrame>
+        <p:nvGraphicFramePr>
+          <p:cNvPr id="11" name="개체 10">
+            <a:extLst>
+              <a:ext uri="{FF2B5EF4-FFF2-40B4-BE49-F238E27FC236}">
+                <a16:creationId xmlns:a16="http://schemas.microsoft.com/office/drawing/2014/main" id="{8E893AEB-2F1A-C3CE-778E-5A107915E2FD}"/>
+              </a:ext>
+            </a:extLst>
+          </p:cNvPr>
+          <p:cNvGraphicFramePr>
+            <a:graphicFrameLocks noChangeAspect="1"/>
+          </p:cNvGraphicFramePr>
+          <p:nvPr>
+            <p:extLst>
+              <p:ext uri="{D42A27DB-BD31-4B8C-83A1-F6EECF244321}">
+                <p14:modId xmlns:p14="http://schemas.microsoft.com/office/powerpoint/2010/main" val="4110603268"/>
+              </p:ext>
+            </p:extLst>
+          </p:nvPr>
+        </p:nvGraphicFramePr>
+        <p:xfrm>
+          <a:off x="1242609" y="4598390"/>
+          <a:ext cx="3863757" cy="2173363"/>
+        </p:xfrm>
+        <a:graphic>
+          <a:graphicData uri="http://schemas.openxmlformats.org/presentationml/2006/ole">
+            <mc:AlternateContent xmlns:mc="http://schemas.openxmlformats.org/markup-compatibility/2006">
+              <mc:Choice xmlns:v="urn:schemas-microsoft-com:vml" Requires="v">
+                <p:oleObj name="Image" r:id="rId10" imgW="25802844" imgH="14514195" progId="Photoshop.Image.26">
+                  <p:embed/>
+                </p:oleObj>
+              </mc:Choice>
+              <mc:Fallback>
+                <p:oleObj name="Image" r:id="rId10" imgW="25802844" imgH="14514195" progId="Photoshop.Image.26">
+                  <p:embed/>
+                  <p:pic>
+                    <p:nvPicPr>
+                      <p:cNvPr id="0" name=""/>
+                      <p:cNvPicPr/>
+                      <p:nvPr/>
+                    </p:nvPicPr>
+                    <p:blipFill>
+                      <a:blip r:embed="rId11"/>
+                      <a:stretch>
+                        <a:fillRect/>
+                      </a:stretch>
+                    </p:blipFill>
+                    <p:spPr>
+                      <a:xfrm>
+                        <a:off x="1242609" y="4598390"/>
+                        <a:ext cx="3863757" cy="2173363"/>
+                      </a:xfrm>
+                      <a:prstGeom prst="rect">
+                        <a:avLst/>
+                      </a:prstGeom>
+                    </p:spPr>
+                  </p:pic>
+                </p:oleObj>
+              </mc:Fallback>
+            </mc:AlternateContent>
+          </a:graphicData>
+        </a:graphic>
+      </p:graphicFrame>
+    </p:spTree>
+    <p:extLst>
+      <p:ext uri="{BB962C8B-B14F-4D97-AF65-F5344CB8AC3E}">
+        <p14:creationId xmlns:p14="http://schemas.microsoft.com/office/powerpoint/2010/main" val="695963039"/>
       </p:ext>
     </p:extLst>
   </p:cSld>

--- a/Plan/기획서/땅부수기2026 ch2.pptx
+++ b/Plan/기획서/땅부수기2026 ch2.pptx
@@ -7556,8 +7556,8 @@
         </p:nvSpPr>
         <p:spPr>
           <a:xfrm>
-            <a:off x="11455400" y="1618089"/>
-            <a:ext cx="975250" cy="3108543"/>
+            <a:off x="11446164" y="2218453"/>
+            <a:ext cx="975250" cy="1815882"/>
           </a:xfrm>
           <a:prstGeom prst="rect">
             <a:avLst/>
@@ -7571,232 +7571,71 @@
           <a:lstStyle/>
           <a:p>
             <a:r>
-              <a:rPr lang="ko-KR" altLang="en-US" sz="1400" dirty="0">
-                <a:solidFill>
-                  <a:schemeClr val="accent2"/>
-                </a:solidFill>
-              </a:rPr>
-              <a:t>팝업을</a:t>
-            </a:r>
-            <a:endParaRPr lang="en-US" altLang="ko-KR" sz="1400" dirty="0">
-              <a:solidFill>
-                <a:schemeClr val="accent2"/>
-              </a:solidFill>
-            </a:endParaRPr>
-          </a:p>
-          <a:p>
-            <a:r>
-              <a:rPr lang="ko-KR" altLang="en-US" sz="1400" dirty="0">
-                <a:solidFill>
-                  <a:schemeClr val="accent2"/>
-                </a:solidFill>
-              </a:rPr>
-              <a:t>살짝 좌</a:t>
-            </a:r>
-            <a:endParaRPr lang="en-US" altLang="ko-KR" sz="1400" dirty="0">
-              <a:solidFill>
-                <a:schemeClr val="accent2"/>
-              </a:solidFill>
-            </a:endParaRPr>
-          </a:p>
-          <a:p>
-            <a:r>
-              <a:rPr lang="ko-KR" altLang="en-US" sz="1400" dirty="0">
-                <a:solidFill>
-                  <a:schemeClr val="accent2"/>
-                </a:solidFill>
-              </a:rPr>
-              <a:t>로</a:t>
-            </a:r>
-            <a:r>
-              <a:rPr lang="en-US" altLang="ko-KR" sz="1400" dirty="0">
-                <a:solidFill>
-                  <a:schemeClr val="accent2"/>
-                </a:solidFill>
-              </a:rPr>
+              <a:rPr lang="ko-KR" altLang="en-US" sz="1400" dirty="0"/>
+              <a:t>이 자리</a:t>
+            </a:r>
+            <a:endParaRPr lang="en-US" altLang="ko-KR" sz="1400" dirty="0"/>
+          </a:p>
+          <a:p>
+            <a:r>
+              <a:rPr lang="ko-KR" altLang="en-US" sz="1400" dirty="0" err="1"/>
+              <a:t>에</a:t>
+            </a:r>
+            <a:r>
+              <a:rPr lang="ko-KR" altLang="en-US" sz="1400" dirty="0"/>
               <a:t> </a:t>
             </a:r>
             <a:r>
-              <a:rPr lang="ko-KR" altLang="en-US" sz="1400" dirty="0">
-                <a:solidFill>
-                  <a:schemeClr val="accent2"/>
-                </a:solidFill>
-              </a:rPr>
-              <a:t>배치</a:t>
-            </a:r>
-            <a:endParaRPr lang="en-US" altLang="ko-KR" sz="1400" dirty="0">
-              <a:solidFill>
-                <a:schemeClr val="accent2"/>
-              </a:solidFill>
-            </a:endParaRPr>
-          </a:p>
-          <a:p>
-            <a:r>
-              <a:rPr lang="ko-KR" altLang="en-US" sz="1400" dirty="0">
-                <a:solidFill>
-                  <a:schemeClr val="accent2"/>
-                </a:solidFill>
-              </a:rPr>
-              <a:t>하고 이</a:t>
-            </a:r>
-            <a:endParaRPr lang="en-US" altLang="ko-KR" sz="1400" dirty="0">
-              <a:solidFill>
-                <a:schemeClr val="accent2"/>
-              </a:solidFill>
-            </a:endParaRPr>
-          </a:p>
-          <a:p>
-            <a:r>
-              <a:rPr lang="ko-KR" altLang="en-US" sz="1400" dirty="0">
-                <a:solidFill>
-                  <a:schemeClr val="accent2"/>
-                </a:solidFill>
-              </a:rPr>
-              <a:t>공간 못</a:t>
-            </a:r>
-            <a:endParaRPr lang="en-US" altLang="ko-KR" sz="1400" dirty="0">
-              <a:solidFill>
-                <a:schemeClr val="accent2"/>
-              </a:solidFill>
-            </a:endParaRPr>
-          </a:p>
-          <a:p>
-            <a:r>
-              <a:rPr lang="ko-KR" altLang="en-US" sz="1400" dirty="0" err="1">
-                <a:solidFill>
-                  <a:schemeClr val="accent2"/>
-                </a:solidFill>
-              </a:rPr>
-              <a:t>쓰려나</a:t>
-            </a:r>
-            <a:r>
-              <a:rPr lang="en-US" altLang="ko-KR" sz="1400" dirty="0">
-                <a:solidFill>
-                  <a:schemeClr val="accent2"/>
-                </a:solidFill>
-              </a:rPr>
-              <a:t>?</a:t>
-            </a:r>
-          </a:p>
-          <a:p>
-            <a:r>
-              <a:rPr lang="en-US" altLang="ko-KR" sz="1400" dirty="0">
-                <a:solidFill>
-                  <a:schemeClr val="accent2"/>
-                </a:solidFill>
-              </a:rPr>
-              <a:t>AD</a:t>
-            </a:r>
-            <a:r>
-              <a:rPr lang="ko-KR" altLang="en-US" sz="1400" dirty="0">
-                <a:solidFill>
-                  <a:schemeClr val="accent2"/>
-                </a:solidFill>
-              </a:rPr>
-              <a:t>와 상</a:t>
-            </a:r>
-            <a:endParaRPr lang="en-US" altLang="ko-KR" sz="1400" dirty="0">
-              <a:solidFill>
-                <a:schemeClr val="accent2"/>
-              </a:solidFill>
-            </a:endParaRPr>
-          </a:p>
-          <a:p>
-            <a:r>
-              <a:rPr lang="ko-KR" altLang="en-US" sz="1400" dirty="0">
-                <a:solidFill>
-                  <a:schemeClr val="accent2"/>
-                </a:solidFill>
-              </a:rPr>
-              <a:t>의</a:t>
-            </a:r>
-            <a:endParaRPr lang="en-US" altLang="ko-KR" sz="1400" dirty="0">
-              <a:solidFill>
-                <a:schemeClr val="accent2"/>
-              </a:solidFill>
-            </a:endParaRPr>
-          </a:p>
-          <a:p>
-            <a:endParaRPr lang="en-US" altLang="ko-KR" sz="1400" dirty="0">
-              <a:solidFill>
-                <a:schemeClr val="accent2"/>
-              </a:solidFill>
-            </a:endParaRPr>
-          </a:p>
-          <a:p>
-            <a:r>
-              <a:rPr lang="ko-KR" altLang="en-US" sz="1400" dirty="0" err="1">
-                <a:solidFill>
-                  <a:schemeClr val="accent2"/>
-                </a:solidFill>
-              </a:rPr>
-              <a:t>대신귀</a:t>
-            </a:r>
-            <a:endParaRPr lang="en-US" altLang="ko-KR" sz="1400" dirty="0">
-              <a:solidFill>
-                <a:schemeClr val="accent2"/>
-              </a:solidFill>
-            </a:endParaRPr>
-          </a:p>
-          <a:p>
-            <a:r>
-              <a:rPr lang="ko-KR" altLang="en-US" sz="1400" dirty="0" err="1">
-                <a:solidFill>
-                  <a:schemeClr val="accent2"/>
-                </a:solidFill>
-              </a:rPr>
-              <a:t>여운알</a:t>
-            </a:r>
-            <a:endParaRPr lang="en-US" altLang="ko-KR" sz="1400" dirty="0">
-              <a:solidFill>
-                <a:schemeClr val="accent2"/>
-              </a:solidFill>
-            </a:endParaRPr>
-          </a:p>
-          <a:p>
-            <a:r>
-              <a:rPr lang="ko-KR" altLang="en-US" sz="1400" dirty="0">
-                <a:solidFill>
-                  <a:schemeClr val="accent2"/>
-                </a:solidFill>
-              </a:rPr>
-              <a:t>파카를</a:t>
-            </a:r>
-            <a:endParaRPr lang="en-US" altLang="ko-KR" sz="1400" dirty="0">
-              <a:solidFill>
-                <a:schemeClr val="accent2"/>
-              </a:solidFill>
-            </a:endParaRPr>
-          </a:p>
-          <a:p>
-            <a:r>
-              <a:rPr lang="ko-KR" altLang="en-US" sz="1400" dirty="0" err="1">
-                <a:solidFill>
-                  <a:schemeClr val="accent2"/>
-                </a:solidFill>
-              </a:rPr>
-              <a:t>드리겟</a:t>
-            </a:r>
-            <a:endParaRPr lang="en-US" altLang="ko-KR" sz="1400" dirty="0">
-              <a:solidFill>
-                <a:schemeClr val="accent2"/>
-              </a:solidFill>
-            </a:endParaRPr>
-          </a:p>
-          <a:p>
-            <a:r>
-              <a:rPr lang="ko-KR" altLang="en-US" sz="1400" dirty="0">
-                <a:solidFill>
-                  <a:schemeClr val="accent2"/>
-                </a:solidFill>
-              </a:rPr>
-              <a:t>습니다</a:t>
-            </a:r>
-            <a:endParaRPr lang="en-US" altLang="ko-KR" sz="1400" dirty="0">
-              <a:solidFill>
-                <a:schemeClr val="accent2"/>
-              </a:solidFill>
-            </a:endParaRPr>
+              <a:rPr lang="ko-KR" altLang="en-US" sz="1400" dirty="0" err="1"/>
+              <a:t>마우</a:t>
+            </a:r>
+            <a:endParaRPr lang="en-US" altLang="ko-KR" sz="1400" dirty="0"/>
+          </a:p>
+          <a:p>
+            <a:r>
+              <a:rPr lang="ko-KR" altLang="en-US" sz="1400" dirty="0" err="1"/>
+              <a:t>스</a:t>
+            </a:r>
+            <a:r>
+              <a:rPr lang="ko-KR" altLang="en-US" sz="1400" dirty="0"/>
+              <a:t> 오버</a:t>
+            </a:r>
+            <a:endParaRPr lang="en-US" altLang="ko-KR" sz="1400" dirty="0"/>
+          </a:p>
+          <a:p>
+            <a:r>
+              <a:rPr lang="ko-KR" altLang="en-US" sz="1400" dirty="0"/>
+              <a:t>한 카드</a:t>
+            </a:r>
+            <a:endParaRPr lang="en-US" altLang="ko-KR" sz="1400" dirty="0"/>
+          </a:p>
+          <a:p>
+            <a:r>
+              <a:rPr lang="ko-KR" altLang="en-US" sz="1400" dirty="0"/>
+              <a:t>의 강화</a:t>
+            </a:r>
+            <a:endParaRPr lang="en-US" altLang="ko-KR" sz="1400" dirty="0"/>
+          </a:p>
+          <a:p>
+            <a:r>
+              <a:rPr lang="ko-KR" altLang="en-US" sz="1400" dirty="0"/>
+              <a:t>판 미리</a:t>
+            </a:r>
+            <a:endParaRPr lang="en-US" altLang="ko-KR" sz="1400" dirty="0"/>
+          </a:p>
+          <a:p>
+            <a:r>
+              <a:rPr lang="ko-KR" altLang="en-US" sz="1400" dirty="0"/>
+              <a:t>보기 표</a:t>
+            </a:r>
+            <a:endParaRPr lang="en-US" altLang="ko-KR" sz="1400" dirty="0"/>
+          </a:p>
+          <a:p>
+            <a:r>
+              <a:rPr lang="ko-KR" altLang="en-US" sz="1400" dirty="0"/>
+              <a:t>시</a:t>
+            </a:r>
+            <a:endParaRPr lang="en-US" altLang="ko-KR" sz="1400" dirty="0"/>
           </a:p>
         </p:txBody>
       </p:sp>
